--- a/20242/Part 4-Associatin Rules Mining/beta/4-1-association_rules_mining.pptx
+++ b/20242/Part 4-Associatin Rules Mining/beta/4-1-association_rules_mining.pptx
@@ -5,36 +5,38 @@
     <p:sldMasterId id="2147483648" r:id="rId1"/>
   </p:sldMasterIdLst>
   <p:notesMasterIdLst>
-    <p:notesMasterId r:id="rId29"/>
+    <p:notesMasterId r:id="rId31"/>
   </p:notesMasterIdLst>
   <p:sldIdLst>
     <p:sldId id="483" r:id="rId2"/>
-    <p:sldId id="484" r:id="rId3"/>
+    <p:sldId id="519" r:id="rId3"/>
     <p:sldId id="485" r:id="rId4"/>
-    <p:sldId id="487" r:id="rId5"/>
+    <p:sldId id="522" r:id="rId5"/>
     <p:sldId id="489" r:id="rId6"/>
-    <p:sldId id="490" r:id="rId7"/>
-    <p:sldId id="491" r:id="rId8"/>
-    <p:sldId id="493" r:id="rId9"/>
-    <p:sldId id="494" r:id="rId10"/>
-    <p:sldId id="512" r:id="rId11"/>
-    <p:sldId id="495" r:id="rId12"/>
-    <p:sldId id="496" r:id="rId13"/>
-    <p:sldId id="497" r:id="rId14"/>
-    <p:sldId id="498" r:id="rId15"/>
-    <p:sldId id="499" r:id="rId16"/>
-    <p:sldId id="500" r:id="rId17"/>
-    <p:sldId id="501" r:id="rId18"/>
-    <p:sldId id="502" r:id="rId19"/>
-    <p:sldId id="503" r:id="rId20"/>
-    <p:sldId id="504" r:id="rId21"/>
-    <p:sldId id="505" r:id="rId22"/>
-    <p:sldId id="506" r:id="rId23"/>
-    <p:sldId id="507" r:id="rId24"/>
-    <p:sldId id="508" r:id="rId25"/>
-    <p:sldId id="509" r:id="rId26"/>
-    <p:sldId id="510" r:id="rId27"/>
-    <p:sldId id="511" r:id="rId28"/>
+    <p:sldId id="521" r:id="rId7"/>
+    <p:sldId id="490" r:id="rId8"/>
+    <p:sldId id="513" r:id="rId9"/>
+    <p:sldId id="523" r:id="rId10"/>
+    <p:sldId id="517" r:id="rId11"/>
+    <p:sldId id="518" r:id="rId12"/>
+    <p:sldId id="515" r:id="rId13"/>
+    <p:sldId id="514" r:id="rId14"/>
+    <p:sldId id="516" r:id="rId15"/>
+    <p:sldId id="497" r:id="rId16"/>
+    <p:sldId id="498" r:id="rId17"/>
+    <p:sldId id="499" r:id="rId18"/>
+    <p:sldId id="500" r:id="rId19"/>
+    <p:sldId id="501" r:id="rId20"/>
+    <p:sldId id="502" r:id="rId21"/>
+    <p:sldId id="503" r:id="rId22"/>
+    <p:sldId id="504" r:id="rId23"/>
+    <p:sldId id="505" r:id="rId24"/>
+    <p:sldId id="506" r:id="rId25"/>
+    <p:sldId id="507" r:id="rId26"/>
+    <p:sldId id="508" r:id="rId27"/>
+    <p:sldId id="509" r:id="rId28"/>
+    <p:sldId id="510" r:id="rId29"/>
+    <p:sldId id="511" r:id="rId30"/>
   </p:sldIdLst>
   <p:sldSz cx="12192000" cy="6858000"/>
   <p:notesSz cx="6858000" cy="9144000"/>
@@ -150,7 +152,7 @@
 <file path=ppt/revisionInfo.xml><?xml version="1.0" encoding="utf-8"?>
 <p1510:revInfo xmlns:a="http://schemas.openxmlformats.org/drawingml/2006/main" xmlns:r="http://schemas.openxmlformats.org/officeDocument/2006/relationships" xmlns:p1510="http://schemas.microsoft.com/office/powerpoint/2015/10/main">
   <p1510:revLst>
-    <p1510:client id="{7E2E8029-2718-4E74-A1E0-5ED48AB79672}" v="115" dt="2025-06-04T07:45:19.731"/>
+    <p1510:client id="{7E2E8029-2718-4E74-A1E0-5ED48AB79672}" v="196" dt="2025-06-07T08:51:04.461"/>
   </p1510:revLst>
 </p1510:revInfo>
 </file>
@@ -175,8 +177,8 @@
   </pc:docChgLst>
   <pc:docChgLst>
     <pc:chgData name="Mohammed Fasha" userId="cc64f42d-a1a6-4f08-b97b-0c37f877119f" providerId="ADAL" clId="{7E2E8029-2718-4E74-A1E0-5ED48AB79672}"/>
-    <pc:docChg chg="undo redo custSel addSld delSld modSld">
-      <pc:chgData name="Mohammed Fasha" userId="cc64f42d-a1a6-4f08-b97b-0c37f877119f" providerId="ADAL" clId="{7E2E8029-2718-4E74-A1E0-5ED48AB79672}" dt="2025-06-04T07:45:38.565" v="893" actId="5793"/>
+    <pc:docChg chg="undo redo custSel addSld delSld modSld sldOrd">
+      <pc:chgData name="Mohammed Fasha" userId="cc64f42d-a1a6-4f08-b97b-0c37f877119f" providerId="ADAL" clId="{7E2E8029-2718-4E74-A1E0-5ED48AB79672}" dt="2025-06-07T08:51:01.005" v="4348" actId="27636"/>
       <pc:docMkLst>
         <pc:docMk/>
       </pc:docMkLst>
@@ -287,37 +289,21 @@
           <pc:sldMk cId="941853383" sldId="484"/>
         </pc:sldMkLst>
       </pc:sldChg>
-      <pc:sldChg chg="modSp new mod">
-        <pc:chgData name="Mohammed Fasha" userId="cc64f42d-a1a6-4f08-b97b-0c37f877119f" providerId="ADAL" clId="{7E2E8029-2718-4E74-A1E0-5ED48AB79672}" dt="2025-06-04T04:01:30.626" v="97" actId="5793"/>
+      <pc:sldChg chg="modSp new del mod">
+        <pc:chgData name="Mohammed Fasha" userId="cc64f42d-a1a6-4f08-b97b-0c37f877119f" providerId="ADAL" clId="{7E2E8029-2718-4E74-A1E0-5ED48AB79672}" dt="2025-06-07T08:10:06.923" v="2989" actId="47"/>
         <pc:sldMkLst>
           <pc:docMk/>
           <pc:sldMk cId="3091730450" sldId="484"/>
         </pc:sldMkLst>
+      </pc:sldChg>
+      <pc:sldChg chg="addSp modSp add del mod">
+        <pc:chgData name="Mohammed Fasha" userId="cc64f42d-a1a6-4f08-b97b-0c37f877119f" providerId="ADAL" clId="{7E2E8029-2718-4E74-A1E0-5ED48AB79672}" dt="2025-06-07T08:29:40.396" v="3450" actId="113"/>
+        <pc:sldMkLst>
+          <pc:docMk/>
+          <pc:sldMk cId="2426021593" sldId="485"/>
+        </pc:sldMkLst>
         <pc:spChg chg="mod">
-          <ac:chgData name="Mohammed Fasha" userId="cc64f42d-a1a6-4f08-b97b-0c37f877119f" providerId="ADAL" clId="{7E2E8029-2718-4E74-A1E0-5ED48AB79672}" dt="2025-06-04T04:01:28.603" v="96" actId="113"/>
-          <ac:spMkLst>
-            <pc:docMk/>
-            <pc:sldMk cId="3091730450" sldId="484"/>
-            <ac:spMk id="2" creationId="{02779D2B-B071-27AF-98C9-C09B74A37AC9}"/>
-          </ac:spMkLst>
-        </pc:spChg>
-        <pc:spChg chg="mod">
-          <ac:chgData name="Mohammed Fasha" userId="cc64f42d-a1a6-4f08-b97b-0c37f877119f" providerId="ADAL" clId="{7E2E8029-2718-4E74-A1E0-5ED48AB79672}" dt="2025-06-04T04:01:30.626" v="97" actId="5793"/>
-          <ac:spMkLst>
-            <pc:docMk/>
-            <pc:sldMk cId="3091730450" sldId="484"/>
-            <ac:spMk id="3" creationId="{47117997-8174-92C7-7767-25A4F07C8AED}"/>
-          </ac:spMkLst>
-        </pc:spChg>
-      </pc:sldChg>
-      <pc:sldChg chg="modSp add del mod">
-        <pc:chgData name="Mohammed Fasha" userId="cc64f42d-a1a6-4f08-b97b-0c37f877119f" providerId="ADAL" clId="{7E2E8029-2718-4E74-A1E0-5ED48AB79672}" dt="2025-06-04T07:23:52.273" v="660" actId="20577"/>
-        <pc:sldMkLst>
-          <pc:docMk/>
-          <pc:sldMk cId="2426021593" sldId="485"/>
-        </pc:sldMkLst>
-        <pc:spChg chg="mod">
-          <ac:chgData name="Mohammed Fasha" userId="cc64f42d-a1a6-4f08-b97b-0c37f877119f" providerId="ADAL" clId="{7E2E8029-2718-4E74-A1E0-5ED48AB79672}" dt="2025-06-04T04:01:47.538" v="106" actId="113"/>
+          <ac:chgData name="Mohammed Fasha" userId="cc64f42d-a1a6-4f08-b97b-0c37f877119f" providerId="ADAL" clId="{7E2E8029-2718-4E74-A1E0-5ED48AB79672}" dt="2025-06-07T08:29:40.396" v="3450" actId="113"/>
           <ac:spMkLst>
             <pc:docMk/>
             <pc:sldMk cId="2426021593" sldId="485"/>
@@ -325,13 +311,21 @@
           </ac:spMkLst>
         </pc:spChg>
         <pc:spChg chg="mod">
-          <ac:chgData name="Mohammed Fasha" userId="cc64f42d-a1a6-4f08-b97b-0c37f877119f" providerId="ADAL" clId="{7E2E8029-2718-4E74-A1E0-5ED48AB79672}" dt="2025-06-04T07:23:52.273" v="660" actId="20577"/>
+          <ac:chgData name="Mohammed Fasha" userId="cc64f42d-a1a6-4f08-b97b-0c37f877119f" providerId="ADAL" clId="{7E2E8029-2718-4E74-A1E0-5ED48AB79672}" dt="2025-06-07T08:27:46.717" v="3417" actId="27636"/>
           <ac:spMkLst>
             <pc:docMk/>
             <pc:sldMk cId="2426021593" sldId="485"/>
             <ac:spMk id="3" creationId="{E2B5208B-AF09-6A8E-7623-44834ADB7FB6}"/>
           </ac:spMkLst>
         </pc:spChg>
+        <pc:spChg chg="add">
+          <ac:chgData name="Mohammed Fasha" userId="cc64f42d-a1a6-4f08-b97b-0c37f877119f" providerId="ADAL" clId="{7E2E8029-2718-4E74-A1E0-5ED48AB79672}" dt="2025-06-07T08:27:07.149" v="3389"/>
+          <ac:spMkLst>
+            <pc:docMk/>
+            <pc:sldMk cId="2426021593" sldId="485"/>
+            <ac:spMk id="4" creationId="{18B1457E-3AFF-EFEC-E42D-7150143C19B7}"/>
+          </ac:spMkLst>
+        </pc:spChg>
       </pc:sldChg>
       <pc:sldChg chg="addSp delSp modSp add del mod">
         <pc:chgData name="Mohammed Fasha" userId="cc64f42d-a1a6-4f08-b97b-0c37f877119f" providerId="ADAL" clId="{7E2E8029-2718-4E74-A1E0-5ED48AB79672}" dt="2025-06-04T04:03:22.922" v="132" actId="47"/>
@@ -339,39 +333,15 @@
           <pc:docMk/>
           <pc:sldMk cId="2941609253" sldId="486"/>
         </pc:sldMkLst>
+      </pc:sldChg>
+      <pc:sldChg chg="modSp add del mod">
+        <pc:chgData name="Mohammed Fasha" userId="cc64f42d-a1a6-4f08-b97b-0c37f877119f" providerId="ADAL" clId="{7E2E8029-2718-4E74-A1E0-5ED48AB79672}" dt="2025-06-07T08:28:41.032" v="3421" actId="47"/>
+        <pc:sldMkLst>
+          <pc:docMk/>
+          <pc:sldMk cId="3181280278" sldId="487"/>
+        </pc:sldMkLst>
         <pc:spChg chg="mod">
-          <ac:chgData name="Mohammed Fasha" userId="cc64f42d-a1a6-4f08-b97b-0c37f877119f" providerId="ADAL" clId="{7E2E8029-2718-4E74-A1E0-5ED48AB79672}" dt="2025-06-04T04:03:16.316" v="129" actId="21"/>
-          <ac:spMkLst>
-            <pc:docMk/>
-            <pc:sldMk cId="2941609253" sldId="486"/>
-            <ac:spMk id="2" creationId="{F2685B28-DB18-BA06-1381-28ABCC7E3430}"/>
-          </ac:spMkLst>
-        </pc:spChg>
-        <pc:spChg chg="del">
-          <ac:chgData name="Mohammed Fasha" userId="cc64f42d-a1a6-4f08-b97b-0c37f877119f" providerId="ADAL" clId="{7E2E8029-2718-4E74-A1E0-5ED48AB79672}" dt="2025-06-04T04:02:31.703" v="115"/>
-          <ac:spMkLst>
-            <pc:docMk/>
-            <pc:sldMk cId="2941609253" sldId="486"/>
-            <ac:spMk id="3" creationId="{E7A0BEEE-F282-F9CB-BE33-2ACEA112D926}"/>
-          </ac:spMkLst>
-        </pc:spChg>
-        <pc:spChg chg="add mod">
-          <ac:chgData name="Mohammed Fasha" userId="cc64f42d-a1a6-4f08-b97b-0c37f877119f" providerId="ADAL" clId="{7E2E8029-2718-4E74-A1E0-5ED48AB79672}" dt="2025-06-04T04:02:47.638" v="118" actId="21"/>
-          <ac:spMkLst>
-            <pc:docMk/>
-            <pc:sldMk cId="2941609253" sldId="486"/>
-            <ac:spMk id="4" creationId="{DA5ABB16-7683-8F57-E300-7BD95522DF63}"/>
-          </ac:spMkLst>
-        </pc:spChg>
-      </pc:sldChg>
-      <pc:sldChg chg="modSp add mod">
-        <pc:chgData name="Mohammed Fasha" userId="cc64f42d-a1a6-4f08-b97b-0c37f877119f" providerId="ADAL" clId="{7E2E8029-2718-4E74-A1E0-5ED48AB79672}" dt="2025-06-04T07:25:12.199" v="714" actId="12"/>
-        <pc:sldMkLst>
-          <pc:docMk/>
-          <pc:sldMk cId="3181280278" sldId="487"/>
-        </pc:sldMkLst>
-        <pc:spChg chg="mod">
-          <ac:chgData name="Mohammed Fasha" userId="cc64f42d-a1a6-4f08-b97b-0c37f877119f" providerId="ADAL" clId="{7E2E8029-2718-4E74-A1E0-5ED48AB79672}" dt="2025-06-04T04:03:24.795" v="133"/>
+          <ac:chgData name="Mohammed Fasha" userId="cc64f42d-a1a6-4f08-b97b-0c37f877119f" providerId="ADAL" clId="{7E2E8029-2718-4E74-A1E0-5ED48AB79672}" dt="2025-06-07T04:19:34.055" v="1344" actId="20577"/>
           <ac:spMkLst>
             <pc:docMk/>
             <pc:sldMk cId="3181280278" sldId="487"/>
@@ -379,7 +349,7 @@
           </ac:spMkLst>
         </pc:spChg>
         <pc:spChg chg="mod">
-          <ac:chgData name="Mohammed Fasha" userId="cc64f42d-a1a6-4f08-b97b-0c37f877119f" providerId="ADAL" clId="{7E2E8029-2718-4E74-A1E0-5ED48AB79672}" dt="2025-06-04T07:25:12.199" v="714" actId="12"/>
+          <ac:chgData name="Mohammed Fasha" userId="cc64f42d-a1a6-4f08-b97b-0c37f877119f" providerId="ADAL" clId="{7E2E8029-2718-4E74-A1E0-5ED48AB79672}" dt="2025-06-07T08:12:58.489" v="3053" actId="21"/>
           <ac:spMkLst>
             <pc:docMk/>
             <pc:sldMk cId="3181280278" sldId="487"/>
@@ -393,41 +363,9 @@
           <pc:docMk/>
           <pc:sldMk cId="4229036623" sldId="488"/>
         </pc:sldMkLst>
-        <pc:spChg chg="mod">
-          <ac:chgData name="Mohammed Fasha" userId="cc64f42d-a1a6-4f08-b97b-0c37f877119f" providerId="ADAL" clId="{7E2E8029-2718-4E74-A1E0-5ED48AB79672}" dt="2025-06-04T04:10:40.570" v="201" actId="21"/>
-          <ac:spMkLst>
-            <pc:docMk/>
-            <pc:sldMk cId="4229036623" sldId="488"/>
-            <ac:spMk id="2" creationId="{0E99F627-81F9-EABD-A937-EEA5FC3AA661}"/>
-          </ac:spMkLst>
-        </pc:spChg>
-        <pc:spChg chg="add del mod">
-          <ac:chgData name="Mohammed Fasha" userId="cc64f42d-a1a6-4f08-b97b-0c37f877119f" providerId="ADAL" clId="{7E2E8029-2718-4E74-A1E0-5ED48AB79672}" dt="2025-06-04T04:04:30.373" v="143" actId="22"/>
-          <ac:spMkLst>
-            <pc:docMk/>
-            <pc:sldMk cId="4229036623" sldId="488"/>
-            <ac:spMk id="3" creationId="{89CE7FE1-10E9-B917-6F1C-702238465A1A}"/>
-          </ac:spMkLst>
-        </pc:spChg>
-        <pc:spChg chg="add mod">
-          <ac:chgData name="Mohammed Fasha" userId="cc64f42d-a1a6-4f08-b97b-0c37f877119f" providerId="ADAL" clId="{7E2E8029-2718-4E74-A1E0-5ED48AB79672}" dt="2025-06-04T04:04:02.460" v="141"/>
-          <ac:spMkLst>
-            <pc:docMk/>
-            <pc:sldMk cId="4229036623" sldId="488"/>
-            <ac:spMk id="4" creationId="{87C9B5D5-4CDB-1A3F-1203-7D089CD963F8}"/>
-          </ac:spMkLst>
-        </pc:spChg>
-        <pc:picChg chg="add mod ord">
-          <ac:chgData name="Mohammed Fasha" userId="cc64f42d-a1a6-4f08-b97b-0c37f877119f" providerId="ADAL" clId="{7E2E8029-2718-4E74-A1E0-5ED48AB79672}" dt="2025-06-04T04:04:43.107" v="163" actId="1076"/>
-          <ac:picMkLst>
-            <pc:docMk/>
-            <pc:sldMk cId="4229036623" sldId="488"/>
-            <ac:picMk id="6" creationId="{F494BA53-B2D3-8395-1052-01D4A4037019}"/>
-          </ac:picMkLst>
-        </pc:picChg>
       </pc:sldChg>
       <pc:sldChg chg="addSp delSp modSp add mod setBg">
-        <pc:chgData name="Mohammed Fasha" userId="cc64f42d-a1a6-4f08-b97b-0c37f877119f" providerId="ADAL" clId="{7E2E8029-2718-4E74-A1E0-5ED48AB79672}" dt="2025-06-04T07:31:32.583" v="799" actId="1076"/>
+        <pc:chgData name="Mohammed Fasha" userId="cc64f42d-a1a6-4f08-b97b-0c37f877119f" providerId="ADAL" clId="{7E2E8029-2718-4E74-A1E0-5ED48AB79672}" dt="2025-06-07T08:30:17.875" v="3456" actId="14100"/>
         <pc:sldMkLst>
           <pc:docMk/>
           <pc:sldMk cId="4066742116" sldId="489"/>
@@ -440,87 +378,71 @@
             <ac:spMk id="2" creationId="{82973B80-800E-A863-13DB-91B41F70B7EF}"/>
           </ac:spMkLst>
         </pc:spChg>
-        <pc:spChg chg="add del">
-          <ac:chgData name="Mohammed Fasha" userId="cc64f42d-a1a6-4f08-b97b-0c37f877119f" providerId="ADAL" clId="{7E2E8029-2718-4E74-A1E0-5ED48AB79672}" dt="2025-06-04T04:09:43.919" v="170"/>
+        <pc:spChg chg="add del mod">
+          <ac:chgData name="Mohammed Fasha" userId="cc64f42d-a1a6-4f08-b97b-0c37f877119f" providerId="ADAL" clId="{7E2E8029-2718-4E74-A1E0-5ED48AB79672}" dt="2025-06-07T08:18:29.940" v="3237" actId="478"/>
           <ac:spMkLst>
             <pc:docMk/>
             <pc:sldMk cId="4066742116" sldId="489"/>
-            <ac:spMk id="3" creationId="{C6524CF3-753B-F66A-2876-5DF71E30C98B}"/>
+            <ac:spMk id="5" creationId="{2F0A6D14-2F44-105E-848B-7DDF686FEB47}"/>
           </ac:spMkLst>
         </pc:spChg>
         <pc:spChg chg="add mod">
-          <ac:chgData name="Mohammed Fasha" userId="cc64f42d-a1a6-4f08-b97b-0c37f877119f" providerId="ADAL" clId="{7E2E8029-2718-4E74-A1E0-5ED48AB79672}" dt="2025-06-04T04:05:49.666" v="165"/>
-          <ac:spMkLst>
-            <pc:docMk/>
-            <pc:sldMk cId="4066742116" sldId="489"/>
-            <ac:spMk id="4" creationId="{DC72F045-DCFE-2730-35BE-ADAD3F8AE053}"/>
-          </ac:spMkLst>
-        </pc:spChg>
-        <pc:spChg chg="add mod">
-          <ac:chgData name="Mohammed Fasha" userId="cc64f42d-a1a6-4f08-b97b-0c37f877119f" providerId="ADAL" clId="{7E2E8029-2718-4E74-A1E0-5ED48AB79672}" dt="2025-06-04T04:05:54.226" v="167"/>
-          <ac:spMkLst>
-            <pc:docMk/>
-            <pc:sldMk cId="4066742116" sldId="489"/>
-            <ac:spMk id="5" creationId="{EC8392FF-03F8-9A11-C8E5-DCB47A0A7E27}"/>
-          </ac:spMkLst>
-        </pc:spChg>
-        <pc:spChg chg="add">
-          <ac:chgData name="Mohammed Fasha" userId="cc64f42d-a1a6-4f08-b97b-0c37f877119f" providerId="ADAL" clId="{7E2E8029-2718-4E74-A1E0-5ED48AB79672}" dt="2025-06-04T04:09:34.134" v="168"/>
-          <ac:spMkLst>
-            <pc:docMk/>
-            <pc:sldMk cId="4066742116" sldId="489"/>
-            <ac:spMk id="7" creationId="{F5E68D5F-A039-8286-A82F-DF300C724364}"/>
-          </ac:spMkLst>
-        </pc:spChg>
-        <pc:spChg chg="add mod">
-          <ac:chgData name="Mohammed Fasha" userId="cc64f42d-a1a6-4f08-b97b-0c37f877119f" providerId="ADAL" clId="{7E2E8029-2718-4E74-A1E0-5ED48AB79672}" dt="2025-06-04T07:27:39.123" v="732" actId="1076"/>
+          <ac:chgData name="Mohammed Fasha" userId="cc64f42d-a1a6-4f08-b97b-0c37f877119f" providerId="ADAL" clId="{7E2E8029-2718-4E74-A1E0-5ED48AB79672}" dt="2025-06-07T08:30:17.875" v="3456" actId="14100"/>
           <ac:spMkLst>
             <pc:docMk/>
             <pc:sldMk cId="4066742116" sldId="489"/>
             <ac:spMk id="10" creationId="{FBDD767E-EE4D-A94D-1BCC-A56951A51E7B}"/>
           </ac:spMkLst>
         </pc:spChg>
-        <pc:spChg chg="add mod">
-          <ac:chgData name="Mohammed Fasha" userId="cc64f42d-a1a6-4f08-b97b-0c37f877119f" providerId="ADAL" clId="{7E2E8029-2718-4E74-A1E0-5ED48AB79672}" dt="2025-06-04T07:26:08.403" v="721" actId="1076"/>
+        <pc:spChg chg="add del mod">
+          <ac:chgData name="Mohammed Fasha" userId="cc64f42d-a1a6-4f08-b97b-0c37f877119f" providerId="ADAL" clId="{7E2E8029-2718-4E74-A1E0-5ED48AB79672}" dt="2025-06-07T08:19:03.702" v="3242" actId="478"/>
           <ac:spMkLst>
             <pc:docMk/>
             <pc:sldMk cId="4066742116" sldId="489"/>
             <ac:spMk id="11" creationId="{269ABBB5-2CA6-18FD-9BD8-FE09CD880503}"/>
           </ac:spMkLst>
         </pc:spChg>
-        <pc:graphicFrameChg chg="add mod">
-          <ac:chgData name="Mohammed Fasha" userId="cc64f42d-a1a6-4f08-b97b-0c37f877119f" providerId="ADAL" clId="{7E2E8029-2718-4E74-A1E0-5ED48AB79672}" dt="2025-06-04T04:09:36.863" v="169"/>
-          <ac:graphicFrameMkLst>
-            <pc:docMk/>
-            <pc:sldMk cId="4066742116" sldId="489"/>
-            <ac:graphicFrameMk id="6" creationId="{8E5D6B8F-E1A0-8245-DA8B-920CB6305F24}"/>
-          </ac:graphicFrameMkLst>
-        </pc:graphicFrameChg>
-        <pc:graphicFrameChg chg="add mod modGraphic">
-          <ac:chgData name="Mohammed Fasha" userId="cc64f42d-a1a6-4f08-b97b-0c37f877119f" providerId="ADAL" clId="{7E2E8029-2718-4E74-A1E0-5ED48AB79672}" dt="2025-06-04T07:27:56.077" v="734" actId="14100"/>
+        <pc:graphicFrameChg chg="add del mod modGraphic">
+          <ac:chgData name="Mohammed Fasha" userId="cc64f42d-a1a6-4f08-b97b-0c37f877119f" providerId="ADAL" clId="{7E2E8029-2718-4E74-A1E0-5ED48AB79672}" dt="2025-06-07T08:18:26.686" v="3236" actId="21"/>
           <ac:graphicFrameMkLst>
             <pc:docMk/>
             <pc:sldMk cId="4066742116" sldId="489"/>
             <ac:graphicFrameMk id="8" creationId="{C6C90679-34C7-D309-8F12-3418E50E21D3}"/>
           </ac:graphicFrameMkLst>
         </pc:graphicFrameChg>
-        <pc:picChg chg="add mod">
-          <ac:chgData name="Mohammed Fasha" userId="cc64f42d-a1a6-4f08-b97b-0c37f877119f" providerId="ADAL" clId="{7E2E8029-2718-4E74-A1E0-5ED48AB79672}" dt="2025-06-04T07:31:32.583" v="799" actId="1076"/>
+        <pc:picChg chg="add del mod">
+          <ac:chgData name="Mohammed Fasha" userId="cc64f42d-a1a6-4f08-b97b-0c37f877119f" providerId="ADAL" clId="{7E2E8029-2718-4E74-A1E0-5ED48AB79672}" dt="2025-06-07T08:29:07.243" v="3423" actId="21"/>
           <ac:picMkLst>
             <pc:docMk/>
             <pc:sldMk cId="4066742116" sldId="489"/>
             <ac:picMk id="4" creationId="{FE62F33E-DC36-69B1-6BA4-3F72051C658C}"/>
           </ac:picMkLst>
         </pc:picChg>
+        <pc:picChg chg="add mod">
+          <ac:chgData name="Mohammed Fasha" userId="cc64f42d-a1a6-4f08-b97b-0c37f877119f" providerId="ADAL" clId="{7E2E8029-2718-4E74-A1E0-5ED48AB79672}" dt="2025-06-07T08:30:14.419" v="3455"/>
+          <ac:picMkLst>
+            <pc:docMk/>
+            <pc:sldMk cId="4066742116" sldId="489"/>
+            <ac:picMk id="6" creationId="{705C105A-97C9-0206-8067-796D33D6C11F}"/>
+          </ac:picMkLst>
+        </pc:picChg>
+        <pc:picChg chg="add mod">
+          <ac:chgData name="Mohammed Fasha" userId="cc64f42d-a1a6-4f08-b97b-0c37f877119f" providerId="ADAL" clId="{7E2E8029-2718-4E74-A1E0-5ED48AB79672}" dt="2025-06-07T08:30:14.419" v="3455"/>
+          <ac:picMkLst>
+            <pc:docMk/>
+            <pc:sldMk cId="4066742116" sldId="489"/>
+            <ac:picMk id="7" creationId="{B79DD5E5-35F4-0EB8-3379-81437C9EE2E9}"/>
+          </ac:picMkLst>
+        </pc:picChg>
       </pc:sldChg>
       <pc:sldChg chg="addSp modSp add mod">
-        <pc:chgData name="Mohammed Fasha" userId="cc64f42d-a1a6-4f08-b97b-0c37f877119f" providerId="ADAL" clId="{7E2E8029-2718-4E74-A1E0-5ED48AB79672}" dt="2025-06-04T07:30:41.522" v="786" actId="207"/>
+        <pc:chgData name="Mohammed Fasha" userId="cc64f42d-a1a6-4f08-b97b-0c37f877119f" providerId="ADAL" clId="{7E2E8029-2718-4E74-A1E0-5ED48AB79672}" dt="2025-06-07T08:44:23" v="4142" actId="20577"/>
         <pc:sldMkLst>
           <pc:docMk/>
           <pc:sldMk cId="976524779" sldId="490"/>
         </pc:sldMkLst>
         <pc:spChg chg="mod">
-          <ac:chgData name="Mohammed Fasha" userId="cc64f42d-a1a6-4f08-b97b-0c37f877119f" providerId="ADAL" clId="{7E2E8029-2718-4E74-A1E0-5ED48AB79672}" dt="2025-06-04T04:11:21.329" v="218" actId="113"/>
+          <ac:chgData name="Mohammed Fasha" userId="cc64f42d-a1a6-4f08-b97b-0c37f877119f" providerId="ADAL" clId="{7E2E8029-2718-4E74-A1E0-5ED48AB79672}" dt="2025-06-07T08:44:23" v="4142" actId="20577"/>
           <ac:spMkLst>
             <pc:docMk/>
             <pc:sldMk cId="976524779" sldId="490"/>
@@ -528,7 +450,7 @@
           </ac:spMkLst>
         </pc:spChg>
         <pc:spChg chg="mod">
-          <ac:chgData name="Mohammed Fasha" userId="cc64f42d-a1a6-4f08-b97b-0c37f877119f" providerId="ADAL" clId="{7E2E8029-2718-4E74-A1E0-5ED48AB79672}" dt="2025-06-04T07:30:41.522" v="786" actId="207"/>
+          <ac:chgData name="Mohammed Fasha" userId="cc64f42d-a1a6-4f08-b97b-0c37f877119f" providerId="ADAL" clId="{7E2E8029-2718-4E74-A1E0-5ED48AB79672}" dt="2025-06-07T08:31:45.406" v="3470" actId="12"/>
           <ac:spMkLst>
             <pc:docMk/>
             <pc:sldMk cId="976524779" sldId="490"/>
@@ -544,36 +466,20 @@
           </ac:graphicFrameMkLst>
         </pc:graphicFrameChg>
       </pc:sldChg>
-      <pc:sldChg chg="addSp modSp add mod">
-        <pc:chgData name="Mohammed Fasha" userId="cc64f42d-a1a6-4f08-b97b-0c37f877119f" providerId="ADAL" clId="{7E2E8029-2718-4E74-A1E0-5ED48AB79672}" dt="2025-06-04T07:31:11.874" v="796" actId="113"/>
+      <pc:sldChg chg="addSp modSp add del mod ord">
+        <pc:chgData name="Mohammed Fasha" userId="cc64f42d-a1a6-4f08-b97b-0c37f877119f" providerId="ADAL" clId="{7E2E8029-2718-4E74-A1E0-5ED48AB79672}" dt="2025-06-07T04:23:29.071" v="1440" actId="47"/>
         <pc:sldMkLst>
           <pc:docMk/>
           <pc:sldMk cId="2300690374" sldId="491"/>
         </pc:sldMkLst>
         <pc:spChg chg="mod">
-          <ac:chgData name="Mohammed Fasha" userId="cc64f42d-a1a6-4f08-b97b-0c37f877119f" providerId="ADAL" clId="{7E2E8029-2718-4E74-A1E0-5ED48AB79672}" dt="2025-06-04T04:12:07.713" v="243" actId="113"/>
-          <ac:spMkLst>
-            <pc:docMk/>
-            <pc:sldMk cId="2300690374" sldId="491"/>
-            <ac:spMk id="2" creationId="{A13142C9-0DBF-43FA-747D-D18A30557DD3}"/>
-          </ac:spMkLst>
-        </pc:spChg>
-        <pc:spChg chg="mod">
-          <ac:chgData name="Mohammed Fasha" userId="cc64f42d-a1a6-4f08-b97b-0c37f877119f" providerId="ADAL" clId="{7E2E8029-2718-4E74-A1E0-5ED48AB79672}" dt="2025-06-04T07:31:11.874" v="796" actId="113"/>
+          <ac:chgData name="Mohammed Fasha" userId="cc64f42d-a1a6-4f08-b97b-0c37f877119f" providerId="ADAL" clId="{7E2E8029-2718-4E74-A1E0-5ED48AB79672}" dt="2025-06-07T04:12:50.954" v="1136" actId="27636"/>
           <ac:spMkLst>
             <pc:docMk/>
             <pc:sldMk cId="2300690374" sldId="491"/>
             <ac:spMk id="3" creationId="{81C5FD02-18E5-FAF0-F50C-176BE3C8CD02}"/>
           </ac:spMkLst>
         </pc:spChg>
-        <pc:graphicFrameChg chg="add mod">
-          <ac:chgData name="Mohammed Fasha" userId="cc64f42d-a1a6-4f08-b97b-0c37f877119f" providerId="ADAL" clId="{7E2E8029-2718-4E74-A1E0-5ED48AB79672}" dt="2025-06-04T07:28:46.440" v="755" actId="1076"/>
-          <ac:graphicFrameMkLst>
-            <pc:docMk/>
-            <pc:sldMk cId="2300690374" sldId="491"/>
-            <ac:graphicFrameMk id="4" creationId="{0B77DAC8-67B3-FEB5-2DB6-16734A330180}"/>
-          </ac:graphicFrameMkLst>
-        </pc:graphicFrameChg>
       </pc:sldChg>
       <pc:sldChg chg="modSp add del mod">
         <pc:chgData name="Mohammed Fasha" userId="cc64f42d-a1a6-4f08-b97b-0c37f877119f" providerId="ADAL" clId="{7E2E8029-2718-4E74-A1E0-5ED48AB79672}" dt="2025-06-04T07:31:18.148" v="797" actId="47"/>
@@ -581,39 +487,15 @@
           <pc:docMk/>
           <pc:sldMk cId="2987114752" sldId="492"/>
         </pc:sldMkLst>
+      </pc:sldChg>
+      <pc:sldChg chg="modSp add del mod">
+        <pc:chgData name="Mohammed Fasha" userId="cc64f42d-a1a6-4f08-b97b-0c37f877119f" providerId="ADAL" clId="{7E2E8029-2718-4E74-A1E0-5ED48AB79672}" dt="2025-06-07T02:51:58.311" v="960" actId="47"/>
+        <pc:sldMkLst>
+          <pc:docMk/>
+          <pc:sldMk cId="3951544621" sldId="493"/>
+        </pc:sldMkLst>
         <pc:spChg chg="mod">
-          <ac:chgData name="Mohammed Fasha" userId="cc64f42d-a1a6-4f08-b97b-0c37f877119f" providerId="ADAL" clId="{7E2E8029-2718-4E74-A1E0-5ED48AB79672}" dt="2025-06-04T04:13:16.339" v="265" actId="113"/>
-          <ac:spMkLst>
-            <pc:docMk/>
-            <pc:sldMk cId="2987114752" sldId="492"/>
-            <ac:spMk id="2" creationId="{CC772A80-96C0-935D-4295-208B4214AC11}"/>
-          </ac:spMkLst>
-        </pc:spChg>
-        <pc:spChg chg="mod">
-          <ac:chgData name="Mohammed Fasha" userId="cc64f42d-a1a6-4f08-b97b-0c37f877119f" providerId="ADAL" clId="{7E2E8029-2718-4E74-A1E0-5ED48AB79672}" dt="2025-06-04T07:30:56.525" v="787" actId="21"/>
-          <ac:spMkLst>
-            <pc:docMk/>
-            <pc:sldMk cId="2987114752" sldId="492"/>
-            <ac:spMk id="3" creationId="{63837125-33C3-CDF1-7612-6D2179E34380}"/>
-          </ac:spMkLst>
-        </pc:spChg>
-      </pc:sldChg>
-      <pc:sldChg chg="modSp add mod">
-        <pc:chgData name="Mohammed Fasha" userId="cc64f42d-a1a6-4f08-b97b-0c37f877119f" providerId="ADAL" clId="{7E2E8029-2718-4E74-A1E0-5ED48AB79672}" dt="2025-06-04T07:31:22.417" v="798" actId="207"/>
-        <pc:sldMkLst>
-          <pc:docMk/>
-          <pc:sldMk cId="3951544621" sldId="493"/>
-        </pc:sldMkLst>
-        <pc:spChg chg="mod">
-          <ac:chgData name="Mohammed Fasha" userId="cc64f42d-a1a6-4f08-b97b-0c37f877119f" providerId="ADAL" clId="{7E2E8029-2718-4E74-A1E0-5ED48AB79672}" dt="2025-06-04T04:13:57.623" v="281" actId="113"/>
-          <ac:spMkLst>
-            <pc:docMk/>
-            <pc:sldMk cId="3951544621" sldId="493"/>
-            <ac:spMk id="2" creationId="{163126A9-D3F8-DC06-88FF-45B2662539BD}"/>
-          </ac:spMkLst>
-        </pc:spChg>
-        <pc:spChg chg="mod">
-          <ac:chgData name="Mohammed Fasha" userId="cc64f42d-a1a6-4f08-b97b-0c37f877119f" providerId="ADAL" clId="{7E2E8029-2718-4E74-A1E0-5ED48AB79672}" dt="2025-06-04T07:31:22.417" v="798" actId="207"/>
+          <ac:chgData name="Mohammed Fasha" userId="cc64f42d-a1a6-4f08-b97b-0c37f877119f" providerId="ADAL" clId="{7E2E8029-2718-4E74-A1E0-5ED48AB79672}" dt="2025-06-07T02:48:42.324" v="954" actId="27636"/>
           <ac:spMkLst>
             <pc:docMk/>
             <pc:sldMk cId="3951544621" sldId="493"/>
@@ -621,117 +503,69 @@
           </ac:spMkLst>
         </pc:spChg>
       </pc:sldChg>
-      <pc:sldChg chg="addSp modSp add mod">
-        <pc:chgData name="Mohammed Fasha" userId="cc64f42d-a1a6-4f08-b97b-0c37f877119f" providerId="ADAL" clId="{7E2E8029-2718-4E74-A1E0-5ED48AB79672}" dt="2025-06-04T07:33:49.530" v="874" actId="27636"/>
+      <pc:sldChg chg="addSp modSp add del mod">
+        <pc:chgData name="Mohammed Fasha" userId="cc64f42d-a1a6-4f08-b97b-0c37f877119f" providerId="ADAL" clId="{7E2E8029-2718-4E74-A1E0-5ED48AB79672}" dt="2025-06-07T06:16:38.935" v="2813" actId="47"/>
         <pc:sldMkLst>
           <pc:docMk/>
           <pc:sldMk cId="3023457119" sldId="494"/>
         </pc:sldMkLst>
         <pc:spChg chg="mod">
-          <ac:chgData name="Mohammed Fasha" userId="cc64f42d-a1a6-4f08-b97b-0c37f877119f" providerId="ADAL" clId="{7E2E8029-2718-4E74-A1E0-5ED48AB79672}" dt="2025-06-04T04:14:35.599" v="297" actId="113"/>
-          <ac:spMkLst>
-            <pc:docMk/>
-            <pc:sldMk cId="3023457119" sldId="494"/>
-            <ac:spMk id="2" creationId="{0BFAF723-5FE2-CD30-E628-7E6F38D6C3AB}"/>
-          </ac:spMkLst>
-        </pc:spChg>
-        <pc:spChg chg="mod">
-          <ac:chgData name="Mohammed Fasha" userId="cc64f42d-a1a6-4f08-b97b-0c37f877119f" providerId="ADAL" clId="{7E2E8029-2718-4E74-A1E0-5ED48AB79672}" dt="2025-06-04T07:33:49.530" v="874" actId="27636"/>
+          <ac:chgData name="Mohammed Fasha" userId="cc64f42d-a1a6-4f08-b97b-0c37f877119f" providerId="ADAL" clId="{7E2E8029-2718-4E74-A1E0-5ED48AB79672}" dt="2025-06-07T06:16:35.446" v="2812" actId="27636"/>
           <ac:spMkLst>
             <pc:docMk/>
             <pc:sldMk cId="3023457119" sldId="494"/>
             <ac:spMk id="3" creationId="{18A30A43-4203-4089-7D6B-E98B5E65891F}"/>
           </ac:spMkLst>
         </pc:spChg>
-        <pc:spChg chg="add">
-          <ac:chgData name="Mohammed Fasha" userId="cc64f42d-a1a6-4f08-b97b-0c37f877119f" providerId="ADAL" clId="{7E2E8029-2718-4E74-A1E0-5ED48AB79672}" dt="2025-06-04T07:33:08.081" v="861"/>
-          <ac:spMkLst>
-            <pc:docMk/>
-            <pc:sldMk cId="3023457119" sldId="494"/>
-            <ac:spMk id="4" creationId="{98474E14-F402-91CC-27E7-07E78B1B1EC6}"/>
-          </ac:spMkLst>
-        </pc:spChg>
-        <pc:spChg chg="add">
-          <ac:chgData name="Mohammed Fasha" userId="cc64f42d-a1a6-4f08-b97b-0c37f877119f" providerId="ADAL" clId="{7E2E8029-2718-4E74-A1E0-5ED48AB79672}" dt="2025-06-04T07:33:26.450" v="862"/>
-          <ac:spMkLst>
-            <pc:docMk/>
-            <pc:sldMk cId="3023457119" sldId="494"/>
-            <ac:spMk id="5" creationId="{2ABBDEC8-6B45-2247-3915-42B9A8FE782D}"/>
-          </ac:spMkLst>
-        </pc:spChg>
-      </pc:sldChg>
-      <pc:sldChg chg="modSp add mod">
-        <pc:chgData name="Mohammed Fasha" userId="cc64f42d-a1a6-4f08-b97b-0c37f877119f" providerId="ADAL" clId="{7E2E8029-2718-4E74-A1E0-5ED48AB79672}" dt="2025-06-04T04:16:03.233" v="326" actId="20577"/>
+      </pc:sldChg>
+      <pc:sldChg chg="modSp add del mod">
+        <pc:chgData name="Mohammed Fasha" userId="cc64f42d-a1a6-4f08-b97b-0c37f877119f" providerId="ADAL" clId="{7E2E8029-2718-4E74-A1E0-5ED48AB79672}" dt="2025-06-07T06:16:43.777" v="2814" actId="47"/>
         <pc:sldMkLst>
           <pc:docMk/>
           <pc:sldMk cId="1938525646" sldId="495"/>
         </pc:sldMkLst>
-        <pc:spChg chg="mod">
-          <ac:chgData name="Mohammed Fasha" userId="cc64f42d-a1a6-4f08-b97b-0c37f877119f" providerId="ADAL" clId="{7E2E8029-2718-4E74-A1E0-5ED48AB79672}" dt="2025-06-04T04:15:06.788" v="312" actId="113"/>
-          <ac:spMkLst>
-            <pc:docMk/>
-            <pc:sldMk cId="1938525646" sldId="495"/>
-            <ac:spMk id="2" creationId="{50237B44-82AA-6D5F-690E-B4196B212F61}"/>
-          </ac:spMkLst>
-        </pc:spChg>
-        <pc:spChg chg="mod">
-          <ac:chgData name="Mohammed Fasha" userId="cc64f42d-a1a6-4f08-b97b-0c37f877119f" providerId="ADAL" clId="{7E2E8029-2718-4E74-A1E0-5ED48AB79672}" dt="2025-06-04T04:16:03.233" v="326" actId="20577"/>
-          <ac:spMkLst>
-            <pc:docMk/>
-            <pc:sldMk cId="1938525646" sldId="495"/>
-            <ac:spMk id="3" creationId="{CF60364B-FC1E-7A96-20D3-ECFE1DD046D9}"/>
-          </ac:spMkLst>
-        </pc:spChg>
-      </pc:sldChg>
-      <pc:sldChg chg="addSp delSp modSp add mod">
-        <pc:chgData name="Mohammed Fasha" userId="cc64f42d-a1a6-4f08-b97b-0c37f877119f" providerId="ADAL" clId="{7E2E8029-2718-4E74-A1E0-5ED48AB79672}" dt="2025-06-04T04:17:25.914" v="346" actId="5793"/>
+      </pc:sldChg>
+      <pc:sldChg chg="addSp delSp modSp add del mod">
+        <pc:chgData name="Mohammed Fasha" userId="cc64f42d-a1a6-4f08-b97b-0c37f877119f" providerId="ADAL" clId="{7E2E8029-2718-4E74-A1E0-5ED48AB79672}" dt="2025-06-07T08:42:21.202" v="3940" actId="47"/>
         <pc:sldMkLst>
           <pc:docMk/>
           <pc:sldMk cId="2805227895" sldId="496"/>
         </pc:sldMkLst>
-        <pc:spChg chg="mod">
-          <ac:chgData name="Mohammed Fasha" userId="cc64f42d-a1a6-4f08-b97b-0c37f877119f" providerId="ADAL" clId="{7E2E8029-2718-4E74-A1E0-5ED48AB79672}" dt="2025-06-04T04:16:25.147" v="327"/>
-          <ac:spMkLst>
-            <pc:docMk/>
-            <pc:sldMk cId="2805227895" sldId="496"/>
-            <ac:spMk id="2" creationId="{898675BF-7046-3A3E-E408-4C2FE0530171}"/>
-          </ac:spMkLst>
-        </pc:spChg>
         <pc:spChg chg="add del mod">
-          <ac:chgData name="Mohammed Fasha" userId="cc64f42d-a1a6-4f08-b97b-0c37f877119f" providerId="ADAL" clId="{7E2E8029-2718-4E74-A1E0-5ED48AB79672}" dt="2025-06-04T04:16:48.649" v="335" actId="20577"/>
+          <ac:chgData name="Mohammed Fasha" userId="cc64f42d-a1a6-4f08-b97b-0c37f877119f" providerId="ADAL" clId="{7E2E8029-2718-4E74-A1E0-5ED48AB79672}" dt="2025-06-07T02:50:29.749" v="955" actId="5793"/>
           <ac:spMkLst>
             <pc:docMk/>
             <pc:sldMk cId="2805227895" sldId="496"/>
             <ac:spMk id="3" creationId="{8A3F3DC4-AAFE-EBA7-A99B-EA18FC4D8D25}"/>
           </ac:spMkLst>
         </pc:spChg>
-        <pc:spChg chg="add mod">
-          <ac:chgData name="Mohammed Fasha" userId="cc64f42d-a1a6-4f08-b97b-0c37f877119f" providerId="ADAL" clId="{7E2E8029-2718-4E74-A1E0-5ED48AB79672}" dt="2025-06-04T04:16:32.173" v="329"/>
-          <ac:spMkLst>
-            <pc:docMk/>
-            <pc:sldMk cId="2805227895" sldId="496"/>
-            <ac:spMk id="4" creationId="{541125F9-7BA3-CE00-FEA1-EDC418329EE0}"/>
-          </ac:spMkLst>
-        </pc:spChg>
-        <pc:spChg chg="add mod">
-          <ac:chgData name="Mohammed Fasha" userId="cc64f42d-a1a6-4f08-b97b-0c37f877119f" providerId="ADAL" clId="{7E2E8029-2718-4E74-A1E0-5ED48AB79672}" dt="2025-06-04T04:17:25.914" v="346" actId="5793"/>
-          <ac:spMkLst>
-            <pc:docMk/>
-            <pc:sldMk cId="2805227895" sldId="496"/>
-            <ac:spMk id="7" creationId="{41EB5759-76A0-ACF0-457A-72B7B72AC433}"/>
-          </ac:spMkLst>
-        </pc:spChg>
         <pc:graphicFrameChg chg="add mod modGraphic">
-          <ac:chgData name="Mohammed Fasha" userId="cc64f42d-a1a6-4f08-b97b-0c37f877119f" providerId="ADAL" clId="{7E2E8029-2718-4E74-A1E0-5ED48AB79672}" dt="2025-06-04T04:17:02.351" v="339" actId="207"/>
+          <ac:chgData name="Mohammed Fasha" userId="cc64f42d-a1a6-4f08-b97b-0c37f877119f" providerId="ADAL" clId="{7E2E8029-2718-4E74-A1E0-5ED48AB79672}" dt="2025-06-07T06:23:55.150" v="2857" actId="14734"/>
           <ac:graphicFrameMkLst>
             <pc:docMk/>
             <pc:sldMk cId="2805227895" sldId="496"/>
             <ac:graphicFrameMk id="5" creationId="{45ABD52E-F79D-2160-1F1B-578B3029517C}"/>
           </ac:graphicFrameMkLst>
         </pc:graphicFrameChg>
+        <pc:graphicFrameChg chg="add mod modGraphic">
+          <ac:chgData name="Mohammed Fasha" userId="cc64f42d-a1a6-4f08-b97b-0c37f877119f" providerId="ADAL" clId="{7E2E8029-2718-4E74-A1E0-5ED48AB79672}" dt="2025-06-07T06:24:25.305" v="2858" actId="1076"/>
+          <ac:graphicFrameMkLst>
+            <pc:docMk/>
+            <pc:sldMk cId="2805227895" sldId="496"/>
+            <ac:graphicFrameMk id="8" creationId="{7E38B740-5670-3C41-5F59-A1140CDEAAA0}"/>
+          </ac:graphicFrameMkLst>
+        </pc:graphicFrameChg>
+        <pc:picChg chg="add del">
+          <ac:chgData name="Mohammed Fasha" userId="cc64f42d-a1a6-4f08-b97b-0c37f877119f" providerId="ADAL" clId="{7E2E8029-2718-4E74-A1E0-5ED48AB79672}" dt="2025-06-07T06:22:58.544" v="2849" actId="22"/>
+          <ac:picMkLst>
+            <pc:docMk/>
+            <pc:sldMk cId="2805227895" sldId="496"/>
+            <ac:picMk id="6" creationId="{0CA5BCB7-1ABA-7476-BF39-4257A7B2D536}"/>
+          </ac:picMkLst>
+        </pc:picChg>
       </pc:sldChg>
       <pc:sldChg chg="modSp add mod">
-        <pc:chgData name="Mohammed Fasha" userId="cc64f42d-a1a6-4f08-b97b-0c37f877119f" providerId="ADAL" clId="{7E2E8029-2718-4E74-A1E0-5ED48AB79672}" dt="2025-06-04T04:18:15.638" v="366" actId="27636"/>
+        <pc:chgData name="Mohammed Fasha" userId="cc64f42d-a1a6-4f08-b97b-0c37f877119f" providerId="ADAL" clId="{7E2E8029-2718-4E74-A1E0-5ED48AB79672}" dt="2025-06-07T08:51:01.005" v="4348" actId="27636"/>
         <pc:sldMkLst>
           <pc:docMk/>
           <pc:sldMk cId="361312424" sldId="497"/>
@@ -745,7 +579,7 @@
           </ac:spMkLst>
         </pc:spChg>
         <pc:spChg chg="mod">
-          <ac:chgData name="Mohammed Fasha" userId="cc64f42d-a1a6-4f08-b97b-0c37f877119f" providerId="ADAL" clId="{7E2E8029-2718-4E74-A1E0-5ED48AB79672}" dt="2025-06-04T04:18:15.638" v="366" actId="27636"/>
+          <ac:chgData name="Mohammed Fasha" userId="cc64f42d-a1a6-4f08-b97b-0c37f877119f" providerId="ADAL" clId="{7E2E8029-2718-4E74-A1E0-5ED48AB79672}" dt="2025-06-07T08:51:01.005" v="4348" actId="27636"/>
           <ac:spMkLst>
             <pc:docMk/>
             <pc:sldMk cId="361312424" sldId="497"/>
@@ -777,7 +611,7 @@
         </pc:spChg>
       </pc:sldChg>
       <pc:sldChg chg="addSp modSp add mod">
-        <pc:chgData name="Mohammed Fasha" userId="cc64f42d-a1a6-4f08-b97b-0c37f877119f" providerId="ADAL" clId="{7E2E8029-2718-4E74-A1E0-5ED48AB79672}" dt="2025-06-04T04:19:29.882" v="387" actId="1076"/>
+        <pc:chgData name="Mohammed Fasha" userId="cc64f42d-a1a6-4f08-b97b-0c37f877119f" providerId="ADAL" clId="{7E2E8029-2718-4E74-A1E0-5ED48AB79672}" dt="2025-06-07T08:49:51.768" v="4331" actId="207"/>
         <pc:sldMkLst>
           <pc:docMk/>
           <pc:sldMk cId="839997894" sldId="499"/>
@@ -806,8 +640,8 @@
             <ac:spMk id="6" creationId="{5730B9AF-F0B4-E86F-B4B0-CEC9C5D0DCFE}"/>
           </ac:spMkLst>
         </pc:spChg>
-        <pc:graphicFrameChg chg="add mod">
-          <ac:chgData name="Mohammed Fasha" userId="cc64f42d-a1a6-4f08-b97b-0c37f877119f" providerId="ADAL" clId="{7E2E8029-2718-4E74-A1E0-5ED48AB79672}" dt="2025-06-04T04:19:21.411" v="385" actId="1076"/>
+        <pc:graphicFrameChg chg="add mod modGraphic">
+          <ac:chgData name="Mohammed Fasha" userId="cc64f42d-a1a6-4f08-b97b-0c37f877119f" providerId="ADAL" clId="{7E2E8029-2718-4E74-A1E0-5ED48AB79672}" dt="2025-06-07T08:49:51.768" v="4331" actId="207"/>
           <ac:graphicFrameMkLst>
             <pc:docMk/>
             <pc:sldMk cId="839997894" sldId="499"/>
@@ -816,7 +650,7 @@
         </pc:graphicFrameChg>
       </pc:sldChg>
       <pc:sldChg chg="addSp modSp add mod">
-        <pc:chgData name="Mohammed Fasha" userId="cc64f42d-a1a6-4f08-b97b-0c37f877119f" providerId="ADAL" clId="{7E2E8029-2718-4E74-A1E0-5ED48AB79672}" dt="2025-06-04T04:20:44.937" v="415" actId="122"/>
+        <pc:chgData name="Mohammed Fasha" userId="cc64f42d-a1a6-4f08-b97b-0c37f877119f" providerId="ADAL" clId="{7E2E8029-2718-4E74-A1E0-5ED48AB79672}" dt="2025-06-07T08:50:00.969" v="4332" actId="207"/>
         <pc:sldMkLst>
           <pc:docMk/>
           <pc:sldMk cId="2617828375" sldId="500"/>
@@ -838,7 +672,7 @@
           </ac:spMkLst>
         </pc:spChg>
         <pc:graphicFrameChg chg="add mod modGraphic">
-          <ac:chgData name="Mohammed Fasha" userId="cc64f42d-a1a6-4f08-b97b-0c37f877119f" providerId="ADAL" clId="{7E2E8029-2718-4E74-A1E0-5ED48AB79672}" dt="2025-06-04T04:20:44.937" v="415" actId="122"/>
+          <ac:chgData name="Mohammed Fasha" userId="cc64f42d-a1a6-4f08-b97b-0c37f877119f" providerId="ADAL" clId="{7E2E8029-2718-4E74-A1E0-5ED48AB79672}" dt="2025-06-07T08:50:00.969" v="4332" actId="207"/>
           <ac:graphicFrameMkLst>
             <pc:docMk/>
             <pc:sldMk cId="2617828375" sldId="500"/>
@@ -847,7 +681,7 @@
         </pc:graphicFrameChg>
       </pc:sldChg>
       <pc:sldChg chg="modSp add mod">
-        <pc:chgData name="Mohammed Fasha" userId="cc64f42d-a1a6-4f08-b97b-0c37f877119f" providerId="ADAL" clId="{7E2E8029-2718-4E74-A1E0-5ED48AB79672}" dt="2025-06-04T04:21:33.865" v="429" actId="20577"/>
+        <pc:chgData name="Mohammed Fasha" userId="cc64f42d-a1a6-4f08-b97b-0c37f877119f" providerId="ADAL" clId="{7E2E8029-2718-4E74-A1E0-5ED48AB79672}" dt="2025-06-07T08:50:19.616" v="4338" actId="113"/>
         <pc:sldMkLst>
           <pc:docMk/>
           <pc:sldMk cId="1812782099" sldId="501"/>
@@ -861,7 +695,7 @@
           </ac:spMkLst>
         </pc:spChg>
         <pc:spChg chg="mod">
-          <ac:chgData name="Mohammed Fasha" userId="cc64f42d-a1a6-4f08-b97b-0c37f877119f" providerId="ADAL" clId="{7E2E8029-2718-4E74-A1E0-5ED48AB79672}" dt="2025-06-04T04:21:33.865" v="429" actId="20577"/>
+          <ac:chgData name="Mohammed Fasha" userId="cc64f42d-a1a6-4f08-b97b-0c37f877119f" providerId="ADAL" clId="{7E2E8029-2718-4E74-A1E0-5ED48AB79672}" dt="2025-06-07T08:50:19.616" v="4338" actId="113"/>
           <ac:spMkLst>
             <pc:docMk/>
             <pc:sldMk cId="1812782099" sldId="501"/>
@@ -945,22 +779,6 @@
             <ac:spMk id="2" creationId="{08BB758F-9395-8D8F-8AEF-5C1A86D3CDF6}"/>
           </ac:spMkLst>
         </pc:spChg>
-        <pc:spChg chg="del mod">
-          <ac:chgData name="Mohammed Fasha" userId="cc64f42d-a1a6-4f08-b97b-0c37f877119f" providerId="ADAL" clId="{7E2E8029-2718-4E74-A1E0-5ED48AB79672}" dt="2025-06-04T04:25:14.100" v="489" actId="478"/>
-          <ac:spMkLst>
-            <pc:docMk/>
-            <pc:sldMk cId="971215272" sldId="504"/>
-            <ac:spMk id="3" creationId="{D9765990-F9F5-6973-BFB2-6C3B492ECFC4}"/>
-          </ac:spMkLst>
-        </pc:spChg>
-        <pc:spChg chg="add del mod">
-          <ac:chgData name="Mohammed Fasha" userId="cc64f42d-a1a6-4f08-b97b-0c37f877119f" providerId="ADAL" clId="{7E2E8029-2718-4E74-A1E0-5ED48AB79672}" dt="2025-06-04T04:25:16.384" v="490" actId="22"/>
-          <ac:spMkLst>
-            <pc:docMk/>
-            <pc:sldMk cId="971215272" sldId="504"/>
-            <ac:spMk id="5" creationId="{2298502E-FF18-A293-67C3-1AA20F2EAF3A}"/>
-          </ac:spMkLst>
-        </pc:spChg>
         <pc:picChg chg="add mod ord">
           <ac:chgData name="Mohammed Fasha" userId="cc64f42d-a1a6-4f08-b97b-0c37f877119f" providerId="ADAL" clId="{7E2E8029-2718-4E74-A1E0-5ED48AB79672}" dt="2025-06-04T04:25:22.091" v="491" actId="1076"/>
           <ac:picMkLst>
@@ -982,14 +800,6 @@
             <pc:docMk/>
             <pc:sldMk cId="4185502721" sldId="505"/>
             <ac:spMk id="2" creationId="{8CE9750B-9646-542B-A26E-A3F5471B77C3}"/>
-          </ac:spMkLst>
-        </pc:spChg>
-        <pc:spChg chg="del">
-          <ac:chgData name="Mohammed Fasha" userId="cc64f42d-a1a6-4f08-b97b-0c37f877119f" providerId="ADAL" clId="{7E2E8029-2718-4E74-A1E0-5ED48AB79672}" dt="2025-06-04T04:25:35.385" v="492" actId="22"/>
-          <ac:spMkLst>
-            <pc:docMk/>
-            <pc:sldMk cId="4185502721" sldId="505"/>
-            <ac:spMk id="3" creationId="{F84810BE-8268-98E0-F3F0-38A824517B13}"/>
           </ac:spMkLst>
         </pc:spChg>
         <pc:picChg chg="add mod ord">
@@ -1038,14 +848,6 @@
             <ac:spMk id="2" creationId="{375762A6-11CE-742F-158C-A423948997A6}"/>
           </ac:spMkLst>
         </pc:spChg>
-        <pc:spChg chg="del">
-          <ac:chgData name="Mohammed Fasha" userId="cc64f42d-a1a6-4f08-b97b-0c37f877119f" providerId="ADAL" clId="{7E2E8029-2718-4E74-A1E0-5ED48AB79672}" dt="2025-06-04T04:26:24.668" v="528" actId="22"/>
-          <ac:spMkLst>
-            <pc:docMk/>
-            <pc:sldMk cId="3868612159" sldId="507"/>
-            <ac:spMk id="3" creationId="{68BD419A-54E1-549D-5091-818152FC57AF}"/>
-          </ac:spMkLst>
-        </pc:spChg>
         <pc:picChg chg="add mod ord">
           <ac:chgData name="Mohammed Fasha" userId="cc64f42d-a1a6-4f08-b97b-0c37f877119f" providerId="ADAL" clId="{7E2E8029-2718-4E74-A1E0-5ED48AB79672}" dt="2025-06-04T04:26:27.790" v="529" actId="1076"/>
           <ac:picMkLst>
@@ -1147,14 +949,14 @@
           </ac:spMkLst>
         </pc:spChg>
       </pc:sldChg>
-      <pc:sldChg chg="modSp new mod">
-        <pc:chgData name="Mohammed Fasha" userId="cc64f42d-a1a6-4f08-b97b-0c37f877119f" providerId="ADAL" clId="{7E2E8029-2718-4E74-A1E0-5ED48AB79672}" dt="2025-06-04T07:45:38.565" v="893" actId="5793"/>
+      <pc:sldChg chg="modSp new del mod ord">
+        <pc:chgData name="Mohammed Fasha" userId="cc64f42d-a1a6-4f08-b97b-0c37f877119f" providerId="ADAL" clId="{7E2E8029-2718-4E74-A1E0-5ED48AB79672}" dt="2025-06-07T06:16:24.259" v="2810" actId="47"/>
         <pc:sldMkLst>
           <pc:docMk/>
           <pc:sldMk cId="18889404" sldId="512"/>
         </pc:sldMkLst>
         <pc:spChg chg="mod">
-          <ac:chgData name="Mohammed Fasha" userId="cc64f42d-a1a6-4f08-b97b-0c37f877119f" providerId="ADAL" clId="{7E2E8029-2718-4E74-A1E0-5ED48AB79672}" dt="2025-06-04T07:45:22.506" v="884" actId="113"/>
+          <ac:chgData name="Mohammed Fasha" userId="cc64f42d-a1a6-4f08-b97b-0c37f877119f" providerId="ADAL" clId="{7E2E8029-2718-4E74-A1E0-5ED48AB79672}" dt="2025-06-07T04:25:42.683" v="1583" actId="20577"/>
           <ac:spMkLst>
             <pc:docMk/>
             <pc:sldMk cId="18889404" sldId="512"/>
@@ -1162,7 +964,7 @@
           </ac:spMkLst>
         </pc:spChg>
         <pc:spChg chg="mod">
-          <ac:chgData name="Mohammed Fasha" userId="cc64f42d-a1a6-4f08-b97b-0c37f877119f" providerId="ADAL" clId="{7E2E8029-2718-4E74-A1E0-5ED48AB79672}" dt="2025-06-04T07:45:38.565" v="893" actId="5793"/>
+          <ac:chgData name="Mohammed Fasha" userId="cc64f42d-a1a6-4f08-b97b-0c37f877119f" providerId="ADAL" clId="{7E2E8029-2718-4E74-A1E0-5ED48AB79672}" dt="2025-06-07T04:28:39.655" v="1602" actId="27636"/>
           <ac:spMkLst>
             <pc:docMk/>
             <pc:sldMk cId="18889404" sldId="512"/>
@@ -1176,29 +978,393 @@
           <pc:docMk/>
           <pc:sldMk cId="1033865034" sldId="512"/>
         </pc:sldMkLst>
+      </pc:sldChg>
+      <pc:sldChg chg="add del">
+        <pc:chgData name="Mohammed Fasha" userId="cc64f42d-a1a6-4f08-b97b-0c37f877119f" providerId="ADAL" clId="{7E2E8029-2718-4E74-A1E0-5ED48AB79672}" dt="2025-06-04T04:28:45.619" v="649" actId="47"/>
+        <pc:sldMkLst>
+          <pc:docMk/>
+          <pc:sldMk cId="3867559169" sldId="512"/>
+        </pc:sldMkLst>
+      </pc:sldChg>
+      <pc:sldChg chg="modSp new mod">
+        <pc:chgData name="Mohammed Fasha" userId="cc64f42d-a1a6-4f08-b97b-0c37f877119f" providerId="ADAL" clId="{7E2E8029-2718-4E74-A1E0-5ED48AB79672}" dt="2025-06-07T08:44:23.207" v="4148" actId="20577"/>
+        <pc:sldMkLst>
+          <pc:docMk/>
+          <pc:sldMk cId="1157874150" sldId="513"/>
+        </pc:sldMkLst>
         <pc:spChg chg="mod">
-          <ac:chgData name="Mohammed Fasha" userId="cc64f42d-a1a6-4f08-b97b-0c37f877119f" providerId="ADAL" clId="{7E2E8029-2718-4E74-A1E0-5ED48AB79672}" dt="2025-06-04T07:32:05.841" v="822" actId="6549"/>
+          <ac:chgData name="Mohammed Fasha" userId="cc64f42d-a1a6-4f08-b97b-0c37f877119f" providerId="ADAL" clId="{7E2E8029-2718-4E74-A1E0-5ED48AB79672}" dt="2025-06-07T08:44:23.207" v="4148" actId="20577"/>
           <ac:spMkLst>
             <pc:docMk/>
-            <pc:sldMk cId="1033865034" sldId="512"/>
-            <ac:spMk id="2" creationId="{05B722A5-C6F7-4DD8-588C-E33FF3F1B3DF}"/>
+            <pc:sldMk cId="1157874150" sldId="513"/>
+            <ac:spMk id="2" creationId="{EE57F7BE-8FAC-3AFD-77D9-ABCE43655ACA}"/>
           </ac:spMkLst>
         </pc:spChg>
         <pc:spChg chg="mod">
-          <ac:chgData name="Mohammed Fasha" userId="cc64f42d-a1a6-4f08-b97b-0c37f877119f" providerId="ADAL" clId="{7E2E8029-2718-4E74-A1E0-5ED48AB79672}" dt="2025-06-04T07:32:29.006" v="860" actId="20577"/>
+          <ac:chgData name="Mohammed Fasha" userId="cc64f42d-a1a6-4f08-b97b-0c37f877119f" providerId="ADAL" clId="{7E2E8029-2718-4E74-A1E0-5ED48AB79672}" dt="2025-06-07T08:38:48.244" v="3874" actId="12"/>
           <ac:spMkLst>
             <pc:docMk/>
-            <pc:sldMk cId="1033865034" sldId="512"/>
-            <ac:spMk id="3" creationId="{7669D3EE-73BA-2F30-9373-A407BBCD0CA2}"/>
+            <pc:sldMk cId="1157874150" sldId="513"/>
+            <ac:spMk id="3" creationId="{C266D561-3069-D7F3-08E9-AC3AC2AFD102}"/>
           </ac:spMkLst>
         </pc:spChg>
       </pc:sldChg>
       <pc:sldChg chg="add del">
-        <pc:chgData name="Mohammed Fasha" userId="cc64f42d-a1a6-4f08-b97b-0c37f877119f" providerId="ADAL" clId="{7E2E8029-2718-4E74-A1E0-5ED48AB79672}" dt="2025-06-04T04:28:45.619" v="649" actId="47"/>
-        <pc:sldMkLst>
-          <pc:docMk/>
-          <pc:sldMk cId="3867559169" sldId="512"/>
-        </pc:sldMkLst>
+        <pc:chgData name="Mohammed Fasha" userId="cc64f42d-a1a6-4f08-b97b-0c37f877119f" providerId="ADAL" clId="{7E2E8029-2718-4E74-A1E0-5ED48AB79672}" dt="2025-06-07T04:25:02.569" v="1524" actId="47"/>
+        <pc:sldMkLst>
+          <pc:docMk/>
+          <pc:sldMk cId="3392208497" sldId="514"/>
+        </pc:sldMkLst>
+      </pc:sldChg>
+      <pc:sldChg chg="addSp modSp new mod">
+        <pc:chgData name="Mohammed Fasha" userId="cc64f42d-a1a6-4f08-b97b-0c37f877119f" providerId="ADAL" clId="{7E2E8029-2718-4E74-A1E0-5ED48AB79672}" dt="2025-06-07T08:48:34.197" v="4283" actId="20577"/>
+        <pc:sldMkLst>
+          <pc:docMk/>
+          <pc:sldMk cId="3589465999" sldId="514"/>
+        </pc:sldMkLst>
+        <pc:spChg chg="mod">
+          <ac:chgData name="Mohammed Fasha" userId="cc64f42d-a1a6-4f08-b97b-0c37f877119f" providerId="ADAL" clId="{7E2E8029-2718-4E74-A1E0-5ED48AB79672}" dt="2025-06-07T08:46:22.445" v="4229"/>
+          <ac:spMkLst>
+            <pc:docMk/>
+            <pc:sldMk cId="3589465999" sldId="514"/>
+            <ac:spMk id="2" creationId="{88A29053-B25D-8437-7DDD-113C9833833C}"/>
+          </ac:spMkLst>
+        </pc:spChg>
+        <pc:spChg chg="mod">
+          <ac:chgData name="Mohammed Fasha" userId="cc64f42d-a1a6-4f08-b97b-0c37f877119f" providerId="ADAL" clId="{7E2E8029-2718-4E74-A1E0-5ED48AB79672}" dt="2025-06-07T08:48:34.197" v="4283" actId="20577"/>
+          <ac:spMkLst>
+            <pc:docMk/>
+            <pc:sldMk cId="3589465999" sldId="514"/>
+            <ac:spMk id="3" creationId="{5B93E470-126F-0470-F370-550A166C8CE3}"/>
+          </ac:spMkLst>
+        </pc:spChg>
+        <pc:spChg chg="add">
+          <ac:chgData name="Mohammed Fasha" userId="cc64f42d-a1a6-4f08-b97b-0c37f877119f" providerId="ADAL" clId="{7E2E8029-2718-4E74-A1E0-5ED48AB79672}" dt="2025-06-07T04:29:13.779" v="1604"/>
+          <ac:spMkLst>
+            <pc:docMk/>
+            <pc:sldMk cId="3589465999" sldId="514"/>
+            <ac:spMk id="4" creationId="{AE0EE7A9-C34F-99C6-24F3-A78E98760B4A}"/>
+          </ac:spMkLst>
+        </pc:spChg>
+        <pc:spChg chg="add">
+          <ac:chgData name="Mohammed Fasha" userId="cc64f42d-a1a6-4f08-b97b-0c37f877119f" providerId="ADAL" clId="{7E2E8029-2718-4E74-A1E0-5ED48AB79672}" dt="2025-06-07T04:29:13.779" v="1604"/>
+          <ac:spMkLst>
+            <pc:docMk/>
+            <pc:sldMk cId="3589465999" sldId="514"/>
+            <ac:spMk id="5" creationId="{E62FD89D-1516-4AF5-C2BC-304891E5D1DD}"/>
+          </ac:spMkLst>
+        </pc:spChg>
+        <pc:spChg chg="add">
+          <ac:chgData name="Mohammed Fasha" userId="cc64f42d-a1a6-4f08-b97b-0c37f877119f" providerId="ADAL" clId="{7E2E8029-2718-4E74-A1E0-5ED48AB79672}" dt="2025-06-07T04:29:13.779" v="1604"/>
+          <ac:spMkLst>
+            <pc:docMk/>
+            <pc:sldMk cId="3589465999" sldId="514"/>
+            <ac:spMk id="6" creationId="{B6B3074C-760C-0AC6-9596-D815ED707C23}"/>
+          </ac:spMkLst>
+        </pc:spChg>
+      </pc:sldChg>
+      <pc:sldChg chg="modSp new mod">
+        <pc:chgData name="Mohammed Fasha" userId="cc64f42d-a1a6-4f08-b97b-0c37f877119f" providerId="ADAL" clId="{7E2E8029-2718-4E74-A1E0-5ED48AB79672}" dt="2025-06-07T08:48:13.280" v="4268" actId="20577"/>
+        <pc:sldMkLst>
+          <pc:docMk/>
+          <pc:sldMk cId="2311531301" sldId="515"/>
+        </pc:sldMkLst>
+        <pc:spChg chg="mod">
+          <ac:chgData name="Mohammed Fasha" userId="cc64f42d-a1a6-4f08-b97b-0c37f877119f" providerId="ADAL" clId="{7E2E8029-2718-4E74-A1E0-5ED48AB79672}" dt="2025-06-07T08:46:16.948" v="4228" actId="20577"/>
+          <ac:spMkLst>
+            <pc:docMk/>
+            <pc:sldMk cId="2311531301" sldId="515"/>
+            <ac:spMk id="2" creationId="{DC04C7CB-A0FB-53BD-F5B2-69AE96A0E5A0}"/>
+          </ac:spMkLst>
+        </pc:spChg>
+        <pc:spChg chg="mod">
+          <ac:chgData name="Mohammed Fasha" userId="cc64f42d-a1a6-4f08-b97b-0c37f877119f" providerId="ADAL" clId="{7E2E8029-2718-4E74-A1E0-5ED48AB79672}" dt="2025-06-07T08:48:13.280" v="4268" actId="20577"/>
+          <ac:spMkLst>
+            <pc:docMk/>
+            <pc:sldMk cId="2311531301" sldId="515"/>
+            <ac:spMk id="3" creationId="{2B689DDF-B48C-5A99-824B-F07E6AA4BC70}"/>
+          </ac:spMkLst>
+        </pc:spChg>
+      </pc:sldChg>
+      <pc:sldChg chg="addSp modSp new mod">
+        <pc:chgData name="Mohammed Fasha" userId="cc64f42d-a1a6-4f08-b97b-0c37f877119f" providerId="ADAL" clId="{7E2E8029-2718-4E74-A1E0-5ED48AB79672}" dt="2025-06-07T08:49:08.522" v="4324" actId="6549"/>
+        <pc:sldMkLst>
+          <pc:docMk/>
+          <pc:sldMk cId="1201106649" sldId="516"/>
+        </pc:sldMkLst>
+        <pc:spChg chg="mod">
+          <ac:chgData name="Mohammed Fasha" userId="cc64f42d-a1a6-4f08-b97b-0c37f877119f" providerId="ADAL" clId="{7E2E8029-2718-4E74-A1E0-5ED48AB79672}" dt="2025-06-07T08:46:30.562" v="4230"/>
+          <ac:spMkLst>
+            <pc:docMk/>
+            <pc:sldMk cId="1201106649" sldId="516"/>
+            <ac:spMk id="2" creationId="{0200F449-8EB2-4A35-0E5D-148ACC5A1F7D}"/>
+          </ac:spMkLst>
+        </pc:spChg>
+        <pc:spChg chg="mod">
+          <ac:chgData name="Mohammed Fasha" userId="cc64f42d-a1a6-4f08-b97b-0c37f877119f" providerId="ADAL" clId="{7E2E8029-2718-4E74-A1E0-5ED48AB79672}" dt="2025-06-07T08:48:56.787" v="4298" actId="20577"/>
+          <ac:spMkLst>
+            <pc:docMk/>
+            <pc:sldMk cId="1201106649" sldId="516"/>
+            <ac:spMk id="3" creationId="{C0784354-661A-5C14-DFC3-A6A7DCA2C928}"/>
+          </ac:spMkLst>
+        </pc:spChg>
+        <pc:spChg chg="add">
+          <ac:chgData name="Mohammed Fasha" userId="cc64f42d-a1a6-4f08-b97b-0c37f877119f" providerId="ADAL" clId="{7E2E8029-2718-4E74-A1E0-5ED48AB79672}" dt="2025-06-07T04:34:19.914" v="1707"/>
+          <ac:spMkLst>
+            <pc:docMk/>
+            <pc:sldMk cId="1201106649" sldId="516"/>
+            <ac:spMk id="4" creationId="{2844257B-0B49-DA61-7A73-AA3EF5E9FFBE}"/>
+          </ac:spMkLst>
+        </pc:spChg>
+        <pc:spChg chg="add">
+          <ac:chgData name="Mohammed Fasha" userId="cc64f42d-a1a6-4f08-b97b-0c37f877119f" providerId="ADAL" clId="{7E2E8029-2718-4E74-A1E0-5ED48AB79672}" dt="2025-06-07T04:34:19.914" v="1707"/>
+          <ac:spMkLst>
+            <pc:docMk/>
+            <pc:sldMk cId="1201106649" sldId="516"/>
+            <ac:spMk id="5" creationId="{759AC453-9411-8B50-8485-EDC31FB389E3}"/>
+          </ac:spMkLst>
+        </pc:spChg>
+        <pc:spChg chg="add">
+          <ac:chgData name="Mohammed Fasha" userId="cc64f42d-a1a6-4f08-b97b-0c37f877119f" providerId="ADAL" clId="{7E2E8029-2718-4E74-A1E0-5ED48AB79672}" dt="2025-06-07T04:34:19.914" v="1707"/>
+          <ac:spMkLst>
+            <pc:docMk/>
+            <pc:sldMk cId="1201106649" sldId="516"/>
+            <ac:spMk id="6" creationId="{26E41BB1-9C81-5C1F-E55E-4BA48CFC2C7B}"/>
+          </ac:spMkLst>
+        </pc:spChg>
+        <pc:spChg chg="add">
+          <ac:chgData name="Mohammed Fasha" userId="cc64f42d-a1a6-4f08-b97b-0c37f877119f" providerId="ADAL" clId="{7E2E8029-2718-4E74-A1E0-5ED48AB79672}" dt="2025-06-07T04:34:19.914" v="1707"/>
+          <ac:spMkLst>
+            <pc:docMk/>
+            <pc:sldMk cId="1201106649" sldId="516"/>
+            <ac:spMk id="7" creationId="{07739F71-AF63-0695-0FA3-0057AE0E18A6}"/>
+          </ac:spMkLst>
+        </pc:spChg>
+        <pc:spChg chg="add">
+          <ac:chgData name="Mohammed Fasha" userId="cc64f42d-a1a6-4f08-b97b-0c37f877119f" providerId="ADAL" clId="{7E2E8029-2718-4E74-A1E0-5ED48AB79672}" dt="2025-06-07T04:34:19.914" v="1707"/>
+          <ac:spMkLst>
+            <pc:docMk/>
+            <pc:sldMk cId="1201106649" sldId="516"/>
+            <ac:spMk id="8" creationId="{DCB610EC-8F44-7D55-FB16-B023A63C266C}"/>
+          </ac:spMkLst>
+        </pc:spChg>
+        <pc:spChg chg="add mod">
+          <ac:chgData name="Mohammed Fasha" userId="cc64f42d-a1a6-4f08-b97b-0c37f877119f" providerId="ADAL" clId="{7E2E8029-2718-4E74-A1E0-5ED48AB79672}" dt="2025-06-07T06:12:23.826" v="2756" actId="1076"/>
+          <ac:spMkLst>
+            <pc:docMk/>
+            <pc:sldMk cId="1201106649" sldId="516"/>
+            <ac:spMk id="10" creationId="{CBD069FD-7B37-85AA-7C66-0FC15C990DD8}"/>
+          </ac:spMkLst>
+        </pc:spChg>
+        <pc:spChg chg="add mod">
+          <ac:chgData name="Mohammed Fasha" userId="cc64f42d-a1a6-4f08-b97b-0c37f877119f" providerId="ADAL" clId="{7E2E8029-2718-4E74-A1E0-5ED48AB79672}" dt="2025-06-07T08:49:08.522" v="4324" actId="6549"/>
+          <ac:spMkLst>
+            <pc:docMk/>
+            <pc:sldMk cId="1201106649" sldId="516"/>
+            <ac:spMk id="11" creationId="{0DA6AEBD-CB6D-CBC3-0968-E6D29B4C3B65}"/>
+          </ac:spMkLst>
+        </pc:spChg>
+      </pc:sldChg>
+      <pc:sldChg chg="modSp new mod">
+        <pc:chgData name="Mohammed Fasha" userId="cc64f42d-a1a6-4f08-b97b-0c37f877119f" providerId="ADAL" clId="{7E2E8029-2718-4E74-A1E0-5ED48AB79672}" dt="2025-06-07T08:47:22.052" v="4243" actId="20577"/>
+        <pc:sldMkLst>
+          <pc:docMk/>
+          <pc:sldMk cId="834475357" sldId="517"/>
+        </pc:sldMkLst>
+        <pc:spChg chg="mod">
+          <ac:chgData name="Mohammed Fasha" userId="cc64f42d-a1a6-4f08-b97b-0c37f877119f" providerId="ADAL" clId="{7E2E8029-2718-4E74-A1E0-5ED48AB79672}" dt="2025-06-07T08:47:22.052" v="4243" actId="20577"/>
+          <ac:spMkLst>
+            <pc:docMk/>
+            <pc:sldMk cId="834475357" sldId="517"/>
+            <ac:spMk id="2" creationId="{748EBE3E-0A49-2947-0CEC-18B7160B878C}"/>
+          </ac:spMkLst>
+        </pc:spChg>
+        <pc:spChg chg="mod">
+          <ac:chgData name="Mohammed Fasha" userId="cc64f42d-a1a6-4f08-b97b-0c37f877119f" providerId="ADAL" clId="{7E2E8029-2718-4E74-A1E0-5ED48AB79672}" dt="2025-06-07T08:45:44.094" v="4212" actId="20577"/>
+          <ac:spMkLst>
+            <pc:docMk/>
+            <pc:sldMk cId="834475357" sldId="517"/>
+            <ac:spMk id="3" creationId="{ACE394C5-CDB7-FD4D-AA66-701E1D158182}"/>
+          </ac:spMkLst>
+        </pc:spChg>
+      </pc:sldChg>
+      <pc:sldChg chg="modSp new mod">
+        <pc:chgData name="Mohammed Fasha" userId="cc64f42d-a1a6-4f08-b97b-0c37f877119f" providerId="ADAL" clId="{7E2E8029-2718-4E74-A1E0-5ED48AB79672}" dt="2025-06-07T08:47:42.871" v="4256" actId="12"/>
+        <pc:sldMkLst>
+          <pc:docMk/>
+          <pc:sldMk cId="1871645747" sldId="518"/>
+        </pc:sldMkLst>
+        <pc:spChg chg="mod">
+          <ac:chgData name="Mohammed Fasha" userId="cc64f42d-a1a6-4f08-b97b-0c37f877119f" providerId="ADAL" clId="{7E2E8029-2718-4E74-A1E0-5ED48AB79672}" dt="2025-06-07T08:47:39.723" v="4255" actId="313"/>
+          <ac:spMkLst>
+            <pc:docMk/>
+            <pc:sldMk cId="1871645747" sldId="518"/>
+            <ac:spMk id="2" creationId="{F8F4BF20-9F6B-53F5-F9C4-82C82044F532}"/>
+          </ac:spMkLst>
+        </pc:spChg>
+        <pc:spChg chg="mod">
+          <ac:chgData name="Mohammed Fasha" userId="cc64f42d-a1a6-4f08-b97b-0c37f877119f" providerId="ADAL" clId="{7E2E8029-2718-4E74-A1E0-5ED48AB79672}" dt="2025-06-07T08:47:42.871" v="4256" actId="12"/>
+          <ac:spMkLst>
+            <pc:docMk/>
+            <pc:sldMk cId="1871645747" sldId="518"/>
+            <ac:spMk id="3" creationId="{CB07E86B-8195-ABC4-FB51-50C4A2AC39B9}"/>
+          </ac:spMkLst>
+        </pc:spChg>
+      </pc:sldChg>
+      <pc:sldChg chg="addSp delSp modSp new mod">
+        <pc:chgData name="Mohammed Fasha" userId="cc64f42d-a1a6-4f08-b97b-0c37f877119f" providerId="ADAL" clId="{7E2E8029-2718-4E74-A1E0-5ED48AB79672}" dt="2025-06-07T08:29:27.807" v="3430" actId="14100"/>
+        <pc:sldMkLst>
+          <pc:docMk/>
+          <pc:sldMk cId="1615891368" sldId="519"/>
+        </pc:sldMkLst>
+        <pc:spChg chg="mod">
+          <ac:chgData name="Mohammed Fasha" userId="cc64f42d-a1a6-4f08-b97b-0c37f877119f" providerId="ADAL" clId="{7E2E8029-2718-4E74-A1E0-5ED48AB79672}" dt="2025-06-07T08:10:13.929" v="2997" actId="113"/>
+          <ac:spMkLst>
+            <pc:docMk/>
+            <pc:sldMk cId="1615891368" sldId="519"/>
+            <ac:spMk id="2" creationId="{CDF253DF-D172-4E49-1179-4EC354E7691A}"/>
+          </ac:spMkLst>
+        </pc:spChg>
+        <pc:spChg chg="mod">
+          <ac:chgData name="Mohammed Fasha" userId="cc64f42d-a1a6-4f08-b97b-0c37f877119f" providerId="ADAL" clId="{7E2E8029-2718-4E74-A1E0-5ED48AB79672}" dt="2025-06-07T08:16:05.569" v="3165" actId="20577"/>
+          <ac:spMkLst>
+            <pc:docMk/>
+            <pc:sldMk cId="1615891368" sldId="519"/>
+            <ac:spMk id="3" creationId="{057CA1C0-0DAB-5276-3F82-291A0C687611}"/>
+          </ac:spMkLst>
+        </pc:spChg>
+        <pc:spChg chg="add del">
+          <ac:chgData name="Mohammed Fasha" userId="cc64f42d-a1a6-4f08-b97b-0c37f877119f" providerId="ADAL" clId="{7E2E8029-2718-4E74-A1E0-5ED48AB79672}" dt="2025-06-07T08:10:49.473" v="3009" actId="22"/>
+          <ac:spMkLst>
+            <pc:docMk/>
+            <pc:sldMk cId="1615891368" sldId="519"/>
+            <ac:spMk id="5" creationId="{7DF245C8-E949-8BBE-6ADB-64ED54B38575}"/>
+          </ac:spMkLst>
+        </pc:spChg>
+        <pc:picChg chg="add mod">
+          <ac:chgData name="Mohammed Fasha" userId="cc64f42d-a1a6-4f08-b97b-0c37f877119f" providerId="ADAL" clId="{7E2E8029-2718-4E74-A1E0-5ED48AB79672}" dt="2025-06-07T08:11:53.355" v="3024" actId="1076"/>
+          <ac:picMkLst>
+            <pc:docMk/>
+            <pc:sldMk cId="1615891368" sldId="519"/>
+            <ac:picMk id="7" creationId="{BBF99406-1FB8-7EA1-9618-E641BC1BF424}"/>
+          </ac:picMkLst>
+        </pc:picChg>
+        <pc:picChg chg="add mod">
+          <ac:chgData name="Mohammed Fasha" userId="cc64f42d-a1a6-4f08-b97b-0c37f877119f" providerId="ADAL" clId="{7E2E8029-2718-4E74-A1E0-5ED48AB79672}" dt="2025-06-07T08:29:27.807" v="3430" actId="14100"/>
+          <ac:picMkLst>
+            <pc:docMk/>
+            <pc:sldMk cId="1615891368" sldId="519"/>
+            <ac:picMk id="9" creationId="{2B463C3C-4817-5118-D1E1-65181B8D2C18}"/>
+          </ac:picMkLst>
+        </pc:picChg>
+        <pc:picChg chg="add mod">
+          <ac:chgData name="Mohammed Fasha" userId="cc64f42d-a1a6-4f08-b97b-0c37f877119f" providerId="ADAL" clId="{7E2E8029-2718-4E74-A1E0-5ED48AB79672}" dt="2025-06-07T08:29:24.940" v="3429" actId="14100"/>
+          <ac:picMkLst>
+            <pc:docMk/>
+            <pc:sldMk cId="1615891368" sldId="519"/>
+            <ac:picMk id="10" creationId="{FE62F33E-DC36-69B1-6BA4-3F72051C658C}"/>
+          </ac:picMkLst>
+        </pc:picChg>
+      </pc:sldChg>
+      <pc:sldChg chg="modSp new del">
+        <pc:chgData name="Mohammed Fasha" userId="cc64f42d-a1a6-4f08-b97b-0c37f877119f" providerId="ADAL" clId="{7E2E8029-2718-4E74-A1E0-5ED48AB79672}" dt="2025-06-07T08:28:45.010" v="3422" actId="47"/>
+        <pc:sldMkLst>
+          <pc:docMk/>
+          <pc:sldMk cId="419552046" sldId="520"/>
+        </pc:sldMkLst>
+        <pc:spChg chg="mod">
+          <ac:chgData name="Mohammed Fasha" userId="cc64f42d-a1a6-4f08-b97b-0c37f877119f" providerId="ADAL" clId="{7E2E8029-2718-4E74-A1E0-5ED48AB79672}" dt="2025-06-07T08:12:12.141" v="3036"/>
+          <ac:spMkLst>
+            <pc:docMk/>
+            <pc:sldMk cId="419552046" sldId="520"/>
+            <ac:spMk id="3" creationId="{70FCBA02-267A-181F-1653-E9D7229C51BF}"/>
+          </ac:spMkLst>
+        </pc:spChg>
+      </pc:sldChg>
+      <pc:sldChg chg="addSp delSp modSp new mod">
+        <pc:chgData name="Mohammed Fasha" userId="cc64f42d-a1a6-4f08-b97b-0c37f877119f" providerId="ADAL" clId="{7E2E8029-2718-4E74-A1E0-5ED48AB79672}" dt="2025-06-07T08:31:16.721" v="3464" actId="14100"/>
+        <pc:sldMkLst>
+          <pc:docMk/>
+          <pc:sldMk cId="2082955467" sldId="521"/>
+        </pc:sldMkLst>
+        <pc:spChg chg="mod">
+          <ac:chgData name="Mohammed Fasha" userId="cc64f42d-a1a6-4f08-b97b-0c37f877119f" providerId="ADAL" clId="{7E2E8029-2718-4E74-A1E0-5ED48AB79672}" dt="2025-06-07T08:18:12.233" v="3235" actId="27636"/>
+          <ac:spMkLst>
+            <pc:docMk/>
+            <pc:sldMk cId="2082955467" sldId="521"/>
+            <ac:spMk id="2" creationId="{489FECB8-FCF6-A050-9BBB-E134B97CF3AE}"/>
+          </ac:spMkLst>
+        </pc:spChg>
+        <pc:spChg chg="del mod">
+          <ac:chgData name="Mohammed Fasha" userId="cc64f42d-a1a6-4f08-b97b-0c37f877119f" providerId="ADAL" clId="{7E2E8029-2718-4E74-A1E0-5ED48AB79672}" dt="2025-06-07T08:31:10.550" v="3461" actId="22"/>
+          <ac:spMkLst>
+            <pc:docMk/>
+            <pc:sldMk cId="2082955467" sldId="521"/>
+            <ac:spMk id="3" creationId="{CEAD3F1F-EA70-775D-8D90-17657BE1887E}"/>
+          </ac:spMkLst>
+        </pc:spChg>
+        <pc:picChg chg="add mod ord">
+          <ac:chgData name="Mohammed Fasha" userId="cc64f42d-a1a6-4f08-b97b-0c37f877119f" providerId="ADAL" clId="{7E2E8029-2718-4E74-A1E0-5ED48AB79672}" dt="2025-06-07T08:31:16.721" v="3464" actId="14100"/>
+          <ac:picMkLst>
+            <pc:docMk/>
+            <pc:sldMk cId="2082955467" sldId="521"/>
+            <ac:picMk id="5" creationId="{C0C1BF33-37AE-890B-AB47-D6E68F7B9BFC}"/>
+          </ac:picMkLst>
+        </pc:picChg>
+      </pc:sldChg>
+      <pc:sldChg chg="modSp new mod">
+        <pc:chgData name="Mohammed Fasha" userId="cc64f42d-a1a6-4f08-b97b-0c37f877119f" providerId="ADAL" clId="{7E2E8029-2718-4E74-A1E0-5ED48AB79672}" dt="2025-06-07T08:29:46.233" v="3452" actId="113"/>
+        <pc:sldMkLst>
+          <pc:docMk/>
+          <pc:sldMk cId="536899377" sldId="522"/>
+        </pc:sldMkLst>
+        <pc:spChg chg="mod">
+          <ac:chgData name="Mohammed Fasha" userId="cc64f42d-a1a6-4f08-b97b-0c37f877119f" providerId="ADAL" clId="{7E2E8029-2718-4E74-A1E0-5ED48AB79672}" dt="2025-06-07T08:29:46.233" v="3452" actId="113"/>
+          <ac:spMkLst>
+            <pc:docMk/>
+            <pc:sldMk cId="536899377" sldId="522"/>
+            <ac:spMk id="2" creationId="{099EFF2A-E4FB-E985-9516-7380C10C3A5C}"/>
+          </ac:spMkLst>
+        </pc:spChg>
+        <pc:spChg chg="mod">
+          <ac:chgData name="Mohammed Fasha" userId="cc64f42d-a1a6-4f08-b97b-0c37f877119f" providerId="ADAL" clId="{7E2E8029-2718-4E74-A1E0-5ED48AB79672}" dt="2025-06-07T08:28:29.256" v="3420" actId="15"/>
+          <ac:spMkLst>
+            <pc:docMk/>
+            <pc:sldMk cId="536899377" sldId="522"/>
+            <ac:spMk id="3" creationId="{9F9BEA77-D725-A9DA-8D5E-654454000EAA}"/>
+          </ac:spMkLst>
+        </pc:spChg>
+      </pc:sldChg>
+      <pc:sldChg chg="addSp modSp add mod">
+        <pc:chgData name="Mohammed Fasha" userId="cc64f42d-a1a6-4f08-b97b-0c37f877119f" providerId="ADAL" clId="{7E2E8029-2718-4E74-A1E0-5ED48AB79672}" dt="2025-06-07T08:44:01.627" v="4108"/>
+        <pc:sldMkLst>
+          <pc:docMk/>
+          <pc:sldMk cId="221849213" sldId="523"/>
+        </pc:sldMkLst>
+        <pc:spChg chg="mod">
+          <ac:chgData name="Mohammed Fasha" userId="cc64f42d-a1a6-4f08-b97b-0c37f877119f" providerId="ADAL" clId="{7E2E8029-2718-4E74-A1E0-5ED48AB79672}" dt="2025-06-07T08:44:01.627" v="4108"/>
+          <ac:spMkLst>
+            <pc:docMk/>
+            <pc:sldMk cId="221849213" sldId="523"/>
+            <ac:spMk id="2" creationId="{C891713C-1D56-EE07-D7AC-E1ABB9A11CF2}"/>
+          </ac:spMkLst>
+        </pc:spChg>
+        <pc:spChg chg="mod">
+          <ac:chgData name="Mohammed Fasha" userId="cc64f42d-a1a6-4f08-b97b-0c37f877119f" providerId="ADAL" clId="{7E2E8029-2718-4E74-A1E0-5ED48AB79672}" dt="2025-06-07T08:41:46.750" v="3938" actId="1076"/>
+          <ac:spMkLst>
+            <pc:docMk/>
+            <pc:sldMk cId="221849213" sldId="523"/>
+            <ac:spMk id="3" creationId="{E709E64B-7903-0471-06AE-02B20D3C3398}"/>
+          </ac:spMkLst>
+        </pc:spChg>
+        <pc:picChg chg="add mod">
+          <ac:chgData name="Mohammed Fasha" userId="cc64f42d-a1a6-4f08-b97b-0c37f877119f" providerId="ADAL" clId="{7E2E8029-2718-4E74-A1E0-5ED48AB79672}" dt="2025-06-07T08:41:49.968" v="3939" actId="14100"/>
+          <ac:picMkLst>
+            <pc:docMk/>
+            <pc:sldMk cId="221849213" sldId="523"/>
+            <ac:picMk id="5" creationId="{6593D4BD-EB64-CE6E-FAC3-571FA0C7A579}"/>
+          </ac:picMkLst>
+        </pc:picChg>
       </pc:sldChg>
       <pc:sldChg chg="del">
         <pc:chgData name="Mohammed Fasha" userId="cc64f42d-a1a6-4f08-b97b-0c37f877119f" providerId="ADAL" clId="{7E2E8029-2718-4E74-A1E0-5ED48AB79672}" dt="2025-06-04T03:59:04.477" v="0" actId="47"/>
@@ -1352,36 +1518,6 @@
         <pc:sldMkLst>
           <pc:docMk/>
           <pc:sldMk cId="3056700689" sldId="724"/>
-        </pc:sldMkLst>
-      </pc:sldChg>
-    </pc:docChg>
-  </pc:docChgLst>
-  <pc:docChgLst>
-    <pc:chgData name="Mohammed Fasha" userId="cc64f42d-a1a6-4f08-b97b-0c37f877119f" providerId="ADAL" clId="{4C71ED24-115E-432D-933D-C801DA3E52F1}"/>
-    <pc:docChg chg="delSld">
-      <pc:chgData name="Mohammed Fasha" userId="cc64f42d-a1a6-4f08-b97b-0c37f877119f" providerId="ADAL" clId="{4C71ED24-115E-432D-933D-C801DA3E52F1}" dt="2024-12-29T03:12:49.974" v="2" actId="47"/>
-      <pc:docMkLst>
-        <pc:docMk/>
-      </pc:docMkLst>
-      <pc:sldChg chg="del">
-        <pc:chgData name="Mohammed Fasha" userId="cc64f42d-a1a6-4f08-b97b-0c37f877119f" providerId="ADAL" clId="{4C71ED24-115E-432D-933D-C801DA3E52F1}" dt="2024-12-29T03:12:48.360" v="0" actId="47"/>
-        <pc:sldMkLst>
-          <pc:docMk/>
-          <pc:sldMk cId="2341000601" sldId="701"/>
-        </pc:sldMkLst>
-      </pc:sldChg>
-      <pc:sldChg chg="del">
-        <pc:chgData name="Mohammed Fasha" userId="cc64f42d-a1a6-4f08-b97b-0c37f877119f" providerId="ADAL" clId="{4C71ED24-115E-432D-933D-C801DA3E52F1}" dt="2024-12-29T03:12:49.133" v="1" actId="47"/>
-        <pc:sldMkLst>
-          <pc:docMk/>
-          <pc:sldMk cId="3519698944" sldId="702"/>
-        </pc:sldMkLst>
-      </pc:sldChg>
-      <pc:sldChg chg="del">
-        <pc:chgData name="Mohammed Fasha" userId="cc64f42d-a1a6-4f08-b97b-0c37f877119f" providerId="ADAL" clId="{4C71ED24-115E-432D-933D-C801DA3E52F1}" dt="2024-12-29T03:12:49.974" v="2" actId="47"/>
-        <pc:sldMkLst>
-          <pc:docMk/>
-          <pc:sldMk cId="3934257344" sldId="703"/>
         </pc:sldMkLst>
       </pc:sldChg>
     </pc:docChg>
@@ -1676,6 +1812,36 @@
           </pc:spChg>
         </pc:sldLayoutChg>
       </pc:sldMasterChg>
+    </pc:docChg>
+  </pc:docChgLst>
+  <pc:docChgLst>
+    <pc:chgData name="Mohammed Fasha" userId="cc64f42d-a1a6-4f08-b97b-0c37f877119f" providerId="ADAL" clId="{4C71ED24-115E-432D-933D-C801DA3E52F1}"/>
+    <pc:docChg chg="delSld">
+      <pc:chgData name="Mohammed Fasha" userId="cc64f42d-a1a6-4f08-b97b-0c37f877119f" providerId="ADAL" clId="{4C71ED24-115E-432D-933D-C801DA3E52F1}" dt="2024-12-29T03:12:49.974" v="2" actId="47"/>
+      <pc:docMkLst>
+        <pc:docMk/>
+      </pc:docMkLst>
+      <pc:sldChg chg="del">
+        <pc:chgData name="Mohammed Fasha" userId="cc64f42d-a1a6-4f08-b97b-0c37f877119f" providerId="ADAL" clId="{4C71ED24-115E-432D-933D-C801DA3E52F1}" dt="2024-12-29T03:12:48.360" v="0" actId="47"/>
+        <pc:sldMkLst>
+          <pc:docMk/>
+          <pc:sldMk cId="2341000601" sldId="701"/>
+        </pc:sldMkLst>
+      </pc:sldChg>
+      <pc:sldChg chg="del">
+        <pc:chgData name="Mohammed Fasha" userId="cc64f42d-a1a6-4f08-b97b-0c37f877119f" providerId="ADAL" clId="{4C71ED24-115E-432D-933D-C801DA3E52F1}" dt="2024-12-29T03:12:49.133" v="1" actId="47"/>
+        <pc:sldMkLst>
+          <pc:docMk/>
+          <pc:sldMk cId="3519698944" sldId="702"/>
+        </pc:sldMkLst>
+      </pc:sldChg>
+      <pc:sldChg chg="del">
+        <pc:chgData name="Mohammed Fasha" userId="cc64f42d-a1a6-4f08-b97b-0c37f877119f" providerId="ADAL" clId="{4C71ED24-115E-432D-933D-C801DA3E52F1}" dt="2024-12-29T03:12:49.974" v="2" actId="47"/>
+        <pc:sldMkLst>
+          <pc:docMk/>
+          <pc:sldMk cId="3934257344" sldId="703"/>
+        </pc:sldMkLst>
+      </pc:sldChg>
     </pc:docChg>
   </pc:docChgLst>
   <pc:docChgLst>
@@ -2952,7 +3118,7 @@
           <a:p>
             <a:fld id="{13BA03A4-B9F1-404C-8A74-B1AFD6480953}" type="datetimeFigureOut">
               <a:rPr lang="en-US" smtClean="0"/>
-              <a:t>6/4/2025</a:t>
+              <a:t>6/7/2025</a:t>
             </a:fld>
             <a:endParaRPr lang="en-US"/>
           </a:p>
@@ -3450,7 +3616,7 @@
           <a:p>
             <a:fld id="{0DB78E95-DE77-44D3-BDB9-E242948FB112}" type="datetimeFigureOut">
               <a:rPr lang="en-US" smtClean="0"/>
-              <a:t>6/4/2025</a:t>
+              <a:t>6/7/2025</a:t>
             </a:fld>
             <a:endParaRPr lang="en-US"/>
           </a:p>
@@ -3678,7 +3844,7 @@
           <a:p>
             <a:fld id="{0DB78E95-DE77-44D3-BDB9-E242948FB112}" type="datetimeFigureOut">
               <a:rPr lang="en-US" smtClean="0"/>
-              <a:t>6/4/2025</a:t>
+              <a:t>6/7/2025</a:t>
             </a:fld>
             <a:endParaRPr lang="en-US"/>
           </a:p>
@@ -3886,7 +4052,7 @@
           <a:p>
             <a:fld id="{0DB78E95-DE77-44D3-BDB9-E242948FB112}" type="datetimeFigureOut">
               <a:rPr lang="en-US" smtClean="0"/>
-              <a:t>6/4/2025</a:t>
+              <a:t>6/7/2025</a:t>
             </a:fld>
             <a:endParaRPr lang="en-US"/>
           </a:p>
@@ -4317,7 +4483,7 @@
           <a:p>
             <a:fld id="{0DB78E95-DE77-44D3-BDB9-E242948FB112}" type="datetimeFigureOut">
               <a:rPr lang="en-US" smtClean="0"/>
-              <a:t>6/4/2025</a:t>
+              <a:t>6/7/2025</a:t>
             </a:fld>
             <a:endParaRPr lang="en-US"/>
           </a:p>
@@ -4696,7 +4862,7 @@
           <a:p>
             <a:fld id="{0DB78E95-DE77-44D3-BDB9-E242948FB112}" type="datetimeFigureOut">
               <a:rPr lang="en-US" smtClean="0"/>
-              <a:t>6/4/2025</a:t>
+              <a:t>6/7/2025</a:t>
             </a:fld>
             <a:endParaRPr lang="en-US"/>
           </a:p>
@@ -5108,7 +5274,7 @@
           <a:p>
             <a:fld id="{0DB78E95-DE77-44D3-BDB9-E242948FB112}" type="datetimeFigureOut">
               <a:rPr lang="en-US" smtClean="0"/>
-              <a:t>6/4/2025</a:t>
+              <a:t>6/7/2025</a:t>
             </a:fld>
             <a:endParaRPr lang="en-US"/>
           </a:p>
@@ -5249,7 +5415,7 @@
           <a:p>
             <a:fld id="{0DB78E95-DE77-44D3-BDB9-E242948FB112}" type="datetimeFigureOut">
               <a:rPr lang="en-US" smtClean="0"/>
-              <a:t>6/4/2025</a:t>
+              <a:t>6/7/2025</a:t>
             </a:fld>
             <a:endParaRPr lang="en-US"/>
           </a:p>
@@ -5362,7 +5528,7 @@
           <a:p>
             <a:fld id="{0DB78E95-DE77-44D3-BDB9-E242948FB112}" type="datetimeFigureOut">
               <a:rPr lang="en-US" smtClean="0"/>
-              <a:t>6/4/2025</a:t>
+              <a:t>6/7/2025</a:t>
             </a:fld>
             <a:endParaRPr lang="en-US"/>
           </a:p>
@@ -5673,7 +5839,7 @@
           <a:p>
             <a:fld id="{0DB78E95-DE77-44D3-BDB9-E242948FB112}" type="datetimeFigureOut">
               <a:rPr lang="en-US" smtClean="0"/>
-              <a:t>6/4/2025</a:t>
+              <a:t>6/7/2025</a:t>
             </a:fld>
             <a:endParaRPr lang="en-US"/>
           </a:p>
@@ -5961,7 +6127,7 @@
           <a:p>
             <a:fld id="{0DB78E95-DE77-44D3-BDB9-E242948FB112}" type="datetimeFigureOut">
               <a:rPr lang="en-US" smtClean="0"/>
-              <a:t>6/4/2025</a:t>
+              <a:t>6/7/2025</a:t>
             </a:fld>
             <a:endParaRPr lang="en-US"/>
           </a:p>
@@ -6202,7 +6368,7 @@
           <a:p>
             <a:fld id="{0DB78E95-DE77-44D3-BDB9-E242948FB112}" type="datetimeFigureOut">
               <a:rPr lang="en-US" smtClean="0"/>
-              <a:t>6/4/2025</a:t>
+              <a:t>6/7/2025</a:t>
             </a:fld>
             <a:endParaRPr lang="en-US"/>
           </a:p>
@@ -6759,15 +6925,7 @@
           <a:p>
             <a:r>
               <a:rPr lang="en-US" sz="3200" dirty="0"/>
-              <a:t>Association Rules Mining &amp; </a:t>
-            </a:r>
-            <a:r>
-              <a:rPr lang="en-US" sz="3200" dirty="0" err="1"/>
-              <a:t>Apriori</a:t>
-            </a:r>
-            <a:r>
-              <a:rPr lang="en-US" sz="3200" dirty="0"/>
-              <a:t> Algorithm</a:t>
+              <a:t>Association Rules Mining &amp; Apriori Algorithm</a:t>
             </a:r>
           </a:p>
           <a:p>
@@ -6861,7 +7019,7 @@
           <p:cNvPr id="2" name="Title 1">
             <a:extLst>
               <a:ext uri="{FF2B5EF4-FFF2-40B4-BE49-F238E27FC236}">
-                <a16:creationId xmlns:a16="http://schemas.microsoft.com/office/drawing/2014/main" id="{2E8AAFAD-4F13-D81B-8B17-B6638AAA08A1}"/>
+                <a16:creationId xmlns:a16="http://schemas.microsoft.com/office/drawing/2014/main" id="{748EBE3E-0A49-2947-0CEC-18B7160B878C}"/>
               </a:ext>
             </a:extLst>
           </p:cNvPr>
@@ -6875,13 +7033,20 @@
         <p:spPr/>
         <p:txBody>
           <a:bodyPr>
-            <a:normAutofit/>
+            <a:normAutofit fontScale="90000"/>
           </a:bodyPr>
           <a:lstStyle/>
           <a:p>
             <a:r>
               <a:rPr lang="en-US" dirty="0"/>
-              <a:t>Why Lift is Useful</a:t>
+              <a:t>The Lift Metric </a:t>
+            </a:r>
+            <a:br>
+              <a:rPr lang="en-US" dirty="0"/>
+            </a:br>
+            <a:r>
+              <a:rPr lang="en-US" dirty="0"/>
+              <a:t>Is the co-occurrence of two items is truly meaningful or just due to chance</a:t>
             </a:r>
           </a:p>
         </p:txBody>
@@ -6891,7 +7056,7 @@
           <p:cNvPr id="3" name="Content Placeholder 2">
             <a:extLst>
               <a:ext uri="{FF2B5EF4-FFF2-40B4-BE49-F238E27FC236}">
-                <a16:creationId xmlns:a16="http://schemas.microsoft.com/office/drawing/2014/main" id="{74B6284C-EB0A-B914-984A-9968E5EAE664}"/>
+                <a16:creationId xmlns:a16="http://schemas.microsoft.com/office/drawing/2014/main" id="{ACE394C5-CDB7-FD4D-AA66-701E1D158182}"/>
               </a:ext>
             </a:extLst>
           </p:cNvPr>
@@ -6902,10 +7067,15 @@
             <p:ph idx="1"/>
           </p:nvPr>
         </p:nvSpPr>
-        <p:spPr/>
+        <p:spPr>
+          <a:xfrm>
+            <a:off x="838200" y="1706007"/>
+            <a:ext cx="10515600" cy="5244669"/>
+          </a:xfrm>
+        </p:spPr>
         <p:txBody>
           <a:bodyPr>
-            <a:normAutofit fontScale="47500" lnSpcReduction="20000"/>
+            <a:normAutofit fontScale="62500" lnSpcReduction="20000"/>
           </a:bodyPr>
           <a:lstStyle/>
           <a:p>
@@ -6914,7 +7084,7 @@
             </a:pPr>
             <a:r>
               <a:rPr lang="en-US" dirty="0"/>
-              <a:t>Lift helps overcome a major limitation of confidence alone. Consider this scenario: if bread appears in 80% of all transactions, then any rule "X → bread" will have high confidence simply because bread is popular, not because there's a meaningful association. Lift corrects for this by normalizing against the baseline probability of the consequent.</a:t>
+              <a:t>The confidence metric can be misleading in some scenarios such as when the consequent is a common item.</a:t>
             </a:r>
           </a:p>
           <a:p>
@@ -6923,13 +7093,11 @@
             </a:pPr>
             <a:r>
               <a:rPr lang="en-US" b="1" dirty="0"/>
-              <a:t>Practical Example</a:t>
-            </a:r>
-          </a:p>
-          <a:p>
-            <a:r>
-              <a:rPr lang="en-US" dirty="0"/>
-              <a:t>Let's say we're analyzing a grocery store dataset with 1,000 transactions:</a:t>
+              <a:t>Scenario: </a:t>
+            </a:r>
+            <a:r>
+              <a:rPr lang="en-US" dirty="0"/>
+              <a:t>We analyze 100 transactions at a bakery.</a:t>
             </a:r>
           </a:p>
           <a:p>
@@ -6938,26 +7106,39 @@
             </a:pPr>
             <a:r>
               <a:rPr lang="en-US" b="1" dirty="0"/>
-              <a:t>Data:</a:t>
+              <a:t>Itemset: {</a:t>
+            </a:r>
+            <a:r>
+              <a:rPr lang="en-US" dirty="0"/>
+              <a:t>Biscuits, Bread}</a:t>
+            </a:r>
+          </a:p>
+          <a:p>
+            <a:pPr marL="0" indent="0">
+              <a:buNone/>
+            </a:pPr>
+            <a:r>
+              <a:rPr lang="en-US" b="1" dirty="0"/>
+              <a:t>Observations:</a:t>
             </a:r>
             <a:endParaRPr lang="en-US" dirty="0"/>
           </a:p>
           <a:p>
             <a:r>
               <a:rPr lang="en-US" dirty="0"/>
-              <a:t>Bread appears in 600 transactions (Support = 0.6)</a:t>
-            </a:r>
-          </a:p>
-          <a:p>
-            <a:r>
-              <a:rPr lang="en-US" dirty="0"/>
-              <a:t>Butter appears in 400 transactions (Support = 0.4)</a:t>
-            </a:r>
-          </a:p>
-          <a:p>
-            <a:r>
-              <a:rPr lang="en-US" dirty="0"/>
-              <a:t>Bread and Butter together appear in 300 transactions (Support = 0.3)</a:t>
+              <a:t>40 people bought biscuits</a:t>
+            </a:r>
+          </a:p>
+          <a:p>
+            <a:r>
+              <a:rPr lang="en-US" dirty="0"/>
+              <a:t>100 people bought bread</a:t>
+            </a:r>
+          </a:p>
+          <a:p>
+            <a:r>
+              <a:rPr lang="en-US" dirty="0"/>
+              <a:t>32 of those who bought biscuits also bought bread</a:t>
             </a:r>
           </a:p>
           <a:p>
@@ -6966,21 +7147,62 @@
             </a:pPr>
             <a:r>
               <a:rPr lang="en-US" b="1" dirty="0"/>
-              <a:t>For the rule "Bread → Butter":</a:t>
+              <a:t>Confidence (Bread | Biscuits): </a:t>
+            </a:r>
+            <a:r>
+              <a:rPr lang="en-US" dirty="0"/>
+              <a:t>= 32 / 40 = </a:t>
+            </a:r>
+            <a:r>
+              <a:rPr lang="en-US" b="1" dirty="0"/>
+              <a:t>80%</a:t>
             </a:r>
             <a:endParaRPr lang="en-US" dirty="0"/>
           </a:p>
           <a:p>
-            <a:r>
-              <a:rPr lang="en-US" dirty="0"/>
-              <a:t>Confidence = 300/600 = 0.5 (50%)</a:t>
-            </a:r>
-          </a:p>
-          <a:p>
-            <a:r>
-              <a:rPr lang="en-US" dirty="0"/>
-              <a:t>Lift = 0.5/0.4 = 1.25</a:t>
-            </a:r>
+            <a:pPr marL="0" indent="0">
+              <a:buNone/>
+            </a:pPr>
+            <a:r>
+              <a:rPr lang="en-US" b="1" dirty="0"/>
+              <a:t>But Bread is Bought in Every Transaction: </a:t>
+            </a:r>
+            <a:r>
+              <a:rPr lang="en-US" dirty="0"/>
+              <a:t>Support(Bread) = 100 / 100 = </a:t>
+            </a:r>
+            <a:r>
+              <a:rPr lang="en-US" b="1" dirty="0"/>
+              <a:t>1.0</a:t>
+            </a:r>
+            <a:endParaRPr lang="en-US" dirty="0"/>
+          </a:p>
+          <a:p>
+            <a:pPr marL="0" indent="0">
+              <a:buNone/>
+            </a:pPr>
+            <a:r>
+              <a:rPr lang="en-US" b="1" dirty="0"/>
+              <a:t>We can use Lift to expose this relation</a:t>
+            </a:r>
+          </a:p>
+          <a:p>
+            <a:pPr marL="0" indent="0">
+              <a:buNone/>
+            </a:pPr>
+            <a:r>
+              <a:rPr lang="en-US" b="1" dirty="0"/>
+              <a:t>Lift = Confidence / Support(Bread): </a:t>
+            </a:r>
+            <a:r>
+              <a:rPr lang="en-US" dirty="0"/>
+              <a:t>= 0.80 / 1.0 = </a:t>
+            </a:r>
+            <a:r>
+              <a:rPr lang="en-US" b="1" dirty="0"/>
+              <a:t>0.8 (below 1)</a:t>
+            </a:r>
+            <a:endParaRPr lang="en-US" dirty="0"/>
           </a:p>
           <a:p>
             <a:pPr marL="0" indent="0">
@@ -6990,10 +7212,35 @@
               <a:rPr lang="en-US" b="1" dirty="0"/>
               <a:t>Interpretation:</a:t>
             </a:r>
-            <a:r>
-              <a:rPr lang="en-US" dirty="0"/>
-              <a:t> People who buy bread are 25% more likely to also buy butter than the average customer. This suggests a meaningful positive association.</a:t>
-            </a:r>
+            <a:endParaRPr lang="en-US" dirty="0"/>
+          </a:p>
+          <a:p>
+            <a:r>
+              <a:rPr lang="en-US" dirty="0"/>
+              <a:t>Confidence is high (80%), suggesting a strong rule</a:t>
+            </a:r>
+          </a:p>
+          <a:p>
+            <a:r>
+              <a:rPr lang="en-US" dirty="0"/>
+              <a:t>But since bread is in every basket, the 80% is </a:t>
+            </a:r>
+            <a:r>
+              <a:rPr lang="en-US" b="1" dirty="0"/>
+              <a:t>not surprising</a:t>
+            </a:r>
+            <a:endParaRPr lang="en-US" dirty="0"/>
+          </a:p>
+          <a:p>
+            <a:r>
+              <a:rPr lang="en-US" dirty="0"/>
+              <a:t>Lift &lt; 1 shows this is actually a </a:t>
+            </a:r>
+            <a:r>
+              <a:rPr lang="en-US" b="1" dirty="0"/>
+              <a:t>weak or negative association</a:t>
+            </a:r>
+            <a:endParaRPr lang="en-US" dirty="0"/>
           </a:p>
           <a:p>
             <a:pPr marL="0" indent="0">
@@ -7001,61 +7248,35 @@
             </a:pPr>
             <a:r>
               <a:rPr lang="en-US" b="1" dirty="0"/>
-              <a:t>Comparison with a weak association:</a:t>
-            </a:r>
-            <a:r>
-              <a:rPr lang="en-US" dirty="0"/>
-              <a:t> If we had a rule "Bread → Milk" where:</a:t>
-            </a:r>
-          </a:p>
-          <a:p>
-            <a:r>
-              <a:rPr lang="en-US" dirty="0"/>
-              <a:t>Milk appears in 300 transactions (Support = 0.3)</a:t>
-            </a:r>
-          </a:p>
-          <a:p>
-            <a:r>
-              <a:rPr lang="en-US" dirty="0"/>
-              <a:t>Bread and Milk together appear in 180 transactions</a:t>
-            </a:r>
-          </a:p>
-          <a:p>
-            <a:pPr marL="0" indent="0">
-              <a:buNone/>
-            </a:pPr>
-            <a:r>
-              <a:rPr lang="en-US" dirty="0"/>
-              <a:t>Then:</a:t>
-            </a:r>
-          </a:p>
-          <a:p>
-            <a:r>
-              <a:rPr lang="en-US" dirty="0"/>
-              <a:t>Confidence = 180/600 = 0.3 (30%)</a:t>
-            </a:r>
-          </a:p>
-          <a:p>
-            <a:r>
-              <a:rPr lang="en-US" dirty="0"/>
-              <a:t>Lift = 0.3/0.3 = 1.0</a:t>
-            </a:r>
-          </a:p>
-          <a:p>
-            <a:r>
-              <a:rPr lang="en-US" dirty="0"/>
-              <a:t>This lift of 1.0 indicates no special association between bread and milk beyond what we'd expect by chance.</a:t>
-            </a:r>
-          </a:p>
-          <a:p>
-            <a:endParaRPr lang="en-US" dirty="0"/>
+              <a:t>Conclusion:</a:t>
+            </a:r>
+          </a:p>
+          <a:p>
+            <a:r>
+              <a:rPr lang="en-US" dirty="0"/>
+              <a:t>Lift adjusts for how common the consequent is.</a:t>
+            </a:r>
+          </a:p>
+          <a:p>
+            <a:r>
+              <a:rPr lang="en-US" dirty="0"/>
+              <a:t>It reveals when a high confidence is simply a result of a </a:t>
+            </a:r>
+            <a:r>
+              <a:rPr lang="en-US" b="1" dirty="0"/>
+              <a:t>popular item</a:t>
+            </a:r>
+            <a:r>
+              <a:rPr lang="en-US" dirty="0"/>
+              <a:t>, not a meaningful relationship.</a:t>
+            </a:r>
           </a:p>
         </p:txBody>
       </p:sp>
     </p:spTree>
     <p:extLst>
       <p:ext uri="{BB962C8B-B14F-4D97-AF65-F5344CB8AC3E}">
-        <p14:creationId xmlns:p14="http://schemas.microsoft.com/office/powerpoint/2010/main" val="18889404"/>
+        <p14:creationId xmlns:p14="http://schemas.microsoft.com/office/powerpoint/2010/main" val="834475357"/>
       </p:ext>
     </p:extLst>
   </p:cSld>
@@ -7070,13 +7291,7 @@
   <p:cSld>
     <p:spTree>
       <p:nvGrpSpPr>
-        <p:cNvPr id="1" name="">
-          <a:extLst>
-            <a:ext uri="{FF2B5EF4-FFF2-40B4-BE49-F238E27FC236}">
-              <a16:creationId xmlns:a16="http://schemas.microsoft.com/office/drawing/2014/main" id="{BC14AA0C-EDAC-0854-4D50-6E10723F377F}"/>
-            </a:ext>
-          </a:extLst>
-        </p:cNvPr>
+        <p:cNvPr id="1" name=""/>
         <p:cNvGrpSpPr/>
         <p:nvPr/>
       </p:nvGrpSpPr>
@@ -7093,7 +7308,7 @@
           <p:cNvPr id="2" name="Title 1">
             <a:extLst>
               <a:ext uri="{FF2B5EF4-FFF2-40B4-BE49-F238E27FC236}">
-                <a16:creationId xmlns:a16="http://schemas.microsoft.com/office/drawing/2014/main" id="{50237B44-82AA-6D5F-690E-B4196B212F61}"/>
+                <a16:creationId xmlns:a16="http://schemas.microsoft.com/office/drawing/2014/main" id="{F8F4BF20-9F6B-53F5-F9C4-82C82044F532}"/>
               </a:ext>
             </a:extLst>
           </p:cNvPr>
@@ -7106,14 +7321,12 @@
         </p:nvSpPr>
         <p:spPr/>
         <p:txBody>
-          <a:bodyPr>
-            <a:normAutofit/>
-          </a:bodyPr>
+          <a:bodyPr/>
           <a:lstStyle/>
           <a:p>
             <a:r>
               <a:rPr lang="en-US" dirty="0"/>
-              <a:t>Lift Reveals True Relationships</a:t>
+              <a:t>Possible Lift Values</a:t>
             </a:r>
           </a:p>
         </p:txBody>
@@ -7123,7 +7336,7 @@
           <p:cNvPr id="3" name="Content Placeholder 2">
             <a:extLst>
               <a:ext uri="{FF2B5EF4-FFF2-40B4-BE49-F238E27FC236}">
-                <a16:creationId xmlns:a16="http://schemas.microsoft.com/office/drawing/2014/main" id="{CF60364B-FC1E-7A96-20D3-ECFE1DD046D9}"/>
+                <a16:creationId xmlns:a16="http://schemas.microsoft.com/office/drawing/2014/main" id="{CB07E86B-8195-ABC4-FB51-50C4A2AC39B9}"/>
               </a:ext>
             </a:extLst>
           </p:cNvPr>
@@ -7139,119 +7352,37 @@
           <a:bodyPr/>
           <a:lstStyle/>
           <a:p>
-            <a:pPr marL="0" indent="0">
-              <a:buNone/>
+            <a:pPr marL="457200" indent="-457200">
+              <a:buFont typeface="+mj-lt"/>
+              <a:buAutoNum type="arabicPeriod"/>
             </a:pPr>
             <a:r>
-              <a:rPr lang="en-US" b="1" dirty="0"/>
-              <a:t>Positive Correlation Example</a:t>
-            </a:r>
-          </a:p>
-          <a:p>
-            <a:pPr lvl="1"/>
-            <a:r>
-              <a:rPr lang="en-US" dirty="0"/>
-              <a:t>{Butter} → {Cheese}: Confidence = 80% Lift = 80% / 60% = 1.33</a:t>
-            </a:r>
-          </a:p>
-          <a:p>
-            <a:pPr marL="0" indent="0">
-              <a:buNone/>
+              <a:rPr lang="en-US" dirty="0"/>
+              <a:t>Lift &gt; 1: Items A and B are positively correlated (they appear together more than expected)</a:t>
+            </a:r>
+          </a:p>
+          <a:p>
+            <a:pPr marL="457200" indent="-457200">
+              <a:buFont typeface="+mj-lt"/>
+              <a:buAutoNum type="arabicPeriod"/>
             </a:pPr>
             <a:r>
-              <a:rPr lang="en-US" b="1" dirty="0"/>
-              <a:t>Interpretation:</a:t>
-            </a:r>
-            <a:r>
-              <a:rPr lang="en-US" dirty="0"/>
-              <a:t> Butter buyers are 33% MORE likely to buy cheese than average</a:t>
-            </a:r>
-          </a:p>
-          <a:p>
-            <a:pPr marL="0" indent="0">
-              <a:buNone/>
+              <a:rPr lang="en-US" dirty="0"/>
+              <a:t>Lift &lt; 1: Items A and B are negatively correlated (they appear together less than expected)</a:t>
+            </a:r>
+          </a:p>
+          <a:p>
+            <a:pPr marL="457200" indent="-457200">
+              <a:buFont typeface="+mj-lt"/>
+              <a:buAutoNum type="arabicPeriod"/>
             </a:pPr>
             <a:r>
-              <a:rPr lang="en-US" b="1" dirty="0"/>
-              <a:t>Independence Example</a:t>
-            </a:r>
-          </a:p>
-          <a:p>
-            <a:pPr lvl="1"/>
-            <a:r>
-              <a:rPr lang="en-US" dirty="0"/>
-              <a:t>{Bread} → {Milk}: Confidence = 50% Lift = 50% / 50% = 1.00</a:t>
-            </a:r>
-          </a:p>
-          <a:p>
-            <a:pPr marL="0" indent="0">
-              <a:buNone/>
-            </a:pPr>
-            <a:r>
-              <a:rPr lang="en-US" b="1" dirty="0"/>
-              <a:t>Interpretation:</a:t>
-            </a:r>
-            <a:r>
-              <a:rPr lang="en-US" dirty="0"/>
-              <a:t> Bread purchase doesn't affect milk purchase probability</a:t>
-            </a:r>
-          </a:p>
-          <a:p>
-            <a:pPr marL="0" indent="0">
-              <a:buNone/>
-            </a:pPr>
-            <a:r>
-              <a:rPr lang="en-US" b="1" dirty="0"/>
-              <a:t>Negative Correlation Example</a:t>
-            </a:r>
-          </a:p>
-          <a:p>
-            <a:pPr lvl="1"/>
-            <a:r>
-              <a:rPr lang="en-US" sz="1800" dirty="0"/>
-              <a:t>{Yogurt} → {Bread}: </a:t>
-            </a:r>
-          </a:p>
-          <a:p>
-            <a:pPr lvl="1"/>
-            <a:r>
-              <a:rPr lang="en-US" sz="1800" dirty="0"/>
-              <a:t>Support({Yogurt, Bread}) = 0/10 = 0% </a:t>
-            </a:r>
-          </a:p>
-          <a:p>
-            <a:pPr lvl="1"/>
-            <a:r>
-              <a:rPr lang="en-US" sz="1800" dirty="0"/>
-              <a:t>Support({Yogurt}) = 3/10 = 30% </a:t>
-            </a:r>
-          </a:p>
-          <a:p>
-            <a:pPr lvl="1"/>
-            <a:r>
-              <a:rPr lang="en-US" sz="1800" dirty="0"/>
-              <a:t>Confidence = 0% / 30% = 0% </a:t>
-            </a:r>
-          </a:p>
-          <a:p>
-            <a:pPr lvl="1"/>
-            <a:r>
-              <a:rPr lang="en-US" sz="1800" dirty="0"/>
-              <a:t>Lift = 0% / 60% = 0.00</a:t>
-            </a:r>
-          </a:p>
-          <a:p>
-            <a:pPr marL="0" indent="0">
-              <a:buNone/>
-            </a:pPr>
-            <a:r>
-              <a:rPr lang="en-US" b="1" dirty="0"/>
-              <a:t>Interpretation:</a:t>
-            </a:r>
-            <a:r>
-              <a:rPr lang="en-US" dirty="0"/>
-              <a:t> Yogurt buyers NEVER buy bread - strong negative correlation</a:t>
-            </a:r>
+              <a:rPr lang="en-US" dirty="0"/>
+              <a:t>Lift = 1: Items A and B are independent (no association)</a:t>
+            </a:r>
+          </a:p>
+          <a:p>
+            <a:endParaRPr lang="en-US" dirty="0"/>
           </a:p>
           <a:p>
             <a:endParaRPr lang="en-US" dirty="0"/>
@@ -7261,7 +7392,7 @@
     </p:spTree>
     <p:extLst>
       <p:ext uri="{BB962C8B-B14F-4D97-AF65-F5344CB8AC3E}">
-        <p14:creationId xmlns:p14="http://schemas.microsoft.com/office/powerpoint/2010/main" val="1938525646"/>
+        <p14:creationId xmlns:p14="http://schemas.microsoft.com/office/powerpoint/2010/main" val="1871645747"/>
       </p:ext>
     </p:extLst>
   </p:cSld>
@@ -7276,13 +7407,7 @@
   <p:cSld>
     <p:spTree>
       <p:nvGrpSpPr>
-        <p:cNvPr id="1" name="">
-          <a:extLst>
-            <a:ext uri="{FF2B5EF4-FFF2-40B4-BE49-F238E27FC236}">
-              <a16:creationId xmlns:a16="http://schemas.microsoft.com/office/drawing/2014/main" id="{C12A53D1-6663-EF96-576F-B98435E8BA12}"/>
-            </a:ext>
-          </a:extLst>
-        </p:cNvPr>
+        <p:cNvPr id="1" name=""/>
         <p:cNvGrpSpPr/>
         <p:nvPr/>
       </p:nvGrpSpPr>
@@ -7299,7 +7424,7 @@
           <p:cNvPr id="2" name="Title 1">
             <a:extLst>
               <a:ext uri="{FF2B5EF4-FFF2-40B4-BE49-F238E27FC236}">
-                <a16:creationId xmlns:a16="http://schemas.microsoft.com/office/drawing/2014/main" id="{898675BF-7046-3A3E-E408-4C2FE0530171}"/>
+                <a16:creationId xmlns:a16="http://schemas.microsoft.com/office/drawing/2014/main" id="{DC04C7CB-A0FB-53BD-F5B2-69AE96A0E5A0}"/>
               </a:ext>
             </a:extLst>
           </p:cNvPr>
@@ -7317,7 +7442,7 @@
           <a:p>
             <a:r>
               <a:rPr lang="en-US" dirty="0"/>
-              <a:t>Why We Need All Three Metrics</a:t>
+              <a:t>Lift Examples - Lift &gt; 1</a:t>
             </a:r>
           </a:p>
         </p:txBody>
@@ -7327,7 +7452,400 @@
           <p:cNvPr id="3" name="Content Placeholder 2">
             <a:extLst>
               <a:ext uri="{FF2B5EF4-FFF2-40B4-BE49-F238E27FC236}">
-                <a16:creationId xmlns:a16="http://schemas.microsoft.com/office/drawing/2014/main" id="{8A3F3DC4-AAFE-EBA7-A99B-EA18FC4D8D25}"/>
+                <a16:creationId xmlns:a16="http://schemas.microsoft.com/office/drawing/2014/main" id="{2B689DDF-B48C-5A99-824B-F07E6AA4BC70}"/>
+              </a:ext>
+            </a:extLst>
+          </p:cNvPr>
+          <p:cNvSpPr>
+            <a:spLocks noGrp="1"/>
+          </p:cNvSpPr>
+          <p:nvPr>
+            <p:ph idx="1"/>
+          </p:nvPr>
+        </p:nvSpPr>
+        <p:spPr>
+          <a:xfrm>
+            <a:off x="838200" y="1706007"/>
+            <a:ext cx="10515600" cy="5151993"/>
+          </a:xfrm>
+        </p:spPr>
+        <p:txBody>
+          <a:bodyPr>
+            <a:normAutofit fontScale="77500" lnSpcReduction="20000"/>
+          </a:bodyPr>
+          <a:lstStyle/>
+          <a:p>
+            <a:pPr marL="0" indent="0">
+              <a:buNone/>
+            </a:pPr>
+            <a:r>
+              <a:rPr lang="en-US" dirty="0"/>
+              <a:t>Example: Analyzing convenience store purchases.</a:t>
+            </a:r>
+          </a:p>
+          <a:p>
+            <a:pPr marL="0" indent="0">
+              <a:buNone/>
+            </a:pPr>
+            <a:r>
+              <a:rPr lang="en-US" dirty="0"/>
+              <a:t>Items: {Chips, Soda}</a:t>
+            </a:r>
+          </a:p>
+          <a:p>
+            <a:pPr marL="0" indent="0">
+              <a:buNone/>
+            </a:pPr>
+            <a:r>
+              <a:rPr lang="en-US" dirty="0"/>
+              <a:t>From 100 transactions:</a:t>
+            </a:r>
+          </a:p>
+          <a:p>
+            <a:r>
+              <a:rPr lang="en-US" dirty="0"/>
+              <a:t>40 people bought chips</a:t>
+            </a:r>
+          </a:p>
+          <a:p>
+            <a:r>
+              <a:rPr lang="en-US" dirty="0"/>
+              <a:t>50 people bought soda</a:t>
+            </a:r>
+          </a:p>
+          <a:p>
+            <a:r>
+              <a:rPr lang="en-US" dirty="0"/>
+              <a:t>30 people bought both chips and soda</a:t>
+            </a:r>
+          </a:p>
+          <a:p>
+            <a:pPr marL="0" indent="0">
+              <a:buNone/>
+            </a:pPr>
+            <a:r>
+              <a:rPr lang="en-US" dirty="0"/>
+              <a:t>Metrics:</a:t>
+            </a:r>
+          </a:p>
+          <a:p>
+            <a:r>
+              <a:rPr lang="en-US" dirty="0"/>
+              <a:t>Support (chips ∩ soda) = 30 / 100 = 0.30</a:t>
+            </a:r>
+          </a:p>
+          <a:p>
+            <a:r>
+              <a:rPr lang="en-US" dirty="0"/>
+              <a:t>Support (chips) = 40 / 100 = 0.40</a:t>
+            </a:r>
+          </a:p>
+          <a:p>
+            <a:r>
+              <a:rPr lang="en-US" dirty="0"/>
+              <a:t>Support (soda) = 50 / 100 = 0.50</a:t>
+            </a:r>
+          </a:p>
+          <a:p>
+            <a:r>
+              <a:rPr lang="en-US" dirty="0"/>
+              <a:t>Confidence (soda | chips):= 0.30 / 0.40 = 0.75</a:t>
+            </a:r>
+          </a:p>
+          <a:p>
+            <a:r>
+              <a:rPr lang="en-US" dirty="0"/>
+              <a:t>Lift:= 0.75 / 0.50 = 1.5</a:t>
+            </a:r>
+          </a:p>
+          <a:p>
+            <a:pPr marL="0" indent="0">
+              <a:buNone/>
+            </a:pPr>
+            <a:r>
+              <a:rPr lang="en-US" dirty="0"/>
+              <a:t>Interpretation:</a:t>
+            </a:r>
+          </a:p>
+          <a:p>
+            <a:r>
+              <a:rPr lang="en-US" dirty="0"/>
+              <a:t>A lift of 1.5 means that people who buy chips are 50% more likely to also buy soda than the average customer.</a:t>
+            </a:r>
+          </a:p>
+          <a:p>
+            <a:r>
+              <a:rPr lang="en-US" dirty="0"/>
+              <a:t>This shows a positive association, which makes sense: chips and soda are often consumed together.</a:t>
+            </a:r>
+          </a:p>
+        </p:txBody>
+      </p:sp>
+    </p:spTree>
+    <p:extLst>
+      <p:ext uri="{BB962C8B-B14F-4D97-AF65-F5344CB8AC3E}">
+        <p14:creationId xmlns:p14="http://schemas.microsoft.com/office/powerpoint/2010/main" val="2311531301"/>
+      </p:ext>
+    </p:extLst>
+  </p:cSld>
+  <p:clrMapOvr>
+    <a:masterClrMapping/>
+  </p:clrMapOvr>
+</p:sld>
+</file>
+
+<file path=ppt/slides/slide13.xml><?xml version="1.0" encoding="utf-8"?>
+<p:sld xmlns:a="http://schemas.openxmlformats.org/drawingml/2006/main" xmlns:r="http://schemas.openxmlformats.org/officeDocument/2006/relationships" xmlns:p="http://schemas.openxmlformats.org/presentationml/2006/main">
+  <p:cSld>
+    <p:spTree>
+      <p:nvGrpSpPr>
+        <p:cNvPr id="1" name=""/>
+        <p:cNvGrpSpPr/>
+        <p:nvPr/>
+      </p:nvGrpSpPr>
+      <p:grpSpPr>
+        <a:xfrm>
+          <a:off x="0" y="0"/>
+          <a:ext cx="0" cy="0"/>
+          <a:chOff x="0" y="0"/>
+          <a:chExt cx="0" cy="0"/>
+        </a:xfrm>
+      </p:grpSpPr>
+      <p:sp>
+        <p:nvSpPr>
+          <p:cNvPr id="2" name="Title 1">
+            <a:extLst>
+              <a:ext uri="{FF2B5EF4-FFF2-40B4-BE49-F238E27FC236}">
+                <a16:creationId xmlns:a16="http://schemas.microsoft.com/office/drawing/2014/main" id="{88A29053-B25D-8437-7DDD-113C9833833C}"/>
+              </a:ext>
+            </a:extLst>
+          </p:cNvPr>
+          <p:cNvSpPr>
+            <a:spLocks noGrp="1"/>
+          </p:cNvSpPr>
+          <p:nvPr>
+            <p:ph type="title"/>
+          </p:nvPr>
+        </p:nvSpPr>
+        <p:spPr/>
+        <p:txBody>
+          <a:bodyPr/>
+          <a:lstStyle/>
+          <a:p>
+            <a:r>
+              <a:rPr lang="en-US" dirty="0"/>
+              <a:t>Lift Examples - Lift &lt; 1 – Negative Relationship</a:t>
+            </a:r>
+          </a:p>
+        </p:txBody>
+      </p:sp>
+      <p:sp>
+        <p:nvSpPr>
+          <p:cNvPr id="3" name="Content Placeholder 2">
+            <a:extLst>
+              <a:ext uri="{FF2B5EF4-FFF2-40B4-BE49-F238E27FC236}">
+                <a16:creationId xmlns:a16="http://schemas.microsoft.com/office/drawing/2014/main" id="{5B93E470-126F-0470-F370-550A166C8CE3}"/>
+              </a:ext>
+            </a:extLst>
+          </p:cNvPr>
+          <p:cNvSpPr>
+            <a:spLocks noGrp="1"/>
+          </p:cNvSpPr>
+          <p:nvPr>
+            <p:ph idx="1"/>
+          </p:nvPr>
+        </p:nvSpPr>
+        <p:spPr>
+          <a:xfrm>
+            <a:off x="838200" y="1706007"/>
+            <a:ext cx="10515600" cy="5226134"/>
+          </a:xfrm>
+        </p:spPr>
+        <p:txBody>
+          <a:bodyPr>
+            <a:normAutofit fontScale="62500" lnSpcReduction="20000"/>
+          </a:bodyPr>
+          <a:lstStyle/>
+          <a:p>
+            <a:pPr marL="0" indent="0">
+              <a:buNone/>
+            </a:pPr>
+            <a:r>
+              <a:rPr lang="en-US" dirty="0"/>
+              <a:t>Lift can be 1 in two cases (When the consequent is common like in the bread/butter example and when there is a negative relationship between the antecedent and the consequent as show in the example in this slide).</a:t>
+            </a:r>
+          </a:p>
+          <a:p>
+            <a:pPr marL="0" indent="0">
+              <a:buNone/>
+            </a:pPr>
+            <a:r>
+              <a:rPr lang="en-US" dirty="0"/>
+              <a:t>Example: Analyzing supermarket transactions.</a:t>
+            </a:r>
+          </a:p>
+          <a:p>
+            <a:pPr marL="0" indent="0">
+              <a:buNone/>
+            </a:pPr>
+            <a:r>
+              <a:rPr lang="en-US" dirty="0"/>
+              <a:t>Items: {Toothpaste, Candy}</a:t>
+            </a:r>
+          </a:p>
+          <a:p>
+            <a:pPr marL="0" indent="0">
+              <a:buNone/>
+            </a:pPr>
+            <a:r>
+              <a:rPr lang="en-US" dirty="0"/>
+              <a:t>Data from 100 transactions:</a:t>
+            </a:r>
+          </a:p>
+          <a:p>
+            <a:r>
+              <a:rPr lang="en-US" dirty="0"/>
+              <a:t>40 people bought toothpaste</a:t>
+            </a:r>
+          </a:p>
+          <a:p>
+            <a:r>
+              <a:rPr lang="en-US" dirty="0"/>
+              <a:t>30 people bought candy</a:t>
+            </a:r>
+          </a:p>
+          <a:p>
+            <a:r>
+              <a:rPr lang="en-US" dirty="0"/>
+              <a:t>Only 4 people bought both toothpaste and candy</a:t>
+            </a:r>
+          </a:p>
+          <a:p>
+            <a:pPr marL="0" indent="0">
+              <a:buNone/>
+            </a:pPr>
+            <a:r>
+              <a:rPr lang="en-US" dirty="0"/>
+              <a:t>Metrics: </a:t>
+            </a:r>
+          </a:p>
+          <a:p>
+            <a:r>
+              <a:rPr lang="en-US" dirty="0"/>
+              <a:t>Support (toothpaste ∩ candy) = 4 / 100 = 0.04</a:t>
+            </a:r>
+          </a:p>
+          <a:p>
+            <a:r>
+              <a:rPr lang="en-US" dirty="0"/>
+              <a:t>Support (toothpaste) = 40 / 100 = 0.40</a:t>
+            </a:r>
+          </a:p>
+          <a:p>
+            <a:r>
+              <a:rPr lang="en-US" dirty="0"/>
+              <a:t>Support (candy) = 30 / 100 = 0.30</a:t>
+            </a:r>
+          </a:p>
+          <a:p>
+            <a:r>
+              <a:rPr lang="en-US" dirty="0"/>
+              <a:t>Confidence (candy | toothpaste):= Support (toothpaste ∩ candy) / Support (toothpaste)= 0.04 / 0.40 = 0.10</a:t>
+            </a:r>
+          </a:p>
+          <a:p>
+            <a:r>
+              <a:rPr lang="en-US" dirty="0"/>
+              <a:t>Lift:= Confidence / Support (candy)= 0.10 / 0.30 = 0.33</a:t>
+            </a:r>
+          </a:p>
+          <a:p>
+            <a:pPr marL="0" indent="0">
+              <a:buNone/>
+            </a:pPr>
+            <a:r>
+              <a:rPr lang="en-US" dirty="0"/>
+              <a:t>Interpretation:</a:t>
+            </a:r>
+          </a:p>
+          <a:p>
+            <a:r>
+              <a:rPr lang="en-US" dirty="0"/>
+              <a:t>A lift of 0.33 means people who buy toothpaste are less likely to buy candy than the average customer.</a:t>
+            </a:r>
+          </a:p>
+          <a:p>
+            <a:r>
+              <a:rPr lang="en-US" dirty="0"/>
+              <a:t>This negative association makes sense intuitively: people buying dental hygiene products might avoid sugary items like candy.</a:t>
+            </a:r>
+          </a:p>
+        </p:txBody>
+      </p:sp>
+    </p:spTree>
+    <p:extLst>
+      <p:ext uri="{BB962C8B-B14F-4D97-AF65-F5344CB8AC3E}">
+        <p14:creationId xmlns:p14="http://schemas.microsoft.com/office/powerpoint/2010/main" val="3589465999"/>
+      </p:ext>
+    </p:extLst>
+  </p:cSld>
+  <p:clrMapOvr>
+    <a:masterClrMapping/>
+  </p:clrMapOvr>
+</p:sld>
+</file>
+
+<file path=ppt/slides/slide14.xml><?xml version="1.0" encoding="utf-8"?>
+<p:sld xmlns:a="http://schemas.openxmlformats.org/drawingml/2006/main" xmlns:r="http://schemas.openxmlformats.org/officeDocument/2006/relationships" xmlns:p="http://schemas.openxmlformats.org/presentationml/2006/main">
+  <p:cSld>
+    <p:spTree>
+      <p:nvGrpSpPr>
+        <p:cNvPr id="1" name=""/>
+        <p:cNvGrpSpPr/>
+        <p:nvPr/>
+      </p:nvGrpSpPr>
+      <p:grpSpPr>
+        <a:xfrm>
+          <a:off x="0" y="0"/>
+          <a:ext cx="0" cy="0"/>
+          <a:chOff x="0" y="0"/>
+          <a:chExt cx="0" cy="0"/>
+        </a:xfrm>
+      </p:grpSpPr>
+      <p:sp>
+        <p:nvSpPr>
+          <p:cNvPr id="2" name="Title 1">
+            <a:extLst>
+              <a:ext uri="{FF2B5EF4-FFF2-40B4-BE49-F238E27FC236}">
+                <a16:creationId xmlns:a16="http://schemas.microsoft.com/office/drawing/2014/main" id="{0200F449-8EB2-4A35-0E5D-148ACC5A1F7D}"/>
+              </a:ext>
+            </a:extLst>
+          </p:cNvPr>
+          <p:cNvSpPr>
+            <a:spLocks noGrp="1"/>
+          </p:cNvSpPr>
+          <p:nvPr>
+            <p:ph type="title"/>
+          </p:nvPr>
+        </p:nvSpPr>
+        <p:spPr/>
+        <p:txBody>
+          <a:bodyPr/>
+          <a:lstStyle/>
+          <a:p>
+            <a:r>
+              <a:rPr lang="en-US" dirty="0"/>
+              <a:t>Lift Examples - Lift = 1</a:t>
+            </a:r>
+          </a:p>
+        </p:txBody>
+      </p:sp>
+      <p:sp>
+        <p:nvSpPr>
+          <p:cNvPr id="3" name="Content Placeholder 2">
+            <a:extLst>
+              <a:ext uri="{FF2B5EF4-FFF2-40B4-BE49-F238E27FC236}">
+                <a16:creationId xmlns:a16="http://schemas.microsoft.com/office/drawing/2014/main" id="{C0784354-661A-5C14-DFC3-A6A7DCA2C928}"/>
               </a:ext>
             </a:extLst>
           </p:cNvPr>
@@ -7341,492 +7859,106 @@
         <p:spPr>
           <a:xfrm>
             <a:off x="838200" y="1706008"/>
-            <a:ext cx="10515600" cy="561458"/>
+            <a:ext cx="4802659" cy="3527078"/>
           </a:xfrm>
         </p:spPr>
         <p:txBody>
-          <a:bodyPr/>
+          <a:bodyPr>
+            <a:normAutofit fontScale="62500" lnSpcReduction="20000"/>
+          </a:bodyPr>
           <a:lstStyle/>
           <a:p>
-            <a:r>
-              <a:rPr lang="en-US" dirty="0"/>
-              <a:t>Complete Rule Evaluation</a:t>
+            <a:pPr marL="0" indent="0">
+              <a:buNone/>
+            </a:pPr>
+            <a:r>
+              <a:rPr lang="en-US" dirty="0"/>
+              <a:t>Example: Analyzing grocery store data.</a:t>
+            </a:r>
+          </a:p>
+          <a:p>
+            <a:pPr marL="0" indent="0">
+              <a:buNone/>
+            </a:pPr>
+            <a:r>
+              <a:rPr lang="en-US" dirty="0"/>
+              <a:t>Items: {Milk, Bread}</a:t>
+            </a:r>
+          </a:p>
+          <a:p>
+            <a:pPr marL="0" indent="0">
+              <a:buNone/>
+            </a:pPr>
+            <a:r>
+              <a:rPr lang="en-US" dirty="0"/>
+              <a:t>From 100 transactions:</a:t>
+            </a:r>
+          </a:p>
+          <a:p>
+            <a:r>
+              <a:rPr lang="en-US" dirty="0"/>
+              <a:t>40 people bought milk</a:t>
+            </a:r>
+          </a:p>
+          <a:p>
+            <a:r>
+              <a:rPr lang="en-US" dirty="0"/>
+              <a:t>50 people bought bread</a:t>
+            </a:r>
+          </a:p>
+          <a:p>
+            <a:r>
+              <a:rPr lang="en-US" dirty="0"/>
+              <a:t>20 people bought both milk and bread</a:t>
+            </a:r>
+          </a:p>
+          <a:p>
+            <a:pPr marL="0" indent="0">
+              <a:buNone/>
+            </a:pPr>
+            <a:r>
+              <a:rPr lang="en-US" dirty="0"/>
+              <a:t>Metrics:</a:t>
+            </a:r>
+          </a:p>
+          <a:p>
+            <a:r>
+              <a:rPr lang="en-US" dirty="0"/>
+              <a:t>Support (milk ∩ bread) = 20 / 100 = 0.20</a:t>
+            </a:r>
+          </a:p>
+          <a:p>
+            <a:r>
+              <a:rPr lang="en-US" dirty="0"/>
+              <a:t>Support (milk) = 40 / 100 = 0.40</a:t>
+            </a:r>
+          </a:p>
+          <a:p>
+            <a:r>
+              <a:rPr lang="en-US" dirty="0"/>
+              <a:t>Support (bread) = 50 / 100 = 0.50</a:t>
+            </a:r>
+          </a:p>
+          <a:p>
+            <a:r>
+              <a:rPr lang="en-US" dirty="0"/>
+              <a:t>Confidence (bread | milk):= 0.20 / 0.40 = 0.50</a:t>
+            </a:r>
+          </a:p>
+          <a:p>
+            <a:r>
+              <a:rPr lang="en-US" dirty="0"/>
+              <a:t>Lift:= 0.50 / 0.50 = 1.0</a:t>
             </a:r>
           </a:p>
         </p:txBody>
       </p:sp>
-      <p:graphicFrame>
-        <p:nvGraphicFramePr>
-          <p:cNvPr id="5" name="Table 4">
+      <p:sp>
+        <p:nvSpPr>
+          <p:cNvPr id="10" name="TextBox 9">
             <a:extLst>
               <a:ext uri="{FF2B5EF4-FFF2-40B4-BE49-F238E27FC236}">
-                <a16:creationId xmlns:a16="http://schemas.microsoft.com/office/drawing/2014/main" id="{45ABD52E-F79D-2160-1F1B-578B3029517C}"/>
-              </a:ext>
-            </a:extLst>
-          </p:cNvPr>
-          <p:cNvGraphicFramePr>
-            <a:graphicFrameLocks noGrp="1"/>
-          </p:cNvGraphicFramePr>
-          <p:nvPr>
-            <p:extLst>
-              <p:ext uri="{D42A27DB-BD31-4B8C-83A1-F6EECF244321}">
-                <p14:modId xmlns:p14="http://schemas.microsoft.com/office/powerpoint/2010/main" val="3097082906"/>
-              </p:ext>
-            </p:extLst>
-          </p:nvPr>
-        </p:nvGraphicFramePr>
-        <p:xfrm>
-          <a:off x="838200" y="2514600"/>
-          <a:ext cx="10515600" cy="1828800"/>
-        </p:xfrm>
-        <a:graphic>
-          <a:graphicData uri="http://schemas.openxmlformats.org/drawingml/2006/table">
-            <a:tbl>
-              <a:tblPr>
-                <a:tableStyleId>{616DA210-FB5B-4158-B5E0-FEB733F419BA}</a:tableStyleId>
-              </a:tblPr>
-              <a:tblGrid>
-                <a:gridCol w="2103120">
-                  <a:extLst>
-                    <a:ext uri="{9D8B030D-6E8A-4147-A177-3AD203B41FA5}">
-                      <a16:colId xmlns:a16="http://schemas.microsoft.com/office/drawing/2014/main" val="3524300491"/>
-                    </a:ext>
-                  </a:extLst>
-                </a:gridCol>
-                <a:gridCol w="2103120">
-                  <a:extLst>
-                    <a:ext uri="{9D8B030D-6E8A-4147-A177-3AD203B41FA5}">
-                      <a16:colId xmlns:a16="http://schemas.microsoft.com/office/drawing/2014/main" val="4013446573"/>
-                    </a:ext>
-                  </a:extLst>
-                </a:gridCol>
-                <a:gridCol w="2103120">
-                  <a:extLst>
-                    <a:ext uri="{9D8B030D-6E8A-4147-A177-3AD203B41FA5}">
-                      <a16:colId xmlns:a16="http://schemas.microsoft.com/office/drawing/2014/main" val="1345340181"/>
-                    </a:ext>
-                  </a:extLst>
-                </a:gridCol>
-                <a:gridCol w="2103120">
-                  <a:extLst>
-                    <a:ext uri="{9D8B030D-6E8A-4147-A177-3AD203B41FA5}">
-                      <a16:colId xmlns:a16="http://schemas.microsoft.com/office/drawing/2014/main" val="1147619799"/>
-                    </a:ext>
-                  </a:extLst>
-                </a:gridCol>
-                <a:gridCol w="2103120">
-                  <a:extLst>
-                    <a:ext uri="{9D8B030D-6E8A-4147-A177-3AD203B41FA5}">
-                      <a16:colId xmlns:a16="http://schemas.microsoft.com/office/drawing/2014/main" val="3361783627"/>
-                    </a:ext>
-                  </a:extLst>
-                </a:gridCol>
-              </a:tblGrid>
-              <a:tr h="0">
-                <a:tc>
-                  <a:txBody>
-                    <a:bodyPr/>
-                    <a:lstStyle/>
-                    <a:p>
-                      <a:pPr algn="ctr"/>
-                      <a:r>
-                        <a:rPr lang="en-US"/>
-                        <a:t>Rule</a:t>
-                      </a:r>
-                    </a:p>
-                  </a:txBody>
-                  <a:tcPr anchor="ctr">
-                    <a:solidFill>
-                      <a:schemeClr val="bg1">
-                        <a:lumMod val="85000"/>
-                      </a:schemeClr>
-                    </a:solidFill>
-                  </a:tcPr>
-                </a:tc>
-                <a:tc>
-                  <a:txBody>
-                    <a:bodyPr/>
-                    <a:lstStyle/>
-                    <a:p>
-                      <a:pPr algn="ctr"/>
-                      <a:r>
-                        <a:rPr lang="en-US" dirty="0"/>
-                        <a:t>Support</a:t>
-                      </a:r>
-                    </a:p>
-                  </a:txBody>
-                  <a:tcPr anchor="ctr">
-                    <a:solidFill>
-                      <a:schemeClr val="bg1">
-                        <a:lumMod val="85000"/>
-                      </a:schemeClr>
-                    </a:solidFill>
-                  </a:tcPr>
-                </a:tc>
-                <a:tc>
-                  <a:txBody>
-                    <a:bodyPr/>
-                    <a:lstStyle/>
-                    <a:p>
-                      <a:pPr algn="ctr"/>
-                      <a:r>
-                        <a:rPr lang="en-US"/>
-                        <a:t>Confidence</a:t>
-                      </a:r>
-                    </a:p>
-                  </a:txBody>
-                  <a:tcPr anchor="ctr">
-                    <a:solidFill>
-                      <a:schemeClr val="bg1">
-                        <a:lumMod val="85000"/>
-                      </a:schemeClr>
-                    </a:solidFill>
-                  </a:tcPr>
-                </a:tc>
-                <a:tc>
-                  <a:txBody>
-                    <a:bodyPr/>
-                    <a:lstStyle/>
-                    <a:p>
-                      <a:pPr algn="ctr"/>
-                      <a:r>
-                        <a:rPr lang="en-US"/>
-                        <a:t>Lift</a:t>
-                      </a:r>
-                    </a:p>
-                  </a:txBody>
-                  <a:tcPr anchor="ctr">
-                    <a:solidFill>
-                      <a:schemeClr val="bg1">
-                        <a:lumMod val="85000"/>
-                      </a:schemeClr>
-                    </a:solidFill>
-                  </a:tcPr>
-                </a:tc>
-                <a:tc>
-                  <a:txBody>
-                    <a:bodyPr/>
-                    <a:lstStyle/>
-                    <a:p>
-                      <a:pPr algn="ctr"/>
-                      <a:r>
-                        <a:rPr lang="en-US" dirty="0"/>
-                        <a:t>Business Value</a:t>
-                      </a:r>
-                    </a:p>
-                  </a:txBody>
-                  <a:tcPr anchor="ctr">
-                    <a:solidFill>
-                      <a:schemeClr val="bg1">
-                        <a:lumMod val="85000"/>
-                      </a:schemeClr>
-                    </a:solidFill>
-                  </a:tcPr>
-                </a:tc>
-                <a:extLst>
-                  <a:ext uri="{0D108BD9-81ED-4DB2-BD59-A6C34878D82A}">
-                    <a16:rowId xmlns:a16="http://schemas.microsoft.com/office/drawing/2014/main" val="3645052062"/>
-                  </a:ext>
-                </a:extLst>
-              </a:tr>
-              <a:tr h="0">
-                <a:tc>
-                  <a:txBody>
-                    <a:bodyPr/>
-                    <a:lstStyle/>
-                    <a:p>
-                      <a:r>
-                        <a:rPr lang="en-US"/>
-                        <a:t>{Butter} → {Cheese}</a:t>
-                      </a:r>
-                    </a:p>
-                  </a:txBody>
-                  <a:tcPr anchor="ctr"/>
-                </a:tc>
-                <a:tc>
-                  <a:txBody>
-                    <a:bodyPr/>
-                    <a:lstStyle/>
-                    <a:p>
-                      <a:r>
-                        <a:rPr lang="en-US"/>
-                        <a:t>40%</a:t>
-                      </a:r>
-                    </a:p>
-                  </a:txBody>
-                  <a:tcPr anchor="ctr"/>
-                </a:tc>
-                <a:tc>
-                  <a:txBody>
-                    <a:bodyPr/>
-                    <a:lstStyle/>
-                    <a:p>
-                      <a:r>
-                        <a:rPr lang="en-US"/>
-                        <a:t>80%</a:t>
-                      </a:r>
-                    </a:p>
-                  </a:txBody>
-                  <a:tcPr anchor="ctr"/>
-                </a:tc>
-                <a:tc>
-                  <a:txBody>
-                    <a:bodyPr/>
-                    <a:lstStyle/>
-                    <a:p>
-                      <a:r>
-                        <a:rPr lang="en-US"/>
-                        <a:t>1.33</a:t>
-                      </a:r>
-                    </a:p>
-                  </a:txBody>
-                  <a:tcPr anchor="ctr"/>
-                </a:tc>
-                <a:tc>
-                  <a:txBody>
-                    <a:bodyPr/>
-                    <a:lstStyle/>
-                    <a:p>
-                      <a:r>
-                        <a:rPr lang="en-US"/>
-                        <a:t>HIGH ✓</a:t>
-                      </a:r>
-                    </a:p>
-                  </a:txBody>
-                  <a:tcPr anchor="ctr"/>
-                </a:tc>
-                <a:extLst>
-                  <a:ext uri="{0D108BD9-81ED-4DB2-BD59-A6C34878D82A}">
-                    <a16:rowId xmlns:a16="http://schemas.microsoft.com/office/drawing/2014/main" val="1568336478"/>
-                  </a:ext>
-                </a:extLst>
-              </a:tr>
-              <a:tr h="0">
-                <a:tc>
-                  <a:txBody>
-                    <a:bodyPr/>
-                    <a:lstStyle/>
-                    <a:p>
-                      <a:r>
-                        <a:rPr lang="en-US"/>
-                        <a:t>{Milk} → {Bread}</a:t>
-                      </a:r>
-                    </a:p>
-                  </a:txBody>
-                  <a:tcPr anchor="ctr"/>
-                </a:tc>
-                <a:tc>
-                  <a:txBody>
-                    <a:bodyPr/>
-                    <a:lstStyle/>
-                    <a:p>
-                      <a:r>
-                        <a:rPr lang="en-US"/>
-                        <a:t>30%</a:t>
-                      </a:r>
-                    </a:p>
-                  </a:txBody>
-                  <a:tcPr anchor="ctr"/>
-                </a:tc>
-                <a:tc>
-                  <a:txBody>
-                    <a:bodyPr/>
-                    <a:lstStyle/>
-                    <a:p>
-                      <a:r>
-                        <a:rPr lang="en-US"/>
-                        <a:t>60%</a:t>
-                      </a:r>
-                    </a:p>
-                  </a:txBody>
-                  <a:tcPr anchor="ctr"/>
-                </a:tc>
-                <a:tc>
-                  <a:txBody>
-                    <a:bodyPr/>
-                    <a:lstStyle/>
-                    <a:p>
-                      <a:r>
-                        <a:rPr lang="en-US"/>
-                        <a:t>1.00</a:t>
-                      </a:r>
-                    </a:p>
-                  </a:txBody>
-                  <a:tcPr anchor="ctr"/>
-                </a:tc>
-                <a:tc>
-                  <a:txBody>
-                    <a:bodyPr/>
-                    <a:lstStyle/>
-                    <a:p>
-                      <a:r>
-                        <a:rPr lang="en-US"/>
-                        <a:t>NONE ✗</a:t>
-                      </a:r>
-                    </a:p>
-                  </a:txBody>
-                  <a:tcPr anchor="ctr"/>
-                </a:tc>
-                <a:extLst>
-                  <a:ext uri="{0D108BD9-81ED-4DB2-BD59-A6C34878D82A}">
-                    <a16:rowId xmlns:a16="http://schemas.microsoft.com/office/drawing/2014/main" val="1189671614"/>
-                  </a:ext>
-                </a:extLst>
-              </a:tr>
-              <a:tr h="0">
-                <a:tc>
-                  <a:txBody>
-                    <a:bodyPr/>
-                    <a:lstStyle/>
-                    <a:p>
-                      <a:r>
-                        <a:rPr lang="en-US"/>
-                        <a:t>{Eggs} → {Cheese}</a:t>
-                      </a:r>
-                    </a:p>
-                  </a:txBody>
-                  <a:tcPr anchor="ctr"/>
-                </a:tc>
-                <a:tc>
-                  <a:txBody>
-                    <a:bodyPr/>
-                    <a:lstStyle/>
-                    <a:p>
-                      <a:r>
-                        <a:rPr lang="en-US"/>
-                        <a:t>20%</a:t>
-                      </a:r>
-                    </a:p>
-                  </a:txBody>
-                  <a:tcPr anchor="ctr"/>
-                </a:tc>
-                <a:tc>
-                  <a:txBody>
-                    <a:bodyPr/>
-                    <a:lstStyle/>
-                    <a:p>
-                      <a:r>
-                        <a:rPr lang="en-US"/>
-                        <a:t>50%</a:t>
-                      </a:r>
-                    </a:p>
-                  </a:txBody>
-                  <a:tcPr anchor="ctr"/>
-                </a:tc>
-                <a:tc>
-                  <a:txBody>
-                    <a:bodyPr/>
-                    <a:lstStyle/>
-                    <a:p>
-                      <a:r>
-                        <a:rPr lang="en-US"/>
-                        <a:t>0.83</a:t>
-                      </a:r>
-                    </a:p>
-                  </a:txBody>
-                  <a:tcPr anchor="ctr"/>
-                </a:tc>
-                <a:tc>
-                  <a:txBody>
-                    <a:bodyPr/>
-                    <a:lstStyle/>
-                    <a:p>
-                      <a:r>
-                        <a:rPr lang="en-US"/>
-                        <a:t>NEGATIVE ✗</a:t>
-                      </a:r>
-                    </a:p>
-                  </a:txBody>
-                  <a:tcPr anchor="ctr"/>
-                </a:tc>
-                <a:extLst>
-                  <a:ext uri="{0D108BD9-81ED-4DB2-BD59-A6C34878D82A}">
-                    <a16:rowId xmlns:a16="http://schemas.microsoft.com/office/drawing/2014/main" val="2611050435"/>
-                  </a:ext>
-                </a:extLst>
-              </a:tr>
-              <a:tr h="0">
-                <a:tc>
-                  <a:txBody>
-                    <a:bodyPr/>
-                    <a:lstStyle/>
-                    <a:p>
-                      <a:r>
-                        <a:rPr lang="en-US"/>
-                        <a:t>{Cheese} → {Yogurt}</a:t>
-                      </a:r>
-                    </a:p>
-                  </a:txBody>
-                  <a:tcPr anchor="ctr"/>
-                </a:tc>
-                <a:tc>
-                  <a:txBody>
-                    <a:bodyPr/>
-                    <a:lstStyle/>
-                    <a:p>
-                      <a:r>
-                        <a:rPr lang="en-US"/>
-                        <a:t>15%</a:t>
-                      </a:r>
-                    </a:p>
-                  </a:txBody>
-                  <a:tcPr anchor="ctr"/>
-                </a:tc>
-                <a:tc>
-                  <a:txBody>
-                    <a:bodyPr/>
-                    <a:lstStyle/>
-                    <a:p>
-                      <a:r>
-                        <a:rPr lang="en-US"/>
-                        <a:t>25%</a:t>
-                      </a:r>
-                    </a:p>
-                  </a:txBody>
-                  <a:tcPr anchor="ctr"/>
-                </a:tc>
-                <a:tc>
-                  <a:txBody>
-                    <a:bodyPr/>
-                    <a:lstStyle/>
-                    <a:p>
-                      <a:r>
-                        <a:rPr lang="en-US"/>
-                        <a:t>0.83</a:t>
-                      </a:r>
-                    </a:p>
-                  </a:txBody>
-                  <a:tcPr anchor="ctr"/>
-                </a:tc>
-                <a:tc>
-                  <a:txBody>
-                    <a:bodyPr/>
-                    <a:lstStyle/>
-                    <a:p>
-                      <a:r>
-                        <a:rPr lang="en-US" dirty="0"/>
-                        <a:t>WEAK ✗</a:t>
-                      </a:r>
-                    </a:p>
-                  </a:txBody>
-                  <a:tcPr anchor="ctr"/>
-                </a:tc>
-                <a:extLst>
-                  <a:ext uri="{0D108BD9-81ED-4DB2-BD59-A6C34878D82A}">
-                    <a16:rowId xmlns:a16="http://schemas.microsoft.com/office/drawing/2014/main" val="3133268943"/>
-                  </a:ext>
-                </a:extLst>
-              </a:tr>
-            </a:tbl>
-          </a:graphicData>
-        </a:graphic>
-      </p:graphicFrame>
-      <p:sp>
-        <p:nvSpPr>
-          <p:cNvPr id="7" name="TextBox 6">
-            <a:extLst>
-              <a:ext uri="{FF2B5EF4-FFF2-40B4-BE49-F238E27FC236}">
-                <a16:creationId xmlns:a16="http://schemas.microsoft.com/office/drawing/2014/main" id="{41EB5759-76A0-ACF0-457A-72B7B72AC433}"/>
+                <a16:creationId xmlns:a16="http://schemas.microsoft.com/office/drawing/2014/main" id="{CBD069FD-7B37-85AA-7C66-0FC15C990DD8}"/>
               </a:ext>
             </a:extLst>
           </p:cNvPr>
@@ -7835,8 +7967,8 @@
         </p:nvSpPr>
         <p:spPr>
           <a:xfrm>
-            <a:off x="761485" y="4406379"/>
-            <a:ext cx="6094970" cy="2308324"/>
+            <a:off x="838200" y="5321813"/>
+            <a:ext cx="6094970" cy="1477328"/>
           </a:xfrm>
           <a:prstGeom prst="rect">
             <a:avLst/>
@@ -7849,99 +7981,305 @@
           </a:bodyPr>
           <a:lstStyle/>
           <a:p>
-            <a:r>
-              <a:rPr lang="en-US" b="1" dirty="0"/>
-              <a:t>Each Metric's Role</a:t>
-            </a:r>
-          </a:p>
-          <a:p>
-            <a:pPr marL="285750" indent="-285750">
+            <a:pPr marL="0" indent="0">
+              <a:buNone/>
+            </a:pPr>
+            <a:r>
+              <a:rPr lang="en-US" dirty="0"/>
+              <a:t>Interpretation: </a:t>
+            </a:r>
+          </a:p>
+          <a:p>
+            <a:r>
+              <a:rPr lang="en-US" dirty="0"/>
+              <a:t>A lift of 1 means people who buy milk are neither more nor less likely to buy bread than the general population.</a:t>
+            </a:r>
+          </a:p>
+          <a:p>
+            <a:r>
+              <a:rPr lang="en-US" dirty="0"/>
+              <a:t>This suggests no real association between milk and bread in this dataset.</a:t>
+            </a:r>
+          </a:p>
+        </p:txBody>
+      </p:sp>
+      <p:sp>
+        <p:nvSpPr>
+          <p:cNvPr id="11" name="Content Placeholder 2">
+            <a:extLst>
+              <a:ext uri="{FF2B5EF4-FFF2-40B4-BE49-F238E27FC236}">
+                <a16:creationId xmlns:a16="http://schemas.microsoft.com/office/drawing/2014/main" id="{0DA6AEBD-CB6D-CBC3-0968-E6D29B4C3B65}"/>
+              </a:ext>
+            </a:extLst>
+          </p:cNvPr>
+          <p:cNvSpPr txBox="1">
+            <a:spLocks/>
+          </p:cNvSpPr>
+          <p:nvPr/>
+        </p:nvSpPr>
+        <p:spPr>
+          <a:xfrm>
+            <a:off x="5883875" y="1634458"/>
+            <a:ext cx="4802659" cy="3527078"/>
+          </a:xfrm>
+          <a:prstGeom prst="rect">
+            <a:avLst/>
+          </a:prstGeom>
+        </p:spPr>
+        <p:txBody>
+          <a:bodyPr vert="horz" lIns="91440" tIns="45720" rIns="91440" bIns="45720" rtlCol="0">
+            <a:normAutofit fontScale="62500" lnSpcReduction="20000"/>
+          </a:bodyPr>
+          <a:lstStyle>
+            <a:lvl1pPr marL="228600" indent="-228600" algn="l" defTabSz="914400" rtl="0" eaLnBrk="1" latinLnBrk="0" hangingPunct="1">
+              <a:lnSpc>
+                <a:spcPct val="90000"/>
+              </a:lnSpc>
+              <a:spcBef>
+                <a:spcPts val="1000"/>
+              </a:spcBef>
               <a:buFont typeface="Arial" panose="020B0604020202020204" pitchFamily="34" charset="0"/>
               <a:buChar char="•"/>
-            </a:pPr>
-            <a:r>
-              <a:rPr lang="en-US" b="1" dirty="0"/>
-              <a:t>Support:</a:t>
-            </a:r>
-            <a:r>
-              <a:rPr lang="en-US" dirty="0"/>
-              <a:t> Filters out rare patterns (need enough data)</a:t>
-            </a:r>
-          </a:p>
-          <a:p>
-            <a:pPr marL="285750" indent="-285750">
+              <a:defRPr sz="2400" kern="1200">
+                <a:solidFill>
+                  <a:schemeClr val="tx1"/>
+                </a:solidFill>
+                <a:latin typeface="+mn-lt"/>
+                <a:ea typeface="+mn-ea"/>
+                <a:cs typeface="+mn-cs"/>
+              </a:defRPr>
+            </a:lvl1pPr>
+            <a:lvl2pPr marL="685800" indent="-228600" algn="l" defTabSz="914400" rtl="0" eaLnBrk="1" latinLnBrk="0" hangingPunct="1">
+              <a:lnSpc>
+                <a:spcPct val="90000"/>
+              </a:lnSpc>
+              <a:spcBef>
+                <a:spcPts val="500"/>
+              </a:spcBef>
               <a:buFont typeface="Arial" panose="020B0604020202020204" pitchFamily="34" charset="0"/>
               <a:buChar char="•"/>
-            </a:pPr>
-            <a:r>
-              <a:rPr lang="en-US" b="1" dirty="0"/>
-              <a:t>Confidence:</a:t>
-            </a:r>
-            <a:r>
-              <a:rPr lang="en-US" dirty="0"/>
-              <a:t> Ensures rule reliability (high success rate)</a:t>
-            </a:r>
-          </a:p>
-          <a:p>
-            <a:pPr marL="285750" indent="-285750">
+              <a:defRPr sz="2000" kern="1200">
+                <a:solidFill>
+                  <a:schemeClr val="tx1"/>
+                </a:solidFill>
+                <a:latin typeface="+mn-lt"/>
+                <a:ea typeface="+mn-ea"/>
+                <a:cs typeface="+mn-cs"/>
+              </a:defRPr>
+            </a:lvl2pPr>
+            <a:lvl3pPr marL="1143000" indent="-228600" algn="l" defTabSz="914400" rtl="0" eaLnBrk="1" latinLnBrk="0" hangingPunct="1">
+              <a:lnSpc>
+                <a:spcPct val="90000"/>
+              </a:lnSpc>
+              <a:spcBef>
+                <a:spcPts val="500"/>
+              </a:spcBef>
               <a:buFont typeface="Arial" panose="020B0604020202020204" pitchFamily="34" charset="0"/>
               <a:buChar char="•"/>
-            </a:pPr>
-            <a:r>
-              <a:rPr lang="en-US" b="1" dirty="0"/>
-              <a:t>Lift:</a:t>
-            </a:r>
-            <a:r>
-              <a:rPr lang="en-US" dirty="0"/>
-              <a:t> Confirms true correlation (not just coincidence)</a:t>
-            </a:r>
-          </a:p>
-          <a:p>
-            <a:r>
-              <a:rPr lang="en-US" b="1" dirty="0"/>
-              <a:t>Best Rule: {Butter} → {Cheese}</a:t>
-            </a:r>
-          </a:p>
-          <a:p>
-            <a:pPr marL="285750" indent="-285750">
+              <a:defRPr sz="1800" kern="1200">
+                <a:solidFill>
+                  <a:schemeClr val="tx1"/>
+                </a:solidFill>
+                <a:latin typeface="+mn-lt"/>
+                <a:ea typeface="+mn-ea"/>
+                <a:cs typeface="+mn-cs"/>
+              </a:defRPr>
+            </a:lvl3pPr>
+            <a:lvl4pPr marL="1600200" indent="-228600" algn="l" defTabSz="914400" rtl="0" eaLnBrk="1" latinLnBrk="0" hangingPunct="1">
+              <a:lnSpc>
+                <a:spcPct val="90000"/>
+              </a:lnSpc>
+              <a:spcBef>
+                <a:spcPts val="500"/>
+              </a:spcBef>
               <a:buFont typeface="Arial" panose="020B0604020202020204" pitchFamily="34" charset="0"/>
               <a:buChar char="•"/>
-            </a:pPr>
-            <a:r>
-              <a:rPr lang="en-US" b="1" dirty="0"/>
-              <a:t>40% support:</a:t>
-            </a:r>
-            <a:r>
-              <a:rPr lang="en-US" dirty="0"/>
-              <a:t> Frequent enough to be reliable</a:t>
-            </a:r>
-          </a:p>
-          <a:p>
-            <a:pPr marL="285750" indent="-285750">
+              <a:defRPr sz="1600" kern="1200">
+                <a:solidFill>
+                  <a:schemeClr val="tx1"/>
+                </a:solidFill>
+                <a:latin typeface="+mn-lt"/>
+                <a:ea typeface="+mn-ea"/>
+                <a:cs typeface="+mn-cs"/>
+              </a:defRPr>
+            </a:lvl4pPr>
+            <a:lvl5pPr marL="2057400" indent="-228600" algn="l" defTabSz="914400" rtl="0" eaLnBrk="1" latinLnBrk="0" hangingPunct="1">
+              <a:lnSpc>
+                <a:spcPct val="90000"/>
+              </a:lnSpc>
+              <a:spcBef>
+                <a:spcPts val="500"/>
+              </a:spcBef>
               <a:buFont typeface="Arial" panose="020B0604020202020204" pitchFamily="34" charset="0"/>
               <a:buChar char="•"/>
-            </a:pPr>
-            <a:r>
-              <a:rPr lang="en-US" b="1" dirty="0"/>
-              <a:t>80% confidence:</a:t>
-            </a:r>
-            <a:r>
-              <a:rPr lang="en-US" dirty="0"/>
-              <a:t> 4 out of 5 butter buyers will buy cheese</a:t>
-            </a:r>
-          </a:p>
-          <a:p>
-            <a:pPr marL="285750" indent="-285750">
+              <a:defRPr sz="1600" kern="1200">
+                <a:solidFill>
+                  <a:schemeClr val="tx1"/>
+                </a:solidFill>
+                <a:latin typeface="+mn-lt"/>
+                <a:ea typeface="+mn-ea"/>
+                <a:cs typeface="+mn-cs"/>
+              </a:defRPr>
+            </a:lvl5pPr>
+            <a:lvl6pPr marL="2514600" indent="-228600" algn="l" defTabSz="914400" rtl="0" eaLnBrk="1" latinLnBrk="0" hangingPunct="1">
+              <a:lnSpc>
+                <a:spcPct val="90000"/>
+              </a:lnSpc>
+              <a:spcBef>
+                <a:spcPts val="500"/>
+              </a:spcBef>
               <a:buFont typeface="Arial" panose="020B0604020202020204" pitchFamily="34" charset="0"/>
               <a:buChar char="•"/>
+              <a:defRPr sz="1800" kern="1200">
+                <a:solidFill>
+                  <a:schemeClr val="tx1"/>
+                </a:solidFill>
+                <a:latin typeface="+mn-lt"/>
+                <a:ea typeface="+mn-ea"/>
+                <a:cs typeface="+mn-cs"/>
+              </a:defRPr>
+            </a:lvl6pPr>
+            <a:lvl7pPr marL="2971800" indent="-228600" algn="l" defTabSz="914400" rtl="0" eaLnBrk="1" latinLnBrk="0" hangingPunct="1">
+              <a:lnSpc>
+                <a:spcPct val="90000"/>
+              </a:lnSpc>
+              <a:spcBef>
+                <a:spcPts val="500"/>
+              </a:spcBef>
+              <a:buFont typeface="Arial" panose="020B0604020202020204" pitchFamily="34" charset="0"/>
+              <a:buChar char="•"/>
+              <a:defRPr sz="1800" kern="1200">
+                <a:solidFill>
+                  <a:schemeClr val="tx1"/>
+                </a:solidFill>
+                <a:latin typeface="+mn-lt"/>
+                <a:ea typeface="+mn-ea"/>
+                <a:cs typeface="+mn-cs"/>
+              </a:defRPr>
+            </a:lvl7pPr>
+            <a:lvl8pPr marL="3429000" indent="-228600" algn="l" defTabSz="914400" rtl="0" eaLnBrk="1" latinLnBrk="0" hangingPunct="1">
+              <a:lnSpc>
+                <a:spcPct val="90000"/>
+              </a:lnSpc>
+              <a:spcBef>
+                <a:spcPts val="500"/>
+              </a:spcBef>
+              <a:buFont typeface="Arial" panose="020B0604020202020204" pitchFamily="34" charset="0"/>
+              <a:buChar char="•"/>
+              <a:defRPr sz="1800" kern="1200">
+                <a:solidFill>
+                  <a:schemeClr val="tx1"/>
+                </a:solidFill>
+                <a:latin typeface="+mn-lt"/>
+                <a:ea typeface="+mn-ea"/>
+                <a:cs typeface="+mn-cs"/>
+              </a:defRPr>
+            </a:lvl8pPr>
+            <a:lvl9pPr marL="3886200" indent="-228600" algn="l" defTabSz="914400" rtl="0" eaLnBrk="1" latinLnBrk="0" hangingPunct="1">
+              <a:lnSpc>
+                <a:spcPct val="90000"/>
+              </a:lnSpc>
+              <a:spcBef>
+                <a:spcPts val="500"/>
+              </a:spcBef>
+              <a:buFont typeface="Arial" panose="020B0604020202020204" pitchFamily="34" charset="0"/>
+              <a:buChar char="•"/>
+              <a:defRPr sz="1800" kern="1200">
+                <a:solidFill>
+                  <a:schemeClr val="tx1"/>
+                </a:solidFill>
+                <a:latin typeface="+mn-lt"/>
+                <a:ea typeface="+mn-ea"/>
+                <a:cs typeface="+mn-cs"/>
+              </a:defRPr>
+            </a:lvl9pPr>
+          </a:lstStyle>
+          <a:p>
+            <a:pPr marL="0" indent="0">
+              <a:buFont typeface="Arial" panose="020B0604020202020204" pitchFamily="34" charset="0"/>
+              <a:buNone/>
             </a:pPr>
             <a:r>
-              <a:rPr lang="en-US" b="1" dirty="0"/>
-              <a:t>1.33 lift:</a:t>
-            </a:r>
-            <a:r>
-              <a:rPr lang="en-US" dirty="0"/>
-              <a:t> 33% more likely than random chance</a:t>
+              <a:rPr lang="en-US" dirty="0"/>
+              <a:t>Another Example: Analyzing grocery store data.</a:t>
+            </a:r>
+          </a:p>
+          <a:p>
+            <a:pPr marL="0" indent="0">
+              <a:buFont typeface="Arial" panose="020B0604020202020204" pitchFamily="34" charset="0"/>
+              <a:buNone/>
+            </a:pPr>
+            <a:r>
+              <a:rPr lang="en-US" dirty="0"/>
+              <a:t>Items: {Milk, Bread}</a:t>
+            </a:r>
+          </a:p>
+          <a:p>
+            <a:pPr marL="0" indent="0">
+              <a:buFont typeface="Arial" panose="020B0604020202020204" pitchFamily="34" charset="0"/>
+              <a:buNone/>
+            </a:pPr>
+            <a:r>
+              <a:rPr lang="en-US" dirty="0"/>
+              <a:t>From 100 transactions:</a:t>
+            </a:r>
+          </a:p>
+          <a:p>
+            <a:r>
+              <a:rPr lang="en-US" dirty="0"/>
+              <a:t>40 people bought milk</a:t>
+            </a:r>
+          </a:p>
+          <a:p>
+            <a:r>
+              <a:rPr lang="en-US" dirty="0"/>
+              <a:t>40 people bought bread</a:t>
+            </a:r>
+          </a:p>
+          <a:p>
+            <a:r>
+              <a:rPr lang="en-US" dirty="0"/>
+              <a:t>16 people bought both milk and bread</a:t>
+            </a:r>
+          </a:p>
+          <a:p>
+            <a:pPr marL="0" indent="0">
+              <a:buFont typeface="Arial" panose="020B0604020202020204" pitchFamily="34" charset="0"/>
+              <a:buNone/>
+            </a:pPr>
+            <a:r>
+              <a:rPr lang="en-US" dirty="0"/>
+              <a:t>Metrics:</a:t>
+            </a:r>
+          </a:p>
+          <a:p>
+            <a:r>
+              <a:rPr lang="en-US" dirty="0"/>
+              <a:t>Support (milk ∩ bread) = 16 / 100 = 0.16</a:t>
+            </a:r>
+          </a:p>
+          <a:p>
+            <a:r>
+              <a:rPr lang="en-US" dirty="0"/>
+              <a:t>Support (milk) = 40 / 100 = 0.40</a:t>
+            </a:r>
+          </a:p>
+          <a:p>
+            <a:r>
+              <a:rPr lang="en-US" dirty="0"/>
+              <a:t>Support (bread) = 40 / 100 = 0.40</a:t>
+            </a:r>
+          </a:p>
+          <a:p>
+            <a:r>
+              <a:rPr lang="en-US" dirty="0"/>
+              <a:t>Confidence (bread | milk):= 0.16 / 0.40 = 0.40</a:t>
+            </a:r>
+          </a:p>
+          <a:p>
+            <a:r>
+              <a:rPr lang="en-US" dirty="0"/>
+              <a:t>Lift:= 0.40 / 0.40 = 1.0</a:t>
             </a:r>
           </a:p>
         </p:txBody>
@@ -7949,7 +8287,7 @@
     </p:spTree>
     <p:extLst>
       <p:ext uri="{BB962C8B-B14F-4D97-AF65-F5344CB8AC3E}">
-        <p14:creationId xmlns:p14="http://schemas.microsoft.com/office/powerpoint/2010/main" val="2805227895"/>
+        <p14:creationId xmlns:p14="http://schemas.microsoft.com/office/powerpoint/2010/main" val="1201106649"/>
       </p:ext>
     </p:extLst>
   </p:cSld>
@@ -7959,7 +8297,7 @@
 </p:sld>
 </file>
 
-<file path=ppt/slides/slide13.xml><?xml version="1.0" encoding="utf-8"?>
+<file path=ppt/slides/slide15.xml><?xml version="1.0" encoding="utf-8"?>
 <p:sld xmlns:a="http://schemas.openxmlformats.org/drawingml/2006/main" xmlns:r="http://schemas.openxmlformats.org/officeDocument/2006/relationships" xmlns:p="http://schemas.openxmlformats.org/presentationml/2006/main">
   <p:cSld>
     <p:spTree>
@@ -8006,12 +8344,8 @@
           <a:lstStyle/>
           <a:p>
             <a:r>
-              <a:rPr lang="en-US" dirty="0" err="1"/>
-              <a:t>Apriori</a:t>
-            </a:r>
-            <a:r>
-              <a:rPr lang="en-US" dirty="0"/>
-              <a:t> Algorithm Overview</a:t>
+              <a:rPr lang="en-US" dirty="0"/>
+              <a:t>Apriori Algorithm Overview</a:t>
             </a:r>
           </a:p>
         </p:txBody>
@@ -8043,16 +8377,8 @@
               <a:buNone/>
             </a:pPr>
             <a:r>
-              <a:rPr lang="en-US" b="1" dirty="0"/>
-              <a:t>Core Principle: </a:t>
-            </a:r>
-            <a:r>
-              <a:rPr lang="en-US" b="1" dirty="0" err="1"/>
-              <a:t>Apriori</a:t>
-            </a:r>
-            <a:r>
-              <a:rPr lang="en-US" b="1" dirty="0"/>
-              <a:t> Property</a:t>
+              <a:rPr lang="en-US" sz="1800" b="1" dirty="0"/>
+              <a:t>Core Principle: Apriori Property</a:t>
             </a:r>
           </a:p>
           <a:p>
@@ -8060,51 +8386,49 @@
               <a:buNone/>
             </a:pPr>
             <a:r>
-              <a:rPr lang="en-US" b="1" dirty="0"/>
+              <a:rPr lang="en-US" sz="1800" dirty="0"/>
               <a:t>"All subsets of a frequent itemset must be frequent"</a:t>
             </a:r>
-            <a:endParaRPr lang="en-US" dirty="0"/>
           </a:p>
           <a:p>
             <a:pPr marL="0" indent="0">
               <a:buNone/>
             </a:pPr>
             <a:r>
-              <a:rPr lang="en-US" b="1" dirty="0"/>
+              <a:rPr lang="en-US" sz="1800" b="1" dirty="0"/>
               <a:t>Example</a:t>
             </a:r>
           </a:p>
           <a:p>
-            <a:r>
-              <a:rPr lang="en-US" sz="2200" dirty="0"/>
+            <a:pPr marL="0" indent="0">
+              <a:buNone/>
+            </a:pPr>
+            <a:r>
+              <a:rPr lang="en-US" sz="1800" dirty="0"/>
               <a:t>If {Bread, Milk, Butter} is frequent, then:</a:t>
             </a:r>
           </a:p>
           <a:p>
-            <a:pPr lvl="1"/>
-            <a:r>
-              <a:rPr lang="en-US" dirty="0"/>
+            <a:r>
+              <a:rPr lang="en-US" sz="2000" dirty="0"/>
               <a:t>{Bread, Milk} must be frequent</a:t>
             </a:r>
           </a:p>
           <a:p>
-            <a:pPr lvl="1"/>
-            <a:r>
-              <a:rPr lang="en-US" dirty="0"/>
+            <a:r>
+              <a:rPr lang="en-US" sz="2000" dirty="0"/>
               <a:t>{Bread, Butter} must be frequent</a:t>
             </a:r>
           </a:p>
           <a:p>
-            <a:pPr lvl="1"/>
-            <a:r>
-              <a:rPr lang="en-US" dirty="0"/>
+            <a:r>
+              <a:rPr lang="en-US" sz="2000" dirty="0"/>
               <a:t>{Milk, Butter} must be frequent</a:t>
             </a:r>
           </a:p>
           <a:p>
-            <a:pPr lvl="1"/>
-            <a:r>
-              <a:rPr lang="en-US" dirty="0"/>
+            <a:r>
+              <a:rPr lang="en-US" sz="2000" dirty="0"/>
               <a:t>{Bread}, {Milk}, {Butter} must be frequent</a:t>
             </a:r>
           </a:p>
@@ -8113,39 +8437,39 @@
               <a:buNone/>
             </a:pPr>
             <a:r>
-              <a:rPr lang="en-US" b="1" dirty="0"/>
+              <a:rPr lang="en-US" sz="1800" b="1" dirty="0"/>
               <a:t>Pruning Power</a:t>
             </a:r>
           </a:p>
           <a:p>
+            <a:pPr marL="0" indent="0">
+              <a:buNone/>
+            </a:pPr>
+            <a:r>
+              <a:rPr lang="en-US" sz="1600" dirty="0"/>
+              <a:t>If {Bread, Milk} is NOT frequent, then:</a:t>
+            </a:r>
+          </a:p>
+          <a:p>
             <a:r>
               <a:rPr lang="en-US" sz="2000" dirty="0"/>
-              <a:t>If {Bread, Milk} is NOT frequent, then:</a:t>
-            </a:r>
-          </a:p>
-          <a:p>
-            <a:pPr lvl="1"/>
-            <a:r>
-              <a:rPr lang="en-US" dirty="0"/>
               <a:t>{Bread, Milk, Butter} cannot be frequent</a:t>
             </a:r>
           </a:p>
           <a:p>
-            <a:pPr lvl="1"/>
-            <a:r>
-              <a:rPr lang="en-US" dirty="0"/>
+            <a:r>
+              <a:rPr lang="en-US" sz="2000" dirty="0"/>
               <a:t>{Bread, Milk, Cheese} cannot be frequent</a:t>
             </a:r>
           </a:p>
           <a:p>
-            <a:pPr lvl="1"/>
-            <a:r>
-              <a:rPr lang="en-US" dirty="0"/>
+            <a:r>
+              <a:rPr lang="en-US" sz="2000" dirty="0"/>
               <a:t>Any superset containing {Bread, Milk} can be eliminated</a:t>
             </a:r>
           </a:p>
           <a:p>
-            <a:endParaRPr lang="en-US" dirty="0"/>
+            <a:endParaRPr lang="en-US" sz="1800" dirty="0"/>
           </a:p>
         </p:txBody>
       </p:sp>
@@ -8162,7 +8486,7 @@
 </p:sld>
 </file>
 
-<file path=ppt/slides/slide14.xml><?xml version="1.0" encoding="utf-8"?>
+<file path=ppt/slides/slide16.xml><?xml version="1.0" encoding="utf-8"?>
 <p:sld xmlns:a="http://schemas.openxmlformats.org/drawingml/2006/main" xmlns:r="http://schemas.openxmlformats.org/officeDocument/2006/relationships" xmlns:p="http://schemas.openxmlformats.org/presentationml/2006/main">
   <p:cSld>
     <p:spTree>
@@ -8209,12 +8533,8 @@
           <a:lstStyle/>
           <a:p>
             <a:r>
-              <a:rPr lang="en-US" dirty="0" err="1"/>
-              <a:t>Apriori</a:t>
-            </a:r>
-            <a:r>
-              <a:rPr lang="en-US" dirty="0"/>
-              <a:t> Algorithm Steps</a:t>
+              <a:rPr lang="en-US" dirty="0"/>
+              <a:t>Apriori Algorithm Steps</a:t>
             </a:r>
           </a:p>
         </p:txBody>
@@ -8428,7 +8748,7 @@
 </p:sld>
 </file>
 
-<file path=ppt/slides/slide15.xml><?xml version="1.0" encoding="utf-8"?>
+<file path=ppt/slides/slide17.xml><?xml version="1.0" encoding="utf-8"?>
 <p:sld xmlns:a="http://schemas.openxmlformats.org/drawingml/2006/main" xmlns:r="http://schemas.openxmlformats.org/officeDocument/2006/relationships" xmlns:p="http://schemas.openxmlformats.org/presentationml/2006/main">
   <p:cSld>
     <p:spTree>
@@ -8530,7 +8850,7 @@
           <p:nvPr>
             <p:extLst>
               <p:ext uri="{D42A27DB-BD31-4B8C-83A1-F6EECF244321}">
-                <p14:modId xmlns:p14="http://schemas.microsoft.com/office/powerpoint/2010/main" val="2295630294"/>
+                <p14:modId xmlns:p14="http://schemas.microsoft.com/office/powerpoint/2010/main" val="2782988865"/>
               </p:ext>
             </p:extLst>
           </p:nvPr>
@@ -8542,7 +8862,9 @@
         <a:graphic>
           <a:graphicData uri="http://schemas.openxmlformats.org/drawingml/2006/table">
             <a:tbl>
-              <a:tblPr/>
+              <a:tblPr>
+                <a:tableStyleId>{616DA210-FB5B-4158-B5E0-FEB733F419BA}</a:tableStyleId>
+              </a:tblPr>
               <a:tblGrid>
                 <a:gridCol w="2628900">
                   <a:extLst>
@@ -8579,6 +8901,7 @@
                     <a:bodyPr/>
                     <a:lstStyle/>
                     <a:p>
+                      <a:pPr algn="ctr"/>
                       <a:r>
                         <a:rPr lang="en-US"/>
                         <a:t>Item</a:t>
@@ -8586,19 +8909,11 @@
                     </a:p>
                   </a:txBody>
                   <a:tcPr anchor="ctr">
-                    <a:lnL>
-                      <a:noFill/>
-                    </a:lnL>
-                    <a:lnR>
-                      <a:noFill/>
-                    </a:lnR>
-                    <a:lnT>
-                      <a:noFill/>
-                    </a:lnT>
-                    <a:lnB>
-                      <a:noFill/>
-                    </a:lnB>
-                    <a:noFill/>
+                    <a:solidFill>
+                      <a:schemeClr val="bg1">
+                        <a:lumMod val="85000"/>
+                      </a:schemeClr>
+                    </a:solidFill>
                   </a:tcPr>
                 </a:tc>
                 <a:tc>
@@ -8606,6 +8921,7 @@
                     <a:bodyPr/>
                     <a:lstStyle/>
                     <a:p>
+                      <a:pPr algn="ctr"/>
                       <a:r>
                         <a:rPr lang="en-US"/>
                         <a:t>Count</a:t>
@@ -8613,19 +8929,11 @@
                     </a:p>
                   </a:txBody>
                   <a:tcPr anchor="ctr">
-                    <a:lnL>
-                      <a:noFill/>
-                    </a:lnL>
-                    <a:lnR>
-                      <a:noFill/>
-                    </a:lnR>
-                    <a:lnT>
-                      <a:noFill/>
-                    </a:lnT>
-                    <a:lnB>
-                      <a:noFill/>
-                    </a:lnB>
-                    <a:noFill/>
+                    <a:solidFill>
+                      <a:schemeClr val="bg1">
+                        <a:lumMod val="85000"/>
+                      </a:schemeClr>
+                    </a:solidFill>
                   </a:tcPr>
                 </a:tc>
                 <a:tc>
@@ -8633,26 +8941,19 @@
                     <a:bodyPr/>
                     <a:lstStyle/>
                     <a:p>
+                      <a:pPr algn="ctr"/>
                       <a:r>
-                        <a:rPr lang="en-US"/>
+                        <a:rPr lang="en-US" dirty="0"/>
                         <a:t>Support</a:t>
                       </a:r>
                     </a:p>
                   </a:txBody>
                   <a:tcPr anchor="ctr">
-                    <a:lnL>
-                      <a:noFill/>
-                    </a:lnL>
-                    <a:lnR>
-                      <a:noFill/>
-                    </a:lnR>
-                    <a:lnT>
-                      <a:noFill/>
-                    </a:lnT>
-                    <a:lnB>
-                      <a:noFill/>
-                    </a:lnB>
-                    <a:noFill/>
+                    <a:solidFill>
+                      <a:schemeClr val="bg1">
+                        <a:lumMod val="85000"/>
+                      </a:schemeClr>
+                    </a:solidFill>
                   </a:tcPr>
                 </a:tc>
                 <a:tc>
@@ -8660,26 +8961,19 @@
                     <a:bodyPr/>
                     <a:lstStyle/>
                     <a:p>
+                      <a:pPr algn="ctr"/>
                       <a:r>
-                        <a:rPr lang="en-US"/>
+                        <a:rPr lang="en-US" dirty="0"/>
                         <a:t>Status</a:t>
                       </a:r>
                     </a:p>
                   </a:txBody>
                   <a:tcPr anchor="ctr">
-                    <a:lnL>
-                      <a:noFill/>
-                    </a:lnL>
-                    <a:lnR>
-                      <a:noFill/>
-                    </a:lnR>
-                    <a:lnT>
-                      <a:noFill/>
-                    </a:lnT>
-                    <a:lnB>
-                      <a:noFill/>
-                    </a:lnB>
-                    <a:noFill/>
+                    <a:solidFill>
+                      <a:schemeClr val="bg1">
+                        <a:lumMod val="85000"/>
+                      </a:schemeClr>
+                    </a:solidFill>
                   </a:tcPr>
                 </a:tc>
                 <a:extLst>
@@ -8700,21 +8994,7 @@
                       </a:r>
                     </a:p>
                   </a:txBody>
-                  <a:tcPr anchor="ctr">
-                    <a:lnL>
-                      <a:noFill/>
-                    </a:lnL>
-                    <a:lnR>
-                      <a:noFill/>
-                    </a:lnR>
-                    <a:lnT>
-                      <a:noFill/>
-                    </a:lnT>
-                    <a:lnB>
-                      <a:noFill/>
-                    </a:lnB>
-                    <a:noFill/>
-                  </a:tcPr>
+                  <a:tcPr anchor="ctr"/>
                 </a:tc>
                 <a:tc>
                   <a:txBody>
@@ -8727,21 +9007,7 @@
                       </a:r>
                     </a:p>
                   </a:txBody>
-                  <a:tcPr anchor="ctr">
-                    <a:lnL>
-                      <a:noFill/>
-                    </a:lnL>
-                    <a:lnR>
-                      <a:noFill/>
-                    </a:lnR>
-                    <a:lnT>
-                      <a:noFill/>
-                    </a:lnT>
-                    <a:lnB>
-                      <a:noFill/>
-                    </a:lnB>
-                    <a:noFill/>
-                  </a:tcPr>
+                  <a:tcPr anchor="ctr"/>
                 </a:tc>
                 <a:tc>
                   <a:txBody>
@@ -8754,21 +9020,7 @@
                       </a:r>
                     </a:p>
                   </a:txBody>
-                  <a:tcPr anchor="ctr">
-                    <a:lnL>
-                      <a:noFill/>
-                    </a:lnL>
-                    <a:lnR>
-                      <a:noFill/>
-                    </a:lnR>
-                    <a:lnT>
-                      <a:noFill/>
-                    </a:lnT>
-                    <a:lnB>
-                      <a:noFill/>
-                    </a:lnB>
-                    <a:noFill/>
-                  </a:tcPr>
+                  <a:tcPr anchor="ctr"/>
                 </a:tc>
                 <a:tc>
                   <a:txBody>
@@ -8781,21 +9033,7 @@
                       </a:r>
                     </a:p>
                   </a:txBody>
-                  <a:tcPr anchor="ctr">
-                    <a:lnL>
-                      <a:noFill/>
-                    </a:lnL>
-                    <a:lnR>
-                      <a:noFill/>
-                    </a:lnR>
-                    <a:lnT>
-                      <a:noFill/>
-                    </a:lnT>
-                    <a:lnB>
-                      <a:noFill/>
-                    </a:lnB>
-                    <a:noFill/>
-                  </a:tcPr>
+                  <a:tcPr anchor="ctr"/>
                 </a:tc>
                 <a:extLst>
                   <a:ext uri="{0D108BD9-81ED-4DB2-BD59-A6C34878D82A}">
@@ -8815,21 +9053,7 @@
                       </a:r>
                     </a:p>
                   </a:txBody>
-                  <a:tcPr anchor="ctr">
-                    <a:lnL>
-                      <a:noFill/>
-                    </a:lnL>
-                    <a:lnR>
-                      <a:noFill/>
-                    </a:lnR>
-                    <a:lnT>
-                      <a:noFill/>
-                    </a:lnT>
-                    <a:lnB>
-                      <a:noFill/>
-                    </a:lnB>
-                    <a:noFill/>
-                  </a:tcPr>
+                  <a:tcPr anchor="ctr"/>
                 </a:tc>
                 <a:tc>
                   <a:txBody>
@@ -8837,26 +9061,12 @@
                     <a:lstStyle/>
                     <a:p>
                       <a:r>
-                        <a:rPr lang="en-US"/>
+                        <a:rPr lang="en-US" dirty="0"/>
                         <a:t>5</a:t>
                       </a:r>
                     </a:p>
                   </a:txBody>
-                  <a:tcPr anchor="ctr">
-                    <a:lnL>
-                      <a:noFill/>
-                    </a:lnL>
-                    <a:lnR>
-                      <a:noFill/>
-                    </a:lnR>
-                    <a:lnT>
-                      <a:noFill/>
-                    </a:lnT>
-                    <a:lnB>
-                      <a:noFill/>
-                    </a:lnB>
-                    <a:noFill/>
-                  </a:tcPr>
+                  <a:tcPr anchor="ctr"/>
                 </a:tc>
                 <a:tc>
                   <a:txBody>
@@ -8869,21 +9079,7 @@
                       </a:r>
                     </a:p>
                   </a:txBody>
-                  <a:tcPr anchor="ctr">
-                    <a:lnL>
-                      <a:noFill/>
-                    </a:lnL>
-                    <a:lnR>
-                      <a:noFill/>
-                    </a:lnR>
-                    <a:lnT>
-                      <a:noFill/>
-                    </a:lnT>
-                    <a:lnB>
-                      <a:noFill/>
-                    </a:lnB>
-                    <a:noFill/>
-                  </a:tcPr>
+                  <a:tcPr anchor="ctr"/>
                 </a:tc>
                 <a:tc>
                   <a:txBody>
@@ -8896,21 +9092,7 @@
                       </a:r>
                     </a:p>
                   </a:txBody>
-                  <a:tcPr anchor="ctr">
-                    <a:lnL>
-                      <a:noFill/>
-                    </a:lnL>
-                    <a:lnR>
-                      <a:noFill/>
-                    </a:lnR>
-                    <a:lnT>
-                      <a:noFill/>
-                    </a:lnT>
-                    <a:lnB>
-                      <a:noFill/>
-                    </a:lnB>
-                    <a:noFill/>
-                  </a:tcPr>
+                  <a:tcPr anchor="ctr"/>
                 </a:tc>
                 <a:extLst>
                   <a:ext uri="{0D108BD9-81ED-4DB2-BD59-A6C34878D82A}">
@@ -8930,21 +9112,7 @@
                       </a:r>
                     </a:p>
                   </a:txBody>
-                  <a:tcPr anchor="ctr">
-                    <a:lnL>
-                      <a:noFill/>
-                    </a:lnL>
-                    <a:lnR>
-                      <a:noFill/>
-                    </a:lnR>
-                    <a:lnT>
-                      <a:noFill/>
-                    </a:lnT>
-                    <a:lnB>
-                      <a:noFill/>
-                    </a:lnB>
-                    <a:noFill/>
-                  </a:tcPr>
+                  <a:tcPr anchor="ctr"/>
                 </a:tc>
                 <a:tc>
                   <a:txBody>
@@ -8957,21 +9125,7 @@
                       </a:r>
                     </a:p>
                   </a:txBody>
-                  <a:tcPr anchor="ctr">
-                    <a:lnL>
-                      <a:noFill/>
-                    </a:lnL>
-                    <a:lnR>
-                      <a:noFill/>
-                    </a:lnR>
-                    <a:lnT>
-                      <a:noFill/>
-                    </a:lnT>
-                    <a:lnB>
-                      <a:noFill/>
-                    </a:lnB>
-                    <a:noFill/>
-                  </a:tcPr>
+                  <a:tcPr anchor="ctr"/>
                 </a:tc>
                 <a:tc>
                   <a:txBody>
@@ -8984,21 +9138,7 @@
                       </a:r>
                     </a:p>
                   </a:txBody>
-                  <a:tcPr anchor="ctr">
-                    <a:lnL>
-                      <a:noFill/>
-                    </a:lnL>
-                    <a:lnR>
-                      <a:noFill/>
-                    </a:lnR>
-                    <a:lnT>
-                      <a:noFill/>
-                    </a:lnT>
-                    <a:lnB>
-                      <a:noFill/>
-                    </a:lnB>
-                    <a:noFill/>
-                  </a:tcPr>
+                  <a:tcPr anchor="ctr"/>
                 </a:tc>
                 <a:tc>
                   <a:txBody>
@@ -9011,21 +9151,7 @@
                       </a:r>
                     </a:p>
                   </a:txBody>
-                  <a:tcPr anchor="ctr">
-                    <a:lnL>
-                      <a:noFill/>
-                    </a:lnL>
-                    <a:lnR>
-                      <a:noFill/>
-                    </a:lnR>
-                    <a:lnT>
-                      <a:noFill/>
-                    </a:lnT>
-                    <a:lnB>
-                      <a:noFill/>
-                    </a:lnB>
-                    <a:noFill/>
-                  </a:tcPr>
+                  <a:tcPr anchor="ctr"/>
                 </a:tc>
                 <a:extLst>
                   <a:ext uri="{0D108BD9-81ED-4DB2-BD59-A6C34878D82A}">
@@ -9045,21 +9171,7 @@
                       </a:r>
                     </a:p>
                   </a:txBody>
-                  <a:tcPr anchor="ctr">
-                    <a:lnL>
-                      <a:noFill/>
-                    </a:lnL>
-                    <a:lnR>
-                      <a:noFill/>
-                    </a:lnR>
-                    <a:lnT>
-                      <a:noFill/>
-                    </a:lnT>
-                    <a:lnB>
-                      <a:noFill/>
-                    </a:lnB>
-                    <a:noFill/>
-                  </a:tcPr>
+                  <a:tcPr anchor="ctr"/>
                 </a:tc>
                 <a:tc>
                   <a:txBody>
@@ -9072,21 +9184,7 @@
                       </a:r>
                     </a:p>
                   </a:txBody>
-                  <a:tcPr anchor="ctr">
-                    <a:lnL>
-                      <a:noFill/>
-                    </a:lnL>
-                    <a:lnR>
-                      <a:noFill/>
-                    </a:lnR>
-                    <a:lnT>
-                      <a:noFill/>
-                    </a:lnT>
-                    <a:lnB>
-                      <a:noFill/>
-                    </a:lnB>
-                    <a:noFill/>
-                  </a:tcPr>
+                  <a:tcPr anchor="ctr"/>
                 </a:tc>
                 <a:tc>
                   <a:txBody>
@@ -9099,21 +9197,7 @@
                       </a:r>
                     </a:p>
                   </a:txBody>
-                  <a:tcPr anchor="ctr">
-                    <a:lnL>
-                      <a:noFill/>
-                    </a:lnL>
-                    <a:lnR>
-                      <a:noFill/>
-                    </a:lnR>
-                    <a:lnT>
-                      <a:noFill/>
-                    </a:lnT>
-                    <a:lnB>
-                      <a:noFill/>
-                    </a:lnB>
-                    <a:noFill/>
-                  </a:tcPr>
+                  <a:tcPr anchor="ctr"/>
                 </a:tc>
                 <a:tc>
                   <a:txBody>
@@ -9126,21 +9210,7 @@
                       </a:r>
                     </a:p>
                   </a:txBody>
-                  <a:tcPr anchor="ctr">
-                    <a:lnL>
-                      <a:noFill/>
-                    </a:lnL>
-                    <a:lnR>
-                      <a:noFill/>
-                    </a:lnR>
-                    <a:lnT>
-                      <a:noFill/>
-                    </a:lnT>
-                    <a:lnB>
-                      <a:noFill/>
-                    </a:lnB>
-                    <a:noFill/>
-                  </a:tcPr>
+                  <a:tcPr anchor="ctr"/>
                 </a:tc>
                 <a:extLst>
                   <a:ext uri="{0D108BD9-81ED-4DB2-BD59-A6C34878D82A}">
@@ -9160,21 +9230,7 @@
                       </a:r>
                     </a:p>
                   </a:txBody>
-                  <a:tcPr anchor="ctr">
-                    <a:lnL>
-                      <a:noFill/>
-                    </a:lnL>
-                    <a:lnR>
-                      <a:noFill/>
-                    </a:lnR>
-                    <a:lnT>
-                      <a:noFill/>
-                    </a:lnT>
-                    <a:lnB>
-                      <a:noFill/>
-                    </a:lnB>
-                    <a:noFill/>
-                  </a:tcPr>
+                  <a:tcPr anchor="ctr"/>
                 </a:tc>
                 <a:tc>
                   <a:txBody>
@@ -9187,21 +9243,7 @@
                       </a:r>
                     </a:p>
                   </a:txBody>
-                  <a:tcPr anchor="ctr">
-                    <a:lnL>
-                      <a:noFill/>
-                    </a:lnL>
-                    <a:lnR>
-                      <a:noFill/>
-                    </a:lnR>
-                    <a:lnT>
-                      <a:noFill/>
-                    </a:lnT>
-                    <a:lnB>
-                      <a:noFill/>
-                    </a:lnB>
-                    <a:noFill/>
-                  </a:tcPr>
+                  <a:tcPr anchor="ctr"/>
                 </a:tc>
                 <a:tc>
                   <a:txBody>
@@ -9214,21 +9256,7 @@
                       </a:r>
                     </a:p>
                   </a:txBody>
-                  <a:tcPr anchor="ctr">
-                    <a:lnL>
-                      <a:noFill/>
-                    </a:lnL>
-                    <a:lnR>
-                      <a:noFill/>
-                    </a:lnR>
-                    <a:lnT>
-                      <a:noFill/>
-                    </a:lnT>
-                    <a:lnB>
-                      <a:noFill/>
-                    </a:lnB>
-                    <a:noFill/>
-                  </a:tcPr>
+                  <a:tcPr anchor="ctr"/>
                 </a:tc>
                 <a:tc>
                   <a:txBody>
@@ -9241,21 +9269,7 @@
                       </a:r>
                     </a:p>
                   </a:txBody>
-                  <a:tcPr anchor="ctr">
-                    <a:lnL>
-                      <a:noFill/>
-                    </a:lnL>
-                    <a:lnR>
-                      <a:noFill/>
-                    </a:lnR>
-                    <a:lnT>
-                      <a:noFill/>
-                    </a:lnT>
-                    <a:lnB>
-                      <a:noFill/>
-                    </a:lnB>
-                    <a:noFill/>
-                  </a:tcPr>
+                  <a:tcPr anchor="ctr"/>
                 </a:tc>
                 <a:extLst>
                   <a:ext uri="{0D108BD9-81ED-4DB2-BD59-A6C34878D82A}">
@@ -9275,21 +9289,7 @@
                       </a:r>
                     </a:p>
                   </a:txBody>
-                  <a:tcPr anchor="ctr">
-                    <a:lnL>
-                      <a:noFill/>
-                    </a:lnL>
-                    <a:lnR>
-                      <a:noFill/>
-                    </a:lnR>
-                    <a:lnT>
-                      <a:noFill/>
-                    </a:lnT>
-                    <a:lnB>
-                      <a:noFill/>
-                    </a:lnB>
-                    <a:noFill/>
-                  </a:tcPr>
+                  <a:tcPr anchor="ctr"/>
                 </a:tc>
                 <a:tc>
                   <a:txBody>
@@ -9302,21 +9302,7 @@
                       </a:r>
                     </a:p>
                   </a:txBody>
-                  <a:tcPr anchor="ctr">
-                    <a:lnL>
-                      <a:noFill/>
-                    </a:lnL>
-                    <a:lnR>
-                      <a:noFill/>
-                    </a:lnR>
-                    <a:lnT>
-                      <a:noFill/>
-                    </a:lnT>
-                    <a:lnB>
-                      <a:noFill/>
-                    </a:lnB>
-                    <a:noFill/>
-                  </a:tcPr>
+                  <a:tcPr anchor="ctr"/>
                 </a:tc>
                 <a:tc>
                   <a:txBody>
@@ -9329,21 +9315,7 @@
                       </a:r>
                     </a:p>
                   </a:txBody>
-                  <a:tcPr anchor="ctr">
-                    <a:lnL>
-                      <a:noFill/>
-                    </a:lnL>
-                    <a:lnR>
-                      <a:noFill/>
-                    </a:lnR>
-                    <a:lnT>
-                      <a:noFill/>
-                    </a:lnT>
-                    <a:lnB>
-                      <a:noFill/>
-                    </a:lnB>
-                    <a:noFill/>
-                  </a:tcPr>
+                  <a:tcPr anchor="ctr"/>
                 </a:tc>
                 <a:tc>
                   <a:txBody>
@@ -9356,21 +9328,7 @@
                       </a:r>
                     </a:p>
                   </a:txBody>
-                  <a:tcPr anchor="ctr">
-                    <a:lnL>
-                      <a:noFill/>
-                    </a:lnL>
-                    <a:lnR>
-                      <a:noFill/>
-                    </a:lnR>
-                    <a:lnT>
-                      <a:noFill/>
-                    </a:lnT>
-                    <a:lnB>
-                      <a:noFill/>
-                    </a:lnB>
-                    <a:noFill/>
-                  </a:tcPr>
+                  <a:tcPr anchor="ctr"/>
                 </a:tc>
                 <a:extLst>
                   <a:ext uri="{0D108BD9-81ED-4DB2-BD59-A6C34878D82A}">
@@ -9449,7 +9407,7 @@
 </p:sld>
 </file>
 
-<file path=ppt/slides/slide16.xml><?xml version="1.0" encoding="utf-8"?>
+<file path=ppt/slides/slide18.xml><?xml version="1.0" encoding="utf-8"?>
 <p:sld xmlns:a="http://schemas.openxmlformats.org/drawingml/2006/main" xmlns:r="http://schemas.openxmlformats.org/officeDocument/2006/relationships" xmlns:p="http://schemas.openxmlformats.org/presentationml/2006/main">
   <p:cSld>
     <p:spTree>
@@ -9573,7 +9531,7 @@
           <p:nvPr>
             <p:extLst>
               <p:ext uri="{D42A27DB-BD31-4B8C-83A1-F6EECF244321}">
-                <p14:modId xmlns:p14="http://schemas.microsoft.com/office/powerpoint/2010/main" val="4274573799"/>
+                <p14:modId xmlns:p14="http://schemas.microsoft.com/office/powerpoint/2010/main" val="272596334"/>
               </p:ext>
             </p:extLst>
           </p:nvPr>
@@ -9638,7 +9596,13 @@
                       </a:r>
                     </a:p>
                   </a:txBody>
-                  <a:tcPr marL="67990" marR="67990" marT="33995" marB="33995" anchor="ctr"/>
+                  <a:tcPr marL="67990" marR="67990" marT="33995" marB="33995" anchor="ctr">
+                    <a:solidFill>
+                      <a:schemeClr val="bg1">
+                        <a:lumMod val="85000"/>
+                      </a:schemeClr>
+                    </a:solidFill>
+                  </a:tcPr>
                 </a:tc>
                 <a:tc>
                   <a:txBody>
@@ -9652,7 +9616,13 @@
                       </a:r>
                     </a:p>
                   </a:txBody>
-                  <a:tcPr marL="67990" marR="67990" marT="33995" marB="33995" anchor="ctr"/>
+                  <a:tcPr marL="67990" marR="67990" marT="33995" marB="33995" anchor="ctr">
+                    <a:solidFill>
+                      <a:schemeClr val="bg1">
+                        <a:lumMod val="85000"/>
+                      </a:schemeClr>
+                    </a:solidFill>
+                  </a:tcPr>
                 </a:tc>
                 <a:tc>
                   <a:txBody>
@@ -9666,7 +9636,13 @@
                       </a:r>
                     </a:p>
                   </a:txBody>
-                  <a:tcPr marL="67990" marR="67990" marT="33995" marB="33995" anchor="ctr"/>
+                  <a:tcPr marL="67990" marR="67990" marT="33995" marB="33995" anchor="ctr">
+                    <a:solidFill>
+                      <a:schemeClr val="bg1">
+                        <a:lumMod val="85000"/>
+                      </a:schemeClr>
+                    </a:solidFill>
+                  </a:tcPr>
                 </a:tc>
                 <a:tc>
                   <a:txBody>
@@ -9680,7 +9656,13 @@
                       </a:r>
                     </a:p>
                   </a:txBody>
-                  <a:tcPr marL="67990" marR="67990" marT="33995" marB="33995" anchor="ctr"/>
+                  <a:tcPr marL="67990" marR="67990" marT="33995" marB="33995" anchor="ctr">
+                    <a:solidFill>
+                      <a:schemeClr val="bg1">
+                        <a:lumMod val="85000"/>
+                      </a:schemeClr>
+                    </a:solidFill>
+                  </a:tcPr>
                 </a:tc>
                 <a:tc>
                   <a:txBody>
@@ -9694,7 +9676,13 @@
                       </a:r>
                     </a:p>
                   </a:txBody>
-                  <a:tcPr marL="67990" marR="67990" marT="33995" marB="33995" anchor="ctr"/>
+                  <a:tcPr marL="67990" marR="67990" marT="33995" marB="33995" anchor="ctr">
+                    <a:solidFill>
+                      <a:schemeClr val="bg1">
+                        <a:lumMod val="85000"/>
+                      </a:schemeClr>
+                    </a:solidFill>
+                  </a:tcPr>
                 </a:tc>
                 <a:extLst>
                   <a:ext uri="{0D108BD9-81ED-4DB2-BD59-A6C34878D82A}">
@@ -10799,7 +10787,7 @@
 </p:sld>
 </file>
 
-<file path=ppt/slides/slide17.xml><?xml version="1.0" encoding="utf-8"?>
+<file path=ppt/slides/slide19.xml><?xml version="1.0" encoding="utf-8"?>
 <p:sld xmlns:a="http://schemas.openxmlformats.org/drawingml/2006/main" xmlns:r="http://schemas.openxmlformats.org/officeDocument/2006/relationships" xmlns:p="http://schemas.openxmlformats.org/presentationml/2006/main">
   <p:cSld>
     <p:spTree>
@@ -10870,21 +10858,23 @@
         </p:nvSpPr>
         <p:spPr/>
         <p:txBody>
-          <a:bodyPr/>
+          <a:bodyPr>
+            <a:normAutofit/>
+          </a:bodyPr>
           <a:lstStyle/>
           <a:p>
             <a:pPr marL="0" indent="0">
               <a:buNone/>
             </a:pPr>
             <a:r>
-              <a:rPr lang="en-US" b="1" dirty="0"/>
+              <a:rPr lang="en-US" sz="2000" b="1" dirty="0"/>
               <a:t>L₂ (Frequent 2-itemsets)</a:t>
             </a:r>
           </a:p>
           <a:p>
             <a:pPr lvl="1"/>
             <a:r>
-              <a:rPr lang="en-US" dirty="0"/>
+              <a:rPr lang="en-US" sz="1800" dirty="0"/>
               <a:t>{Bread, Milk} - 40% support {Bread, Butter} - 40% support {Bread, Cheese} - 30% support {Bread, Eggs} - 30% support {Milk, Butter} - 30% support {Milk, Cheese} - 40% support {Butter, Cheese} - 40% support {Cheese, Yogurt} - 40% support</a:t>
             </a:r>
           </a:p>
@@ -10893,42 +10883,30 @@
               <a:buNone/>
             </a:pPr>
             <a:r>
-              <a:rPr lang="en-US" b="1" dirty="0"/>
+              <a:rPr lang="en-US" sz="2000" b="1" dirty="0"/>
               <a:t>Key Observations</a:t>
             </a:r>
           </a:p>
           <a:p>
             <a:r>
-              <a:rPr lang="en-US" b="1" dirty="0"/>
-              <a:t>8 frequent pairs</a:t>
-            </a:r>
-            <a:r>
-              <a:rPr lang="en-US" dirty="0"/>
-              <a:t> out of 15 possible</a:t>
-            </a:r>
-          </a:p>
-          <a:p>
-            <a:r>
-              <a:rPr lang="en-US" b="1" dirty="0"/>
-              <a:t>{Bread, Yogurt}</a:t>
-            </a:r>
-            <a:r>
-              <a:rPr lang="en-US" dirty="0"/>
-              <a:t> has 0% support - strong negative correlation</a:t>
-            </a:r>
-          </a:p>
-          <a:p>
-            <a:r>
-              <a:rPr lang="en-US" b="1" dirty="0"/>
-              <a:t>{Butter, Cheese}</a:t>
-            </a:r>
-            <a:r>
-              <a:rPr lang="en-US" dirty="0"/>
-              <a:t> has highest support (40%) - good combination</a:t>
-            </a:r>
-          </a:p>
-          <a:p>
-            <a:endParaRPr lang="en-US" dirty="0"/>
+              <a:rPr lang="en-US" sz="2000" dirty="0"/>
+              <a:t>8 frequent pairs out of 15 possible</a:t>
+            </a:r>
+          </a:p>
+          <a:p>
+            <a:r>
+              <a:rPr lang="en-US" sz="2000" dirty="0"/>
+              <a:t>{Bread, Yogurt} has 0% support - strong negative correlation</a:t>
+            </a:r>
+          </a:p>
+          <a:p>
+            <a:r>
+              <a:rPr lang="en-US" sz="2000" dirty="0"/>
+              <a:t>{Butter, Cheese} has highest support (40%) - good combination</a:t>
+            </a:r>
+          </a:p>
+          <a:p>
+            <a:endParaRPr lang="en-US" sz="2000" dirty="0"/>
           </a:p>
         </p:txBody>
       </p:sp>
@@ -10945,7 +10923,221 @@
 </p:sld>
 </file>
 
-<file path=ppt/slides/slide18.xml><?xml version="1.0" encoding="utf-8"?>
+<file path=ppt/slides/slide2.xml><?xml version="1.0" encoding="utf-8"?>
+<p:sld xmlns:a="http://schemas.openxmlformats.org/drawingml/2006/main" xmlns:r="http://schemas.openxmlformats.org/officeDocument/2006/relationships" xmlns:p="http://schemas.openxmlformats.org/presentationml/2006/main">
+  <p:cSld>
+    <p:spTree>
+      <p:nvGrpSpPr>
+        <p:cNvPr id="1" name=""/>
+        <p:cNvGrpSpPr/>
+        <p:nvPr/>
+      </p:nvGrpSpPr>
+      <p:grpSpPr>
+        <a:xfrm>
+          <a:off x="0" y="0"/>
+          <a:ext cx="0" cy="0"/>
+          <a:chOff x="0" y="0"/>
+          <a:chExt cx="0" cy="0"/>
+        </a:xfrm>
+      </p:grpSpPr>
+      <p:sp>
+        <p:nvSpPr>
+          <p:cNvPr id="2" name="Title 1">
+            <a:extLst>
+              <a:ext uri="{FF2B5EF4-FFF2-40B4-BE49-F238E27FC236}">
+                <a16:creationId xmlns:a16="http://schemas.microsoft.com/office/drawing/2014/main" id="{CDF253DF-D172-4E49-1179-4EC354E7691A}"/>
+              </a:ext>
+            </a:extLst>
+          </p:cNvPr>
+          <p:cNvSpPr>
+            <a:spLocks noGrp="1"/>
+          </p:cNvSpPr>
+          <p:nvPr>
+            <p:ph type="title"/>
+          </p:nvPr>
+        </p:nvSpPr>
+        <p:spPr/>
+        <p:txBody>
+          <a:bodyPr>
+            <a:normAutofit/>
+          </a:bodyPr>
+          <a:lstStyle/>
+          <a:p>
+            <a:r>
+              <a:rPr lang="en-US" dirty="0"/>
+              <a:t>Introduction to Association Rule Mining</a:t>
+            </a:r>
+          </a:p>
+        </p:txBody>
+      </p:sp>
+      <p:sp>
+        <p:nvSpPr>
+          <p:cNvPr id="3" name="Content Placeholder 2">
+            <a:extLst>
+              <a:ext uri="{FF2B5EF4-FFF2-40B4-BE49-F238E27FC236}">
+                <a16:creationId xmlns:a16="http://schemas.microsoft.com/office/drawing/2014/main" id="{057CA1C0-0DAB-5276-3F82-291A0C687611}"/>
+              </a:ext>
+            </a:extLst>
+          </p:cNvPr>
+          <p:cNvSpPr>
+            <a:spLocks noGrp="1"/>
+          </p:cNvSpPr>
+          <p:nvPr>
+            <p:ph idx="1"/>
+          </p:nvPr>
+        </p:nvSpPr>
+        <p:spPr>
+          <a:xfrm>
+            <a:off x="838200" y="1706007"/>
+            <a:ext cx="5018903" cy="4991039"/>
+          </a:xfrm>
+        </p:spPr>
+        <p:txBody>
+          <a:bodyPr>
+            <a:normAutofit/>
+          </a:bodyPr>
+          <a:lstStyle/>
+          <a:p>
+            <a:pPr marL="0" indent="0">
+              <a:buNone/>
+            </a:pPr>
+            <a:r>
+              <a:rPr lang="en-US" b="1" dirty="0"/>
+              <a:t>What Is It?</a:t>
+            </a:r>
+            <a:br>
+              <a:rPr lang="en-US" dirty="0"/>
+            </a:br>
+            <a:r>
+              <a:rPr lang="en-US" dirty="0"/>
+              <a:t>Association Rule Mining is a data mining technique used to discover interesting relationships or patterns between variables in large datasets, typically in the form:</a:t>
+            </a:r>
+          </a:p>
+          <a:p>
+            <a:pPr marL="0" indent="0">
+              <a:buNone/>
+            </a:pPr>
+            <a:br>
+              <a:rPr lang="en-US" dirty="0"/>
+            </a:br>
+            <a:r>
+              <a:rPr lang="en-US" b="1" dirty="0"/>
+              <a:t>If A, then B</a:t>
+            </a:r>
+            <a:r>
+              <a:rPr lang="en-US" dirty="0"/>
+              <a:t> </a:t>
+            </a:r>
+          </a:p>
+          <a:p>
+            <a:pPr marL="0" indent="0">
+              <a:buNone/>
+            </a:pPr>
+            <a:r>
+              <a:rPr lang="en-US" dirty="0"/>
+              <a:t>e.g. </a:t>
+            </a:r>
+          </a:p>
+          <a:p>
+            <a:pPr marL="0" indent="0">
+              <a:buNone/>
+            </a:pPr>
+            <a:r>
+              <a:rPr lang="en-US" dirty="0"/>
+              <a:t>If {Milk}, then {Bread})</a:t>
+            </a:r>
+          </a:p>
+          <a:p>
+            <a:endParaRPr lang="en-US" dirty="0"/>
+          </a:p>
+        </p:txBody>
+      </p:sp>
+      <p:pic>
+        <p:nvPicPr>
+          <p:cNvPr id="9" name="Picture 8" descr="A shopping cart full of food&#10;&#10;AI-generated content may be incorrect.">
+            <a:extLst>
+              <a:ext uri="{FF2B5EF4-FFF2-40B4-BE49-F238E27FC236}">
+                <a16:creationId xmlns:a16="http://schemas.microsoft.com/office/drawing/2014/main" id="{2B463C3C-4817-5118-D1E1-65181B8D2C18}"/>
+              </a:ext>
+            </a:extLst>
+          </p:cNvPr>
+          <p:cNvPicPr>
+            <a:picLocks noChangeAspect="1"/>
+          </p:cNvPicPr>
+          <p:nvPr/>
+        </p:nvPicPr>
+        <p:blipFill>
+          <a:blip r:embed="rId2">
+            <a:extLst>
+              <a:ext uri="{28A0092B-C50C-407E-A947-70E740481C1C}">
+                <a14:useLocalDpi xmlns:a14="http://schemas.microsoft.com/office/drawing/2010/main" val="0"/>
+              </a:ext>
+            </a:extLst>
+          </a:blip>
+          <a:stretch>
+            <a:fillRect/>
+          </a:stretch>
+        </p:blipFill>
+        <p:spPr>
+          <a:xfrm>
+            <a:off x="8640608" y="1766133"/>
+            <a:ext cx="2713191" cy="2713191"/>
+          </a:xfrm>
+          <a:prstGeom prst="rect">
+            <a:avLst/>
+          </a:prstGeom>
+        </p:spPr>
+      </p:pic>
+      <p:pic>
+        <p:nvPicPr>
+          <p:cNvPr id="10" name="Picture 9" descr="A close-up of a paper&#10;&#10;AI-generated content may be incorrect.">
+            <a:extLst>
+              <a:ext uri="{FF2B5EF4-FFF2-40B4-BE49-F238E27FC236}">
+                <a16:creationId xmlns:a16="http://schemas.microsoft.com/office/drawing/2014/main" id="{FE62F33E-DC36-69B1-6BA4-3F72051C658C}"/>
+              </a:ext>
+            </a:extLst>
+          </p:cNvPr>
+          <p:cNvPicPr>
+            <a:picLocks noChangeAspect="1"/>
+          </p:cNvPicPr>
+          <p:nvPr/>
+        </p:nvPicPr>
+        <p:blipFill>
+          <a:blip r:embed="rId3">
+            <a:extLst>
+              <a:ext uri="{28A0092B-C50C-407E-A947-70E740481C1C}">
+                <a14:useLocalDpi xmlns:a14="http://schemas.microsoft.com/office/drawing/2010/main" val="0"/>
+              </a:ext>
+            </a:extLst>
+          </a:blip>
+          <a:stretch>
+            <a:fillRect/>
+          </a:stretch>
+        </p:blipFill>
+        <p:spPr>
+          <a:xfrm>
+            <a:off x="5889172" y="1729062"/>
+            <a:ext cx="2619047" cy="3133321"/>
+          </a:xfrm>
+          <a:prstGeom prst="rect">
+            <a:avLst/>
+          </a:prstGeom>
+        </p:spPr>
+      </p:pic>
+    </p:spTree>
+    <p:extLst>
+      <p:ext uri="{BB962C8B-B14F-4D97-AF65-F5344CB8AC3E}">
+        <p14:creationId xmlns:p14="http://schemas.microsoft.com/office/powerpoint/2010/main" val="1615891368"/>
+      </p:ext>
+    </p:extLst>
+  </p:cSld>
+  <p:clrMapOvr>
+    <a:masterClrMapping/>
+  </p:clrMapOvr>
+</p:sld>
+</file>
+
+<file path=ppt/slides/slide20.xml><?xml version="1.0" encoding="utf-8"?>
 <p:sld xmlns:a="http://schemas.openxmlformats.org/drawingml/2006/main" xmlns:r="http://schemas.openxmlformats.org/officeDocument/2006/relationships" xmlns:p="http://schemas.openxmlformats.org/presentationml/2006/main">
   <p:cSld>
     <p:spTree>
@@ -11068,15 +11260,7 @@
             </a:pPr>
             <a:r>
               <a:rPr lang="en-US" b="1" dirty="0"/>
-              <a:t>Step 2: Prune Candidates (Based on </a:t>
-            </a:r>
-            <a:r>
-              <a:rPr lang="en-US" b="1" dirty="0" err="1"/>
-              <a:t>Apriori</a:t>
-            </a:r>
-            <a:r>
-              <a:rPr lang="en-US" b="1" dirty="0"/>
-              <a:t> Property)</a:t>
+              <a:t>Step 2: Prune Candidates (Based on Apriori Property)</a:t>
             </a:r>
           </a:p>
           <a:p>
@@ -11164,7 +11348,7 @@
 </p:sld>
 </file>
 
-<file path=ppt/slides/slide19.xml><?xml version="1.0" encoding="utf-8"?>
+<file path=ppt/slides/slide21.xml><?xml version="1.0" encoding="utf-8"?>
 <p:sld xmlns:a="http://schemas.openxmlformats.org/drawingml/2006/main" xmlns:r="http://schemas.openxmlformats.org/officeDocument/2006/relationships" xmlns:p="http://schemas.openxmlformats.org/presentationml/2006/main">
   <p:cSld>
     <p:spTree>
@@ -11865,139 +12049,7 @@
 </p:sld>
 </file>
 
-<file path=ppt/slides/slide2.xml><?xml version="1.0" encoding="utf-8"?>
-<p:sld xmlns:a="http://schemas.openxmlformats.org/drawingml/2006/main" xmlns:r="http://schemas.openxmlformats.org/officeDocument/2006/relationships" xmlns:p="http://schemas.openxmlformats.org/presentationml/2006/main">
-  <p:cSld>
-    <p:spTree>
-      <p:nvGrpSpPr>
-        <p:cNvPr id="1" name=""/>
-        <p:cNvGrpSpPr/>
-        <p:nvPr/>
-      </p:nvGrpSpPr>
-      <p:grpSpPr>
-        <a:xfrm>
-          <a:off x="0" y="0"/>
-          <a:ext cx="0" cy="0"/>
-          <a:chOff x="0" y="0"/>
-          <a:chExt cx="0" cy="0"/>
-        </a:xfrm>
-      </p:grpSpPr>
-      <p:sp>
-        <p:nvSpPr>
-          <p:cNvPr id="2" name="Title 1">
-            <a:extLst>
-              <a:ext uri="{FF2B5EF4-FFF2-40B4-BE49-F238E27FC236}">
-                <a16:creationId xmlns:a16="http://schemas.microsoft.com/office/drawing/2014/main" id="{02779D2B-B071-27AF-98C9-C09B74A37AC9}"/>
-              </a:ext>
-            </a:extLst>
-          </p:cNvPr>
-          <p:cNvSpPr>
-            <a:spLocks noGrp="1"/>
-          </p:cNvSpPr>
-          <p:nvPr>
-            <p:ph type="title"/>
-          </p:nvPr>
-        </p:nvSpPr>
-        <p:spPr/>
-        <p:txBody>
-          <a:bodyPr>
-            <a:normAutofit/>
-          </a:bodyPr>
-          <a:lstStyle/>
-          <a:p>
-            <a:r>
-              <a:rPr lang="en-US" dirty="0"/>
-              <a:t>Learning Objectives</a:t>
-            </a:r>
-          </a:p>
-        </p:txBody>
-      </p:sp>
-      <p:sp>
-        <p:nvSpPr>
-          <p:cNvPr id="3" name="Content Placeholder 2">
-            <a:extLst>
-              <a:ext uri="{FF2B5EF4-FFF2-40B4-BE49-F238E27FC236}">
-                <a16:creationId xmlns:a16="http://schemas.microsoft.com/office/drawing/2014/main" id="{47117997-8174-92C7-7767-25A4F07C8AED}"/>
-              </a:ext>
-            </a:extLst>
-          </p:cNvPr>
-          <p:cNvSpPr>
-            <a:spLocks noGrp="1"/>
-          </p:cNvSpPr>
-          <p:nvPr>
-            <p:ph idx="1"/>
-          </p:nvPr>
-        </p:nvSpPr>
-        <p:spPr/>
-        <p:txBody>
-          <a:bodyPr/>
-          <a:lstStyle/>
-          <a:p>
-            <a:pPr marL="0" indent="0">
-              <a:buNone/>
-            </a:pPr>
-            <a:r>
-              <a:rPr lang="en-US" b="1" dirty="0"/>
-              <a:t>By the end of this lecture, you will:</a:t>
-            </a:r>
-          </a:p>
-          <a:p>
-            <a:r>
-              <a:rPr lang="en-US" dirty="0"/>
-              <a:t>Understand association rules and their real-world applications</a:t>
-            </a:r>
-          </a:p>
-          <a:p>
-            <a:r>
-              <a:rPr lang="en-US" dirty="0"/>
-              <a:t>Master key metrics: support, confidence, and lift</a:t>
-            </a:r>
-          </a:p>
-          <a:p>
-            <a:r>
-              <a:rPr lang="en-US" dirty="0"/>
-              <a:t>See how each metric helps filter and rank rules</a:t>
-            </a:r>
-          </a:p>
-          <a:p>
-            <a:r>
-              <a:rPr lang="en-US" dirty="0"/>
-              <a:t>Explain the </a:t>
-            </a:r>
-            <a:r>
-              <a:rPr lang="en-US" dirty="0" err="1"/>
-              <a:t>Apriori</a:t>
-            </a:r>
-            <a:r>
-              <a:rPr lang="en-US" dirty="0"/>
-              <a:t> algorithm step-by-step</a:t>
-            </a:r>
-          </a:p>
-          <a:p>
-            <a:r>
-              <a:rPr lang="en-US" dirty="0"/>
-              <a:t>Apply the algorithm to find actionable business insights</a:t>
-            </a:r>
-          </a:p>
-          <a:p>
-            <a:endParaRPr lang="en-US" dirty="0"/>
-          </a:p>
-        </p:txBody>
-      </p:sp>
-    </p:spTree>
-    <p:extLst>
-      <p:ext uri="{BB962C8B-B14F-4D97-AF65-F5344CB8AC3E}">
-        <p14:creationId xmlns:p14="http://schemas.microsoft.com/office/powerpoint/2010/main" val="3091730450"/>
-      </p:ext>
-    </p:extLst>
-  </p:cSld>
-  <p:clrMapOvr>
-    <a:masterClrMapping/>
-  </p:clrMapOvr>
-</p:sld>
-</file>
-
-<file path=ppt/slides/slide20.xml><?xml version="1.0" encoding="utf-8"?>
+<file path=ppt/slides/slide22.xml><?xml version="1.0" encoding="utf-8"?>
 <p:sld xmlns:a="http://schemas.openxmlformats.org/drawingml/2006/main" xmlns:r="http://schemas.openxmlformats.org/officeDocument/2006/relationships" xmlns:p="http://schemas.openxmlformats.org/presentationml/2006/main">
   <p:cSld>
     <p:spTree>
@@ -12092,7 +12144,7 @@
 </p:sld>
 </file>
 
-<file path=ppt/slides/slide21.xml><?xml version="1.0" encoding="utf-8"?>
+<file path=ppt/slides/slide23.xml><?xml version="1.0" encoding="utf-8"?>
 <p:sld xmlns:a="http://schemas.openxmlformats.org/drawingml/2006/main" xmlns:r="http://schemas.openxmlformats.org/officeDocument/2006/relationships" xmlns:p="http://schemas.openxmlformats.org/presentationml/2006/main">
   <p:cSld>
     <p:spTree>
@@ -12185,7 +12237,7 @@
 </p:sld>
 </file>
 
-<file path=ppt/slides/slide22.xml><?xml version="1.0" encoding="utf-8"?>
+<file path=ppt/slides/slide24.xml><?xml version="1.0" encoding="utf-8"?>
 <p:sld xmlns:a="http://schemas.openxmlformats.org/drawingml/2006/main" xmlns:r="http://schemas.openxmlformats.org/officeDocument/2006/relationships" xmlns:p="http://schemas.openxmlformats.org/presentationml/2006/main">
   <p:cSld>
     <p:spTree>
@@ -12401,7 +12453,7 @@
 </p:sld>
 </file>
 
-<file path=ppt/slides/slide23.xml><?xml version="1.0" encoding="utf-8"?>
+<file path=ppt/slides/slide25.xml><?xml version="1.0" encoding="utf-8"?>
 <p:sld xmlns:a="http://schemas.openxmlformats.org/drawingml/2006/main" xmlns:r="http://schemas.openxmlformats.org/officeDocument/2006/relationships" xmlns:p="http://schemas.openxmlformats.org/presentationml/2006/main">
   <p:cSld>
     <p:spTree>
@@ -12494,7 +12546,7 @@
 </p:sld>
 </file>
 
-<file path=ppt/slides/slide24.xml><?xml version="1.0" encoding="utf-8"?>
+<file path=ppt/slides/slide26.xml><?xml version="1.0" encoding="utf-8"?>
 <p:sld xmlns:a="http://schemas.openxmlformats.org/drawingml/2006/main" xmlns:r="http://schemas.openxmlformats.org/officeDocument/2006/relationships" xmlns:p="http://schemas.openxmlformats.org/presentationml/2006/main">
   <p:cSld>
     <p:spTree>
@@ -12663,15 +12715,7 @@
             </a:r>
             <a:r>
               <a:rPr lang="en-US" dirty="0"/>
-              <a:t> Distributed </a:t>
-            </a:r>
-            <a:r>
-              <a:rPr lang="en-US" dirty="0" err="1"/>
-              <a:t>Apriori</a:t>
-            </a:r>
-            <a:r>
-              <a:rPr lang="en-US" dirty="0"/>
-              <a:t> implementations</a:t>
+              <a:t> Distributed Apriori implementations</a:t>
             </a:r>
           </a:p>
           <a:p>
@@ -12712,7 +12756,7 @@
 </p:sld>
 </file>
 
-<file path=ppt/slides/slide25.xml><?xml version="1.0" encoding="utf-8"?>
+<file path=ppt/slides/slide27.xml><?xml version="1.0" encoding="utf-8"?>
 <p:sld xmlns:a="http://schemas.openxmlformats.org/drawingml/2006/main" xmlns:r="http://schemas.openxmlformats.org/officeDocument/2006/relationships" xmlns:p="http://schemas.openxmlformats.org/presentationml/2006/main">
   <p:cSld>
     <p:spTree>
@@ -12968,7 +13012,7 @@
 </p:sld>
 </file>
 
-<file path=ppt/slides/slide26.xml><?xml version="1.0" encoding="utf-8"?>
+<file path=ppt/slides/slide28.xml><?xml version="1.0" encoding="utf-8"?>
 <p:sld xmlns:a="http://schemas.openxmlformats.org/drawingml/2006/main" xmlns:r="http://schemas.openxmlformats.org/officeDocument/2006/relationships" xmlns:p="http://schemas.openxmlformats.org/presentationml/2006/main">
   <p:cSld>
     <p:spTree>
@@ -13103,12 +13147,8 @@
           </a:p>
           <a:p>
             <a:r>
-              <a:rPr lang="en-US" b="1" dirty="0" err="1"/>
-              <a:t>Apriori</a:t>
-            </a:r>
-            <a:r>
               <a:rPr lang="en-US" b="1" dirty="0"/>
-              <a:t> property</a:t>
+              <a:t>Apriori property</a:t>
             </a:r>
             <a:r>
               <a:rPr lang="en-US" dirty="0"/>
@@ -13231,7 +13271,7 @@
 </p:sld>
 </file>
 
-<file path=ppt/slides/slide27.xml><?xml version="1.0" encoding="utf-8"?>
+<file path=ppt/slides/slide29.xml><?xml version="1.0" encoding="utf-8"?>
 <p:sld xmlns:a="http://schemas.openxmlformats.org/drawingml/2006/main" xmlns:r="http://schemas.openxmlformats.org/officeDocument/2006/relationships" xmlns:p="http://schemas.openxmlformats.org/presentationml/2006/main">
   <p:cSld>
     <p:spTree>
@@ -13319,11 +13359,7 @@
           <a:p>
             <a:r>
               <a:rPr lang="en-US" b="1" dirty="0"/>
-              <a:t>Implement basic </a:t>
-            </a:r>
-            <a:r>
-              <a:rPr lang="en-US" b="1" dirty="0" err="1"/>
-              <a:t>Apriori</a:t>
+              <a:t>Implement basic Apriori</a:t>
             </a:r>
             <a:r>
               <a:rPr lang="en-US" dirty="0"/>
@@ -13565,7 +13601,7 @@
           <a:p>
             <a:r>
               <a:rPr lang="en-US" dirty="0"/>
-              <a:t>What Are We Actually Associating?</a:t>
+              <a:t>Real Life Use Cases</a:t>
             </a:r>
           </a:p>
         </p:txBody>
@@ -13589,22 +13625,13 @@
         <p:spPr/>
         <p:txBody>
           <a:bodyPr>
-            <a:normAutofit/>
+            <a:normAutofit fontScale="77500" lnSpcReduction="20000"/>
           </a:bodyPr>
           <a:lstStyle/>
           <a:p>
-            <a:pPr marL="0" indent="0">
-              <a:buNone/>
-            </a:pPr>
             <a:r>
               <a:rPr lang="en-US" b="1" dirty="0"/>
-              <a:t>Real-World Association Examples</a:t>
-            </a:r>
-          </a:p>
-          <a:p>
-            <a:r>
-              <a:rPr lang="en-US" b="1" dirty="0"/>
-              <a:t>Retail/E-commerce:</a:t>
+              <a:t>Retail:</a:t>
             </a:r>
             <a:endParaRPr lang="en-US" dirty="0"/>
           </a:p>
@@ -13616,7 +13643,121 @@
             </a:r>
             <a:r>
               <a:rPr lang="en-US" dirty="0"/>
-              <a:t> "Customers who buy butter also buy bread"</a:t>
+              <a:t> "Customers who buy Milk also buy Bread“</a:t>
+            </a:r>
+          </a:p>
+          <a:p>
+            <a:pPr lvl="1"/>
+            <a:r>
+              <a:rPr lang="en-US" altLang="en-US" sz="2000" b="1" dirty="0"/>
+              <a:t>Suggested Actions:</a:t>
+            </a:r>
+            <a:r>
+              <a:rPr lang="en-US" altLang="en-US" sz="2000" dirty="0"/>
+              <a:t> </a:t>
+            </a:r>
+          </a:p>
+          <a:p>
+            <a:pPr lvl="2"/>
+            <a:r>
+              <a:rPr lang="en-US" altLang="en-US" dirty="0"/>
+              <a:t>Place Milk close to Bread (in-store layout)</a:t>
+            </a:r>
+          </a:p>
+          <a:p>
+            <a:pPr lvl="2"/>
+            <a:r>
+              <a:rPr lang="en-US" altLang="en-US" dirty="0"/>
+              <a:t>Recommend Bread when Milk is added to cart (cross-sell)</a:t>
+            </a:r>
+          </a:p>
+          <a:p>
+            <a:pPr lvl="2"/>
+            <a:r>
+              <a:rPr lang="en-US" altLang="en-US" dirty="0"/>
+              <a:t>Offer Milk + Bread at a discounted price (bundle offer)</a:t>
+            </a:r>
+          </a:p>
+          <a:p>
+            <a:pPr lvl="1"/>
+            <a:r>
+              <a:rPr lang="en-US" altLang="en-US" b="1" dirty="0"/>
+              <a:t>Expected Results:</a:t>
+            </a:r>
+            <a:r>
+              <a:rPr lang="en-US" altLang="en-US" dirty="0"/>
+              <a:t> Increase in Bread sales.</a:t>
+            </a:r>
+          </a:p>
+          <a:p>
+            <a:r>
+              <a:rPr lang="en-US" altLang="en-US" b="1" dirty="0"/>
+              <a:t>E-commerce Recommendation:</a:t>
+            </a:r>
+            <a:endParaRPr lang="ar-JO" altLang="en-US" b="1" dirty="0"/>
+          </a:p>
+          <a:p>
+            <a:pPr lvl="1"/>
+            <a:r>
+              <a:rPr lang="en-US" b="1" dirty="0"/>
+              <a:t>Items ↔ Items:</a:t>
+            </a:r>
+            <a:r>
+              <a:rPr lang="en-US" dirty="0"/>
+              <a:t> “Customers who buy </a:t>
+            </a:r>
+            <a:r>
+              <a:rPr lang="en-US" altLang="en-US" sz="2000" dirty="0"/>
+              <a:t>iPhone also buy Phone Case</a:t>
+            </a:r>
+            <a:r>
+              <a:rPr lang="en-US" altLang="en-US" dirty="0"/>
+              <a:t>”</a:t>
+            </a:r>
+            <a:endParaRPr lang="ar-JO" altLang="en-US" sz="2000" dirty="0"/>
+          </a:p>
+          <a:p>
+            <a:pPr lvl="1"/>
+            <a:r>
+              <a:rPr lang="en-US" altLang="en-US" sz="2000" b="1" dirty="0"/>
+              <a:t>Action:</a:t>
+            </a:r>
+            <a:r>
+              <a:rPr lang="en-US" altLang="en-US" sz="2000" dirty="0"/>
+              <a:t> Auto-suggest phone cases during iPhone checkout </a:t>
+            </a:r>
+            <a:endParaRPr lang="ar-JO" altLang="en-US" sz="2000" dirty="0"/>
+          </a:p>
+          <a:p>
+            <a:pPr lvl="1"/>
+            <a:r>
+              <a:rPr lang="en-US" altLang="en-US" sz="2000" b="1" dirty="0"/>
+              <a:t>Expected Results:</a:t>
+            </a:r>
+            <a:r>
+              <a:rPr lang="en-US" altLang="en-US" sz="2000" dirty="0"/>
+              <a:t> Many iPhone buyers also purchase cases </a:t>
+            </a:r>
+            <a:endParaRPr lang="en-US" dirty="0"/>
+          </a:p>
+          <a:p>
+            <a:r>
+              <a:rPr lang="en-US" b="1" dirty="0"/>
+              <a:t>Healthcare:</a:t>
+            </a:r>
+            <a:endParaRPr lang="en-US" dirty="0"/>
+          </a:p>
+          <a:p>
+            <a:pPr marL="457200" lvl="1" indent="0">
+              <a:buNone/>
+            </a:pPr>
+            <a:r>
+              <a:rPr lang="en-US" b="1" dirty="0"/>
+              <a:t>Symptoms ↔ Diseases:</a:t>
+            </a:r>
+            <a:r>
+              <a:rPr lang="en-US" dirty="0"/>
+              <a:t> "Patients with fever and headache often have flu“</a:t>
             </a:r>
           </a:p>
           <a:p>
@@ -13627,29 +13768,35 @@
             </a:r>
             <a:r>
               <a:rPr lang="en-US" dirty="0"/>
-              <a:t> Product placement, cross-selling, bundle offers</a:t>
-            </a:r>
-          </a:p>
-          <a:p>
+              <a:t> Diagnosis support</a:t>
+            </a:r>
+          </a:p>
+          <a:p>
+            <a:pPr lvl="1"/>
             <a:r>
               <a:rPr lang="en-US" b="1" dirty="0"/>
-              <a:t>Healthcare:</a:t>
-            </a:r>
-            <a:endParaRPr lang="en-US" dirty="0"/>
+              <a:t>Action:</a:t>
+            </a:r>
+            <a:r>
+              <a:rPr lang="en-US" dirty="0"/>
+              <a:t> Flag patient records or prompt flu tests when both symptoms are present</a:t>
+            </a:r>
           </a:p>
           <a:p>
             <a:pPr lvl="1"/>
             <a:r>
               <a:rPr lang="en-US" b="1" dirty="0"/>
-              <a:t>Symptoms ↔ Diseases:</a:t>
-            </a:r>
-            <a:r>
-              <a:rPr lang="en-US" dirty="0"/>
-              <a:t> "Patients with fever and headache often have flu"</a:t>
-            </a:r>
-          </a:p>
-          <a:p>
-            <a:pPr lvl="1"/>
+              <a:t>Expected Results:</a:t>
+            </a:r>
+            <a:r>
+              <a:rPr lang="en-US" dirty="0"/>
+              <a:t> Faster diagnosis, better triage, improved patient outcomes</a:t>
+            </a:r>
+          </a:p>
+          <a:p>
+            <a:pPr marL="457200" lvl="1" indent="0">
+              <a:buNone/>
+            </a:pPr>
             <a:r>
               <a:rPr lang="en-US" b="1" dirty="0"/>
               <a:t>Drugs ↔ Side Effects:</a:t>
@@ -13667,66 +13814,30 @@
             </a:r>
             <a:r>
               <a:rPr lang="en-US" dirty="0"/>
-              <a:t> Diagnosis support, drug safety monitoring</a:t>
-            </a:r>
-          </a:p>
-          <a:p>
+              <a:t> Drug safety monitoring</a:t>
+            </a:r>
+          </a:p>
+          <a:p>
+            <a:pPr lvl="1"/>
             <a:r>
               <a:rPr lang="en-US" b="1" dirty="0"/>
-              <a:t>Web Analytics:</a:t>
-            </a:r>
-            <a:endParaRPr lang="en-US" dirty="0"/>
+              <a:t>Action:</a:t>
+            </a:r>
+            <a:r>
+              <a:rPr lang="en-US" dirty="0"/>
+              <a:t> Add nausea warnings and prescribe anti-nausea medication alongside</a:t>
+            </a:r>
           </a:p>
           <a:p>
             <a:pPr lvl="1"/>
             <a:r>
               <a:rPr lang="en-US" b="1" dirty="0"/>
-              <a:t>Pages ↔ Pages:</a:t>
-            </a:r>
-            <a:r>
-              <a:rPr lang="en-US" dirty="0"/>
-              <a:t> "Users who visit Product Page A also visit Product Page B"</a:t>
-            </a:r>
-          </a:p>
-          <a:p>
-            <a:pPr lvl="1"/>
-            <a:r>
-              <a:rPr lang="en-US" b="1" dirty="0"/>
-              <a:t>Actions ↔ Actions:</a:t>
-            </a:r>
-            <a:r>
-              <a:rPr lang="en-US" dirty="0"/>
-              <a:t> "Users who click 'Add to Cart' also click 'View Reviews'"</a:t>
-            </a:r>
-          </a:p>
-          <a:p>
-            <a:pPr lvl="1"/>
-            <a:r>
-              <a:rPr lang="en-US" b="1" dirty="0"/>
-              <a:t>Used for:</a:t>
-            </a:r>
-            <a:r>
-              <a:rPr lang="en-US" dirty="0"/>
-              <a:t> Website optimization, content recommendations</a:t>
-            </a:r>
-          </a:p>
-          <a:p>
-            <a:pPr marL="0" lvl="1" indent="0">
-              <a:buNone/>
-            </a:pPr>
-            <a:r>
-              <a:rPr lang="en-US" b="1" dirty="0"/>
-              <a:t>The Key Question:</a:t>
-            </a:r>
-            <a:r>
-              <a:rPr lang="en-US" dirty="0"/>
-              <a:t> </a:t>
-            </a:r>
-            <a:r>
-              <a:rPr lang="en-US" b="1" dirty="0"/>
-              <a:t>"When X happens, what else is likely to happen?"</a:t>
-            </a:r>
-            <a:endParaRPr lang="en-US" dirty="0"/>
+              <a:t>Expected Results:</a:t>
+            </a:r>
+            <a:r>
+              <a:rPr lang="en-US" dirty="0"/>
+              <a:t> Increased patient safety and compliance</a:t>
+            </a:r>
           </a:p>
           <a:p>
             <a:endParaRPr lang="en-US" dirty="0"/>
@@ -13751,13 +13862,7 @@
   <p:cSld>
     <p:spTree>
       <p:nvGrpSpPr>
-        <p:cNvPr id="1" name="">
-          <a:extLst>
-            <a:ext uri="{FF2B5EF4-FFF2-40B4-BE49-F238E27FC236}">
-              <a16:creationId xmlns:a16="http://schemas.microsoft.com/office/drawing/2014/main" id="{BF55326E-9942-34A1-4BC8-5FCD76B852C3}"/>
-            </a:ext>
-          </a:extLst>
-        </p:cNvPr>
+        <p:cNvPr id="1" name=""/>
         <p:cNvGrpSpPr/>
         <p:nvPr/>
       </p:nvGrpSpPr>
@@ -13774,7 +13879,7 @@
           <p:cNvPr id="2" name="Title 1">
             <a:extLst>
               <a:ext uri="{FF2B5EF4-FFF2-40B4-BE49-F238E27FC236}">
-                <a16:creationId xmlns:a16="http://schemas.microsoft.com/office/drawing/2014/main" id="{649BE8BB-7667-03ED-871D-1A09FFC8BDCC}"/>
+                <a16:creationId xmlns:a16="http://schemas.microsoft.com/office/drawing/2014/main" id="{099EFF2A-E4FB-E985-9516-7380C10C3A5C}"/>
               </a:ext>
             </a:extLst>
           </p:cNvPr>
@@ -13791,10 +13896,9 @@
           <a:lstStyle/>
           <a:p>
             <a:r>
-              <a:rPr lang="en-US" altLang="en-US" dirty="0"/>
-              <a:t>Why Association Rules Matter</a:t>
-            </a:r>
-            <a:endParaRPr lang="en-US" dirty="0"/>
+              <a:rPr lang="en-US" dirty="0"/>
+              <a:t>Real Life Use Cases</a:t>
+            </a:r>
           </a:p>
         </p:txBody>
       </p:sp>
@@ -13803,7 +13907,7 @@
           <p:cNvPr id="3" name="Content Placeholder 2">
             <a:extLst>
               <a:ext uri="{FF2B5EF4-FFF2-40B4-BE49-F238E27FC236}">
-                <a16:creationId xmlns:a16="http://schemas.microsoft.com/office/drawing/2014/main" id="{B4D50D09-1A60-3190-5579-2259B299C703}"/>
+                <a16:creationId xmlns:a16="http://schemas.microsoft.com/office/drawing/2014/main" id="{9F9BEA77-D725-A9DA-8D5E-654454000EAA}"/>
               </a:ext>
             </a:extLst>
           </p:cNvPr>
@@ -13816,276 +13920,95 @@
         </p:nvSpPr>
         <p:spPr/>
         <p:txBody>
-          <a:bodyPr>
-            <a:normAutofit/>
-          </a:bodyPr>
+          <a:bodyPr/>
           <a:lstStyle/>
           <a:p>
-            <a:pPr marL="0" lvl="0" indent="0" eaLnBrk="0" fontAlgn="base" hangingPunct="0">
-              <a:lnSpc>
-                <a:spcPct val="100000"/>
-              </a:lnSpc>
-              <a:spcBef>
-                <a:spcPct val="0"/>
-              </a:spcBef>
-              <a:spcAft>
-                <a:spcPct val="0"/>
-              </a:spcAft>
+            <a:pPr marL="0" indent="0">
               <a:buNone/>
             </a:pPr>
             <a:r>
-              <a:rPr lang="en-US" altLang="en-US" b="1" dirty="0"/>
-              <a:t>Business Impact Examples</a:t>
-            </a:r>
-          </a:p>
-          <a:p>
-            <a:pPr marL="0" lvl="0" indent="0" eaLnBrk="0" fontAlgn="base" hangingPunct="0">
-              <a:lnSpc>
-                <a:spcPct val="100000"/>
-              </a:lnSpc>
-              <a:spcBef>
-                <a:spcPct val="0"/>
-              </a:spcBef>
-              <a:spcAft>
-                <a:spcPct val="0"/>
-              </a:spcAft>
+              <a:rPr lang="en-US" b="1" dirty="0"/>
+              <a:t>Web Analytics:</a:t>
+            </a:r>
+            <a:endParaRPr lang="en-US" dirty="0"/>
+          </a:p>
+          <a:p>
+            <a:r>
+              <a:rPr lang="en-US" b="1" dirty="0"/>
+              <a:t>Pages ↔ Pages:</a:t>
+            </a:r>
+          </a:p>
+          <a:p>
+            <a:pPr lvl="1"/>
+            <a:r>
+              <a:rPr lang="en-US" dirty="0"/>
+              <a:t>"Users who visit Product Page A also visit Product Page B“</a:t>
+            </a:r>
+          </a:p>
+          <a:p>
+            <a:pPr lvl="1"/>
+            <a:r>
+              <a:rPr lang="en-US" b="1" dirty="0"/>
+              <a:t>Action:</a:t>
+            </a:r>
+            <a:r>
+              <a:rPr lang="en-US" dirty="0"/>
+              <a:t> Add cross-links or suggest Page B under “Customers also viewed”</a:t>
+            </a:r>
+          </a:p>
+          <a:p>
+            <a:pPr lvl="1"/>
+            <a:r>
+              <a:rPr lang="en-US" b="1" dirty="0"/>
+              <a:t>Expected Results:</a:t>
+            </a:r>
+            <a:r>
+              <a:rPr lang="en-US" dirty="0"/>
+              <a:t> Increased session duration and conversion rates</a:t>
+            </a:r>
+          </a:p>
+          <a:p>
+            <a:pPr marL="0" indent="0">
               <a:buNone/>
             </a:pPr>
             <a:r>
-              <a:rPr lang="en-US" altLang="en-US" b="1" dirty="0"/>
-              <a:t>Supermarket Chain Discovery:</a:t>
-            </a:r>
-            <a:endParaRPr lang="en-US" altLang="en-US" dirty="0"/>
-          </a:p>
-          <a:p>
-            <a:pPr eaLnBrk="0" fontAlgn="base" hangingPunct="0">
-              <a:lnSpc>
-                <a:spcPct val="100000"/>
-              </a:lnSpc>
-              <a:spcBef>
-                <a:spcPct val="0"/>
-              </a:spcBef>
-              <a:spcAft>
-                <a:spcPct val="0"/>
-              </a:spcAft>
-            </a:pPr>
-            <a:r>
-              <a:rPr lang="en-US" altLang="en-US" dirty="0"/>
-              <a:t>Rule: {Butter} → {Bread} (confidence: 65%, lift: 1.8) </a:t>
-            </a:r>
-          </a:p>
-          <a:p>
-            <a:pPr eaLnBrk="0" fontAlgn="base" hangingPunct="0">
-              <a:lnSpc>
-                <a:spcPct val="100000"/>
-              </a:lnSpc>
-              <a:spcBef>
-                <a:spcPct val="0"/>
-              </a:spcBef>
-              <a:spcAft>
-                <a:spcPct val="0"/>
-              </a:spcAft>
-            </a:pPr>
-            <a:r>
-              <a:rPr lang="en-US" altLang="en-US" b="1" dirty="0"/>
+              <a:rPr lang="en-US" b="1" dirty="0"/>
+              <a:t>Actions ↔ Actions:</a:t>
+            </a:r>
+          </a:p>
+          <a:p>
+            <a:pPr lvl="1"/>
+            <a:r>
+              <a:rPr lang="en-US" dirty="0"/>
+              <a:t>"Users who click 'Add to Cart' also click 'View Reviews’ </a:t>
+            </a:r>
+            <a:r>
+              <a:rPr lang="ar-JO" dirty="0"/>
+              <a:t>"</a:t>
+            </a:r>
+            <a:endParaRPr lang="en-US" dirty="0"/>
+          </a:p>
+          <a:p>
+            <a:pPr lvl="1"/>
+            <a:r>
+              <a:rPr lang="en-US" b="1" dirty="0"/>
               <a:t>Action:</a:t>
             </a:r>
             <a:r>
-              <a:rPr lang="en-US" altLang="en-US" dirty="0"/>
-              <a:t> Place Butter close to Bread</a:t>
-            </a:r>
-          </a:p>
-          <a:p>
-            <a:pPr eaLnBrk="0" fontAlgn="base" hangingPunct="0">
-              <a:lnSpc>
-                <a:spcPct val="100000"/>
-              </a:lnSpc>
-              <a:spcBef>
-                <a:spcPct val="0"/>
-              </a:spcBef>
-              <a:spcAft>
-                <a:spcPct val="0"/>
-              </a:spcAft>
-            </a:pPr>
-            <a:r>
-              <a:rPr lang="en-US" altLang="en-US" b="1" dirty="0"/>
-              <a:t>Result:</a:t>
-            </a:r>
-            <a:r>
-              <a:rPr lang="en-US" altLang="en-US" dirty="0"/>
-              <a:t> 25% increase in Butter sales on weekends </a:t>
-            </a:r>
-          </a:p>
-          <a:p>
-            <a:pPr marL="0" lvl="0" indent="0" eaLnBrk="0" fontAlgn="base" hangingPunct="0">
-              <a:lnSpc>
-                <a:spcPct val="100000"/>
-              </a:lnSpc>
-              <a:spcBef>
-                <a:spcPct val="0"/>
-              </a:spcBef>
-              <a:spcAft>
-                <a:spcPct val="0"/>
-              </a:spcAft>
-              <a:buNone/>
-            </a:pPr>
-            <a:r>
-              <a:rPr lang="en-US" altLang="en-US" b="1" dirty="0"/>
-              <a:t>E-commerce Recommendation:</a:t>
-            </a:r>
-            <a:endParaRPr lang="en-US" altLang="en-US" dirty="0"/>
-          </a:p>
-          <a:p>
-            <a:pPr eaLnBrk="0" fontAlgn="base" hangingPunct="0">
-              <a:lnSpc>
-                <a:spcPct val="100000"/>
-              </a:lnSpc>
-              <a:spcBef>
-                <a:spcPct val="0"/>
-              </a:spcBef>
-              <a:spcAft>
-                <a:spcPct val="0"/>
-              </a:spcAft>
-            </a:pPr>
-            <a:r>
-              <a:rPr lang="en-US" altLang="en-US" dirty="0"/>
-              <a:t>Rule: {iPhone} → {Phone Case} (confidence: 78%, lift: 2.1) </a:t>
-            </a:r>
-          </a:p>
-          <a:p>
-            <a:pPr eaLnBrk="0" fontAlgn="base" hangingPunct="0">
-              <a:lnSpc>
-                <a:spcPct val="100000"/>
-              </a:lnSpc>
-              <a:spcBef>
-                <a:spcPct val="0"/>
-              </a:spcBef>
-              <a:spcAft>
-                <a:spcPct val="0"/>
-              </a:spcAft>
-            </a:pPr>
-            <a:r>
-              <a:rPr lang="en-US" altLang="en-US" b="1" dirty="0"/>
-              <a:t>Action:</a:t>
-            </a:r>
-            <a:r>
-              <a:rPr lang="en-US" altLang="en-US" dirty="0"/>
-              <a:t> Auto-suggest phone cases during iPhone checkout </a:t>
-            </a:r>
-          </a:p>
-          <a:p>
-            <a:pPr eaLnBrk="0" fontAlgn="base" hangingPunct="0">
-              <a:lnSpc>
-                <a:spcPct val="100000"/>
-              </a:lnSpc>
-              <a:spcBef>
-                <a:spcPct val="0"/>
-              </a:spcBef>
-              <a:spcAft>
-                <a:spcPct val="0"/>
-              </a:spcAft>
-            </a:pPr>
-            <a:r>
-              <a:rPr lang="en-US" altLang="en-US" b="1" dirty="0"/>
-              <a:t>Result:</a:t>
-            </a:r>
-            <a:r>
-              <a:rPr lang="en-US" altLang="en-US" dirty="0"/>
-              <a:t> 40% of iPhone buyers also purchase cases </a:t>
-            </a:r>
-          </a:p>
-          <a:p>
-            <a:pPr marL="0" lvl="0" indent="0" eaLnBrk="0" fontAlgn="base" hangingPunct="0">
-              <a:lnSpc>
-                <a:spcPct val="100000"/>
-              </a:lnSpc>
-              <a:spcBef>
-                <a:spcPct val="0"/>
-              </a:spcBef>
-              <a:spcAft>
-                <a:spcPct val="0"/>
-              </a:spcAft>
-              <a:buNone/>
-            </a:pPr>
-            <a:r>
-              <a:rPr lang="en-US" altLang="en-US" b="1" dirty="0"/>
-              <a:t>Website Navigation:</a:t>
-            </a:r>
-            <a:endParaRPr lang="en-US" altLang="en-US" dirty="0"/>
-          </a:p>
-          <a:p>
-            <a:pPr eaLnBrk="0" fontAlgn="base" hangingPunct="0">
-              <a:lnSpc>
-                <a:spcPct val="100000"/>
-              </a:lnSpc>
-              <a:spcBef>
-                <a:spcPct val="0"/>
-              </a:spcBef>
-              <a:spcAft>
-                <a:spcPct val="0"/>
-              </a:spcAft>
-            </a:pPr>
-            <a:r>
-              <a:rPr lang="en-US" altLang="en-US" dirty="0"/>
-              <a:t>Rule: {View Pricing} → {Contact Sales} (confidence: 45%, lift: 3.2) </a:t>
-            </a:r>
-          </a:p>
-          <a:p>
-            <a:pPr eaLnBrk="0" fontAlgn="base" hangingPunct="0">
-              <a:lnSpc>
-                <a:spcPct val="100000"/>
-              </a:lnSpc>
-              <a:spcBef>
-                <a:spcPct val="0"/>
-              </a:spcBef>
-              <a:spcAft>
-                <a:spcPct val="0"/>
-              </a:spcAft>
-            </a:pPr>
-            <a:r>
-              <a:rPr lang="en-US" altLang="en-US" b="1" dirty="0"/>
-              <a:t>Action:</a:t>
-            </a:r>
-            <a:r>
-              <a:rPr lang="en-US" altLang="en-US" dirty="0"/>
-              <a:t> Add prominent "Contact Sales" button on pricing page </a:t>
-            </a:r>
-          </a:p>
-          <a:p>
-            <a:pPr eaLnBrk="0" fontAlgn="base" hangingPunct="0">
-              <a:lnSpc>
-                <a:spcPct val="100000"/>
-              </a:lnSpc>
-              <a:spcBef>
-                <a:spcPct val="0"/>
-              </a:spcBef>
-              <a:spcAft>
-                <a:spcPct val="0"/>
-              </a:spcAft>
-            </a:pPr>
-            <a:r>
-              <a:rPr lang="en-US" altLang="en-US" b="1" dirty="0"/>
-              <a:t>Result:</a:t>
-            </a:r>
-            <a:r>
-              <a:rPr lang="en-US" altLang="en-US" dirty="0"/>
-              <a:t> 60% increase in sales inquiries</a:t>
-            </a:r>
-          </a:p>
-          <a:p>
-            <a:pPr marL="0" lvl="0" indent="0" eaLnBrk="0" fontAlgn="base" hangingPunct="0">
-              <a:lnSpc>
-                <a:spcPct val="100000"/>
-              </a:lnSpc>
-              <a:spcBef>
-                <a:spcPct val="0"/>
-              </a:spcBef>
-              <a:spcAft>
-                <a:spcPct val="0"/>
-              </a:spcAft>
-              <a:buNone/>
-            </a:pPr>
-            <a:endParaRPr lang="en-US" altLang="en-US" dirty="0"/>
+              <a:rPr lang="en-US" dirty="0"/>
+              <a:t> Automatically scroll or highlight reviews after cart interaction</a:t>
+            </a:r>
+          </a:p>
+          <a:p>
+            <a:pPr lvl="1"/>
+            <a:r>
+              <a:rPr lang="en-US" b="1" dirty="0"/>
+              <a:t>Expected Results:</a:t>
+            </a:r>
+            <a:r>
+              <a:rPr lang="en-US" dirty="0"/>
+              <a:t> Higher purchase confidence, reduced cart abandonment</a:t>
+            </a:r>
           </a:p>
           <a:p>
             <a:endParaRPr lang="en-US" dirty="0"/>
@@ -14095,7 +14018,7 @@
     </p:spTree>
     <p:extLst>
       <p:ext uri="{BB962C8B-B14F-4D97-AF65-F5344CB8AC3E}">
-        <p14:creationId xmlns:p14="http://schemas.microsoft.com/office/powerpoint/2010/main" val="3181280278"/>
+        <p14:creationId xmlns:p14="http://schemas.microsoft.com/office/powerpoint/2010/main" val="536899377"/>
       </p:ext>
     </p:extLst>
   </p:cSld>
@@ -14156,432 +14079,6 @@
           </a:p>
         </p:txBody>
       </p:sp>
-      <p:graphicFrame>
-        <p:nvGraphicFramePr>
-          <p:cNvPr id="8" name="Content Placeholder 7">
-            <a:extLst>
-              <a:ext uri="{FF2B5EF4-FFF2-40B4-BE49-F238E27FC236}">
-                <a16:creationId xmlns:a16="http://schemas.microsoft.com/office/drawing/2014/main" id="{C6C90679-34C7-D309-8F12-3418E50E21D3}"/>
-              </a:ext>
-            </a:extLst>
-          </p:cNvPr>
-          <p:cNvGraphicFramePr>
-            <a:graphicFrameLocks noGrp="1"/>
-          </p:cNvGraphicFramePr>
-          <p:nvPr>
-            <p:ph idx="1"/>
-            <p:extLst>
-              <p:ext uri="{D42A27DB-BD31-4B8C-83A1-F6EECF244321}">
-                <p14:modId xmlns:p14="http://schemas.microsoft.com/office/powerpoint/2010/main" val="3236909309"/>
-              </p:ext>
-            </p:extLst>
-          </p:nvPr>
-        </p:nvGraphicFramePr>
-        <p:xfrm>
-          <a:off x="751703" y="3392957"/>
-          <a:ext cx="3807940" cy="3352800"/>
-        </p:xfrm>
-        <a:graphic>
-          <a:graphicData uri="http://schemas.openxmlformats.org/drawingml/2006/table">
-            <a:tbl>
-              <a:tblPr>
-                <a:tableStyleId>{616DA210-FB5B-4158-B5E0-FEB733F419BA}</a:tableStyleId>
-              </a:tblPr>
-              <a:tblGrid>
-                <a:gridCol w="1330741">
-                  <a:extLst>
-                    <a:ext uri="{9D8B030D-6E8A-4147-A177-3AD203B41FA5}">
-                      <a16:colId xmlns:a16="http://schemas.microsoft.com/office/drawing/2014/main" val="83576377"/>
-                    </a:ext>
-                  </a:extLst>
-                </a:gridCol>
-                <a:gridCol w="2477199">
-                  <a:extLst>
-                    <a:ext uri="{9D8B030D-6E8A-4147-A177-3AD203B41FA5}">
-                      <a16:colId xmlns:a16="http://schemas.microsoft.com/office/drawing/2014/main" val="62154499"/>
-                    </a:ext>
-                  </a:extLst>
-                </a:gridCol>
-              </a:tblGrid>
-              <a:tr h="265016">
-                <a:tc>
-                  <a:txBody>
-                    <a:bodyPr/>
-                    <a:lstStyle/>
-                    <a:p>
-                      <a:r>
-                        <a:rPr lang="en-US" sz="1400" dirty="0"/>
-                        <a:t>Transaction ID</a:t>
-                      </a:r>
-                    </a:p>
-                  </a:txBody>
-                  <a:tcPr anchor="ctr">
-                    <a:solidFill>
-                      <a:schemeClr val="bg1">
-                        <a:lumMod val="85000"/>
-                      </a:schemeClr>
-                    </a:solidFill>
-                  </a:tcPr>
-                </a:tc>
-                <a:tc>
-                  <a:txBody>
-                    <a:bodyPr/>
-                    <a:lstStyle/>
-                    <a:p>
-                      <a:r>
-                        <a:rPr lang="en-US" sz="1400" dirty="0"/>
-                        <a:t>Items Purchased</a:t>
-                      </a:r>
-                    </a:p>
-                  </a:txBody>
-                  <a:tcPr anchor="ctr">
-                    <a:solidFill>
-                      <a:schemeClr val="bg1">
-                        <a:lumMod val="85000"/>
-                      </a:schemeClr>
-                    </a:solidFill>
-                  </a:tcPr>
-                </a:tc>
-                <a:extLst>
-                  <a:ext uri="{0D108BD9-81ED-4DB2-BD59-A6C34878D82A}">
-                    <a16:rowId xmlns:a16="http://schemas.microsoft.com/office/drawing/2014/main" val="1673618146"/>
-                  </a:ext>
-                </a:extLst>
-              </a:tr>
-              <a:tr h="265016">
-                <a:tc>
-                  <a:txBody>
-                    <a:bodyPr/>
-                    <a:lstStyle/>
-                    <a:p>
-                      <a:r>
-                        <a:rPr lang="en-US" sz="1400"/>
-                        <a:t>T1</a:t>
-                      </a:r>
-                    </a:p>
-                  </a:txBody>
-                  <a:tcPr anchor="ctr"/>
-                </a:tc>
-                <a:tc>
-                  <a:txBody>
-                    <a:bodyPr/>
-                    <a:lstStyle/>
-                    <a:p>
-                      <a:r>
-                        <a:rPr lang="en-US" sz="1400" dirty="0"/>
-                        <a:t>{Bread, Milk, Eggs}</a:t>
-                      </a:r>
-                    </a:p>
-                  </a:txBody>
-                  <a:tcPr anchor="ctr"/>
-                </a:tc>
-                <a:extLst>
-                  <a:ext uri="{0D108BD9-81ED-4DB2-BD59-A6C34878D82A}">
-                    <a16:rowId xmlns:a16="http://schemas.microsoft.com/office/drawing/2014/main" val="2659284684"/>
-                  </a:ext>
-                </a:extLst>
-              </a:tr>
-              <a:tr h="265016">
-                <a:tc>
-                  <a:txBody>
-                    <a:bodyPr/>
-                    <a:lstStyle/>
-                    <a:p>
-                      <a:r>
-                        <a:rPr lang="en-US" sz="1400"/>
-                        <a:t>T2</a:t>
-                      </a:r>
-                    </a:p>
-                  </a:txBody>
-                  <a:tcPr anchor="ctr"/>
-                </a:tc>
-                <a:tc>
-                  <a:txBody>
-                    <a:bodyPr/>
-                    <a:lstStyle/>
-                    <a:p>
-                      <a:r>
-                        <a:rPr lang="en-US" sz="1400" dirty="0"/>
-                        <a:t>{Bread, Butter, Cheese}</a:t>
-                      </a:r>
-                    </a:p>
-                  </a:txBody>
-                  <a:tcPr anchor="ctr"/>
-                </a:tc>
-                <a:extLst>
-                  <a:ext uri="{0D108BD9-81ED-4DB2-BD59-A6C34878D82A}">
-                    <a16:rowId xmlns:a16="http://schemas.microsoft.com/office/drawing/2014/main" val="3004706385"/>
-                  </a:ext>
-                </a:extLst>
-              </a:tr>
-              <a:tr h="265016">
-                <a:tc>
-                  <a:txBody>
-                    <a:bodyPr/>
-                    <a:lstStyle/>
-                    <a:p>
-                      <a:r>
-                        <a:rPr lang="en-US" sz="1400"/>
-                        <a:t>T3</a:t>
-                      </a:r>
-                    </a:p>
-                  </a:txBody>
-                  <a:tcPr anchor="ctr"/>
-                </a:tc>
-                <a:tc>
-                  <a:txBody>
-                    <a:bodyPr/>
-                    <a:lstStyle/>
-                    <a:p>
-                      <a:r>
-                        <a:rPr lang="en-US" sz="1400"/>
-                        <a:t>{Milk, Butter, Cheese, Yogurt}</a:t>
-                      </a:r>
-                    </a:p>
-                  </a:txBody>
-                  <a:tcPr anchor="ctr"/>
-                </a:tc>
-                <a:extLst>
-                  <a:ext uri="{0D108BD9-81ED-4DB2-BD59-A6C34878D82A}">
-                    <a16:rowId xmlns:a16="http://schemas.microsoft.com/office/drawing/2014/main" val="4250415316"/>
-                  </a:ext>
-                </a:extLst>
-              </a:tr>
-              <a:tr h="265016">
-                <a:tc>
-                  <a:txBody>
-                    <a:bodyPr/>
-                    <a:lstStyle/>
-                    <a:p>
-                      <a:r>
-                        <a:rPr lang="en-US" sz="1400"/>
-                        <a:t>T4</a:t>
-                      </a:r>
-                    </a:p>
-                  </a:txBody>
-                  <a:tcPr anchor="ctr"/>
-                </a:tc>
-                <a:tc>
-                  <a:txBody>
-                    <a:bodyPr/>
-                    <a:lstStyle/>
-                    <a:p>
-                      <a:r>
-                        <a:rPr lang="en-US" sz="1400"/>
-                        <a:t>{Bread, Milk, Butter}</a:t>
-                      </a:r>
-                    </a:p>
-                  </a:txBody>
-                  <a:tcPr anchor="ctr"/>
-                </a:tc>
-                <a:extLst>
-                  <a:ext uri="{0D108BD9-81ED-4DB2-BD59-A6C34878D82A}">
-                    <a16:rowId xmlns:a16="http://schemas.microsoft.com/office/drawing/2014/main" val="709021022"/>
-                  </a:ext>
-                </a:extLst>
-              </a:tr>
-              <a:tr h="265016">
-                <a:tc>
-                  <a:txBody>
-                    <a:bodyPr/>
-                    <a:lstStyle/>
-                    <a:p>
-                      <a:r>
-                        <a:rPr lang="en-US" sz="1400"/>
-                        <a:t>T5</a:t>
-                      </a:r>
-                    </a:p>
-                  </a:txBody>
-                  <a:tcPr anchor="ctr"/>
-                </a:tc>
-                <a:tc>
-                  <a:txBody>
-                    <a:bodyPr/>
-                    <a:lstStyle/>
-                    <a:p>
-                      <a:r>
-                        <a:rPr lang="en-US" sz="1400"/>
-                        <a:t>{Bread, Milk, Eggs, Cheese}</a:t>
-                      </a:r>
-                    </a:p>
-                  </a:txBody>
-                  <a:tcPr anchor="ctr"/>
-                </a:tc>
-                <a:extLst>
-                  <a:ext uri="{0D108BD9-81ED-4DB2-BD59-A6C34878D82A}">
-                    <a16:rowId xmlns:a16="http://schemas.microsoft.com/office/drawing/2014/main" val="513921480"/>
-                  </a:ext>
-                </a:extLst>
-              </a:tr>
-              <a:tr h="265016">
-                <a:tc>
-                  <a:txBody>
-                    <a:bodyPr/>
-                    <a:lstStyle/>
-                    <a:p>
-                      <a:r>
-                        <a:rPr lang="en-US" sz="1400"/>
-                        <a:t>T6</a:t>
-                      </a:r>
-                    </a:p>
-                  </a:txBody>
-                  <a:tcPr anchor="ctr"/>
-                </a:tc>
-                <a:tc>
-                  <a:txBody>
-                    <a:bodyPr/>
-                    <a:lstStyle/>
-                    <a:p>
-                      <a:r>
-                        <a:rPr lang="en-US" sz="1400"/>
-                        <a:t>{Butter, Cheese, Yogurt}</a:t>
-                      </a:r>
-                    </a:p>
-                  </a:txBody>
-                  <a:tcPr anchor="ctr"/>
-                </a:tc>
-                <a:extLst>
-                  <a:ext uri="{0D108BD9-81ED-4DB2-BD59-A6C34878D82A}">
-                    <a16:rowId xmlns:a16="http://schemas.microsoft.com/office/drawing/2014/main" val="1752320554"/>
-                  </a:ext>
-                </a:extLst>
-              </a:tr>
-              <a:tr h="265016">
-                <a:tc>
-                  <a:txBody>
-                    <a:bodyPr/>
-                    <a:lstStyle/>
-                    <a:p>
-                      <a:r>
-                        <a:rPr lang="en-US" sz="1400"/>
-                        <a:t>T7</a:t>
-                      </a:r>
-                    </a:p>
-                  </a:txBody>
-                  <a:tcPr anchor="ctr"/>
-                </a:tc>
-                <a:tc>
-                  <a:txBody>
-                    <a:bodyPr/>
-                    <a:lstStyle/>
-                    <a:p>
-                      <a:r>
-                        <a:rPr lang="en-US" sz="1400"/>
-                        <a:t>{Bread, Butter, Eggs}</a:t>
-                      </a:r>
-                    </a:p>
-                  </a:txBody>
-                  <a:tcPr anchor="ctr"/>
-                </a:tc>
-                <a:extLst>
-                  <a:ext uri="{0D108BD9-81ED-4DB2-BD59-A6C34878D82A}">
-                    <a16:rowId xmlns:a16="http://schemas.microsoft.com/office/drawing/2014/main" val="1504799868"/>
-                  </a:ext>
-                </a:extLst>
-              </a:tr>
-              <a:tr h="265016">
-                <a:tc>
-                  <a:txBody>
-                    <a:bodyPr/>
-                    <a:lstStyle/>
-                    <a:p>
-                      <a:r>
-                        <a:rPr lang="en-US" sz="1400" dirty="0"/>
-                        <a:t>T8</a:t>
-                      </a:r>
-                    </a:p>
-                  </a:txBody>
-                  <a:tcPr anchor="ctr"/>
-                </a:tc>
-                <a:tc>
-                  <a:txBody>
-                    <a:bodyPr/>
-                    <a:lstStyle/>
-                    <a:p>
-                      <a:r>
-                        <a:rPr lang="en-US" sz="1400"/>
-                        <a:t>{Milk, Cheese, Yogurt}</a:t>
-                      </a:r>
-                    </a:p>
-                  </a:txBody>
-                  <a:tcPr anchor="ctr"/>
-                </a:tc>
-                <a:extLst>
-                  <a:ext uri="{0D108BD9-81ED-4DB2-BD59-A6C34878D82A}">
-                    <a16:rowId xmlns:a16="http://schemas.microsoft.com/office/drawing/2014/main" val="4252743236"/>
-                  </a:ext>
-                </a:extLst>
-              </a:tr>
-              <a:tr h="265016">
-                <a:tc>
-                  <a:txBody>
-                    <a:bodyPr/>
-                    <a:lstStyle/>
-                    <a:p>
-                      <a:r>
-                        <a:rPr lang="en-US" sz="1400"/>
-                        <a:t>T9</a:t>
-                      </a:r>
-                    </a:p>
-                  </a:txBody>
-                  <a:tcPr anchor="ctr"/>
-                </a:tc>
-                <a:tc>
-                  <a:txBody>
-                    <a:bodyPr/>
-                    <a:lstStyle/>
-                    <a:p>
-                      <a:r>
-                        <a:rPr lang="en-US" sz="1400"/>
-                        <a:t>{Bread, Milk, Butter, Cheese}</a:t>
-                      </a:r>
-                    </a:p>
-                  </a:txBody>
-                  <a:tcPr anchor="ctr"/>
-                </a:tc>
-                <a:extLst>
-                  <a:ext uri="{0D108BD9-81ED-4DB2-BD59-A6C34878D82A}">
-                    <a16:rowId xmlns:a16="http://schemas.microsoft.com/office/drawing/2014/main" val="3595114685"/>
-                  </a:ext>
-                </a:extLst>
-              </a:tr>
-              <a:tr h="265016">
-                <a:tc>
-                  <a:txBody>
-                    <a:bodyPr/>
-                    <a:lstStyle/>
-                    <a:p>
-                      <a:r>
-                        <a:rPr lang="en-US" sz="1400" dirty="0"/>
-                        <a:t>T10</a:t>
-                      </a:r>
-                    </a:p>
-                  </a:txBody>
-                  <a:tcPr anchor="ctr"/>
-                </a:tc>
-                <a:tc>
-                  <a:txBody>
-                    <a:bodyPr/>
-                    <a:lstStyle/>
-                    <a:p>
-                      <a:r>
-                        <a:rPr lang="en-US" sz="1400" dirty="0"/>
-                        <a:t>{Eggs, Cheese, Yogurt}</a:t>
-                      </a:r>
-                    </a:p>
-                  </a:txBody>
-                  <a:tcPr anchor="ctr"/>
-                </a:tc>
-                <a:extLst>
-                  <a:ext uri="{0D108BD9-81ED-4DB2-BD59-A6C34878D82A}">
-                    <a16:rowId xmlns:a16="http://schemas.microsoft.com/office/drawing/2014/main" val="2577148015"/>
-                  </a:ext>
-                </a:extLst>
-              </a:tr>
-            </a:tbl>
-          </a:graphicData>
-        </a:graphic>
-      </p:graphicFrame>
       <p:sp>
         <p:nvSpPr>
           <p:cNvPr id="10" name="TextBox 9">
@@ -14596,8 +14093,8 @@
         </p:nvSpPr>
         <p:spPr>
           <a:xfrm>
-            <a:off x="838200" y="2067842"/>
-            <a:ext cx="6094970" cy="1200329"/>
+            <a:off x="838199" y="1857777"/>
+            <a:ext cx="4679093" cy="2585323"/>
           </a:xfrm>
           <a:prstGeom prst="rect">
             <a:avLst/>
@@ -14657,110 +14154,34 @@
               <a:t> X → Y, e.g., {Bread} → {Milk}</a:t>
             </a:r>
           </a:p>
-        </p:txBody>
-      </p:sp>
-      <p:sp>
-        <p:nvSpPr>
-          <p:cNvPr id="11" name="Rectangle 4">
-            <a:extLst>
-              <a:ext uri="{FF2B5EF4-FFF2-40B4-BE49-F238E27FC236}">
-                <a16:creationId xmlns:a16="http://schemas.microsoft.com/office/drawing/2014/main" id="{269ABBB5-2CA6-18FD-9BD8-FE09CD880503}"/>
-              </a:ext>
-            </a:extLst>
-          </p:cNvPr>
-          <p:cNvSpPr>
-            <a:spLocks noChangeArrowheads="1"/>
-          </p:cNvSpPr>
-          <p:nvPr/>
-        </p:nvSpPr>
-        <p:spPr bwMode="auto">
-          <a:xfrm>
-            <a:off x="838200" y="1604503"/>
-            <a:ext cx="2425664" cy="338554"/>
-          </a:xfrm>
-          <a:prstGeom prst="rect">
-            <a:avLst/>
-          </a:prstGeom>
-          <a:noFill/>
-          <a:ln>
-            <a:noFill/>
-          </a:ln>
-          <a:effectLst/>
-          <a:extLst>
-            <a:ext uri="{909E8E84-426E-40DD-AFC4-6F175D3DCCD1}">
-              <a14:hiddenFill xmlns:a14="http://schemas.microsoft.com/office/drawing/2010/main">
-                <a:solidFill>
-                  <a:schemeClr val="accent1"/>
-                </a:solidFill>
-              </a14:hiddenFill>
-            </a:ext>
-            <a:ext uri="{91240B29-F687-4F45-9708-019B960494DF}">
-              <a14:hiddenLine xmlns:a14="http://schemas.microsoft.com/office/drawing/2010/main" w="9525">
-                <a:solidFill>
-                  <a:schemeClr val="tx1"/>
-                </a:solidFill>
-                <a:miter lim="800000"/>
-                <a:headEnd/>
-                <a:tailEnd/>
-              </a14:hiddenLine>
-            </a:ext>
-            <a:ext uri="{AF507438-7753-43E0-B8FC-AC1667EBCBE1}">
-              <a14:hiddenEffects xmlns:a14="http://schemas.microsoft.com/office/drawing/2010/main">
-                <a:effectLst>
-                  <a:outerShdw dist="35921" dir="2700000" algn="ctr" rotWithShape="0">
-                    <a:schemeClr val="bg2"/>
-                  </a:outerShdw>
-                </a:effectLst>
-              </a14:hiddenEffects>
-            </a:ext>
-          </a:extLst>
-        </p:spPr>
-        <p:txBody>
-          <a:bodyPr vert="horz" wrap="none" lIns="91440" tIns="45720" rIns="91440" bIns="45720" numCol="1" anchor="ctr" anchorCtr="0" compatLnSpc="1">
-            <a:prstTxWarp prst="textNoShape">
-              <a:avLst/>
-            </a:prstTxWarp>
-            <a:spAutoFit/>
-          </a:bodyPr>
-          <a:lstStyle/>
-          <a:p>
-            <a:pPr marL="0" marR="0" lvl="0" indent="0" algn="l" defTabSz="914400" rtl="0" eaLnBrk="0" fontAlgn="base" latinLnBrk="0" hangingPunct="0">
-              <a:lnSpc>
-                <a:spcPct val="100000"/>
-              </a:lnSpc>
-              <a:spcBef>
-                <a:spcPct val="0"/>
-              </a:spcBef>
-              <a:spcAft>
-                <a:spcPct val="0"/>
-              </a:spcAft>
-              <a:buClrTx/>
-              <a:buSzTx/>
-              <a:buFontTx/>
-              <a:buNone/>
-              <a:tabLst/>
+          <a:p>
+            <a:r>
+              <a:rPr lang="en-US" b="1" dirty="0"/>
+              <a:t>Goal:</a:t>
+            </a:r>
+            <a:br>
+              <a:rPr lang="en-US" dirty="0"/>
+            </a:br>
+            <a:r>
+              <a:rPr lang="en-US" dirty="0"/>
+              <a:t>Find rules that are statistically significant, useful, and actionable</a:t>
+            </a:r>
+          </a:p>
+          <a:p>
+            <a:pPr marL="285750" indent="-285750">
+              <a:buFont typeface="Arial" panose="020B0604020202020204" pitchFamily="34" charset="0"/>
+              <a:buChar char="•"/>
             </a:pPr>
-            <a:r>
-              <a:rPr kumimoji="0" lang="en-US" altLang="en-US" sz="1600" b="1" i="0" u="none" strike="noStrike" cap="none" normalizeH="0" baseline="0" dirty="0">
-                <a:ln>
-                  <a:noFill/>
-                </a:ln>
-                <a:solidFill>
-                  <a:schemeClr val="tx1"/>
-                </a:solidFill>
-                <a:effectLst/>
-              </a:rPr>
-              <a:t>Our Grocery Store Dataset</a:t>
-            </a:r>
+            <a:endParaRPr lang="en-US" dirty="0"/>
           </a:p>
         </p:txBody>
       </p:sp>
       <p:pic>
         <p:nvPicPr>
-          <p:cNvPr id="4" name="Picture 3" descr="A close-up of a paper&#10;&#10;AI-generated content may be incorrect.">
+          <p:cNvPr id="6" name="Picture 5" descr="A shopping cart full of food&#10;&#10;AI-generated content may be incorrect.">
             <a:extLst>
               <a:ext uri="{FF2B5EF4-FFF2-40B4-BE49-F238E27FC236}">
-                <a16:creationId xmlns:a16="http://schemas.microsoft.com/office/drawing/2014/main" id="{FE62F33E-DC36-69B1-6BA4-3F72051C658C}"/>
+                <a16:creationId xmlns:a16="http://schemas.microsoft.com/office/drawing/2014/main" id="{705C105A-97C9-0206-8067-796D33D6C11F}"/>
               </a:ext>
             </a:extLst>
           </p:cNvPr>
@@ -14783,8 +14204,44 @@
         </p:blipFill>
         <p:spPr>
           <a:xfrm>
-            <a:off x="7132478" y="1690390"/>
-            <a:ext cx="4221322" cy="5050216"/>
+            <a:off x="8640608" y="1766133"/>
+            <a:ext cx="2713191" cy="2713191"/>
+          </a:xfrm>
+          <a:prstGeom prst="rect">
+            <a:avLst/>
+          </a:prstGeom>
+        </p:spPr>
+      </p:pic>
+      <p:pic>
+        <p:nvPicPr>
+          <p:cNvPr id="7" name="Picture 6" descr="A close-up of a paper&#10;&#10;AI-generated content may be incorrect.">
+            <a:extLst>
+              <a:ext uri="{FF2B5EF4-FFF2-40B4-BE49-F238E27FC236}">
+                <a16:creationId xmlns:a16="http://schemas.microsoft.com/office/drawing/2014/main" id="{B79DD5E5-35F4-0EB8-3379-81437C9EE2E9}"/>
+              </a:ext>
+            </a:extLst>
+          </p:cNvPr>
+          <p:cNvPicPr>
+            <a:picLocks noChangeAspect="1"/>
+          </p:cNvPicPr>
+          <p:nvPr/>
+        </p:nvPicPr>
+        <p:blipFill>
+          <a:blip r:embed="rId3">
+            <a:extLst>
+              <a:ext uri="{28A0092B-C50C-407E-A947-70E740481C1C}">
+                <a14:useLocalDpi xmlns:a14="http://schemas.microsoft.com/office/drawing/2010/main" val="0"/>
+              </a:ext>
+            </a:extLst>
+          </a:blip>
+          <a:stretch>
+            <a:fillRect/>
+          </a:stretch>
+        </p:blipFill>
+        <p:spPr>
+          <a:xfrm>
+            <a:off x="5889172" y="1729062"/>
+            <a:ext cx="2619047" cy="3133321"/>
           </a:xfrm>
           <a:prstGeom prst="rect">
             <a:avLst/>
@@ -14805,6 +14262,95 @@
 </file>
 
 <file path=ppt/slides/slide6.xml><?xml version="1.0" encoding="utf-8"?>
+<p:sld xmlns:a="http://schemas.openxmlformats.org/drawingml/2006/main" xmlns:r="http://schemas.openxmlformats.org/officeDocument/2006/relationships" xmlns:p="http://schemas.openxmlformats.org/presentationml/2006/main">
+  <p:cSld>
+    <p:spTree>
+      <p:nvGrpSpPr>
+        <p:cNvPr id="1" name=""/>
+        <p:cNvGrpSpPr/>
+        <p:nvPr/>
+      </p:nvGrpSpPr>
+      <p:grpSpPr>
+        <a:xfrm>
+          <a:off x="0" y="0"/>
+          <a:ext cx="0" cy="0"/>
+          <a:chOff x="0" y="0"/>
+          <a:chExt cx="0" cy="0"/>
+        </a:xfrm>
+      </p:grpSpPr>
+      <p:sp>
+        <p:nvSpPr>
+          <p:cNvPr id="2" name="Title 1">
+            <a:extLst>
+              <a:ext uri="{FF2B5EF4-FFF2-40B4-BE49-F238E27FC236}">
+                <a16:creationId xmlns:a16="http://schemas.microsoft.com/office/drawing/2014/main" id="{489FECB8-FCF6-A050-9BBB-E134B97CF3AE}"/>
+              </a:ext>
+            </a:extLst>
+          </p:cNvPr>
+          <p:cNvSpPr>
+            <a:spLocks noGrp="1"/>
+          </p:cNvSpPr>
+          <p:nvPr>
+            <p:ph type="title"/>
+          </p:nvPr>
+        </p:nvSpPr>
+        <p:spPr/>
+        <p:txBody>
+          <a:bodyPr>
+            <a:normAutofit/>
+          </a:bodyPr>
+          <a:lstStyle/>
+          <a:p>
+            <a:r>
+              <a:rPr lang="en-US" dirty="0"/>
+              <a:t>To evaluate the strength and relevance of rules, we use:</a:t>
+            </a:r>
+          </a:p>
+        </p:txBody>
+      </p:sp>
+      <p:pic>
+        <p:nvPicPr>
+          <p:cNvPr id="5" name="Content Placeholder 4">
+            <a:extLst>
+              <a:ext uri="{FF2B5EF4-FFF2-40B4-BE49-F238E27FC236}">
+                <a16:creationId xmlns:a16="http://schemas.microsoft.com/office/drawing/2014/main" id="{C0C1BF33-37AE-890B-AB47-D6E68F7B9BFC}"/>
+              </a:ext>
+            </a:extLst>
+          </p:cNvPr>
+          <p:cNvPicPr>
+            <a:picLocks noGrp="1" noChangeAspect="1"/>
+          </p:cNvPicPr>
+          <p:nvPr>
+            <p:ph idx="1"/>
+          </p:nvPr>
+        </p:nvPicPr>
+        <p:blipFill>
+          <a:blip r:embed="rId2"/>
+          <a:stretch>
+            <a:fillRect/>
+          </a:stretch>
+        </p:blipFill>
+        <p:spPr>
+          <a:xfrm>
+            <a:off x="838200" y="1849839"/>
+            <a:ext cx="6576427" cy="4584828"/>
+          </a:xfrm>
+        </p:spPr>
+      </p:pic>
+    </p:spTree>
+    <p:extLst>
+      <p:ext uri="{BB962C8B-B14F-4D97-AF65-F5344CB8AC3E}">
+        <p14:creationId xmlns:p14="http://schemas.microsoft.com/office/powerpoint/2010/main" val="2082955467"/>
+      </p:ext>
+    </p:extLst>
+  </p:cSld>
+  <p:clrMapOvr>
+    <a:masterClrMapping/>
+  </p:clrMapOvr>
+</p:sld>
+</file>
+
+<file path=ppt/slides/slide7.xml><?xml version="1.0" encoding="utf-8"?>
 <p:sld xmlns:a="http://schemas.openxmlformats.org/drawingml/2006/main" xmlns:r="http://schemas.openxmlformats.org/officeDocument/2006/relationships" xmlns:p="http://schemas.openxmlformats.org/presentationml/2006/main">
   <p:cSld>
     <p:spTree>
@@ -14852,7 +14398,7 @@
           <a:p>
             <a:r>
               <a:rPr lang="en-US" dirty="0"/>
-              <a:t>Support - "How Popular Is This Pattern?"</a:t>
+              <a:t>The Support Metric - "How Popular Is This Pattern?"</a:t>
             </a:r>
           </a:p>
         </p:txBody>
@@ -14876,12 +14422,12 @@
         <p:spPr>
           <a:xfrm>
             <a:off x="838200" y="1706007"/>
-            <a:ext cx="6001265" cy="4991039"/>
+            <a:ext cx="6246707" cy="4991039"/>
           </a:xfrm>
         </p:spPr>
         <p:txBody>
           <a:bodyPr>
-            <a:normAutofit fontScale="85000" lnSpcReduction="20000"/>
+            <a:normAutofit lnSpcReduction="10000"/>
           </a:bodyPr>
           <a:lstStyle/>
           <a:p>
@@ -14889,13 +14435,16 @@
               <a:buNone/>
             </a:pPr>
             <a:r>
-              <a:rPr lang="en-US" b="1" dirty="0"/>
+              <a:rPr lang="en-US" sz="1800" b="1" dirty="0"/>
               <a:t>Definition</a:t>
             </a:r>
           </a:p>
           <a:p>
-            <a:r>
-              <a:rPr lang="en-US" dirty="0"/>
+            <a:pPr marL="0" indent="0">
+              <a:buNone/>
+            </a:pPr>
+            <a:r>
+              <a:rPr lang="en-US" sz="1800" dirty="0"/>
               <a:t>Percentage of transactions containing the itemset</a:t>
             </a:r>
           </a:p>
@@ -14904,13 +14453,16 @@
               <a:buNone/>
             </a:pPr>
             <a:r>
-              <a:rPr lang="en-US" b="1" dirty="0"/>
+              <a:rPr lang="en-US" sz="1800" b="1" dirty="0"/>
               <a:t>Formula</a:t>
             </a:r>
           </a:p>
           <a:p>
-            <a:r>
-              <a:rPr lang="en-US" dirty="0"/>
+            <a:pPr marL="0" indent="0">
+              <a:buNone/>
+            </a:pPr>
+            <a:r>
+              <a:rPr lang="en-US" sz="1800" dirty="0"/>
               <a:t>Support(X) = Count(transactions with X) / Total transactions</a:t>
             </a:r>
           </a:p>
@@ -14919,14 +14471,16 @@
               <a:buNone/>
             </a:pPr>
             <a:r>
-              <a:rPr lang="en-US" b="1" dirty="0"/>
+              <a:rPr lang="en-US" sz="1800" b="1" dirty="0"/>
               <a:t>Calculations from Our Data</a:t>
             </a:r>
           </a:p>
           <a:p>
-            <a:pPr lvl="1"/>
-            <a:r>
-              <a:rPr lang="en-US" dirty="0">
+            <a:pPr marL="457200" lvl="1" indent="0">
+              <a:buNone/>
+            </a:pPr>
+            <a:r>
+              <a:rPr lang="en-US" sz="1600" dirty="0">
                 <a:solidFill>
                   <a:srgbClr val="0070C0"/>
                 </a:solidFill>
@@ -14935,9 +14489,11 @@
             </a:r>
           </a:p>
           <a:p>
-            <a:pPr lvl="1"/>
-            <a:r>
-              <a:rPr lang="en-US" dirty="0">
+            <a:pPr marL="457200" lvl="1" indent="0">
+              <a:buNone/>
+            </a:pPr>
+            <a:r>
+              <a:rPr lang="en-US" sz="1600" dirty="0">
                 <a:solidFill>
                   <a:srgbClr val="0070C0"/>
                 </a:solidFill>
@@ -14946,9 +14502,11 @@
             </a:r>
           </a:p>
           <a:p>
-            <a:pPr lvl="1"/>
-            <a:r>
-              <a:rPr lang="en-US" dirty="0">
+            <a:pPr marL="457200" lvl="1" indent="0">
+              <a:buNone/>
+            </a:pPr>
+            <a:r>
+              <a:rPr lang="en-US" sz="1600" dirty="0">
                 <a:solidFill>
                   <a:srgbClr val="0070C0"/>
                 </a:solidFill>
@@ -14957,9 +14515,11 @@
             </a:r>
           </a:p>
           <a:p>
-            <a:pPr lvl="1"/>
-            <a:r>
-              <a:rPr lang="en-US" dirty="0">
+            <a:pPr marL="457200" lvl="1" indent="0">
+              <a:buNone/>
+            </a:pPr>
+            <a:r>
+              <a:rPr lang="en-US" sz="1600" dirty="0">
                 <a:solidFill>
                   <a:srgbClr val="0070C0"/>
                 </a:solidFill>
@@ -14968,9 +14528,11 @@
             </a:r>
           </a:p>
           <a:p>
-            <a:pPr lvl="1"/>
-            <a:r>
-              <a:rPr lang="en-US" dirty="0">
+            <a:pPr marL="457200" lvl="1" indent="0">
+              <a:buNone/>
+            </a:pPr>
+            <a:r>
+              <a:rPr lang="en-US" sz="1600" dirty="0">
                 <a:solidFill>
                   <a:srgbClr val="0070C0"/>
                 </a:solidFill>
@@ -14979,9 +14541,11 @@
             </a:r>
           </a:p>
           <a:p>
-            <a:pPr lvl="1"/>
-            <a:r>
-              <a:rPr lang="en-US" dirty="0">
+            <a:pPr marL="457200" lvl="1" indent="0">
+              <a:buNone/>
+            </a:pPr>
+            <a:r>
+              <a:rPr lang="en-US" sz="1600" dirty="0">
                 <a:solidFill>
                   <a:srgbClr val="0070C0"/>
                 </a:solidFill>
@@ -14994,42 +14558,45 @@
               <a:buNone/>
             </a:pPr>
             <a:r>
-              <a:rPr lang="en-US" b="1" dirty="0"/>
+              <a:rPr lang="en-US" sz="1800" b="1" dirty="0"/>
               <a:t>Why Support Matters</a:t>
             </a:r>
           </a:p>
           <a:p>
             <a:r>
-              <a:rPr lang="en-US" b="1" dirty="0"/>
+              <a:rPr lang="en-US" sz="1800" b="1" dirty="0"/>
               <a:t>High support:</a:t>
             </a:r>
             <a:r>
-              <a:rPr lang="en-US" dirty="0"/>
+              <a:rPr lang="en-US" sz="1800" dirty="0"/>
               <a:t> Common, reliable patterns</a:t>
             </a:r>
           </a:p>
           <a:p>
             <a:r>
-              <a:rPr lang="en-US" b="1" dirty="0"/>
+              <a:rPr lang="en-US" sz="1800" b="1" dirty="0"/>
               <a:t>Low support:</a:t>
             </a:r>
             <a:r>
-              <a:rPr lang="en-US" dirty="0"/>
+              <a:rPr lang="en-US" sz="1800" dirty="0"/>
               <a:t> Rare, potentially spurious patterns</a:t>
             </a:r>
           </a:p>
           <a:p>
             <a:r>
-              <a:rPr lang="en-US" b="1" dirty="0"/>
+              <a:rPr lang="en-US" sz="1800" b="1" dirty="0"/>
               <a:t>Threshold:</a:t>
             </a:r>
             <a:r>
-              <a:rPr lang="en-US" dirty="0"/>
+              <a:rPr lang="en-US" sz="1800" dirty="0"/>
               <a:t> Typically, 5-20% depending on business context</a:t>
             </a:r>
           </a:p>
           <a:p>
-            <a:endParaRPr lang="en-US" dirty="0"/>
+            <a:pPr marL="0" indent="0">
+              <a:buNone/>
+            </a:pPr>
+            <a:endParaRPr lang="en-US" sz="1800" dirty="0"/>
           </a:p>
         </p:txBody>
       </p:sp>
@@ -15471,7 +15038,220 @@
 </p:sld>
 </file>
 
-<file path=ppt/slides/slide7.xml><?xml version="1.0" encoding="utf-8"?>
+<file path=ppt/slides/slide8.xml><?xml version="1.0" encoding="utf-8"?>
+<p:sld xmlns:a="http://schemas.openxmlformats.org/drawingml/2006/main" xmlns:r="http://schemas.openxmlformats.org/officeDocument/2006/relationships" xmlns:p="http://schemas.openxmlformats.org/presentationml/2006/main">
+  <p:cSld>
+    <p:spTree>
+      <p:nvGrpSpPr>
+        <p:cNvPr id="1" name=""/>
+        <p:cNvGrpSpPr/>
+        <p:nvPr/>
+      </p:nvGrpSpPr>
+      <p:grpSpPr>
+        <a:xfrm>
+          <a:off x="0" y="0"/>
+          <a:ext cx="0" cy="0"/>
+          <a:chOff x="0" y="0"/>
+          <a:chExt cx="0" cy="0"/>
+        </a:xfrm>
+      </p:grpSpPr>
+      <p:sp>
+        <p:nvSpPr>
+          <p:cNvPr id="2" name="Title 1">
+            <a:extLst>
+              <a:ext uri="{FF2B5EF4-FFF2-40B4-BE49-F238E27FC236}">
+                <a16:creationId xmlns:a16="http://schemas.microsoft.com/office/drawing/2014/main" id="{EE57F7BE-8FAC-3AFD-77D9-ABCE43655ACA}"/>
+              </a:ext>
+            </a:extLst>
+          </p:cNvPr>
+          <p:cNvSpPr>
+            <a:spLocks noGrp="1"/>
+          </p:cNvSpPr>
+          <p:nvPr>
+            <p:ph type="title"/>
+          </p:nvPr>
+        </p:nvSpPr>
+        <p:spPr/>
+        <p:txBody>
+          <a:bodyPr>
+            <a:normAutofit/>
+          </a:bodyPr>
+          <a:lstStyle/>
+          <a:p>
+            <a:r>
+              <a:rPr lang="en-US" dirty="0"/>
+              <a:t>The Confidence Metric – Direction Matters</a:t>
+            </a:r>
+          </a:p>
+        </p:txBody>
+      </p:sp>
+      <p:sp>
+        <p:nvSpPr>
+          <p:cNvPr id="3" name="Content Placeholder 2">
+            <a:extLst>
+              <a:ext uri="{FF2B5EF4-FFF2-40B4-BE49-F238E27FC236}">
+                <a16:creationId xmlns:a16="http://schemas.microsoft.com/office/drawing/2014/main" id="{C266D561-3069-D7F3-08E9-AC3AC2AFD102}"/>
+              </a:ext>
+            </a:extLst>
+          </p:cNvPr>
+          <p:cNvSpPr>
+            <a:spLocks noGrp="1"/>
+          </p:cNvSpPr>
+          <p:nvPr>
+            <p:ph idx="1"/>
+          </p:nvPr>
+        </p:nvSpPr>
+        <p:spPr>
+          <a:xfrm>
+            <a:off x="838200" y="1706007"/>
+            <a:ext cx="10515600" cy="5151993"/>
+          </a:xfrm>
+        </p:spPr>
+        <p:txBody>
+          <a:bodyPr>
+            <a:normAutofit fontScale="92500" lnSpcReduction="20000"/>
+          </a:bodyPr>
+          <a:lstStyle/>
+          <a:p>
+            <a:r>
+              <a:rPr lang="en-US" dirty="0"/>
+              <a:t>Support tells us how many times two items appear together:</a:t>
+            </a:r>
+          </a:p>
+          <a:p>
+            <a:pPr lvl="1"/>
+            <a:r>
+              <a:rPr lang="en-US" dirty="0"/>
+              <a:t>Support(milk ∩ diapers) = 100 / 1000 = 10% </a:t>
+            </a:r>
+          </a:p>
+          <a:p>
+            <a:r>
+              <a:rPr lang="en-US" dirty="0"/>
+              <a:t>But support is symmetric (have no direction) it does not tell us if we should recommend milk when diapers are bought or should we recommend milk when diapers are bought?</a:t>
+            </a:r>
+          </a:p>
+          <a:p>
+            <a:r>
+              <a:rPr lang="en-US" dirty="0">
+                <a:solidFill>
+                  <a:srgbClr val="0070C0"/>
+                </a:solidFill>
+              </a:rPr>
+              <a:t>Confidence answers this question by measuring the conditional probability.</a:t>
+            </a:r>
+          </a:p>
+          <a:p>
+            <a:pPr marL="0" indent="0">
+              <a:buNone/>
+            </a:pPr>
+            <a:r>
+              <a:rPr lang="en-US" b="1" dirty="0"/>
+              <a:t>Scenario: </a:t>
+            </a:r>
+            <a:r>
+              <a:rPr lang="en-US" dirty="0"/>
+              <a:t>We have 1,000 transactions of </a:t>
+            </a:r>
+            <a:r>
+              <a:rPr lang="en-US" b="1" dirty="0" err="1"/>
+              <a:t>Itemsets</a:t>
+            </a:r>
+            <a:r>
+              <a:rPr lang="en-US" b="1" dirty="0"/>
+              <a:t>: {</a:t>
+            </a:r>
+            <a:r>
+              <a:rPr lang="en-US" dirty="0"/>
+              <a:t>Milk, Diapers}</a:t>
+            </a:r>
+          </a:p>
+          <a:p>
+            <a:pPr marL="0" indent="0">
+              <a:buNone/>
+            </a:pPr>
+            <a:r>
+              <a:rPr lang="en-US" b="1" dirty="0"/>
+              <a:t>Raw Data:</a:t>
+            </a:r>
+            <a:endParaRPr lang="en-US" dirty="0"/>
+          </a:p>
+          <a:p>
+            <a:r>
+              <a:rPr lang="en-US" dirty="0"/>
+              <a:t>500 bought milk</a:t>
+            </a:r>
+          </a:p>
+          <a:p>
+            <a:r>
+              <a:rPr lang="en-US" dirty="0"/>
+              <a:t>150 bought diapers</a:t>
+            </a:r>
+          </a:p>
+          <a:p>
+            <a:r>
+              <a:rPr lang="en-US" dirty="0"/>
+              <a:t>100 bought both milk and diapers</a:t>
+            </a:r>
+          </a:p>
+          <a:p>
+            <a:pPr marL="0" indent="0">
+              <a:buNone/>
+            </a:pPr>
+            <a:r>
+              <a:rPr lang="en-US" dirty="0"/>
+              <a:t>Which rule should we use</a:t>
+            </a:r>
+          </a:p>
+          <a:p>
+            <a:pPr marL="0" indent="0">
+              <a:buNone/>
+            </a:pPr>
+            <a:r>
+              <a:rPr lang="en-US" b="1" dirty="0"/>
+              <a:t>Diapers </a:t>
+            </a:r>
+            <a:r>
+              <a:rPr lang="en-US" b="1" dirty="0">
+                <a:sym typeface="Wingdings" panose="05000000000000000000" pitchFamily="2" charset="2"/>
+              </a:rPr>
+              <a:t> Milk</a:t>
+            </a:r>
+          </a:p>
+          <a:p>
+            <a:pPr marL="0" indent="0">
+              <a:buNone/>
+            </a:pPr>
+            <a:r>
+              <a:rPr lang="en-US" b="1" dirty="0"/>
+              <a:t>Milk -&gt; Diapers</a:t>
+            </a:r>
+          </a:p>
+          <a:p>
+            <a:pPr marL="0" indent="0">
+              <a:buNone/>
+            </a:pPr>
+            <a:r>
+              <a:rPr lang="en-US" b="1" dirty="0"/>
+              <a:t>Or Both?</a:t>
+            </a:r>
+          </a:p>
+        </p:txBody>
+      </p:sp>
+    </p:spTree>
+    <p:extLst>
+      <p:ext uri="{BB962C8B-B14F-4D97-AF65-F5344CB8AC3E}">
+        <p14:creationId xmlns:p14="http://schemas.microsoft.com/office/powerpoint/2010/main" val="1157874150"/>
+      </p:ext>
+    </p:extLst>
+  </p:cSld>
+  <p:clrMapOvr>
+    <a:masterClrMapping/>
+  </p:clrMapOvr>
+</p:sld>
+</file>
+
+<file path=ppt/slides/slide9.xml><?xml version="1.0" encoding="utf-8"?>
 <p:sld xmlns:a="http://schemas.openxmlformats.org/drawingml/2006/main" xmlns:r="http://schemas.openxmlformats.org/officeDocument/2006/relationships" xmlns:p="http://schemas.openxmlformats.org/presentationml/2006/main">
   <p:cSld>
     <p:spTree>
@@ -15479,7 +15259,7 @@
         <p:cNvPr id="1" name="">
           <a:extLst>
             <a:ext uri="{FF2B5EF4-FFF2-40B4-BE49-F238E27FC236}">
-              <a16:creationId xmlns:a16="http://schemas.microsoft.com/office/drawing/2014/main" id="{863A9968-A8AC-434A-7357-080A09781B99}"/>
+              <a16:creationId xmlns:a16="http://schemas.microsoft.com/office/drawing/2014/main" id="{AA6E4C16-8016-6CC0-25C6-2198AA63CFBD}"/>
             </a:ext>
           </a:extLst>
         </p:cNvPr>
@@ -15499,7 +15279,7 @@
           <p:cNvPr id="2" name="Title 1">
             <a:extLst>
               <a:ext uri="{FF2B5EF4-FFF2-40B4-BE49-F238E27FC236}">
-                <a16:creationId xmlns:a16="http://schemas.microsoft.com/office/drawing/2014/main" id="{A13142C9-0DBF-43FA-747D-D18A30557DD3}"/>
+                <a16:creationId xmlns:a16="http://schemas.microsoft.com/office/drawing/2014/main" id="{C891713C-1D56-EE07-D7AC-E1ABB9A11CF2}"/>
               </a:ext>
             </a:extLst>
           </p:cNvPr>
@@ -15519,7 +15299,7 @@
           <a:p>
             <a:r>
               <a:rPr lang="en-US" dirty="0"/>
-              <a:t>Confidence - "How Reliable Is This Rule?"</a:t>
+              <a:t>The Confidence Metric – Direction Matters</a:t>
             </a:r>
           </a:p>
         </p:txBody>
@@ -15529,7 +15309,7 @@
           <p:cNvPr id="3" name="Content Placeholder 2">
             <a:extLst>
               <a:ext uri="{FF2B5EF4-FFF2-40B4-BE49-F238E27FC236}">
-                <a16:creationId xmlns:a16="http://schemas.microsoft.com/office/drawing/2014/main" id="{81C5FD02-18E5-FAF0-F50C-176BE3C8CD02}"/>
+                <a16:creationId xmlns:a16="http://schemas.microsoft.com/office/drawing/2014/main" id="{E709E64B-7903-0471-06AE-02B20D3C3398}"/>
               </a:ext>
             </a:extLst>
           </p:cNvPr>
@@ -15542,901 +15322,67 @@
         </p:nvSpPr>
         <p:spPr>
           <a:xfrm>
-            <a:off x="838199" y="1706007"/>
-            <a:ext cx="6390503" cy="4991039"/>
+            <a:off x="838200" y="6301946"/>
+            <a:ext cx="10515600" cy="463378"/>
           </a:xfrm>
         </p:spPr>
-        <p:txBody>
-          <a:bodyPr>
-            <a:normAutofit fontScale="92500" lnSpcReduction="20000"/>
-          </a:bodyPr>
-          <a:lstStyle/>
-          <a:p>
-            <a:pPr marL="0" indent="0">
-              <a:buNone/>
-            </a:pPr>
-            <a:r>
-              <a:rPr lang="en-US" sz="2000" b="1" dirty="0"/>
-              <a:t>Definition: </a:t>
-            </a:r>
-          </a:p>
-          <a:p>
-            <a:r>
-              <a:rPr lang="en-US" sz="2000" dirty="0"/>
-              <a:t>When X is bought, what's the probability Y is also bought?</a:t>
-            </a:r>
-          </a:p>
-          <a:p>
-            <a:pPr marL="0" indent="0">
-              <a:buNone/>
-            </a:pPr>
-            <a:r>
-              <a:rPr lang="en-US" sz="2000" b="1" dirty="0"/>
-              <a:t>Formula</a:t>
-            </a:r>
-          </a:p>
-          <a:p>
-            <a:r>
-              <a:rPr lang="en-US" sz="2000" dirty="0"/>
-              <a:t>Confidence(X → Y) = Support(X ∪ Y) / Support(X)</a:t>
-            </a:r>
-          </a:p>
-          <a:p>
-            <a:pPr marL="0" indent="0">
-              <a:buNone/>
-            </a:pPr>
-            <a:r>
-              <a:rPr lang="en-US" sz="2000" b="1" dirty="0"/>
-              <a:t>Key Comparison</a:t>
-            </a:r>
-          </a:p>
-          <a:p>
-            <a:pPr marL="0" indent="0">
-              <a:buNone/>
-            </a:pPr>
-            <a:r>
-              <a:rPr lang="en-US" sz="2000" b="1" dirty="0"/>
-              <a:t>Direction Matters! Confidence Reveals Asymmetric Relationships:</a:t>
-            </a:r>
-          </a:p>
-          <a:p>
-            <a:pPr marL="228600" lvl="1"/>
-            <a:r>
-              <a:rPr lang="en-US" sz="1800" i="1" dirty="0">
-                <a:solidFill>
-                  <a:srgbClr val="0070C0"/>
-                </a:solidFill>
-              </a:rPr>
-              <a:t>{Bread} → {Milk}: Confidence = Support({Bread, Milk}) / Support({Bread}) = 30% / 60% = 50%</a:t>
-            </a:r>
-          </a:p>
-          <a:p>
-            <a:pPr marL="228600" lvl="1"/>
-            <a:r>
-              <a:rPr lang="en-US" sz="1800" i="1" dirty="0">
-                <a:solidFill>
-                  <a:srgbClr val="0070C0"/>
-                </a:solidFill>
-              </a:rPr>
-              <a:t>{Milk} → {Bread}: Confidence = Support({Bread, Milk}) / Support({Milk}) = 30% / 50% = 60%</a:t>
-            </a:r>
-          </a:p>
-          <a:p>
-            <a:pPr marL="0" indent="0">
-              <a:buNone/>
-            </a:pPr>
-            <a:r>
-              <a:rPr lang="en-US" sz="2000" b="1" dirty="0"/>
-              <a:t>Business Insight</a:t>
-            </a:r>
-          </a:p>
-          <a:p>
-            <a:r>
-              <a:rPr lang="en-US" sz="2000" dirty="0"/>
-              <a:t>Confidence helps us choose the RIGHT DIRECTION for recommendations</a:t>
-            </a:r>
-          </a:p>
-          <a:p>
-            <a:r>
-              <a:rPr lang="en-US" sz="2000" dirty="0"/>
-              <a:t>Milk buyers are MORE likely to buy bread (60%) than bread buyers are to buy milk (50%)</a:t>
-            </a:r>
-          </a:p>
-          <a:p>
-            <a:r>
-              <a:rPr lang="en-US" sz="2000" b="1" dirty="0"/>
-              <a:t>Action:</a:t>
-            </a:r>
-            <a:r>
-              <a:rPr lang="en-US" sz="2000" dirty="0"/>
-              <a:t> Target bread promotions to milk buyers, not vice versa</a:t>
-            </a:r>
-          </a:p>
-          <a:p>
-            <a:endParaRPr lang="en-US" sz="2000" dirty="0"/>
-          </a:p>
-        </p:txBody>
-      </p:sp>
-      <p:graphicFrame>
-        <p:nvGraphicFramePr>
-          <p:cNvPr id="4" name="Content Placeholder 7">
-            <a:extLst>
-              <a:ext uri="{FF2B5EF4-FFF2-40B4-BE49-F238E27FC236}">
-                <a16:creationId xmlns:a16="http://schemas.microsoft.com/office/drawing/2014/main" id="{0B77DAC8-67B3-FEB5-2DB6-16734A330180}"/>
-              </a:ext>
-            </a:extLst>
-          </p:cNvPr>
-          <p:cNvGraphicFramePr>
-            <a:graphicFrameLocks/>
-          </p:cNvGraphicFramePr>
-          <p:nvPr>
-            <p:extLst>
-              <p:ext uri="{D42A27DB-BD31-4B8C-83A1-F6EECF244321}">
-                <p14:modId xmlns:p14="http://schemas.microsoft.com/office/powerpoint/2010/main" val="3212133869"/>
-              </p:ext>
-            </p:extLst>
-          </p:nvPr>
-        </p:nvGraphicFramePr>
-        <p:xfrm>
-          <a:off x="7591167" y="1706007"/>
-          <a:ext cx="3807940" cy="3352800"/>
-        </p:xfrm>
-        <a:graphic>
-          <a:graphicData uri="http://schemas.openxmlformats.org/drawingml/2006/table">
-            <a:tbl>
-              <a:tblPr>
-                <a:tableStyleId>{616DA210-FB5B-4158-B5E0-FEB733F419BA}</a:tableStyleId>
-              </a:tblPr>
-              <a:tblGrid>
-                <a:gridCol w="1330741">
-                  <a:extLst>
-                    <a:ext uri="{9D8B030D-6E8A-4147-A177-3AD203B41FA5}">
-                      <a16:colId xmlns:a16="http://schemas.microsoft.com/office/drawing/2014/main" val="83576377"/>
-                    </a:ext>
-                  </a:extLst>
-                </a:gridCol>
-                <a:gridCol w="2477199">
-                  <a:extLst>
-                    <a:ext uri="{9D8B030D-6E8A-4147-A177-3AD203B41FA5}">
-                      <a16:colId xmlns:a16="http://schemas.microsoft.com/office/drawing/2014/main" val="62154499"/>
-                    </a:ext>
-                  </a:extLst>
-                </a:gridCol>
-              </a:tblGrid>
-              <a:tr h="265016">
-                <a:tc>
-                  <a:txBody>
-                    <a:bodyPr/>
-                    <a:lstStyle/>
-                    <a:p>
-                      <a:r>
-                        <a:rPr lang="en-US" sz="1400" dirty="0"/>
-                        <a:t>Transaction ID</a:t>
-                      </a:r>
-                    </a:p>
-                  </a:txBody>
-                  <a:tcPr anchor="ctr">
-                    <a:solidFill>
-                      <a:schemeClr val="bg1">
-                        <a:lumMod val="85000"/>
-                      </a:schemeClr>
-                    </a:solidFill>
-                  </a:tcPr>
-                </a:tc>
-                <a:tc>
-                  <a:txBody>
-                    <a:bodyPr/>
-                    <a:lstStyle/>
-                    <a:p>
-                      <a:r>
-                        <a:rPr lang="en-US" sz="1400" dirty="0"/>
-                        <a:t>Items Purchased</a:t>
-                      </a:r>
-                    </a:p>
-                  </a:txBody>
-                  <a:tcPr anchor="ctr">
-                    <a:solidFill>
-                      <a:schemeClr val="bg1">
-                        <a:lumMod val="85000"/>
-                      </a:schemeClr>
-                    </a:solidFill>
-                  </a:tcPr>
-                </a:tc>
-                <a:extLst>
-                  <a:ext uri="{0D108BD9-81ED-4DB2-BD59-A6C34878D82A}">
-                    <a16:rowId xmlns:a16="http://schemas.microsoft.com/office/drawing/2014/main" val="1673618146"/>
-                  </a:ext>
-                </a:extLst>
-              </a:tr>
-              <a:tr h="265016">
-                <a:tc>
-                  <a:txBody>
-                    <a:bodyPr/>
-                    <a:lstStyle/>
-                    <a:p>
-                      <a:r>
-                        <a:rPr lang="en-US" sz="1400"/>
-                        <a:t>T1</a:t>
-                      </a:r>
-                    </a:p>
-                  </a:txBody>
-                  <a:tcPr anchor="ctr"/>
-                </a:tc>
-                <a:tc>
-                  <a:txBody>
-                    <a:bodyPr/>
-                    <a:lstStyle/>
-                    <a:p>
-                      <a:r>
-                        <a:rPr lang="en-US" sz="1400" dirty="0"/>
-                        <a:t>{Bread, Milk, Eggs}</a:t>
-                      </a:r>
-                    </a:p>
-                  </a:txBody>
-                  <a:tcPr anchor="ctr"/>
-                </a:tc>
-                <a:extLst>
-                  <a:ext uri="{0D108BD9-81ED-4DB2-BD59-A6C34878D82A}">
-                    <a16:rowId xmlns:a16="http://schemas.microsoft.com/office/drawing/2014/main" val="2659284684"/>
-                  </a:ext>
-                </a:extLst>
-              </a:tr>
-              <a:tr h="265016">
-                <a:tc>
-                  <a:txBody>
-                    <a:bodyPr/>
-                    <a:lstStyle/>
-                    <a:p>
-                      <a:r>
-                        <a:rPr lang="en-US" sz="1400"/>
-                        <a:t>T2</a:t>
-                      </a:r>
-                    </a:p>
-                  </a:txBody>
-                  <a:tcPr anchor="ctr"/>
-                </a:tc>
-                <a:tc>
-                  <a:txBody>
-                    <a:bodyPr/>
-                    <a:lstStyle/>
-                    <a:p>
-                      <a:r>
-                        <a:rPr lang="en-US" sz="1400" dirty="0"/>
-                        <a:t>{Bread, Butter, Cheese}</a:t>
-                      </a:r>
-                    </a:p>
-                  </a:txBody>
-                  <a:tcPr anchor="ctr"/>
-                </a:tc>
-                <a:extLst>
-                  <a:ext uri="{0D108BD9-81ED-4DB2-BD59-A6C34878D82A}">
-                    <a16:rowId xmlns:a16="http://schemas.microsoft.com/office/drawing/2014/main" val="3004706385"/>
-                  </a:ext>
-                </a:extLst>
-              </a:tr>
-              <a:tr h="265016">
-                <a:tc>
-                  <a:txBody>
-                    <a:bodyPr/>
-                    <a:lstStyle/>
-                    <a:p>
-                      <a:r>
-                        <a:rPr lang="en-US" sz="1400"/>
-                        <a:t>T3</a:t>
-                      </a:r>
-                    </a:p>
-                  </a:txBody>
-                  <a:tcPr anchor="ctr"/>
-                </a:tc>
-                <a:tc>
-                  <a:txBody>
-                    <a:bodyPr/>
-                    <a:lstStyle/>
-                    <a:p>
-                      <a:r>
-                        <a:rPr lang="en-US" sz="1400"/>
-                        <a:t>{Milk, Butter, Cheese, Yogurt}</a:t>
-                      </a:r>
-                    </a:p>
-                  </a:txBody>
-                  <a:tcPr anchor="ctr"/>
-                </a:tc>
-                <a:extLst>
-                  <a:ext uri="{0D108BD9-81ED-4DB2-BD59-A6C34878D82A}">
-                    <a16:rowId xmlns:a16="http://schemas.microsoft.com/office/drawing/2014/main" val="4250415316"/>
-                  </a:ext>
-                </a:extLst>
-              </a:tr>
-              <a:tr h="265016">
-                <a:tc>
-                  <a:txBody>
-                    <a:bodyPr/>
-                    <a:lstStyle/>
-                    <a:p>
-                      <a:r>
-                        <a:rPr lang="en-US" sz="1400"/>
-                        <a:t>T4</a:t>
-                      </a:r>
-                    </a:p>
-                  </a:txBody>
-                  <a:tcPr anchor="ctr"/>
-                </a:tc>
-                <a:tc>
-                  <a:txBody>
-                    <a:bodyPr/>
-                    <a:lstStyle/>
-                    <a:p>
-                      <a:r>
-                        <a:rPr lang="en-US" sz="1400"/>
-                        <a:t>{Bread, Milk, Butter}</a:t>
-                      </a:r>
-                    </a:p>
-                  </a:txBody>
-                  <a:tcPr anchor="ctr"/>
-                </a:tc>
-                <a:extLst>
-                  <a:ext uri="{0D108BD9-81ED-4DB2-BD59-A6C34878D82A}">
-                    <a16:rowId xmlns:a16="http://schemas.microsoft.com/office/drawing/2014/main" val="709021022"/>
-                  </a:ext>
-                </a:extLst>
-              </a:tr>
-              <a:tr h="265016">
-                <a:tc>
-                  <a:txBody>
-                    <a:bodyPr/>
-                    <a:lstStyle/>
-                    <a:p>
-                      <a:r>
-                        <a:rPr lang="en-US" sz="1400"/>
-                        <a:t>T5</a:t>
-                      </a:r>
-                    </a:p>
-                  </a:txBody>
-                  <a:tcPr anchor="ctr"/>
-                </a:tc>
-                <a:tc>
-                  <a:txBody>
-                    <a:bodyPr/>
-                    <a:lstStyle/>
-                    <a:p>
-                      <a:r>
-                        <a:rPr lang="en-US" sz="1400"/>
-                        <a:t>{Bread, Milk, Eggs, Cheese}</a:t>
-                      </a:r>
-                    </a:p>
-                  </a:txBody>
-                  <a:tcPr anchor="ctr"/>
-                </a:tc>
-                <a:extLst>
-                  <a:ext uri="{0D108BD9-81ED-4DB2-BD59-A6C34878D82A}">
-                    <a16:rowId xmlns:a16="http://schemas.microsoft.com/office/drawing/2014/main" val="513921480"/>
-                  </a:ext>
-                </a:extLst>
-              </a:tr>
-              <a:tr h="265016">
-                <a:tc>
-                  <a:txBody>
-                    <a:bodyPr/>
-                    <a:lstStyle/>
-                    <a:p>
-                      <a:r>
-                        <a:rPr lang="en-US" sz="1400"/>
-                        <a:t>T6</a:t>
-                      </a:r>
-                    </a:p>
-                  </a:txBody>
-                  <a:tcPr anchor="ctr"/>
-                </a:tc>
-                <a:tc>
-                  <a:txBody>
-                    <a:bodyPr/>
-                    <a:lstStyle/>
-                    <a:p>
-                      <a:r>
-                        <a:rPr lang="en-US" sz="1400"/>
-                        <a:t>{Butter, Cheese, Yogurt}</a:t>
-                      </a:r>
-                    </a:p>
-                  </a:txBody>
-                  <a:tcPr anchor="ctr"/>
-                </a:tc>
-                <a:extLst>
-                  <a:ext uri="{0D108BD9-81ED-4DB2-BD59-A6C34878D82A}">
-                    <a16:rowId xmlns:a16="http://schemas.microsoft.com/office/drawing/2014/main" val="1752320554"/>
-                  </a:ext>
-                </a:extLst>
-              </a:tr>
-              <a:tr h="265016">
-                <a:tc>
-                  <a:txBody>
-                    <a:bodyPr/>
-                    <a:lstStyle/>
-                    <a:p>
-                      <a:r>
-                        <a:rPr lang="en-US" sz="1400"/>
-                        <a:t>T7</a:t>
-                      </a:r>
-                    </a:p>
-                  </a:txBody>
-                  <a:tcPr anchor="ctr"/>
-                </a:tc>
-                <a:tc>
-                  <a:txBody>
-                    <a:bodyPr/>
-                    <a:lstStyle/>
-                    <a:p>
-                      <a:r>
-                        <a:rPr lang="en-US" sz="1400"/>
-                        <a:t>{Bread, Butter, Eggs}</a:t>
-                      </a:r>
-                    </a:p>
-                  </a:txBody>
-                  <a:tcPr anchor="ctr"/>
-                </a:tc>
-                <a:extLst>
-                  <a:ext uri="{0D108BD9-81ED-4DB2-BD59-A6C34878D82A}">
-                    <a16:rowId xmlns:a16="http://schemas.microsoft.com/office/drawing/2014/main" val="1504799868"/>
-                  </a:ext>
-                </a:extLst>
-              </a:tr>
-              <a:tr h="265016">
-                <a:tc>
-                  <a:txBody>
-                    <a:bodyPr/>
-                    <a:lstStyle/>
-                    <a:p>
-                      <a:r>
-                        <a:rPr lang="en-US" sz="1400" dirty="0"/>
-                        <a:t>T8</a:t>
-                      </a:r>
-                    </a:p>
-                  </a:txBody>
-                  <a:tcPr anchor="ctr"/>
-                </a:tc>
-                <a:tc>
-                  <a:txBody>
-                    <a:bodyPr/>
-                    <a:lstStyle/>
-                    <a:p>
-                      <a:r>
-                        <a:rPr lang="en-US" sz="1400"/>
-                        <a:t>{Milk, Cheese, Yogurt}</a:t>
-                      </a:r>
-                    </a:p>
-                  </a:txBody>
-                  <a:tcPr anchor="ctr"/>
-                </a:tc>
-                <a:extLst>
-                  <a:ext uri="{0D108BD9-81ED-4DB2-BD59-A6C34878D82A}">
-                    <a16:rowId xmlns:a16="http://schemas.microsoft.com/office/drawing/2014/main" val="4252743236"/>
-                  </a:ext>
-                </a:extLst>
-              </a:tr>
-              <a:tr h="265016">
-                <a:tc>
-                  <a:txBody>
-                    <a:bodyPr/>
-                    <a:lstStyle/>
-                    <a:p>
-                      <a:r>
-                        <a:rPr lang="en-US" sz="1400"/>
-                        <a:t>T9</a:t>
-                      </a:r>
-                    </a:p>
-                  </a:txBody>
-                  <a:tcPr anchor="ctr"/>
-                </a:tc>
-                <a:tc>
-                  <a:txBody>
-                    <a:bodyPr/>
-                    <a:lstStyle/>
-                    <a:p>
-                      <a:r>
-                        <a:rPr lang="en-US" sz="1400"/>
-                        <a:t>{Bread, Milk, Butter, Cheese}</a:t>
-                      </a:r>
-                    </a:p>
-                  </a:txBody>
-                  <a:tcPr anchor="ctr"/>
-                </a:tc>
-                <a:extLst>
-                  <a:ext uri="{0D108BD9-81ED-4DB2-BD59-A6C34878D82A}">
-                    <a16:rowId xmlns:a16="http://schemas.microsoft.com/office/drawing/2014/main" val="3595114685"/>
-                  </a:ext>
-                </a:extLst>
-              </a:tr>
-              <a:tr h="265016">
-                <a:tc>
-                  <a:txBody>
-                    <a:bodyPr/>
-                    <a:lstStyle/>
-                    <a:p>
-                      <a:r>
-                        <a:rPr lang="en-US" sz="1400" dirty="0"/>
-                        <a:t>T10</a:t>
-                      </a:r>
-                    </a:p>
-                  </a:txBody>
-                  <a:tcPr anchor="ctr"/>
-                </a:tc>
-                <a:tc>
-                  <a:txBody>
-                    <a:bodyPr/>
-                    <a:lstStyle/>
-                    <a:p>
-                      <a:r>
-                        <a:rPr lang="en-US" sz="1400" dirty="0"/>
-                        <a:t>{Eggs, Cheese, Yogurt}</a:t>
-                      </a:r>
-                    </a:p>
-                  </a:txBody>
-                  <a:tcPr anchor="ctr"/>
-                </a:tc>
-                <a:extLst>
-                  <a:ext uri="{0D108BD9-81ED-4DB2-BD59-A6C34878D82A}">
-                    <a16:rowId xmlns:a16="http://schemas.microsoft.com/office/drawing/2014/main" val="2577148015"/>
-                  </a:ext>
-                </a:extLst>
-              </a:tr>
-            </a:tbl>
-          </a:graphicData>
-        </a:graphic>
-      </p:graphicFrame>
-    </p:spTree>
-    <p:extLst>
-      <p:ext uri="{BB962C8B-B14F-4D97-AF65-F5344CB8AC3E}">
-        <p14:creationId xmlns:p14="http://schemas.microsoft.com/office/powerpoint/2010/main" val="2300690374"/>
-      </p:ext>
-    </p:extLst>
-  </p:cSld>
-  <p:clrMapOvr>
-    <a:masterClrMapping/>
-  </p:clrMapOvr>
-</p:sld>
-</file>
-
-<file path=ppt/slides/slide8.xml><?xml version="1.0" encoding="utf-8"?>
-<p:sld xmlns:a="http://schemas.openxmlformats.org/drawingml/2006/main" xmlns:r="http://schemas.openxmlformats.org/officeDocument/2006/relationships" xmlns:p="http://schemas.openxmlformats.org/presentationml/2006/main">
-  <p:cSld>
-    <p:spTree>
-      <p:nvGrpSpPr>
-        <p:cNvPr id="1" name="">
-          <a:extLst>
-            <a:ext uri="{FF2B5EF4-FFF2-40B4-BE49-F238E27FC236}">
-              <a16:creationId xmlns:a16="http://schemas.microsoft.com/office/drawing/2014/main" id="{8793F8EC-0EEF-A176-6F36-0000E7B041B0}"/>
-            </a:ext>
-          </a:extLst>
-        </p:cNvPr>
-        <p:cNvGrpSpPr/>
-        <p:nvPr/>
-      </p:nvGrpSpPr>
-      <p:grpSpPr>
-        <a:xfrm>
-          <a:off x="0" y="0"/>
-          <a:ext cx="0" cy="0"/>
-          <a:chOff x="0" y="0"/>
-          <a:chExt cx="0" cy="0"/>
-        </a:xfrm>
-      </p:grpSpPr>
-      <p:sp>
-        <p:nvSpPr>
-          <p:cNvPr id="2" name="Title 1">
-            <a:extLst>
-              <a:ext uri="{FF2B5EF4-FFF2-40B4-BE49-F238E27FC236}">
-                <a16:creationId xmlns:a16="http://schemas.microsoft.com/office/drawing/2014/main" id="{163126A9-D3F8-DC06-88FF-45B2662539BD}"/>
-              </a:ext>
-            </a:extLst>
-          </p:cNvPr>
-          <p:cNvSpPr>
-            <a:spLocks noGrp="1"/>
-          </p:cNvSpPr>
-          <p:nvPr>
-            <p:ph type="title"/>
-          </p:nvPr>
-        </p:nvSpPr>
-        <p:spPr/>
         <p:txBody>
           <a:bodyPr>
             <a:normAutofit/>
           </a:bodyPr>
           <a:lstStyle/>
           <a:p>
-            <a:r>
-              <a:rPr lang="en-US" dirty="0"/>
-              <a:t>The Problem with Confidence Alone</a:t>
-            </a:r>
+            <a:pPr marL="0" indent="0">
+              <a:buNone/>
+            </a:pPr>
+            <a:r>
+              <a:rPr lang="en-US" sz="1600" dirty="0"/>
+              <a:t>Therefore, Diapers </a:t>
+            </a:r>
+            <a:r>
+              <a:rPr lang="en-US" sz="1600" dirty="0">
+                <a:sym typeface="Wingdings" panose="05000000000000000000" pitchFamily="2" charset="2"/>
+              </a:rPr>
+              <a:t> Milk is the rule that we should select</a:t>
+            </a:r>
+            <a:endParaRPr lang="en-US" sz="1600" dirty="0"/>
           </a:p>
         </p:txBody>
       </p:sp>
-      <p:sp>
-        <p:nvSpPr>
-          <p:cNvPr id="3" name="Content Placeholder 2">
+      <p:pic>
+        <p:nvPicPr>
+          <p:cNvPr id="5" name="Picture 4">
             <a:extLst>
               <a:ext uri="{FF2B5EF4-FFF2-40B4-BE49-F238E27FC236}">
-                <a16:creationId xmlns:a16="http://schemas.microsoft.com/office/drawing/2014/main" id="{57B2DD35-2E22-4FDD-96C0-AE3E993C2920}"/>
+                <a16:creationId xmlns:a16="http://schemas.microsoft.com/office/drawing/2014/main" id="{6593D4BD-EB64-CE6E-FAC3-571FA0C7A579}"/>
               </a:ext>
             </a:extLst>
           </p:cNvPr>
-          <p:cNvSpPr>
-            <a:spLocks noGrp="1"/>
-          </p:cNvSpPr>
-          <p:nvPr>
-            <p:ph idx="1"/>
-          </p:nvPr>
-        </p:nvSpPr>
-        <p:spPr/>
-        <p:txBody>
-          <a:bodyPr/>
-          <a:lstStyle/>
-          <a:p>
-            <a:pPr marL="0" indent="0">
-              <a:buNone/>
-            </a:pPr>
-            <a:r>
-              <a:rPr lang="en-US" b="1" dirty="0"/>
-              <a:t>Misleading High Confidence Example</a:t>
-            </a:r>
-          </a:p>
-          <a:p>
-            <a:r>
-              <a:rPr lang="en-US" sz="2000" dirty="0">
-                <a:solidFill>
-                  <a:srgbClr val="0070C0"/>
-                </a:solidFill>
-              </a:rPr>
-              <a:t>{Eggs} → {Cheese}: Support({Eggs, Cheese}) = 2/10 = 20% Support({Eggs}) = 4/10 = 40% Confidence = 20% / 40% = 50%</a:t>
-            </a:r>
-          </a:p>
-          <a:p>
-            <a:pPr marL="0" indent="0">
-              <a:buNone/>
-            </a:pPr>
-            <a:r>
-              <a:rPr lang="en-US" b="1" dirty="0"/>
-              <a:t>Seems reasonable, but...</a:t>
-            </a:r>
-          </a:p>
-          <a:p>
-            <a:r>
-              <a:rPr lang="en-US" dirty="0"/>
-              <a:t>Overall popularity of Cheese = Support({Cheese}) = 60%</a:t>
-            </a:r>
-          </a:p>
-          <a:p>
-            <a:pPr marL="0" indent="0">
-              <a:buNone/>
-            </a:pPr>
-            <a:r>
-              <a:rPr lang="en-US" b="1" dirty="0"/>
-              <a:t>The Problem</a:t>
-            </a:r>
-          </a:p>
-          <a:p>
-            <a:r>
-              <a:rPr lang="en-US" b="1" dirty="0"/>
-              <a:t>Confidence:</a:t>
-            </a:r>
-            <a:r>
-              <a:rPr lang="en-US" dirty="0"/>
-              <a:t> 50% of eggs buyers buy cheese</a:t>
-            </a:r>
-          </a:p>
-          <a:p>
-            <a:r>
-              <a:rPr lang="en-US" b="1" dirty="0"/>
-              <a:t>Reality:</a:t>
-            </a:r>
-            <a:r>
-              <a:rPr lang="en-US" dirty="0"/>
-              <a:t> 60% of ALL customers buy cheese</a:t>
-            </a:r>
-          </a:p>
-          <a:p>
-            <a:r>
-              <a:rPr lang="en-US" b="1" dirty="0"/>
-              <a:t>Truth:</a:t>
-            </a:r>
-            <a:r>
-              <a:rPr lang="en-US" dirty="0"/>
-              <a:t> Buying eggs actually DECREASES cheese probability!</a:t>
-            </a:r>
-          </a:p>
-          <a:p>
-            <a:pPr marL="0" indent="0">
-              <a:buNone/>
-            </a:pPr>
-            <a:r>
-              <a:rPr lang="en-US" b="1" dirty="0"/>
-              <a:t>This is where LIFT comes to the rescue!</a:t>
-            </a:r>
-          </a:p>
-          <a:p>
-            <a:endParaRPr lang="en-US" dirty="0"/>
-          </a:p>
-        </p:txBody>
-      </p:sp>
+          <p:cNvPicPr>
+            <a:picLocks noChangeAspect="1"/>
+          </p:cNvPicPr>
+          <p:nvPr/>
+        </p:nvPicPr>
+        <p:blipFill>
+          <a:blip r:embed="rId2"/>
+          <a:stretch>
+            <a:fillRect/>
+          </a:stretch>
+        </p:blipFill>
+        <p:spPr>
+          <a:xfrm>
+            <a:off x="838200" y="1635013"/>
+            <a:ext cx="5393642" cy="4500117"/>
+          </a:xfrm>
+          <a:prstGeom prst="rect">
+            <a:avLst/>
+          </a:prstGeom>
+        </p:spPr>
+      </p:pic>
     </p:spTree>
     <p:extLst>
       <p:ext uri="{BB962C8B-B14F-4D97-AF65-F5344CB8AC3E}">
-        <p14:creationId xmlns:p14="http://schemas.microsoft.com/office/powerpoint/2010/main" val="3951544621"/>
-      </p:ext>
-    </p:extLst>
-  </p:cSld>
-  <p:clrMapOvr>
-    <a:masterClrMapping/>
-  </p:clrMapOvr>
-</p:sld>
-</file>
-
-<file path=ppt/slides/slide9.xml><?xml version="1.0" encoding="utf-8"?>
-<p:sld xmlns:a="http://schemas.openxmlformats.org/drawingml/2006/main" xmlns:r="http://schemas.openxmlformats.org/officeDocument/2006/relationships" xmlns:p="http://schemas.openxmlformats.org/presentationml/2006/main">
-  <p:cSld>
-    <p:spTree>
-      <p:nvGrpSpPr>
-        <p:cNvPr id="1" name="">
-          <a:extLst>
-            <a:ext uri="{FF2B5EF4-FFF2-40B4-BE49-F238E27FC236}">
-              <a16:creationId xmlns:a16="http://schemas.microsoft.com/office/drawing/2014/main" id="{B80C82C4-6666-1AFF-E156-4193982AF824}"/>
-            </a:ext>
-          </a:extLst>
-        </p:cNvPr>
-        <p:cNvGrpSpPr/>
-        <p:nvPr/>
-      </p:nvGrpSpPr>
-      <p:grpSpPr>
-        <a:xfrm>
-          <a:off x="0" y="0"/>
-          <a:ext cx="0" cy="0"/>
-          <a:chOff x="0" y="0"/>
-          <a:chExt cx="0" cy="0"/>
-        </a:xfrm>
-      </p:grpSpPr>
-      <p:sp>
-        <p:nvSpPr>
-          <p:cNvPr id="2" name="Title 1">
-            <a:extLst>
-              <a:ext uri="{FF2B5EF4-FFF2-40B4-BE49-F238E27FC236}">
-                <a16:creationId xmlns:a16="http://schemas.microsoft.com/office/drawing/2014/main" id="{0BFAF723-5FE2-CD30-E628-7E6F38D6C3AB}"/>
-              </a:ext>
-            </a:extLst>
-          </p:cNvPr>
-          <p:cNvSpPr>
-            <a:spLocks noGrp="1"/>
-          </p:cNvSpPr>
-          <p:nvPr>
-            <p:ph type="title"/>
-          </p:nvPr>
-        </p:nvSpPr>
-        <p:spPr/>
-        <p:txBody>
-          <a:bodyPr>
-            <a:normAutofit/>
-          </a:bodyPr>
-          <a:lstStyle/>
-          <a:p>
-            <a:r>
-              <a:rPr lang="en-US" dirty="0"/>
-              <a:t>Lift - "Is This Really Meaningful?"</a:t>
-            </a:r>
-          </a:p>
-        </p:txBody>
-      </p:sp>
-      <p:sp>
-        <p:nvSpPr>
-          <p:cNvPr id="3" name="Content Placeholder 2">
-            <a:extLst>
-              <a:ext uri="{FF2B5EF4-FFF2-40B4-BE49-F238E27FC236}">
-                <a16:creationId xmlns:a16="http://schemas.microsoft.com/office/drawing/2014/main" id="{18A30A43-4203-4089-7D6B-E98B5E65891F}"/>
-              </a:ext>
-            </a:extLst>
-          </p:cNvPr>
-          <p:cNvSpPr>
-            <a:spLocks noGrp="1"/>
-          </p:cNvSpPr>
-          <p:nvPr>
-            <p:ph idx="1"/>
-          </p:nvPr>
-        </p:nvSpPr>
-        <p:spPr/>
-        <p:txBody>
-          <a:bodyPr>
-            <a:normAutofit fontScale="92500" lnSpcReduction="20000"/>
-          </a:bodyPr>
-          <a:lstStyle/>
-          <a:p>
-            <a:pPr marL="0" indent="0">
-              <a:buNone/>
-            </a:pPr>
-            <a:r>
-              <a:rPr lang="en-US" b="1" dirty="0"/>
-              <a:t>Definition</a:t>
-            </a:r>
-          </a:p>
-          <a:p>
-            <a:r>
-              <a:rPr lang="en-US" dirty="0"/>
-              <a:t>How much more likely is Y when X is present vs. Y's general popularity?</a:t>
-            </a:r>
-          </a:p>
-          <a:p>
-            <a:pPr marL="0" indent="0">
-              <a:buNone/>
-            </a:pPr>
-            <a:r>
-              <a:rPr lang="en-US" b="1" dirty="0"/>
-              <a:t>Formula</a:t>
-            </a:r>
-          </a:p>
-          <a:p>
-            <a:r>
-              <a:rPr lang="en-US" dirty="0"/>
-              <a:t>Lift(X → Y) = Confidence(X → Y) / Support(Y)</a:t>
-            </a:r>
-          </a:p>
-          <a:p>
-            <a:r>
-              <a:rPr lang="en-US" b="1" dirty="0"/>
-              <a:t>The Eggs → Cheese Example Revisited</a:t>
-            </a:r>
-          </a:p>
-          <a:p>
-            <a:r>
-              <a:rPr lang="en-US" dirty="0"/>
-              <a:t>Lift({Eggs} → {Cheese}) = 50% / 60% = 0.83</a:t>
-            </a:r>
-          </a:p>
-          <a:p>
-            <a:pPr marL="0" indent="0">
-              <a:buNone/>
-            </a:pPr>
-            <a:r>
-              <a:rPr lang="en-US" b="1" dirty="0"/>
-              <a:t>Interpretation</a:t>
-            </a:r>
-          </a:p>
-          <a:p>
-            <a:r>
-              <a:rPr lang="en-US" dirty="0"/>
-              <a:t>Lift = 1: Items A and B are independent (no association)</a:t>
-            </a:r>
-          </a:p>
-          <a:p>
-            <a:r>
-              <a:rPr lang="en-US" dirty="0"/>
-              <a:t>Lift &gt; 1: Items A and B are positively correlated (they appear together more than expected)</a:t>
-            </a:r>
-          </a:p>
-          <a:p>
-            <a:r>
-              <a:rPr lang="en-US" dirty="0"/>
-              <a:t>Lift &lt; 1: Items A and B are negatively correlated (they appear together less than expected)</a:t>
-            </a:r>
-          </a:p>
-          <a:p>
-            <a:pPr marL="0" indent="0">
-              <a:buNone/>
-            </a:pPr>
-            <a:r>
-              <a:rPr lang="en-US" b="1" dirty="0"/>
-              <a:t>Business Insight</a:t>
-            </a:r>
-          </a:p>
-          <a:p>
-            <a:r>
-              <a:rPr lang="en-US" b="1" dirty="0"/>
-              <a:t>Don't recommend cheese to eggs buyers - they're LESS likely to buy it!</a:t>
-            </a:r>
-            <a:endParaRPr lang="en-US" dirty="0"/>
-          </a:p>
-          <a:p>
-            <a:endParaRPr lang="en-US" dirty="0"/>
-          </a:p>
-        </p:txBody>
-      </p:sp>
-    </p:spTree>
-    <p:extLst>
-      <p:ext uri="{BB962C8B-B14F-4D97-AF65-F5344CB8AC3E}">
-        <p14:creationId xmlns:p14="http://schemas.microsoft.com/office/powerpoint/2010/main" val="3023457119"/>
+        <p14:creationId xmlns:p14="http://schemas.microsoft.com/office/powerpoint/2010/main" val="221849213"/>
       </p:ext>
     </p:extLst>
   </p:cSld>

--- a/20242/Part 4-Associatin Rules Mining/beta/4-1-association_rules_mining.pptx
+++ b/20242/Part 4-Associatin Rules Mining/beta/4-1-association_rules_mining.pptx
@@ -5,7 +5,7 @@
     <p:sldMasterId id="2147483648" r:id="rId1"/>
   </p:sldMasterIdLst>
   <p:notesMasterIdLst>
-    <p:notesMasterId r:id="rId31"/>
+    <p:notesMasterId r:id="rId32"/>
   </p:notesMasterIdLst>
   <p:sldIdLst>
     <p:sldId id="483" r:id="rId2"/>
@@ -17,26 +17,27 @@
     <p:sldId id="490" r:id="rId8"/>
     <p:sldId id="513" r:id="rId9"/>
     <p:sldId id="523" r:id="rId10"/>
-    <p:sldId id="517" r:id="rId11"/>
-    <p:sldId id="518" r:id="rId12"/>
-    <p:sldId id="515" r:id="rId13"/>
-    <p:sldId id="514" r:id="rId14"/>
-    <p:sldId id="516" r:id="rId15"/>
-    <p:sldId id="497" r:id="rId16"/>
-    <p:sldId id="498" r:id="rId17"/>
-    <p:sldId id="499" r:id="rId18"/>
-    <p:sldId id="500" r:id="rId19"/>
-    <p:sldId id="501" r:id="rId20"/>
-    <p:sldId id="502" r:id="rId21"/>
-    <p:sldId id="503" r:id="rId22"/>
-    <p:sldId id="504" r:id="rId23"/>
-    <p:sldId id="505" r:id="rId24"/>
-    <p:sldId id="506" r:id="rId25"/>
-    <p:sldId id="507" r:id="rId26"/>
-    <p:sldId id="508" r:id="rId27"/>
-    <p:sldId id="509" r:id="rId28"/>
-    <p:sldId id="510" r:id="rId29"/>
-    <p:sldId id="511" r:id="rId30"/>
+    <p:sldId id="524" r:id="rId11"/>
+    <p:sldId id="517" r:id="rId12"/>
+    <p:sldId id="518" r:id="rId13"/>
+    <p:sldId id="515" r:id="rId14"/>
+    <p:sldId id="514" r:id="rId15"/>
+    <p:sldId id="516" r:id="rId16"/>
+    <p:sldId id="497" r:id="rId17"/>
+    <p:sldId id="498" r:id="rId18"/>
+    <p:sldId id="499" r:id="rId19"/>
+    <p:sldId id="500" r:id="rId20"/>
+    <p:sldId id="501" r:id="rId21"/>
+    <p:sldId id="502" r:id="rId22"/>
+    <p:sldId id="503" r:id="rId23"/>
+    <p:sldId id="504" r:id="rId24"/>
+    <p:sldId id="505" r:id="rId25"/>
+    <p:sldId id="506" r:id="rId26"/>
+    <p:sldId id="507" r:id="rId27"/>
+    <p:sldId id="508" r:id="rId28"/>
+    <p:sldId id="509" r:id="rId29"/>
+    <p:sldId id="510" r:id="rId30"/>
+    <p:sldId id="511" r:id="rId31"/>
   </p:sldIdLst>
   <p:sldSz cx="12192000" cy="6858000"/>
   <p:notesSz cx="6858000" cy="9144000"/>
@@ -152,13 +153,1254 @@
 <file path=ppt/revisionInfo.xml><?xml version="1.0" encoding="utf-8"?>
 <p1510:revInfo xmlns:a="http://schemas.openxmlformats.org/drawingml/2006/main" xmlns:r="http://schemas.openxmlformats.org/officeDocument/2006/relationships" xmlns:p1510="http://schemas.microsoft.com/office/powerpoint/2015/10/main">
   <p1510:revLst>
-    <p1510:client id="{7E2E8029-2718-4E74-A1E0-5ED48AB79672}" v="196" dt="2025-06-07T08:51:04.461"/>
+    <p1510:client id="{5A53F68D-5D62-2F91-0C34-5AF0710613BB}" v="270" dt="2025-06-18T07:34:46.145"/>
   </p1510:revLst>
 </p1510:revInfo>
 </file>
 
 <file path=ppt/changesInfos/changesInfo1.xml><?xml version="1.0" encoding="utf-8"?>
 <pc:chgInfo xmlns:a="http://schemas.openxmlformats.org/drawingml/2006/main" xmlns:r="http://schemas.openxmlformats.org/officeDocument/2006/relationships" xmlns:ac="http://schemas.microsoft.com/office/drawing/2013/main/command" xmlns:pc="http://schemas.microsoft.com/office/powerpoint/2013/main/command">
+  <pc:docChgLst>
+    <pc:chgData name="Mohammed Fasha" userId="cc64f42d-a1a6-4f08-b97b-0c37f877119f" providerId="ADAL" clId="{BECD4A7F-C1AF-4585-8C31-FE7D4FE3ED16}"/>
+    <pc:docChg chg="undo redo custSel addSld delSld modSld sldOrd">
+      <pc:chgData name="Mohammed Fasha" userId="cc64f42d-a1a6-4f08-b97b-0c37f877119f" providerId="ADAL" clId="{BECD4A7F-C1AF-4585-8C31-FE7D4FE3ED16}" dt="2025-01-05T16:36:16.605" v="1945" actId="1076"/>
+      <pc:docMkLst>
+        <pc:docMk/>
+      </pc:docMkLst>
+      <pc:sldChg chg="modSp mod">
+        <pc:chgData name="Mohammed Fasha" userId="cc64f42d-a1a6-4f08-b97b-0c37f877119f" providerId="ADAL" clId="{BECD4A7F-C1AF-4585-8C31-FE7D4FE3ED16}" dt="2024-12-30T18:47:27.683" v="988" actId="20577"/>
+        <pc:sldMkLst>
+          <pc:docMk/>
+          <pc:sldMk cId="2281221656" sldId="527"/>
+        </pc:sldMkLst>
+      </pc:sldChg>
+      <pc:sldChg chg="modSp mod">
+        <pc:chgData name="Mohammed Fasha" userId="cc64f42d-a1a6-4f08-b97b-0c37f877119f" providerId="ADAL" clId="{BECD4A7F-C1AF-4585-8C31-FE7D4FE3ED16}" dt="2024-12-27T13:59:26.893" v="366" actId="20577"/>
+        <pc:sldMkLst>
+          <pc:docMk/>
+          <pc:sldMk cId="3474268344" sldId="596"/>
+        </pc:sldMkLst>
+      </pc:sldChg>
+      <pc:sldChg chg="modSp mod">
+        <pc:chgData name="Mohammed Fasha" userId="cc64f42d-a1a6-4f08-b97b-0c37f877119f" providerId="ADAL" clId="{BECD4A7F-C1AF-4585-8C31-FE7D4FE3ED16}" dt="2024-12-30T18:44:34.649" v="884" actId="20577"/>
+        <pc:sldMkLst>
+          <pc:docMk/>
+          <pc:sldMk cId="916802035" sldId="651"/>
+        </pc:sldMkLst>
+      </pc:sldChg>
+      <pc:sldChg chg="del">
+        <pc:chgData name="Mohammed Fasha" userId="cc64f42d-a1a6-4f08-b97b-0c37f877119f" providerId="ADAL" clId="{BECD4A7F-C1AF-4585-8C31-FE7D4FE3ED16}" dt="2025-01-05T14:42:38.675" v="989" actId="2696"/>
+        <pc:sldMkLst>
+          <pc:docMk/>
+          <pc:sldMk cId="426516858" sldId="662"/>
+        </pc:sldMkLst>
+      </pc:sldChg>
+      <pc:sldChg chg="modSp add del mod">
+        <pc:chgData name="Mohammed Fasha" userId="cc64f42d-a1a6-4f08-b97b-0c37f877119f" providerId="ADAL" clId="{BECD4A7F-C1AF-4585-8C31-FE7D4FE3ED16}" dt="2025-01-05T16:34:59.233" v="1926" actId="20577"/>
+        <pc:sldMkLst>
+          <pc:docMk/>
+          <pc:sldMk cId="691538069" sldId="662"/>
+        </pc:sldMkLst>
+      </pc:sldChg>
+      <pc:sldChg chg="del">
+        <pc:chgData name="Mohammed Fasha" userId="cc64f42d-a1a6-4f08-b97b-0c37f877119f" providerId="ADAL" clId="{BECD4A7F-C1AF-4585-8C31-FE7D4FE3ED16}" dt="2025-01-05T14:42:38.675" v="989" actId="2696"/>
+        <pc:sldMkLst>
+          <pc:docMk/>
+          <pc:sldMk cId="895445062" sldId="663"/>
+        </pc:sldMkLst>
+      </pc:sldChg>
+      <pc:sldChg chg="add del">
+        <pc:chgData name="Mohammed Fasha" userId="cc64f42d-a1a6-4f08-b97b-0c37f877119f" providerId="ADAL" clId="{BECD4A7F-C1AF-4585-8C31-FE7D4FE3ED16}" dt="2025-01-05T14:43:16.100" v="993" actId="2696"/>
+        <pc:sldMkLst>
+          <pc:docMk/>
+          <pc:sldMk cId="3980180774" sldId="663"/>
+        </pc:sldMkLst>
+      </pc:sldChg>
+      <pc:sldChg chg="add del">
+        <pc:chgData name="Mohammed Fasha" userId="cc64f42d-a1a6-4f08-b97b-0c37f877119f" providerId="ADAL" clId="{BECD4A7F-C1AF-4585-8C31-FE7D4FE3ED16}" dt="2025-01-05T14:43:16.100" v="993" actId="2696"/>
+        <pc:sldMkLst>
+          <pc:docMk/>
+          <pc:sldMk cId="1728680596" sldId="664"/>
+        </pc:sldMkLst>
+      </pc:sldChg>
+      <pc:sldChg chg="del">
+        <pc:chgData name="Mohammed Fasha" userId="cc64f42d-a1a6-4f08-b97b-0c37f877119f" providerId="ADAL" clId="{BECD4A7F-C1AF-4585-8C31-FE7D4FE3ED16}" dt="2025-01-05T14:42:38.675" v="989" actId="2696"/>
+        <pc:sldMkLst>
+          <pc:docMk/>
+          <pc:sldMk cId="3900588277" sldId="664"/>
+        </pc:sldMkLst>
+      </pc:sldChg>
+      <pc:sldChg chg="del">
+        <pc:chgData name="Mohammed Fasha" userId="cc64f42d-a1a6-4f08-b97b-0c37f877119f" providerId="ADAL" clId="{BECD4A7F-C1AF-4585-8C31-FE7D4FE3ED16}" dt="2025-01-05T14:42:38.675" v="989" actId="2696"/>
+        <pc:sldMkLst>
+          <pc:docMk/>
+          <pc:sldMk cId="123002105" sldId="665"/>
+        </pc:sldMkLst>
+      </pc:sldChg>
+      <pc:sldChg chg="modSp add del mod">
+        <pc:chgData name="Mohammed Fasha" userId="cc64f42d-a1a6-4f08-b97b-0c37f877119f" providerId="ADAL" clId="{BECD4A7F-C1AF-4585-8C31-FE7D4FE3ED16}" dt="2025-01-05T15:05:12.729" v="1226" actId="21"/>
+        <pc:sldMkLst>
+          <pc:docMk/>
+          <pc:sldMk cId="148099094" sldId="665"/>
+        </pc:sldMkLst>
+      </pc:sldChg>
+      <pc:sldChg chg="del">
+        <pc:chgData name="Mohammed Fasha" userId="cc64f42d-a1a6-4f08-b97b-0c37f877119f" providerId="ADAL" clId="{BECD4A7F-C1AF-4585-8C31-FE7D4FE3ED16}" dt="2025-01-05T14:42:38.675" v="989" actId="2696"/>
+        <pc:sldMkLst>
+          <pc:docMk/>
+          <pc:sldMk cId="659863378" sldId="676"/>
+        </pc:sldMkLst>
+      </pc:sldChg>
+      <pc:sldChg chg="modSp add del mod">
+        <pc:chgData name="Mohammed Fasha" userId="cc64f42d-a1a6-4f08-b97b-0c37f877119f" providerId="ADAL" clId="{BECD4A7F-C1AF-4585-8C31-FE7D4FE3ED16}" dt="2025-01-05T14:55:27.595" v="1130" actId="255"/>
+        <pc:sldMkLst>
+          <pc:docMk/>
+          <pc:sldMk cId="1577854815" sldId="676"/>
+        </pc:sldMkLst>
+      </pc:sldChg>
+      <pc:sldChg chg="modSp add del mod">
+        <pc:chgData name="Mohammed Fasha" userId="cc64f42d-a1a6-4f08-b97b-0c37f877119f" providerId="ADAL" clId="{BECD4A7F-C1AF-4585-8C31-FE7D4FE3ED16}" dt="2025-01-05T14:55:43.754" v="1132" actId="1076"/>
+        <pc:sldMkLst>
+          <pc:docMk/>
+          <pc:sldMk cId="139882925" sldId="677"/>
+        </pc:sldMkLst>
+      </pc:sldChg>
+      <pc:sldChg chg="del">
+        <pc:chgData name="Mohammed Fasha" userId="cc64f42d-a1a6-4f08-b97b-0c37f877119f" providerId="ADAL" clId="{BECD4A7F-C1AF-4585-8C31-FE7D4FE3ED16}" dt="2025-01-05T14:42:38.675" v="989" actId="2696"/>
+        <pc:sldMkLst>
+          <pc:docMk/>
+          <pc:sldMk cId="2736863534" sldId="677"/>
+        </pc:sldMkLst>
+      </pc:sldChg>
+      <pc:sldChg chg="add del">
+        <pc:chgData name="Mohammed Fasha" userId="cc64f42d-a1a6-4f08-b97b-0c37f877119f" providerId="ADAL" clId="{BECD4A7F-C1AF-4585-8C31-FE7D4FE3ED16}" dt="2025-01-05T14:43:16.100" v="993" actId="2696"/>
+        <pc:sldMkLst>
+          <pc:docMk/>
+          <pc:sldMk cId="4146654093" sldId="678"/>
+        </pc:sldMkLst>
+      </pc:sldChg>
+      <pc:sldChg chg="del">
+        <pc:chgData name="Mohammed Fasha" userId="cc64f42d-a1a6-4f08-b97b-0c37f877119f" providerId="ADAL" clId="{BECD4A7F-C1AF-4585-8C31-FE7D4FE3ED16}" dt="2025-01-05T14:42:38.675" v="989" actId="2696"/>
+        <pc:sldMkLst>
+          <pc:docMk/>
+          <pc:sldMk cId="4228312762" sldId="678"/>
+        </pc:sldMkLst>
+      </pc:sldChg>
+      <pc:sldChg chg="del">
+        <pc:chgData name="Mohammed Fasha" userId="cc64f42d-a1a6-4f08-b97b-0c37f877119f" providerId="ADAL" clId="{BECD4A7F-C1AF-4585-8C31-FE7D4FE3ED16}" dt="2025-01-05T14:42:38.675" v="989" actId="2696"/>
+        <pc:sldMkLst>
+          <pc:docMk/>
+          <pc:sldMk cId="581717462" sldId="679"/>
+        </pc:sldMkLst>
+      </pc:sldChg>
+      <pc:sldChg chg="addSp delSp modSp add del mod chgLayout">
+        <pc:chgData name="Mohammed Fasha" userId="cc64f42d-a1a6-4f08-b97b-0c37f877119f" providerId="ADAL" clId="{BECD4A7F-C1AF-4585-8C31-FE7D4FE3ED16}" dt="2025-01-05T16:36:16.605" v="1945" actId="1076"/>
+        <pc:sldMkLst>
+          <pc:docMk/>
+          <pc:sldMk cId="3454522070" sldId="679"/>
+        </pc:sldMkLst>
+      </pc:sldChg>
+      <pc:sldChg chg="add del">
+        <pc:chgData name="Mohammed Fasha" userId="cc64f42d-a1a6-4f08-b97b-0c37f877119f" providerId="ADAL" clId="{BECD4A7F-C1AF-4585-8C31-FE7D4FE3ED16}" dt="2025-01-05T14:43:16.100" v="993" actId="2696"/>
+        <pc:sldMkLst>
+          <pc:docMk/>
+          <pc:sldMk cId="2856814121" sldId="681"/>
+        </pc:sldMkLst>
+      </pc:sldChg>
+      <pc:sldChg chg="del">
+        <pc:chgData name="Mohammed Fasha" userId="cc64f42d-a1a6-4f08-b97b-0c37f877119f" providerId="ADAL" clId="{BECD4A7F-C1AF-4585-8C31-FE7D4FE3ED16}" dt="2025-01-05T14:42:38.675" v="989" actId="2696"/>
+        <pc:sldMkLst>
+          <pc:docMk/>
+          <pc:sldMk cId="3083966018" sldId="681"/>
+        </pc:sldMkLst>
+      </pc:sldChg>
+      <pc:sldChg chg="modSp mod">
+        <pc:chgData name="Mohammed Fasha" userId="cc64f42d-a1a6-4f08-b97b-0c37f877119f" providerId="ADAL" clId="{BECD4A7F-C1AF-4585-8C31-FE7D4FE3ED16}" dt="2025-01-05T14:42:50.596" v="990" actId="14100"/>
+        <pc:sldMkLst>
+          <pc:docMk/>
+          <pc:sldMk cId="1697141369" sldId="695"/>
+        </pc:sldMkLst>
+      </pc:sldChg>
+      <pc:sldChg chg="addSp delSp modSp add del mod">
+        <pc:chgData name="Mohammed Fasha" userId="cc64f42d-a1a6-4f08-b97b-0c37f877119f" providerId="ADAL" clId="{BECD4A7F-C1AF-4585-8C31-FE7D4FE3ED16}" dt="2025-01-05T14:54:31.375" v="1125" actId="14100"/>
+        <pc:sldMkLst>
+          <pc:docMk/>
+          <pc:sldMk cId="265576630" sldId="698"/>
+        </pc:sldMkLst>
+      </pc:sldChg>
+      <pc:sldChg chg="del">
+        <pc:chgData name="Mohammed Fasha" userId="cc64f42d-a1a6-4f08-b97b-0c37f877119f" providerId="ADAL" clId="{BECD4A7F-C1AF-4585-8C31-FE7D4FE3ED16}" dt="2025-01-05T14:42:38.675" v="989" actId="2696"/>
+        <pc:sldMkLst>
+          <pc:docMk/>
+          <pc:sldMk cId="991725834" sldId="698"/>
+        </pc:sldMkLst>
+      </pc:sldChg>
+      <pc:sldChg chg="del">
+        <pc:chgData name="Mohammed Fasha" userId="cc64f42d-a1a6-4f08-b97b-0c37f877119f" providerId="ADAL" clId="{BECD4A7F-C1AF-4585-8C31-FE7D4FE3ED16}" dt="2025-01-05T14:42:38.675" v="989" actId="2696"/>
+        <pc:sldMkLst>
+          <pc:docMk/>
+          <pc:sldMk cId="3109561867" sldId="700"/>
+        </pc:sldMkLst>
+      </pc:sldChg>
+      <pc:sldChg chg="addSp delSp modSp add del mod">
+        <pc:chgData name="Mohammed Fasha" userId="cc64f42d-a1a6-4f08-b97b-0c37f877119f" providerId="ADAL" clId="{BECD4A7F-C1AF-4585-8C31-FE7D4FE3ED16}" dt="2025-01-05T16:00:05.564" v="1529" actId="20577"/>
+        <pc:sldMkLst>
+          <pc:docMk/>
+          <pc:sldMk cId="4247717824" sldId="700"/>
+        </pc:sldMkLst>
+      </pc:sldChg>
+      <pc:sldChg chg="addSp delSp modSp add mod">
+        <pc:chgData name="Mohammed Fasha" userId="cc64f42d-a1a6-4f08-b97b-0c37f877119f" providerId="ADAL" clId="{BECD4A7F-C1AF-4585-8C31-FE7D4FE3ED16}" dt="2025-01-05T14:53:29.185" v="1101" actId="21"/>
+        <pc:sldMkLst>
+          <pc:docMk/>
+          <pc:sldMk cId="67871309" sldId="709"/>
+        </pc:sldMkLst>
+      </pc:sldChg>
+      <pc:sldChg chg="modSp add mod">
+        <pc:chgData name="Mohammed Fasha" userId="cc64f42d-a1a6-4f08-b97b-0c37f877119f" providerId="ADAL" clId="{BECD4A7F-C1AF-4585-8C31-FE7D4FE3ED16}" dt="2025-01-05T15:31:09.113" v="1385" actId="6549"/>
+        <pc:sldMkLst>
+          <pc:docMk/>
+          <pc:sldMk cId="4114896152" sldId="710"/>
+        </pc:sldMkLst>
+      </pc:sldChg>
+      <pc:sldChg chg="addSp modSp add mod">
+        <pc:chgData name="Mohammed Fasha" userId="cc64f42d-a1a6-4f08-b97b-0c37f877119f" providerId="ADAL" clId="{BECD4A7F-C1AF-4585-8C31-FE7D4FE3ED16}" dt="2025-01-05T15:27:36.027" v="1348" actId="20577"/>
+        <pc:sldMkLst>
+          <pc:docMk/>
+          <pc:sldMk cId="3794385322" sldId="711"/>
+        </pc:sldMkLst>
+      </pc:sldChg>
+      <pc:sldChg chg="add del">
+        <pc:chgData name="Mohammed Fasha" userId="cc64f42d-a1a6-4f08-b97b-0c37f877119f" providerId="ADAL" clId="{BECD4A7F-C1AF-4585-8C31-FE7D4FE3ED16}" dt="2025-01-05T14:57:43.613" v="1146" actId="2696"/>
+        <pc:sldMkLst>
+          <pc:docMk/>
+          <pc:sldMk cId="501127302" sldId="712"/>
+        </pc:sldMkLst>
+      </pc:sldChg>
+      <pc:sldChg chg="modSp add mod">
+        <pc:chgData name="Mohammed Fasha" userId="cc64f42d-a1a6-4f08-b97b-0c37f877119f" providerId="ADAL" clId="{BECD4A7F-C1AF-4585-8C31-FE7D4FE3ED16}" dt="2025-01-05T15:32:23.870" v="1388"/>
+        <pc:sldMkLst>
+          <pc:docMk/>
+          <pc:sldMk cId="3701206727" sldId="712"/>
+        </pc:sldMkLst>
+      </pc:sldChg>
+      <pc:sldChg chg="addSp modSp add mod">
+        <pc:chgData name="Mohammed Fasha" userId="cc64f42d-a1a6-4f08-b97b-0c37f877119f" providerId="ADAL" clId="{BECD4A7F-C1AF-4585-8C31-FE7D4FE3ED16}" dt="2025-01-05T16:06:36.028" v="1538" actId="1076"/>
+        <pc:sldMkLst>
+          <pc:docMk/>
+          <pc:sldMk cId="1499972066" sldId="713"/>
+        </pc:sldMkLst>
+      </pc:sldChg>
+      <pc:sldChg chg="addSp delSp modSp add mod">
+        <pc:chgData name="Mohammed Fasha" userId="cc64f42d-a1a6-4f08-b97b-0c37f877119f" providerId="ADAL" clId="{BECD4A7F-C1AF-4585-8C31-FE7D4FE3ED16}" dt="2025-01-05T16:19:08.436" v="1705" actId="1036"/>
+        <pc:sldMkLst>
+          <pc:docMk/>
+          <pc:sldMk cId="1270641495" sldId="714"/>
+        </pc:sldMkLst>
+      </pc:sldChg>
+      <pc:sldChg chg="addSp modSp new mod">
+        <pc:chgData name="Mohammed Fasha" userId="cc64f42d-a1a6-4f08-b97b-0c37f877119f" providerId="ADAL" clId="{BECD4A7F-C1AF-4585-8C31-FE7D4FE3ED16}" dt="2025-01-05T16:23:44.632" v="1736" actId="12"/>
+        <pc:sldMkLst>
+          <pc:docMk/>
+          <pc:sldMk cId="1096386322" sldId="715"/>
+        </pc:sldMkLst>
+      </pc:sldChg>
+      <pc:sldChg chg="modSp new mod">
+        <pc:chgData name="Mohammed Fasha" userId="cc64f42d-a1a6-4f08-b97b-0c37f877119f" providerId="ADAL" clId="{BECD4A7F-C1AF-4585-8C31-FE7D4FE3ED16}" dt="2025-01-05T16:34:02.360" v="1902" actId="27636"/>
+        <pc:sldMkLst>
+          <pc:docMk/>
+          <pc:sldMk cId="1784058309" sldId="716"/>
+        </pc:sldMkLst>
+      </pc:sldChg>
+      <pc:sldChg chg="modSp add mod ord">
+        <pc:chgData name="Mohammed Fasha" userId="cc64f42d-a1a6-4f08-b97b-0c37f877119f" providerId="ADAL" clId="{BECD4A7F-C1AF-4585-8C31-FE7D4FE3ED16}" dt="2025-01-05T16:27:20.520" v="1803"/>
+        <pc:sldMkLst>
+          <pc:docMk/>
+          <pc:sldMk cId="3139017106" sldId="717"/>
+        </pc:sldMkLst>
+      </pc:sldChg>
+      <pc:sldChg chg="addSp delSp modSp new mod">
+        <pc:chgData name="Mohammed Fasha" userId="cc64f42d-a1a6-4f08-b97b-0c37f877119f" providerId="ADAL" clId="{BECD4A7F-C1AF-4585-8C31-FE7D4FE3ED16}" dt="2025-01-05T16:32:45.446" v="1897" actId="20577"/>
+        <pc:sldMkLst>
+          <pc:docMk/>
+          <pc:sldMk cId="3043812923" sldId="718"/>
+        </pc:sldMkLst>
+      </pc:sldChg>
+    </pc:docChg>
+  </pc:docChgLst>
+  <pc:docChgLst>
+    <pc:chgData name="Mohammed Fasha" userId="S::mohammed.fasha@uop.edu.jo::cc64f42d-a1a6-4f08-b97b-0c37f877119f" providerId="AD" clId="Web-{5A53F68D-5D62-2F91-0C34-5AF0710613BB}"/>
+    <pc:docChg chg="addSld modSld">
+      <pc:chgData name="Mohammed Fasha" userId="S::mohammed.fasha@uop.edu.jo::cc64f42d-a1a6-4f08-b97b-0c37f877119f" providerId="AD" clId="Web-{5A53F68D-5D62-2F91-0C34-5AF0710613BB}" dt="2025-06-18T07:34:46.145" v="255" actId="20577"/>
+      <pc:docMkLst>
+        <pc:docMk/>
+      </pc:docMkLst>
+      <pc:sldChg chg="modSp">
+        <pc:chgData name="Mohammed Fasha" userId="S::mohammed.fasha@uop.edu.jo::cc64f42d-a1a6-4f08-b97b-0c37f877119f" providerId="AD" clId="Web-{5A53F68D-5D62-2F91-0C34-5AF0710613BB}" dt="2025-06-18T07:34:46.145" v="255" actId="20577"/>
+        <pc:sldMkLst>
+          <pc:docMk/>
+          <pc:sldMk cId="1855355283" sldId="498"/>
+        </pc:sldMkLst>
+        <pc:spChg chg="mod">
+          <ac:chgData name="Mohammed Fasha" userId="S::mohammed.fasha@uop.edu.jo::cc64f42d-a1a6-4f08-b97b-0c37f877119f" providerId="AD" clId="Web-{5A53F68D-5D62-2F91-0C34-5AF0710613BB}" dt="2025-06-18T07:34:46.145" v="255" actId="20577"/>
+          <ac:spMkLst>
+            <pc:docMk/>
+            <pc:sldMk cId="1855355283" sldId="498"/>
+            <ac:spMk id="3" creationId="{EE397667-A7E4-7E53-67C9-F8B9D8DAF6D5}"/>
+          </ac:spMkLst>
+        </pc:spChg>
+      </pc:sldChg>
+      <pc:sldChg chg="modSp">
+        <pc:chgData name="Mohammed Fasha" userId="S::mohammed.fasha@uop.edu.jo::cc64f42d-a1a6-4f08-b97b-0c37f877119f" providerId="AD" clId="Web-{5A53F68D-5D62-2F91-0C34-5AF0710613BB}" dt="2025-06-18T07:33:42.518" v="245" actId="20577"/>
+        <pc:sldMkLst>
+          <pc:docMk/>
+          <pc:sldMk cId="3589465999" sldId="514"/>
+        </pc:sldMkLst>
+        <pc:spChg chg="mod">
+          <ac:chgData name="Mohammed Fasha" userId="S::mohammed.fasha@uop.edu.jo::cc64f42d-a1a6-4f08-b97b-0c37f877119f" providerId="AD" clId="Web-{5A53F68D-5D62-2F91-0C34-5AF0710613BB}" dt="2025-06-18T07:32:02.797" v="218" actId="20577"/>
+          <ac:spMkLst>
+            <pc:docMk/>
+            <pc:sldMk cId="3589465999" sldId="514"/>
+            <ac:spMk id="2" creationId="{88A29053-B25D-8437-7DDD-113C9833833C}"/>
+          </ac:spMkLst>
+        </pc:spChg>
+        <pc:spChg chg="mod">
+          <ac:chgData name="Mohammed Fasha" userId="S::mohammed.fasha@uop.edu.jo::cc64f42d-a1a6-4f08-b97b-0c37f877119f" providerId="AD" clId="Web-{5A53F68D-5D62-2F91-0C34-5AF0710613BB}" dt="2025-06-18T07:33:42.518" v="245" actId="20577"/>
+          <ac:spMkLst>
+            <pc:docMk/>
+            <pc:sldMk cId="3589465999" sldId="514"/>
+            <ac:spMk id="3" creationId="{5B93E470-126F-0470-F370-550A166C8CE3}"/>
+          </ac:spMkLst>
+        </pc:spChg>
+      </pc:sldChg>
+      <pc:sldChg chg="modSp">
+        <pc:chgData name="Mohammed Fasha" userId="S::mohammed.fasha@uop.edu.jo::cc64f42d-a1a6-4f08-b97b-0c37f877119f" providerId="AD" clId="Web-{5A53F68D-5D62-2F91-0C34-5AF0710613BB}" dt="2025-06-18T07:32:07.031" v="219" actId="20577"/>
+        <pc:sldMkLst>
+          <pc:docMk/>
+          <pc:sldMk cId="2311531301" sldId="515"/>
+        </pc:sldMkLst>
+        <pc:spChg chg="mod">
+          <ac:chgData name="Mohammed Fasha" userId="S::mohammed.fasha@uop.edu.jo::cc64f42d-a1a6-4f08-b97b-0c37f877119f" providerId="AD" clId="Web-{5A53F68D-5D62-2F91-0C34-5AF0710613BB}" dt="2025-06-18T07:32:07.031" v="219" actId="20577"/>
+          <ac:spMkLst>
+            <pc:docMk/>
+            <pc:sldMk cId="2311531301" sldId="515"/>
+            <ac:spMk id="2" creationId="{DC04C7CB-A0FB-53BD-F5B2-69AE96A0E5A0}"/>
+          </ac:spMkLst>
+        </pc:spChg>
+      </pc:sldChg>
+      <pc:sldChg chg="modSp">
+        <pc:chgData name="Mohammed Fasha" userId="S::mohammed.fasha@uop.edu.jo::cc64f42d-a1a6-4f08-b97b-0c37f877119f" providerId="AD" clId="Web-{5A53F68D-5D62-2F91-0C34-5AF0710613BB}" dt="2025-06-18T07:34:15.676" v="252" actId="14100"/>
+        <pc:sldMkLst>
+          <pc:docMk/>
+          <pc:sldMk cId="1201106649" sldId="516"/>
+        </pc:sldMkLst>
+        <pc:spChg chg="mod">
+          <ac:chgData name="Mohammed Fasha" userId="S::mohammed.fasha@uop.edu.jo::cc64f42d-a1a6-4f08-b97b-0c37f877119f" providerId="AD" clId="Web-{5A53F68D-5D62-2F91-0C34-5AF0710613BB}" dt="2025-06-18T07:34:04.910" v="248" actId="20577"/>
+          <ac:spMkLst>
+            <pc:docMk/>
+            <pc:sldMk cId="1201106649" sldId="516"/>
+            <ac:spMk id="2" creationId="{0200F449-8EB2-4A35-0E5D-148ACC5A1F7D}"/>
+          </ac:spMkLst>
+        </pc:spChg>
+        <pc:spChg chg="mod">
+          <ac:chgData name="Mohammed Fasha" userId="S::mohammed.fasha@uop.edu.jo::cc64f42d-a1a6-4f08-b97b-0c37f877119f" providerId="AD" clId="Web-{5A53F68D-5D62-2F91-0C34-5AF0710613BB}" dt="2025-06-18T07:34:15.676" v="252" actId="14100"/>
+          <ac:spMkLst>
+            <pc:docMk/>
+            <pc:sldMk cId="1201106649" sldId="516"/>
+            <ac:spMk id="10" creationId="{CBD069FD-7B37-85AA-7C66-0FC15C990DD8}"/>
+          </ac:spMkLst>
+        </pc:spChg>
+      </pc:sldChg>
+      <pc:sldChg chg="modSp">
+        <pc:chgData name="Mohammed Fasha" userId="S::mohammed.fasha@uop.edu.jo::cc64f42d-a1a6-4f08-b97b-0c37f877119f" providerId="AD" clId="Web-{5A53F68D-5D62-2F91-0C34-5AF0710613BB}" dt="2025-06-18T07:31:30.389" v="215" actId="20577"/>
+        <pc:sldMkLst>
+          <pc:docMk/>
+          <pc:sldMk cId="834475357" sldId="517"/>
+        </pc:sldMkLst>
+        <pc:spChg chg="mod">
+          <ac:chgData name="Mohammed Fasha" userId="S::mohammed.fasha@uop.edu.jo::cc64f42d-a1a6-4f08-b97b-0c37f877119f" providerId="AD" clId="Web-{5A53F68D-5D62-2F91-0C34-5AF0710613BB}" dt="2025-06-18T07:28:32.493" v="127" actId="20577"/>
+          <ac:spMkLst>
+            <pc:docMk/>
+            <pc:sldMk cId="834475357" sldId="517"/>
+            <ac:spMk id="2" creationId="{748EBE3E-0A49-2947-0CEC-18B7160B878C}"/>
+          </ac:spMkLst>
+        </pc:spChg>
+        <pc:spChg chg="mod">
+          <ac:chgData name="Mohammed Fasha" userId="S::mohammed.fasha@uop.edu.jo::cc64f42d-a1a6-4f08-b97b-0c37f877119f" providerId="AD" clId="Web-{5A53F68D-5D62-2F91-0C34-5AF0710613BB}" dt="2025-06-18T07:31:30.389" v="215" actId="20577"/>
+          <ac:spMkLst>
+            <pc:docMk/>
+            <pc:sldMk cId="834475357" sldId="517"/>
+            <ac:spMk id="3" creationId="{ACE394C5-CDB7-FD4D-AA66-701E1D158182}"/>
+          </ac:spMkLst>
+        </pc:spChg>
+      </pc:sldChg>
+      <pc:sldChg chg="addSp delSp modSp new">
+        <pc:chgData name="Mohammed Fasha" userId="S::mohammed.fasha@uop.edu.jo::cc64f42d-a1a6-4f08-b97b-0c37f877119f" providerId="AD" clId="Web-{5A53F68D-5D62-2F91-0C34-5AF0710613BB}" dt="2025-06-18T07:30:05.621" v="168"/>
+        <pc:sldMkLst>
+          <pc:docMk/>
+          <pc:sldMk cId="2757035436" sldId="524"/>
+        </pc:sldMkLst>
+        <pc:spChg chg="mod">
+          <ac:chgData name="Mohammed Fasha" userId="S::mohammed.fasha@uop.edu.jo::cc64f42d-a1a6-4f08-b97b-0c37f877119f" providerId="AD" clId="Web-{5A53F68D-5D62-2F91-0C34-5AF0710613BB}" dt="2025-06-18T07:27:14.553" v="64" actId="20577"/>
+          <ac:spMkLst>
+            <pc:docMk/>
+            <pc:sldMk cId="2757035436" sldId="524"/>
+            <ac:spMk id="2" creationId="{1462616C-41EE-2B5B-760C-E900F7CFDE29}"/>
+          </ac:spMkLst>
+        </pc:spChg>
+        <pc:spChg chg="del">
+          <ac:chgData name="Mohammed Fasha" userId="S::mohammed.fasha@uop.edu.jo::cc64f42d-a1a6-4f08-b97b-0c37f877119f" providerId="AD" clId="Web-{5A53F68D-5D62-2F91-0C34-5AF0710613BB}" dt="2025-06-18T07:26:35.287" v="1"/>
+          <ac:spMkLst>
+            <pc:docMk/>
+            <pc:sldMk cId="2757035436" sldId="524"/>
+            <ac:spMk id="3" creationId="{0249785F-B0B6-B72E-2196-10705E6D2A17}"/>
+          </ac:spMkLst>
+        </pc:spChg>
+        <pc:graphicFrameChg chg="add mod ord modGraphic">
+          <ac:chgData name="Mohammed Fasha" userId="S::mohammed.fasha@uop.edu.jo::cc64f42d-a1a6-4f08-b97b-0c37f877119f" providerId="AD" clId="Web-{5A53F68D-5D62-2F91-0C34-5AF0710613BB}" dt="2025-06-18T07:30:05.621" v="168"/>
+          <ac:graphicFrameMkLst>
+            <pc:docMk/>
+            <pc:sldMk cId="2757035436" sldId="524"/>
+            <ac:graphicFrameMk id="5" creationId="{D986A135-B943-08AB-BF49-B8AFBFF1A02E}"/>
+          </ac:graphicFrameMkLst>
+        </pc:graphicFrameChg>
+      </pc:sldChg>
+    </pc:docChg>
+  </pc:docChgLst>
+  <pc:docChgLst>
+    <pc:chgData name="Mohammed Fasha" userId="cc64f42d-a1a6-4f08-b97b-0c37f877119f" providerId="ADAL" clId="{25C05559-E4DC-4EE1-91BC-1444D09EE869}"/>
+    <pc:docChg chg="undo custSel addSld delSld modSld sldOrd">
+      <pc:chgData name="Mohammed Fasha" userId="cc64f42d-a1a6-4f08-b97b-0c37f877119f" providerId="ADAL" clId="{25C05559-E4DC-4EE1-91BC-1444D09EE869}" dt="2025-04-30T07:51:18.812" v="264" actId="47"/>
+      <pc:docMkLst>
+        <pc:docMk/>
+      </pc:docMkLst>
+      <pc:sldChg chg="modSp mod">
+        <pc:chgData name="Mohammed Fasha" userId="cc64f42d-a1a6-4f08-b97b-0c37f877119f" providerId="ADAL" clId="{25C05559-E4DC-4EE1-91BC-1444D09EE869}" dt="2025-04-16T06:14:55.232" v="16" actId="1076"/>
+        <pc:sldMkLst>
+          <pc:docMk/>
+          <pc:sldMk cId="1499958888" sldId="394"/>
+        </pc:sldMkLst>
+      </pc:sldChg>
+      <pc:sldChg chg="delSp modSp mod delAnim">
+        <pc:chgData name="Mohammed Fasha" userId="cc64f42d-a1a6-4f08-b97b-0c37f877119f" providerId="ADAL" clId="{25C05559-E4DC-4EE1-91BC-1444D09EE869}" dt="2025-04-16T06:43:36.666" v="20" actId="478"/>
+        <pc:sldMkLst>
+          <pc:docMk/>
+          <pc:sldMk cId="2905491798" sldId="440"/>
+        </pc:sldMkLst>
+      </pc:sldChg>
+      <pc:sldChg chg="modSp mod">
+        <pc:chgData name="Mohammed Fasha" userId="cc64f42d-a1a6-4f08-b97b-0c37f877119f" providerId="ADAL" clId="{25C05559-E4DC-4EE1-91BC-1444D09EE869}" dt="2025-04-09T06:23:26.187" v="0" actId="20577"/>
+        <pc:sldMkLst>
+          <pc:docMk/>
+          <pc:sldMk cId="2297456757" sldId="483"/>
+        </pc:sldMkLst>
+        <pc:spChg chg="mod">
+          <ac:chgData name="Mohammed Fasha" userId="cc64f42d-a1a6-4f08-b97b-0c37f877119f" providerId="ADAL" clId="{25C05559-E4DC-4EE1-91BC-1444D09EE869}" dt="2025-04-09T06:23:26.187" v="0" actId="20577"/>
+          <ac:spMkLst>
+            <pc:docMk/>
+            <pc:sldMk cId="2297456757" sldId="483"/>
+            <ac:spMk id="5" creationId="{89403830-E271-DAA0-8838-E295A84A8B5B}"/>
+          </ac:spMkLst>
+        </pc:spChg>
+      </pc:sldChg>
+      <pc:sldChg chg="ord">
+        <pc:chgData name="Mohammed Fasha" userId="cc64f42d-a1a6-4f08-b97b-0c37f877119f" providerId="ADAL" clId="{25C05559-E4DC-4EE1-91BC-1444D09EE869}" dt="2025-04-16T06:46:21.733" v="23" actId="20578"/>
+        <pc:sldMkLst>
+          <pc:docMk/>
+          <pc:sldMk cId="3480194047" sldId="599"/>
+        </pc:sldMkLst>
+      </pc:sldChg>
+      <pc:sldChg chg="modSp mod">
+        <pc:chgData name="Mohammed Fasha" userId="cc64f42d-a1a6-4f08-b97b-0c37f877119f" providerId="ADAL" clId="{25C05559-E4DC-4EE1-91BC-1444D09EE869}" dt="2025-04-16T06:46:47.902" v="27" actId="404"/>
+        <pc:sldMkLst>
+          <pc:docMk/>
+          <pc:sldMk cId="3146452721" sldId="600"/>
+        </pc:sldMkLst>
+      </pc:sldChg>
+      <pc:sldChg chg="delSp mod">
+        <pc:chgData name="Mohammed Fasha" userId="cc64f42d-a1a6-4f08-b97b-0c37f877119f" providerId="ADAL" clId="{25C05559-E4DC-4EE1-91BC-1444D09EE869}" dt="2025-04-16T06:47:57.131" v="35" actId="21"/>
+        <pc:sldMkLst>
+          <pc:docMk/>
+          <pc:sldMk cId="202107314" sldId="647"/>
+        </pc:sldMkLst>
+      </pc:sldChg>
+      <pc:sldChg chg="modSp mod">
+        <pc:chgData name="Mohammed Fasha" userId="cc64f42d-a1a6-4f08-b97b-0c37f877119f" providerId="ADAL" clId="{25C05559-E4DC-4EE1-91BC-1444D09EE869}" dt="2025-04-16T06:48:42.467" v="40" actId="14100"/>
+        <pc:sldMkLst>
+          <pc:docMk/>
+          <pc:sldMk cId="3454522070" sldId="679"/>
+        </pc:sldMkLst>
+      </pc:sldChg>
+      <pc:sldChg chg="modSp mod">
+        <pc:chgData name="Mohammed Fasha" userId="cc64f42d-a1a6-4f08-b97b-0c37f877119f" providerId="ADAL" clId="{25C05559-E4DC-4EE1-91BC-1444D09EE869}" dt="2025-04-16T06:49:10.468" v="48" actId="404"/>
+        <pc:sldMkLst>
+          <pc:docMk/>
+          <pc:sldMk cId="2856814121" sldId="681"/>
+        </pc:sldMkLst>
+      </pc:sldChg>
+      <pc:sldChg chg="modSp mod">
+        <pc:chgData name="Mohammed Fasha" userId="cc64f42d-a1a6-4f08-b97b-0c37f877119f" providerId="ADAL" clId="{25C05559-E4DC-4EE1-91BC-1444D09EE869}" dt="2025-04-16T06:48:55.287" v="46" actId="27636"/>
+        <pc:sldMkLst>
+          <pc:docMk/>
+          <pc:sldMk cId="265576630" sldId="698"/>
+        </pc:sldMkLst>
+      </pc:sldChg>
+      <pc:sldChg chg="modSp">
+        <pc:chgData name="Mohammed Fasha" userId="cc64f42d-a1a6-4f08-b97b-0c37f877119f" providerId="ADAL" clId="{25C05559-E4DC-4EE1-91BC-1444D09EE869}" dt="2025-04-16T06:48:02.658" v="36" actId="1076"/>
+        <pc:sldMkLst>
+          <pc:docMk/>
+          <pc:sldMk cId="3085160177" sldId="704"/>
+        </pc:sldMkLst>
+      </pc:sldChg>
+      <pc:sldChg chg="modSp mod">
+        <pc:chgData name="Mohammed Fasha" userId="cc64f42d-a1a6-4f08-b97b-0c37f877119f" providerId="ADAL" clId="{25C05559-E4DC-4EE1-91BC-1444D09EE869}" dt="2025-04-16T06:47:18.630" v="34" actId="1076"/>
+        <pc:sldMkLst>
+          <pc:docMk/>
+          <pc:sldMk cId="32004852" sldId="708"/>
+        </pc:sldMkLst>
+      </pc:sldChg>
+      <pc:sldChg chg="addSp delSp modSp mod">
+        <pc:chgData name="Mohammed Fasha" userId="cc64f42d-a1a6-4f08-b97b-0c37f877119f" providerId="ADAL" clId="{25C05559-E4DC-4EE1-91BC-1444D09EE869}" dt="2025-04-16T06:14:10.424" v="11" actId="167"/>
+        <pc:sldMkLst>
+          <pc:docMk/>
+          <pc:sldMk cId="3150550060" sldId="720"/>
+        </pc:sldMkLst>
+      </pc:sldChg>
+      <pc:sldChg chg="addSp modSp new mod">
+        <pc:chgData name="Mohammed Fasha" userId="cc64f42d-a1a6-4f08-b97b-0c37f877119f" providerId="ADAL" clId="{25C05559-E4DC-4EE1-91BC-1444D09EE869}" dt="2025-04-30T06:40:50.224" v="212" actId="6549"/>
+        <pc:sldMkLst>
+          <pc:docMk/>
+          <pc:sldMk cId="666527140" sldId="725"/>
+        </pc:sldMkLst>
+      </pc:sldChg>
+      <pc:sldChg chg="addSp delSp modSp new mod">
+        <pc:chgData name="Mohammed Fasha" userId="cc64f42d-a1a6-4f08-b97b-0c37f877119f" providerId="ADAL" clId="{25C05559-E4DC-4EE1-91BC-1444D09EE869}" dt="2025-04-30T07:05:36.135" v="263" actId="122"/>
+        <pc:sldMkLst>
+          <pc:docMk/>
+          <pc:sldMk cId="3660604927" sldId="726"/>
+        </pc:sldMkLst>
+      </pc:sldChg>
+      <pc:sldChg chg="add del">
+        <pc:chgData name="Mohammed Fasha" userId="cc64f42d-a1a6-4f08-b97b-0c37f877119f" providerId="ADAL" clId="{25C05559-E4DC-4EE1-91BC-1444D09EE869}" dt="2025-04-30T07:51:18.812" v="264" actId="47"/>
+        <pc:sldMkLst>
+          <pc:docMk/>
+          <pc:sldMk cId="2399550384" sldId="727"/>
+        </pc:sldMkLst>
+      </pc:sldChg>
+      <pc:sldChg chg="modSp add mod ord">
+        <pc:chgData name="Mohammed Fasha" userId="cc64f42d-a1a6-4f08-b97b-0c37f877119f" providerId="ADAL" clId="{25C05559-E4DC-4EE1-91BC-1444D09EE869}" dt="2025-04-30T06:47:23.280" v="238" actId="20577"/>
+        <pc:sldMkLst>
+          <pc:docMk/>
+          <pc:sldMk cId="4051640529" sldId="728"/>
+        </pc:sldMkLst>
+      </pc:sldChg>
+    </pc:docChg>
+  </pc:docChgLst>
+  <pc:docChgLst>
+    <pc:chgData name="Mohammed Fasha" userId="cc64f42d-a1a6-4f08-b97b-0c37f877119f" providerId="ADAL" clId="{4C71ED24-115E-432D-933D-C801DA3E52F1}"/>
+    <pc:docChg chg="delSld">
+      <pc:chgData name="Mohammed Fasha" userId="cc64f42d-a1a6-4f08-b97b-0c37f877119f" providerId="ADAL" clId="{4C71ED24-115E-432D-933D-C801DA3E52F1}" dt="2024-12-29T03:12:49.974" v="2" actId="47"/>
+      <pc:docMkLst>
+        <pc:docMk/>
+      </pc:docMkLst>
+      <pc:sldChg chg="del">
+        <pc:chgData name="Mohammed Fasha" userId="cc64f42d-a1a6-4f08-b97b-0c37f877119f" providerId="ADAL" clId="{4C71ED24-115E-432D-933D-C801DA3E52F1}" dt="2024-12-29T03:12:48.360" v="0" actId="47"/>
+        <pc:sldMkLst>
+          <pc:docMk/>
+          <pc:sldMk cId="2341000601" sldId="701"/>
+        </pc:sldMkLst>
+      </pc:sldChg>
+      <pc:sldChg chg="del">
+        <pc:chgData name="Mohammed Fasha" userId="cc64f42d-a1a6-4f08-b97b-0c37f877119f" providerId="ADAL" clId="{4C71ED24-115E-432D-933D-C801DA3E52F1}" dt="2024-12-29T03:12:49.133" v="1" actId="47"/>
+        <pc:sldMkLst>
+          <pc:docMk/>
+          <pc:sldMk cId="3519698944" sldId="702"/>
+        </pc:sldMkLst>
+      </pc:sldChg>
+      <pc:sldChg chg="del">
+        <pc:chgData name="Mohammed Fasha" userId="cc64f42d-a1a6-4f08-b97b-0c37f877119f" providerId="ADAL" clId="{4C71ED24-115E-432D-933D-C801DA3E52F1}" dt="2024-12-29T03:12:49.974" v="2" actId="47"/>
+        <pc:sldMkLst>
+          <pc:docMk/>
+          <pc:sldMk cId="3934257344" sldId="703"/>
+        </pc:sldMkLst>
+      </pc:sldChg>
+    </pc:docChg>
+  </pc:docChgLst>
+  <pc:docChgLst>
+    <pc:chgData name="Mohammed Fasha" userId="cc64f42d-a1a6-4f08-b97b-0c37f877119f" providerId="ADAL" clId="{FEC9C214-E726-4192-8176-A8C9AACEB478}"/>
+    <pc:docChg chg="custSel addSld delSld modSld">
+      <pc:chgData name="Mohammed Fasha" userId="cc64f42d-a1a6-4f08-b97b-0c37f877119f" providerId="ADAL" clId="{FEC9C214-E726-4192-8176-A8C9AACEB478}" dt="2025-05-16T05:43:36.510" v="126" actId="2696"/>
+      <pc:docMkLst>
+        <pc:docMk/>
+      </pc:docMkLst>
+      <pc:sldChg chg="del">
+        <pc:chgData name="Mohammed Fasha" userId="cc64f42d-a1a6-4f08-b97b-0c37f877119f" providerId="ADAL" clId="{FEC9C214-E726-4192-8176-A8C9AACEB478}" dt="2025-05-16T05:43:36.510" v="126" actId="2696"/>
+        <pc:sldMkLst>
+          <pc:docMk/>
+          <pc:sldMk cId="607684796" sldId="333"/>
+        </pc:sldMkLst>
+      </pc:sldChg>
+      <pc:sldChg chg="del">
+        <pc:chgData name="Mohammed Fasha" userId="cc64f42d-a1a6-4f08-b97b-0c37f877119f" providerId="ADAL" clId="{FEC9C214-E726-4192-8176-A8C9AACEB478}" dt="2025-05-16T05:43:36.510" v="126" actId="2696"/>
+        <pc:sldMkLst>
+          <pc:docMk/>
+          <pc:sldMk cId="587789057" sldId="423"/>
+        </pc:sldMkLst>
+      </pc:sldChg>
+      <pc:sldChg chg="del">
+        <pc:chgData name="Mohammed Fasha" userId="cc64f42d-a1a6-4f08-b97b-0c37f877119f" providerId="ADAL" clId="{FEC9C214-E726-4192-8176-A8C9AACEB478}" dt="2025-05-16T05:43:36.510" v="126" actId="2696"/>
+        <pc:sldMkLst>
+          <pc:docMk/>
+          <pc:sldMk cId="2127906749" sldId="427"/>
+        </pc:sldMkLst>
+      </pc:sldChg>
+      <pc:sldChg chg="del">
+        <pc:chgData name="Mohammed Fasha" userId="cc64f42d-a1a6-4f08-b97b-0c37f877119f" providerId="ADAL" clId="{FEC9C214-E726-4192-8176-A8C9AACEB478}" dt="2025-05-16T05:43:36.510" v="126" actId="2696"/>
+        <pc:sldMkLst>
+          <pc:docMk/>
+          <pc:sldMk cId="391491219" sldId="428"/>
+        </pc:sldMkLst>
+      </pc:sldChg>
+      <pc:sldChg chg="del">
+        <pc:chgData name="Mohammed Fasha" userId="cc64f42d-a1a6-4f08-b97b-0c37f877119f" providerId="ADAL" clId="{FEC9C214-E726-4192-8176-A8C9AACEB478}" dt="2025-05-16T05:43:36.510" v="126" actId="2696"/>
+        <pc:sldMkLst>
+          <pc:docMk/>
+          <pc:sldMk cId="3339445507" sldId="430"/>
+        </pc:sldMkLst>
+      </pc:sldChg>
+      <pc:sldChg chg="del">
+        <pc:chgData name="Mohammed Fasha" userId="cc64f42d-a1a6-4f08-b97b-0c37f877119f" providerId="ADAL" clId="{FEC9C214-E726-4192-8176-A8C9AACEB478}" dt="2025-05-16T05:43:36.510" v="126" actId="2696"/>
+        <pc:sldMkLst>
+          <pc:docMk/>
+          <pc:sldMk cId="3389046835" sldId="431"/>
+        </pc:sldMkLst>
+      </pc:sldChg>
+      <pc:sldChg chg="modSp mod">
+        <pc:chgData name="Mohammed Fasha" userId="cc64f42d-a1a6-4f08-b97b-0c37f877119f" providerId="ADAL" clId="{FEC9C214-E726-4192-8176-A8C9AACEB478}" dt="2025-05-16T05:42:48.998" v="99" actId="6549"/>
+        <pc:sldMkLst>
+          <pc:docMk/>
+          <pc:sldMk cId="4208461039" sldId="447"/>
+        </pc:sldMkLst>
+      </pc:sldChg>
+      <pc:sldChg chg="modSp mod">
+        <pc:chgData name="Mohammed Fasha" userId="cc64f42d-a1a6-4f08-b97b-0c37f877119f" providerId="ADAL" clId="{FEC9C214-E726-4192-8176-A8C9AACEB478}" dt="2025-05-16T05:43:13.101" v="125" actId="6549"/>
+        <pc:sldMkLst>
+          <pc:docMk/>
+          <pc:sldMk cId="2297456757" sldId="483"/>
+        </pc:sldMkLst>
+        <pc:spChg chg="mod">
+          <ac:chgData name="Mohammed Fasha" userId="cc64f42d-a1a6-4f08-b97b-0c37f877119f" providerId="ADAL" clId="{FEC9C214-E726-4192-8176-A8C9AACEB478}" dt="2025-05-16T05:43:13.101" v="125" actId="6549"/>
+          <ac:spMkLst>
+            <pc:docMk/>
+            <pc:sldMk cId="2297456757" sldId="483"/>
+            <ac:spMk id="5" creationId="{89403830-E271-DAA0-8838-E295A84A8B5B}"/>
+          </ac:spMkLst>
+        </pc:spChg>
+      </pc:sldChg>
+      <pc:sldChg chg="del">
+        <pc:chgData name="Mohammed Fasha" userId="cc64f42d-a1a6-4f08-b97b-0c37f877119f" providerId="ADAL" clId="{FEC9C214-E726-4192-8176-A8C9AACEB478}" dt="2025-05-16T05:43:36.510" v="126" actId="2696"/>
+        <pc:sldMkLst>
+          <pc:docMk/>
+          <pc:sldMk cId="1586650541" sldId="510"/>
+        </pc:sldMkLst>
+      </pc:sldChg>
+      <pc:sldChg chg="del">
+        <pc:chgData name="Mohammed Fasha" userId="cc64f42d-a1a6-4f08-b97b-0c37f877119f" providerId="ADAL" clId="{FEC9C214-E726-4192-8176-A8C9AACEB478}" dt="2025-05-16T05:43:36.510" v="126" actId="2696"/>
+        <pc:sldMkLst>
+          <pc:docMk/>
+          <pc:sldMk cId="1271956779" sldId="514"/>
+        </pc:sldMkLst>
+      </pc:sldChg>
+      <pc:sldChg chg="del">
+        <pc:chgData name="Mohammed Fasha" userId="cc64f42d-a1a6-4f08-b97b-0c37f877119f" providerId="ADAL" clId="{FEC9C214-E726-4192-8176-A8C9AACEB478}" dt="2025-05-16T05:43:36.510" v="126" actId="2696"/>
+        <pc:sldMkLst>
+          <pc:docMk/>
+          <pc:sldMk cId="2281221656" sldId="527"/>
+        </pc:sldMkLst>
+      </pc:sldChg>
+      <pc:sldChg chg="del">
+        <pc:chgData name="Mohammed Fasha" userId="cc64f42d-a1a6-4f08-b97b-0c37f877119f" providerId="ADAL" clId="{FEC9C214-E726-4192-8176-A8C9AACEB478}" dt="2025-05-16T05:43:36.510" v="126" actId="2696"/>
+        <pc:sldMkLst>
+          <pc:docMk/>
+          <pc:sldMk cId="2877973779" sldId="607"/>
+        </pc:sldMkLst>
+      </pc:sldChg>
+      <pc:sldChg chg="del">
+        <pc:chgData name="Mohammed Fasha" userId="cc64f42d-a1a6-4f08-b97b-0c37f877119f" providerId="ADAL" clId="{FEC9C214-E726-4192-8176-A8C9AACEB478}" dt="2025-05-16T05:43:36.510" v="126" actId="2696"/>
+        <pc:sldMkLst>
+          <pc:docMk/>
+          <pc:sldMk cId="21481256" sldId="611"/>
+        </pc:sldMkLst>
+      </pc:sldChg>
+      <pc:sldChg chg="del">
+        <pc:chgData name="Mohammed Fasha" userId="cc64f42d-a1a6-4f08-b97b-0c37f877119f" providerId="ADAL" clId="{FEC9C214-E726-4192-8176-A8C9AACEB478}" dt="2025-05-16T05:43:36.510" v="126" actId="2696"/>
+        <pc:sldMkLst>
+          <pc:docMk/>
+          <pc:sldMk cId="4040874025" sldId="612"/>
+        </pc:sldMkLst>
+      </pc:sldChg>
+      <pc:sldChg chg="del">
+        <pc:chgData name="Mohammed Fasha" userId="cc64f42d-a1a6-4f08-b97b-0c37f877119f" providerId="ADAL" clId="{FEC9C214-E726-4192-8176-A8C9AACEB478}" dt="2025-05-16T05:43:36.510" v="126" actId="2696"/>
+        <pc:sldMkLst>
+          <pc:docMk/>
+          <pc:sldMk cId="399592497" sldId="613"/>
+        </pc:sldMkLst>
+      </pc:sldChg>
+      <pc:sldChg chg="del">
+        <pc:chgData name="Mohammed Fasha" userId="cc64f42d-a1a6-4f08-b97b-0c37f877119f" providerId="ADAL" clId="{FEC9C214-E726-4192-8176-A8C9AACEB478}" dt="2025-05-16T05:43:36.510" v="126" actId="2696"/>
+        <pc:sldMkLst>
+          <pc:docMk/>
+          <pc:sldMk cId="3535314737" sldId="614"/>
+        </pc:sldMkLst>
+      </pc:sldChg>
+      <pc:sldChg chg="del">
+        <pc:chgData name="Mohammed Fasha" userId="cc64f42d-a1a6-4f08-b97b-0c37f877119f" providerId="ADAL" clId="{FEC9C214-E726-4192-8176-A8C9AACEB478}" dt="2025-05-16T05:43:36.510" v="126" actId="2696"/>
+        <pc:sldMkLst>
+          <pc:docMk/>
+          <pc:sldMk cId="627652750" sldId="615"/>
+        </pc:sldMkLst>
+      </pc:sldChg>
+      <pc:sldChg chg="del">
+        <pc:chgData name="Mohammed Fasha" userId="cc64f42d-a1a6-4f08-b97b-0c37f877119f" providerId="ADAL" clId="{FEC9C214-E726-4192-8176-A8C9AACEB478}" dt="2025-05-16T05:43:36.510" v="126" actId="2696"/>
+        <pc:sldMkLst>
+          <pc:docMk/>
+          <pc:sldMk cId="423212581" sldId="616"/>
+        </pc:sldMkLst>
+      </pc:sldChg>
+      <pc:sldChg chg="del">
+        <pc:chgData name="Mohammed Fasha" userId="cc64f42d-a1a6-4f08-b97b-0c37f877119f" providerId="ADAL" clId="{FEC9C214-E726-4192-8176-A8C9AACEB478}" dt="2025-05-16T05:43:36.510" v="126" actId="2696"/>
+        <pc:sldMkLst>
+          <pc:docMk/>
+          <pc:sldMk cId="3329135496" sldId="617"/>
+        </pc:sldMkLst>
+      </pc:sldChg>
+      <pc:sldChg chg="del">
+        <pc:chgData name="Mohammed Fasha" userId="cc64f42d-a1a6-4f08-b97b-0c37f877119f" providerId="ADAL" clId="{FEC9C214-E726-4192-8176-A8C9AACEB478}" dt="2025-05-16T05:43:36.510" v="126" actId="2696"/>
+        <pc:sldMkLst>
+          <pc:docMk/>
+          <pc:sldMk cId="1380276415" sldId="618"/>
+        </pc:sldMkLst>
+      </pc:sldChg>
+      <pc:sldChg chg="del">
+        <pc:chgData name="Mohammed Fasha" userId="cc64f42d-a1a6-4f08-b97b-0c37f877119f" providerId="ADAL" clId="{FEC9C214-E726-4192-8176-A8C9AACEB478}" dt="2025-05-16T05:43:36.510" v="126" actId="2696"/>
+        <pc:sldMkLst>
+          <pc:docMk/>
+          <pc:sldMk cId="246730148" sldId="619"/>
+        </pc:sldMkLst>
+      </pc:sldChg>
+      <pc:sldChg chg="del">
+        <pc:chgData name="Mohammed Fasha" userId="cc64f42d-a1a6-4f08-b97b-0c37f877119f" providerId="ADAL" clId="{FEC9C214-E726-4192-8176-A8C9AACEB478}" dt="2025-05-16T05:43:36.510" v="126" actId="2696"/>
+        <pc:sldMkLst>
+          <pc:docMk/>
+          <pc:sldMk cId="839834530" sldId="621"/>
+        </pc:sldMkLst>
+      </pc:sldChg>
+      <pc:sldChg chg="del">
+        <pc:chgData name="Mohammed Fasha" userId="cc64f42d-a1a6-4f08-b97b-0c37f877119f" providerId="ADAL" clId="{FEC9C214-E726-4192-8176-A8C9AACEB478}" dt="2025-05-16T05:43:36.510" v="126" actId="2696"/>
+        <pc:sldMkLst>
+          <pc:docMk/>
+          <pc:sldMk cId="3734309461" sldId="625"/>
+        </pc:sldMkLst>
+      </pc:sldChg>
+      <pc:sldChg chg="del">
+        <pc:chgData name="Mohammed Fasha" userId="cc64f42d-a1a6-4f08-b97b-0c37f877119f" providerId="ADAL" clId="{FEC9C214-E726-4192-8176-A8C9AACEB478}" dt="2025-05-16T05:43:36.510" v="126" actId="2696"/>
+        <pc:sldMkLst>
+          <pc:docMk/>
+          <pc:sldMk cId="4269580935" sldId="634"/>
+        </pc:sldMkLst>
+      </pc:sldChg>
+      <pc:sldChg chg="del">
+        <pc:chgData name="Mohammed Fasha" userId="cc64f42d-a1a6-4f08-b97b-0c37f877119f" providerId="ADAL" clId="{FEC9C214-E726-4192-8176-A8C9AACEB478}" dt="2025-05-16T05:43:36.510" v="126" actId="2696"/>
+        <pc:sldMkLst>
+          <pc:docMk/>
+          <pc:sldMk cId="2838240985" sldId="635"/>
+        </pc:sldMkLst>
+      </pc:sldChg>
+      <pc:sldChg chg="del">
+        <pc:chgData name="Mohammed Fasha" userId="cc64f42d-a1a6-4f08-b97b-0c37f877119f" providerId="ADAL" clId="{FEC9C214-E726-4192-8176-A8C9AACEB478}" dt="2025-05-16T05:43:36.510" v="126" actId="2696"/>
+        <pc:sldMkLst>
+          <pc:docMk/>
+          <pc:sldMk cId="1675291572" sldId="638"/>
+        </pc:sldMkLst>
+      </pc:sldChg>
+      <pc:sldChg chg="modSp del">
+        <pc:chgData name="Mohammed Fasha" userId="cc64f42d-a1a6-4f08-b97b-0c37f877119f" providerId="ADAL" clId="{FEC9C214-E726-4192-8176-A8C9AACEB478}" dt="2025-05-16T05:43:36.510" v="126" actId="2696"/>
+        <pc:sldMkLst>
+          <pc:docMk/>
+          <pc:sldMk cId="2145145303" sldId="640"/>
+        </pc:sldMkLst>
+      </pc:sldChg>
+      <pc:sldChg chg="del">
+        <pc:chgData name="Mohammed Fasha" userId="cc64f42d-a1a6-4f08-b97b-0c37f877119f" providerId="ADAL" clId="{FEC9C214-E726-4192-8176-A8C9AACEB478}" dt="2025-05-16T05:43:36.510" v="126" actId="2696"/>
+        <pc:sldMkLst>
+          <pc:docMk/>
+          <pc:sldMk cId="1135291414" sldId="643"/>
+        </pc:sldMkLst>
+      </pc:sldChg>
+      <pc:sldChg chg="del">
+        <pc:chgData name="Mohammed Fasha" userId="cc64f42d-a1a6-4f08-b97b-0c37f877119f" providerId="ADAL" clId="{FEC9C214-E726-4192-8176-A8C9AACEB478}" dt="2025-05-16T05:43:36.510" v="126" actId="2696"/>
+        <pc:sldMkLst>
+          <pc:docMk/>
+          <pc:sldMk cId="1030124935" sldId="644"/>
+        </pc:sldMkLst>
+      </pc:sldChg>
+      <pc:sldChg chg="del">
+        <pc:chgData name="Mohammed Fasha" userId="cc64f42d-a1a6-4f08-b97b-0c37f877119f" providerId="ADAL" clId="{FEC9C214-E726-4192-8176-A8C9AACEB478}" dt="2025-05-16T05:43:36.510" v="126" actId="2696"/>
+        <pc:sldMkLst>
+          <pc:docMk/>
+          <pc:sldMk cId="2168644593" sldId="645"/>
+        </pc:sldMkLst>
+      </pc:sldChg>
+      <pc:sldChg chg="del">
+        <pc:chgData name="Mohammed Fasha" userId="cc64f42d-a1a6-4f08-b97b-0c37f877119f" providerId="ADAL" clId="{FEC9C214-E726-4192-8176-A8C9AACEB478}" dt="2025-05-16T05:43:36.510" v="126" actId="2696"/>
+        <pc:sldMkLst>
+          <pc:docMk/>
+          <pc:sldMk cId="2743226386" sldId="646"/>
+        </pc:sldMkLst>
+      </pc:sldChg>
+      <pc:sldChg chg="del">
+        <pc:chgData name="Mohammed Fasha" userId="cc64f42d-a1a6-4f08-b97b-0c37f877119f" providerId="ADAL" clId="{FEC9C214-E726-4192-8176-A8C9AACEB478}" dt="2025-05-16T05:43:36.510" v="126" actId="2696"/>
+        <pc:sldMkLst>
+          <pc:docMk/>
+          <pc:sldMk cId="202107314" sldId="647"/>
+        </pc:sldMkLst>
+      </pc:sldChg>
+      <pc:sldChg chg="del">
+        <pc:chgData name="Mohammed Fasha" userId="cc64f42d-a1a6-4f08-b97b-0c37f877119f" providerId="ADAL" clId="{FEC9C214-E726-4192-8176-A8C9AACEB478}" dt="2025-05-16T05:43:36.510" v="126" actId="2696"/>
+        <pc:sldMkLst>
+          <pc:docMk/>
+          <pc:sldMk cId="662689605" sldId="649"/>
+        </pc:sldMkLst>
+      </pc:sldChg>
+      <pc:sldChg chg="del">
+        <pc:chgData name="Mohammed Fasha" userId="cc64f42d-a1a6-4f08-b97b-0c37f877119f" providerId="ADAL" clId="{FEC9C214-E726-4192-8176-A8C9AACEB478}" dt="2025-05-16T05:43:36.510" v="126" actId="2696"/>
+        <pc:sldMkLst>
+          <pc:docMk/>
+          <pc:sldMk cId="3942060319" sldId="650"/>
+        </pc:sldMkLst>
+      </pc:sldChg>
+      <pc:sldChg chg="del">
+        <pc:chgData name="Mohammed Fasha" userId="cc64f42d-a1a6-4f08-b97b-0c37f877119f" providerId="ADAL" clId="{FEC9C214-E726-4192-8176-A8C9AACEB478}" dt="2025-05-16T05:43:36.510" v="126" actId="2696"/>
+        <pc:sldMkLst>
+          <pc:docMk/>
+          <pc:sldMk cId="916802035" sldId="651"/>
+        </pc:sldMkLst>
+      </pc:sldChg>
+      <pc:sldChg chg="del">
+        <pc:chgData name="Mohammed Fasha" userId="cc64f42d-a1a6-4f08-b97b-0c37f877119f" providerId="ADAL" clId="{FEC9C214-E726-4192-8176-A8C9AACEB478}" dt="2025-05-16T05:43:36.510" v="126" actId="2696"/>
+        <pc:sldMkLst>
+          <pc:docMk/>
+          <pc:sldMk cId="3061130053" sldId="653"/>
+        </pc:sldMkLst>
+      </pc:sldChg>
+      <pc:sldChg chg="del">
+        <pc:chgData name="Mohammed Fasha" userId="cc64f42d-a1a6-4f08-b97b-0c37f877119f" providerId="ADAL" clId="{FEC9C214-E726-4192-8176-A8C9AACEB478}" dt="2025-05-16T05:43:36.510" v="126" actId="2696"/>
+        <pc:sldMkLst>
+          <pc:docMk/>
+          <pc:sldMk cId="3585687456" sldId="654"/>
+        </pc:sldMkLst>
+      </pc:sldChg>
+      <pc:sldChg chg="del">
+        <pc:chgData name="Mohammed Fasha" userId="cc64f42d-a1a6-4f08-b97b-0c37f877119f" providerId="ADAL" clId="{FEC9C214-E726-4192-8176-A8C9AACEB478}" dt="2025-05-16T05:43:36.510" v="126" actId="2696"/>
+        <pc:sldMkLst>
+          <pc:docMk/>
+          <pc:sldMk cId="2892622100" sldId="655"/>
+        </pc:sldMkLst>
+      </pc:sldChg>
+      <pc:sldChg chg="modSp del mod">
+        <pc:chgData name="Mohammed Fasha" userId="cc64f42d-a1a6-4f08-b97b-0c37f877119f" providerId="ADAL" clId="{FEC9C214-E726-4192-8176-A8C9AACEB478}" dt="2025-05-16T05:43:36.510" v="126" actId="2696"/>
+        <pc:sldMkLst>
+          <pc:docMk/>
+          <pc:sldMk cId="555764928" sldId="657"/>
+        </pc:sldMkLst>
+      </pc:sldChg>
+      <pc:sldChg chg="del">
+        <pc:chgData name="Mohammed Fasha" userId="cc64f42d-a1a6-4f08-b97b-0c37f877119f" providerId="ADAL" clId="{FEC9C214-E726-4192-8176-A8C9AACEB478}" dt="2025-05-16T05:43:36.510" v="126" actId="2696"/>
+        <pc:sldMkLst>
+          <pc:docMk/>
+          <pc:sldMk cId="1461426122" sldId="658"/>
+        </pc:sldMkLst>
+      </pc:sldChg>
+      <pc:sldChg chg="del">
+        <pc:chgData name="Mohammed Fasha" userId="cc64f42d-a1a6-4f08-b97b-0c37f877119f" providerId="ADAL" clId="{FEC9C214-E726-4192-8176-A8C9AACEB478}" dt="2025-05-16T05:43:36.510" v="126" actId="2696"/>
+        <pc:sldMkLst>
+          <pc:docMk/>
+          <pc:sldMk cId="2990045589" sldId="659"/>
+        </pc:sldMkLst>
+      </pc:sldChg>
+      <pc:sldChg chg="del">
+        <pc:chgData name="Mohammed Fasha" userId="cc64f42d-a1a6-4f08-b97b-0c37f877119f" providerId="ADAL" clId="{FEC9C214-E726-4192-8176-A8C9AACEB478}" dt="2025-05-16T05:43:36.510" v="126" actId="2696"/>
+        <pc:sldMkLst>
+          <pc:docMk/>
+          <pc:sldMk cId="2575039538" sldId="660"/>
+        </pc:sldMkLst>
+      </pc:sldChg>
+      <pc:sldChg chg="del">
+        <pc:chgData name="Mohammed Fasha" userId="cc64f42d-a1a6-4f08-b97b-0c37f877119f" providerId="ADAL" clId="{FEC9C214-E726-4192-8176-A8C9AACEB478}" dt="2025-05-16T05:43:36.510" v="126" actId="2696"/>
+        <pc:sldMkLst>
+          <pc:docMk/>
+          <pc:sldMk cId="1554491934" sldId="661"/>
+        </pc:sldMkLst>
+      </pc:sldChg>
+      <pc:sldChg chg="del">
+        <pc:chgData name="Mohammed Fasha" userId="cc64f42d-a1a6-4f08-b97b-0c37f877119f" providerId="ADAL" clId="{FEC9C214-E726-4192-8176-A8C9AACEB478}" dt="2025-05-16T05:43:36.510" v="126" actId="2696"/>
+        <pc:sldMkLst>
+          <pc:docMk/>
+          <pc:sldMk cId="691538069" sldId="662"/>
+        </pc:sldMkLst>
+      </pc:sldChg>
+      <pc:sldChg chg="del">
+        <pc:chgData name="Mohammed Fasha" userId="cc64f42d-a1a6-4f08-b97b-0c37f877119f" providerId="ADAL" clId="{FEC9C214-E726-4192-8176-A8C9AACEB478}" dt="2025-05-16T05:43:36.510" v="126" actId="2696"/>
+        <pc:sldMkLst>
+          <pc:docMk/>
+          <pc:sldMk cId="3980180774" sldId="663"/>
+        </pc:sldMkLst>
+      </pc:sldChg>
+      <pc:sldChg chg="del">
+        <pc:chgData name="Mohammed Fasha" userId="cc64f42d-a1a6-4f08-b97b-0c37f877119f" providerId="ADAL" clId="{FEC9C214-E726-4192-8176-A8C9AACEB478}" dt="2025-05-16T05:43:36.510" v="126" actId="2696"/>
+        <pc:sldMkLst>
+          <pc:docMk/>
+          <pc:sldMk cId="1728680596" sldId="664"/>
+        </pc:sldMkLst>
+      </pc:sldChg>
+      <pc:sldChg chg="del">
+        <pc:chgData name="Mohammed Fasha" userId="cc64f42d-a1a6-4f08-b97b-0c37f877119f" providerId="ADAL" clId="{FEC9C214-E726-4192-8176-A8C9AACEB478}" dt="2025-05-16T05:43:36.510" v="126" actId="2696"/>
+        <pc:sldMkLst>
+          <pc:docMk/>
+          <pc:sldMk cId="148099094" sldId="665"/>
+        </pc:sldMkLst>
+      </pc:sldChg>
+      <pc:sldChg chg="del">
+        <pc:chgData name="Mohammed Fasha" userId="cc64f42d-a1a6-4f08-b97b-0c37f877119f" providerId="ADAL" clId="{FEC9C214-E726-4192-8176-A8C9AACEB478}" dt="2025-05-16T05:43:36.510" v="126" actId="2696"/>
+        <pc:sldMkLst>
+          <pc:docMk/>
+          <pc:sldMk cId="898885298" sldId="667"/>
+        </pc:sldMkLst>
+      </pc:sldChg>
+      <pc:sldChg chg="del">
+        <pc:chgData name="Mohammed Fasha" userId="cc64f42d-a1a6-4f08-b97b-0c37f877119f" providerId="ADAL" clId="{FEC9C214-E726-4192-8176-A8C9AACEB478}" dt="2025-05-16T05:43:36.510" v="126" actId="2696"/>
+        <pc:sldMkLst>
+          <pc:docMk/>
+          <pc:sldMk cId="2652660250" sldId="668"/>
+        </pc:sldMkLst>
+      </pc:sldChg>
+      <pc:sldChg chg="del">
+        <pc:chgData name="Mohammed Fasha" userId="cc64f42d-a1a6-4f08-b97b-0c37f877119f" providerId="ADAL" clId="{FEC9C214-E726-4192-8176-A8C9AACEB478}" dt="2025-05-16T05:43:36.510" v="126" actId="2696"/>
+        <pc:sldMkLst>
+          <pc:docMk/>
+          <pc:sldMk cId="2680231355" sldId="669"/>
+        </pc:sldMkLst>
+      </pc:sldChg>
+      <pc:sldChg chg="modSp del mod">
+        <pc:chgData name="Mohammed Fasha" userId="cc64f42d-a1a6-4f08-b97b-0c37f877119f" providerId="ADAL" clId="{FEC9C214-E726-4192-8176-A8C9AACEB478}" dt="2025-05-16T05:43:36.510" v="126" actId="2696"/>
+        <pc:sldMkLst>
+          <pc:docMk/>
+          <pc:sldMk cId="1960150938" sldId="670"/>
+        </pc:sldMkLst>
+      </pc:sldChg>
+      <pc:sldChg chg="del">
+        <pc:chgData name="Mohammed Fasha" userId="cc64f42d-a1a6-4f08-b97b-0c37f877119f" providerId="ADAL" clId="{FEC9C214-E726-4192-8176-A8C9AACEB478}" dt="2025-05-16T05:43:36.510" v="126" actId="2696"/>
+        <pc:sldMkLst>
+          <pc:docMk/>
+          <pc:sldMk cId="3605011436" sldId="671"/>
+        </pc:sldMkLst>
+      </pc:sldChg>
+      <pc:sldChg chg="del">
+        <pc:chgData name="Mohammed Fasha" userId="cc64f42d-a1a6-4f08-b97b-0c37f877119f" providerId="ADAL" clId="{FEC9C214-E726-4192-8176-A8C9AACEB478}" dt="2025-05-16T05:43:36.510" v="126" actId="2696"/>
+        <pc:sldMkLst>
+          <pc:docMk/>
+          <pc:sldMk cId="1620993364" sldId="672"/>
+        </pc:sldMkLst>
+      </pc:sldChg>
+      <pc:sldChg chg="del">
+        <pc:chgData name="Mohammed Fasha" userId="cc64f42d-a1a6-4f08-b97b-0c37f877119f" providerId="ADAL" clId="{FEC9C214-E726-4192-8176-A8C9AACEB478}" dt="2025-05-16T05:43:36.510" v="126" actId="2696"/>
+        <pc:sldMkLst>
+          <pc:docMk/>
+          <pc:sldMk cId="2865119215" sldId="674"/>
+        </pc:sldMkLst>
+      </pc:sldChg>
+      <pc:sldChg chg="del">
+        <pc:chgData name="Mohammed Fasha" userId="cc64f42d-a1a6-4f08-b97b-0c37f877119f" providerId="ADAL" clId="{FEC9C214-E726-4192-8176-A8C9AACEB478}" dt="2025-05-16T05:43:36.510" v="126" actId="2696"/>
+        <pc:sldMkLst>
+          <pc:docMk/>
+          <pc:sldMk cId="2170303756" sldId="675"/>
+        </pc:sldMkLst>
+      </pc:sldChg>
+      <pc:sldChg chg="del">
+        <pc:chgData name="Mohammed Fasha" userId="cc64f42d-a1a6-4f08-b97b-0c37f877119f" providerId="ADAL" clId="{FEC9C214-E726-4192-8176-A8C9AACEB478}" dt="2025-05-16T05:43:36.510" v="126" actId="2696"/>
+        <pc:sldMkLst>
+          <pc:docMk/>
+          <pc:sldMk cId="1577854815" sldId="676"/>
+        </pc:sldMkLst>
+      </pc:sldChg>
+      <pc:sldChg chg="del">
+        <pc:chgData name="Mohammed Fasha" userId="cc64f42d-a1a6-4f08-b97b-0c37f877119f" providerId="ADAL" clId="{FEC9C214-E726-4192-8176-A8C9AACEB478}" dt="2025-05-16T05:43:36.510" v="126" actId="2696"/>
+        <pc:sldMkLst>
+          <pc:docMk/>
+          <pc:sldMk cId="139882925" sldId="677"/>
+        </pc:sldMkLst>
+      </pc:sldChg>
+      <pc:sldChg chg="del">
+        <pc:chgData name="Mohammed Fasha" userId="cc64f42d-a1a6-4f08-b97b-0c37f877119f" providerId="ADAL" clId="{FEC9C214-E726-4192-8176-A8C9AACEB478}" dt="2025-05-16T05:43:36.510" v="126" actId="2696"/>
+        <pc:sldMkLst>
+          <pc:docMk/>
+          <pc:sldMk cId="4146654093" sldId="678"/>
+        </pc:sldMkLst>
+      </pc:sldChg>
+      <pc:sldChg chg="del">
+        <pc:chgData name="Mohammed Fasha" userId="cc64f42d-a1a6-4f08-b97b-0c37f877119f" providerId="ADAL" clId="{FEC9C214-E726-4192-8176-A8C9AACEB478}" dt="2025-05-16T05:43:36.510" v="126" actId="2696"/>
+        <pc:sldMkLst>
+          <pc:docMk/>
+          <pc:sldMk cId="3454522070" sldId="679"/>
+        </pc:sldMkLst>
+      </pc:sldChg>
+      <pc:sldChg chg="del">
+        <pc:chgData name="Mohammed Fasha" userId="cc64f42d-a1a6-4f08-b97b-0c37f877119f" providerId="ADAL" clId="{FEC9C214-E726-4192-8176-A8C9AACEB478}" dt="2025-05-16T05:43:36.510" v="126" actId="2696"/>
+        <pc:sldMkLst>
+          <pc:docMk/>
+          <pc:sldMk cId="2856814121" sldId="681"/>
+        </pc:sldMkLst>
+      </pc:sldChg>
+      <pc:sldChg chg="del">
+        <pc:chgData name="Mohammed Fasha" userId="cc64f42d-a1a6-4f08-b97b-0c37f877119f" providerId="ADAL" clId="{FEC9C214-E726-4192-8176-A8C9AACEB478}" dt="2025-05-16T05:43:36.510" v="126" actId="2696"/>
+        <pc:sldMkLst>
+          <pc:docMk/>
+          <pc:sldMk cId="1377124484" sldId="682"/>
+        </pc:sldMkLst>
+      </pc:sldChg>
+      <pc:sldChg chg="del">
+        <pc:chgData name="Mohammed Fasha" userId="cc64f42d-a1a6-4f08-b97b-0c37f877119f" providerId="ADAL" clId="{FEC9C214-E726-4192-8176-A8C9AACEB478}" dt="2025-05-16T05:43:36.510" v="126" actId="2696"/>
+        <pc:sldMkLst>
+          <pc:docMk/>
+          <pc:sldMk cId="2630096202" sldId="683"/>
+        </pc:sldMkLst>
+      </pc:sldChg>
+      <pc:sldChg chg="del">
+        <pc:chgData name="Mohammed Fasha" userId="cc64f42d-a1a6-4f08-b97b-0c37f877119f" providerId="ADAL" clId="{FEC9C214-E726-4192-8176-A8C9AACEB478}" dt="2025-05-16T05:43:36.510" v="126" actId="2696"/>
+        <pc:sldMkLst>
+          <pc:docMk/>
+          <pc:sldMk cId="3328652623" sldId="684"/>
+        </pc:sldMkLst>
+      </pc:sldChg>
+      <pc:sldChg chg="del">
+        <pc:chgData name="Mohammed Fasha" userId="cc64f42d-a1a6-4f08-b97b-0c37f877119f" providerId="ADAL" clId="{FEC9C214-E726-4192-8176-A8C9AACEB478}" dt="2025-05-16T05:43:36.510" v="126" actId="2696"/>
+        <pc:sldMkLst>
+          <pc:docMk/>
+          <pc:sldMk cId="916102856" sldId="685"/>
+        </pc:sldMkLst>
+      </pc:sldChg>
+      <pc:sldChg chg="del">
+        <pc:chgData name="Mohammed Fasha" userId="cc64f42d-a1a6-4f08-b97b-0c37f877119f" providerId="ADAL" clId="{FEC9C214-E726-4192-8176-A8C9AACEB478}" dt="2025-05-16T05:43:36.510" v="126" actId="2696"/>
+        <pc:sldMkLst>
+          <pc:docMk/>
+          <pc:sldMk cId="2620697854" sldId="686"/>
+        </pc:sldMkLst>
+      </pc:sldChg>
+      <pc:sldChg chg="del">
+        <pc:chgData name="Mohammed Fasha" userId="cc64f42d-a1a6-4f08-b97b-0c37f877119f" providerId="ADAL" clId="{FEC9C214-E726-4192-8176-A8C9AACEB478}" dt="2025-05-16T05:43:36.510" v="126" actId="2696"/>
+        <pc:sldMkLst>
+          <pc:docMk/>
+          <pc:sldMk cId="140683555" sldId="687"/>
+        </pc:sldMkLst>
+      </pc:sldChg>
+      <pc:sldChg chg="del">
+        <pc:chgData name="Mohammed Fasha" userId="cc64f42d-a1a6-4f08-b97b-0c37f877119f" providerId="ADAL" clId="{FEC9C214-E726-4192-8176-A8C9AACEB478}" dt="2025-05-16T05:43:36.510" v="126" actId="2696"/>
+        <pc:sldMkLst>
+          <pc:docMk/>
+          <pc:sldMk cId="1788308240" sldId="688"/>
+        </pc:sldMkLst>
+      </pc:sldChg>
+      <pc:sldChg chg="del">
+        <pc:chgData name="Mohammed Fasha" userId="cc64f42d-a1a6-4f08-b97b-0c37f877119f" providerId="ADAL" clId="{FEC9C214-E726-4192-8176-A8C9AACEB478}" dt="2025-05-16T05:43:36.510" v="126" actId="2696"/>
+        <pc:sldMkLst>
+          <pc:docMk/>
+          <pc:sldMk cId="1660737293" sldId="689"/>
+        </pc:sldMkLst>
+      </pc:sldChg>
+      <pc:sldChg chg="del">
+        <pc:chgData name="Mohammed Fasha" userId="cc64f42d-a1a6-4f08-b97b-0c37f877119f" providerId="ADAL" clId="{FEC9C214-E726-4192-8176-A8C9AACEB478}" dt="2025-05-16T05:43:36.510" v="126" actId="2696"/>
+        <pc:sldMkLst>
+          <pc:docMk/>
+          <pc:sldMk cId="1987101698" sldId="690"/>
+        </pc:sldMkLst>
+      </pc:sldChg>
+      <pc:sldChg chg="del">
+        <pc:chgData name="Mohammed Fasha" userId="cc64f42d-a1a6-4f08-b97b-0c37f877119f" providerId="ADAL" clId="{FEC9C214-E726-4192-8176-A8C9AACEB478}" dt="2025-05-16T05:43:36.510" v="126" actId="2696"/>
+        <pc:sldMkLst>
+          <pc:docMk/>
+          <pc:sldMk cId="1982708772" sldId="692"/>
+        </pc:sldMkLst>
+      </pc:sldChg>
+      <pc:sldChg chg="del">
+        <pc:chgData name="Mohammed Fasha" userId="cc64f42d-a1a6-4f08-b97b-0c37f877119f" providerId="ADAL" clId="{FEC9C214-E726-4192-8176-A8C9AACEB478}" dt="2025-05-16T05:43:36.510" v="126" actId="2696"/>
+        <pc:sldMkLst>
+          <pc:docMk/>
+          <pc:sldMk cId="3424197979" sldId="694"/>
+        </pc:sldMkLst>
+      </pc:sldChg>
+      <pc:sldChg chg="del">
+        <pc:chgData name="Mohammed Fasha" userId="cc64f42d-a1a6-4f08-b97b-0c37f877119f" providerId="ADAL" clId="{FEC9C214-E726-4192-8176-A8C9AACEB478}" dt="2025-05-16T05:43:36.510" v="126" actId="2696"/>
+        <pc:sldMkLst>
+          <pc:docMk/>
+          <pc:sldMk cId="1697141369" sldId="695"/>
+        </pc:sldMkLst>
+      </pc:sldChg>
+      <pc:sldChg chg="del">
+        <pc:chgData name="Mohammed Fasha" userId="cc64f42d-a1a6-4f08-b97b-0c37f877119f" providerId="ADAL" clId="{FEC9C214-E726-4192-8176-A8C9AACEB478}" dt="2025-05-16T05:43:36.510" v="126" actId="2696"/>
+        <pc:sldMkLst>
+          <pc:docMk/>
+          <pc:sldMk cId="1317643237" sldId="696"/>
+        </pc:sldMkLst>
+      </pc:sldChg>
+      <pc:sldChg chg="del">
+        <pc:chgData name="Mohammed Fasha" userId="cc64f42d-a1a6-4f08-b97b-0c37f877119f" providerId="ADAL" clId="{FEC9C214-E726-4192-8176-A8C9AACEB478}" dt="2025-05-16T05:43:36.510" v="126" actId="2696"/>
+        <pc:sldMkLst>
+          <pc:docMk/>
+          <pc:sldMk cId="265576630" sldId="698"/>
+        </pc:sldMkLst>
+      </pc:sldChg>
+      <pc:sldChg chg="del">
+        <pc:chgData name="Mohammed Fasha" userId="cc64f42d-a1a6-4f08-b97b-0c37f877119f" providerId="ADAL" clId="{FEC9C214-E726-4192-8176-A8C9AACEB478}" dt="2025-05-16T05:43:36.510" v="126" actId="2696"/>
+        <pc:sldMkLst>
+          <pc:docMk/>
+          <pc:sldMk cId="4247717824" sldId="700"/>
+        </pc:sldMkLst>
+      </pc:sldChg>
+      <pc:sldChg chg="del">
+        <pc:chgData name="Mohammed Fasha" userId="cc64f42d-a1a6-4f08-b97b-0c37f877119f" providerId="ADAL" clId="{FEC9C214-E726-4192-8176-A8C9AACEB478}" dt="2025-05-16T05:43:36.510" v="126" actId="2696"/>
+        <pc:sldMkLst>
+          <pc:docMk/>
+          <pc:sldMk cId="3085160177" sldId="704"/>
+        </pc:sldMkLst>
+      </pc:sldChg>
+      <pc:sldChg chg="del">
+        <pc:chgData name="Mohammed Fasha" userId="cc64f42d-a1a6-4f08-b97b-0c37f877119f" providerId="ADAL" clId="{FEC9C214-E726-4192-8176-A8C9AACEB478}" dt="2025-05-16T05:43:36.510" v="126" actId="2696"/>
+        <pc:sldMkLst>
+          <pc:docMk/>
+          <pc:sldMk cId="1862107672" sldId="705"/>
+        </pc:sldMkLst>
+      </pc:sldChg>
+      <pc:sldChg chg="modSp del mod">
+        <pc:chgData name="Mohammed Fasha" userId="cc64f42d-a1a6-4f08-b97b-0c37f877119f" providerId="ADAL" clId="{FEC9C214-E726-4192-8176-A8C9AACEB478}" dt="2025-05-16T05:43:36.510" v="126" actId="2696"/>
+        <pc:sldMkLst>
+          <pc:docMk/>
+          <pc:sldMk cId="1142780366" sldId="706"/>
+        </pc:sldMkLst>
+      </pc:sldChg>
+      <pc:sldChg chg="del">
+        <pc:chgData name="Mohammed Fasha" userId="cc64f42d-a1a6-4f08-b97b-0c37f877119f" providerId="ADAL" clId="{FEC9C214-E726-4192-8176-A8C9AACEB478}" dt="2025-05-16T05:43:36.510" v="126" actId="2696"/>
+        <pc:sldMkLst>
+          <pc:docMk/>
+          <pc:sldMk cId="67871309" sldId="709"/>
+        </pc:sldMkLst>
+      </pc:sldChg>
+      <pc:sldChg chg="del">
+        <pc:chgData name="Mohammed Fasha" userId="cc64f42d-a1a6-4f08-b97b-0c37f877119f" providerId="ADAL" clId="{FEC9C214-E726-4192-8176-A8C9AACEB478}" dt="2025-05-16T05:43:36.510" v="126" actId="2696"/>
+        <pc:sldMkLst>
+          <pc:docMk/>
+          <pc:sldMk cId="4114896152" sldId="710"/>
+        </pc:sldMkLst>
+      </pc:sldChg>
+      <pc:sldChg chg="del">
+        <pc:chgData name="Mohammed Fasha" userId="cc64f42d-a1a6-4f08-b97b-0c37f877119f" providerId="ADAL" clId="{FEC9C214-E726-4192-8176-A8C9AACEB478}" dt="2025-05-16T05:43:36.510" v="126" actId="2696"/>
+        <pc:sldMkLst>
+          <pc:docMk/>
+          <pc:sldMk cId="3794385322" sldId="711"/>
+        </pc:sldMkLst>
+      </pc:sldChg>
+      <pc:sldChg chg="del">
+        <pc:chgData name="Mohammed Fasha" userId="cc64f42d-a1a6-4f08-b97b-0c37f877119f" providerId="ADAL" clId="{FEC9C214-E726-4192-8176-A8C9AACEB478}" dt="2025-05-16T05:43:36.510" v="126" actId="2696"/>
+        <pc:sldMkLst>
+          <pc:docMk/>
+          <pc:sldMk cId="3701206727" sldId="712"/>
+        </pc:sldMkLst>
+      </pc:sldChg>
+      <pc:sldChg chg="del">
+        <pc:chgData name="Mohammed Fasha" userId="cc64f42d-a1a6-4f08-b97b-0c37f877119f" providerId="ADAL" clId="{FEC9C214-E726-4192-8176-A8C9AACEB478}" dt="2025-05-16T05:43:36.510" v="126" actId="2696"/>
+        <pc:sldMkLst>
+          <pc:docMk/>
+          <pc:sldMk cId="1499972066" sldId="713"/>
+        </pc:sldMkLst>
+      </pc:sldChg>
+      <pc:sldChg chg="del">
+        <pc:chgData name="Mohammed Fasha" userId="cc64f42d-a1a6-4f08-b97b-0c37f877119f" providerId="ADAL" clId="{FEC9C214-E726-4192-8176-A8C9AACEB478}" dt="2025-05-16T05:43:36.510" v="126" actId="2696"/>
+        <pc:sldMkLst>
+          <pc:docMk/>
+          <pc:sldMk cId="1270641495" sldId="714"/>
+        </pc:sldMkLst>
+      </pc:sldChg>
+      <pc:sldChg chg="modSp del mod">
+        <pc:chgData name="Mohammed Fasha" userId="cc64f42d-a1a6-4f08-b97b-0c37f877119f" providerId="ADAL" clId="{FEC9C214-E726-4192-8176-A8C9AACEB478}" dt="2025-05-16T05:43:36.510" v="126" actId="2696"/>
+        <pc:sldMkLst>
+          <pc:docMk/>
+          <pc:sldMk cId="1096386322" sldId="715"/>
+        </pc:sldMkLst>
+      </pc:sldChg>
+      <pc:sldChg chg="modSp del mod">
+        <pc:chgData name="Mohammed Fasha" userId="cc64f42d-a1a6-4f08-b97b-0c37f877119f" providerId="ADAL" clId="{FEC9C214-E726-4192-8176-A8C9AACEB478}" dt="2025-05-16T05:43:36.510" v="126" actId="2696"/>
+        <pc:sldMkLst>
+          <pc:docMk/>
+          <pc:sldMk cId="1784058309" sldId="716"/>
+        </pc:sldMkLst>
+      </pc:sldChg>
+      <pc:sldChg chg="modSp del mod">
+        <pc:chgData name="Mohammed Fasha" userId="cc64f42d-a1a6-4f08-b97b-0c37f877119f" providerId="ADAL" clId="{FEC9C214-E726-4192-8176-A8C9AACEB478}" dt="2025-05-16T05:43:36.510" v="126" actId="2696"/>
+        <pc:sldMkLst>
+          <pc:docMk/>
+          <pc:sldMk cId="3139017106" sldId="717"/>
+        </pc:sldMkLst>
+      </pc:sldChg>
+      <pc:sldChg chg="del">
+        <pc:chgData name="Mohammed Fasha" userId="cc64f42d-a1a6-4f08-b97b-0c37f877119f" providerId="ADAL" clId="{FEC9C214-E726-4192-8176-A8C9AACEB478}" dt="2025-05-16T05:43:36.510" v="126" actId="2696"/>
+        <pc:sldMkLst>
+          <pc:docMk/>
+          <pc:sldMk cId="3043812923" sldId="718"/>
+        </pc:sldMkLst>
+      </pc:sldChg>
+      <pc:sldChg chg="modSp del mod">
+        <pc:chgData name="Mohammed Fasha" userId="cc64f42d-a1a6-4f08-b97b-0c37f877119f" providerId="ADAL" clId="{FEC9C214-E726-4192-8176-A8C9AACEB478}" dt="2025-05-12T03:04:56.963" v="45" actId="2696"/>
+        <pc:sldMkLst>
+          <pc:docMk/>
+          <pc:sldMk cId="666527140" sldId="725"/>
+        </pc:sldMkLst>
+      </pc:sldChg>
+      <pc:sldChg chg="add del">
+        <pc:chgData name="Mohammed Fasha" userId="cc64f42d-a1a6-4f08-b97b-0c37f877119f" providerId="ADAL" clId="{FEC9C214-E726-4192-8176-A8C9AACEB478}" dt="2025-05-16T05:43:36.510" v="126" actId="2696"/>
+        <pc:sldMkLst>
+          <pc:docMk/>
+          <pc:sldMk cId="2280465272" sldId="725"/>
+        </pc:sldMkLst>
+      </pc:sldChg>
+      <pc:sldChg chg="del">
+        <pc:chgData name="Mohammed Fasha" userId="cc64f42d-a1a6-4f08-b97b-0c37f877119f" providerId="ADAL" clId="{FEC9C214-E726-4192-8176-A8C9AACEB478}" dt="2025-05-16T05:43:36.510" v="126" actId="2696"/>
+        <pc:sldMkLst>
+          <pc:docMk/>
+          <pc:sldMk cId="3660604927" sldId="726"/>
+        </pc:sldMkLst>
+      </pc:sldChg>
+      <pc:sldChg chg="del">
+        <pc:chgData name="Mohammed Fasha" userId="cc64f42d-a1a6-4f08-b97b-0c37f877119f" providerId="ADAL" clId="{FEC9C214-E726-4192-8176-A8C9AACEB478}" dt="2025-05-16T05:43:36.510" v="126" actId="2696"/>
+        <pc:sldMkLst>
+          <pc:docMk/>
+          <pc:sldMk cId="4051640529" sldId="728"/>
+        </pc:sldMkLst>
+      </pc:sldChg>
+      <pc:sldChg chg="modSp new del mod">
+        <pc:chgData name="Mohammed Fasha" userId="cc64f42d-a1a6-4f08-b97b-0c37f877119f" providerId="ADAL" clId="{FEC9C214-E726-4192-8176-A8C9AACEB478}" dt="2025-05-12T03:11:40.927" v="51" actId="47"/>
+        <pc:sldMkLst>
+          <pc:docMk/>
+          <pc:sldMk cId="1223704259" sldId="729"/>
+        </pc:sldMkLst>
+      </pc:sldChg>
+      <pc:sldChg chg="add del">
+        <pc:chgData name="Mohammed Fasha" userId="cc64f42d-a1a6-4f08-b97b-0c37f877119f" providerId="ADAL" clId="{FEC9C214-E726-4192-8176-A8C9AACEB478}" dt="2025-05-12T03:06:57.298" v="49"/>
+        <pc:sldMkLst>
+          <pc:docMk/>
+          <pc:sldMk cId="3927078588" sldId="730"/>
+        </pc:sldMkLst>
+      </pc:sldChg>
+    </pc:docChg>
+  </pc:docChgLst>
   <pc:docChgLst>
     <pc:chgData name="Mohammed Fasha" userId="cc64f42d-a1a6-4f08-b97b-0c37f877119f" providerId="ADAL" clId="{5980B3BB-4EB6-4E37-92BF-3A2A8F4B2C7A}"/>
     <pc:docChg chg="custSel modSld">
@@ -171,6 +1413,99 @@
         <pc:sldMkLst>
           <pc:docMk/>
           <pc:sldMk cId="2297456757" sldId="483"/>
+        </pc:sldMkLst>
+      </pc:sldChg>
+    </pc:docChg>
+  </pc:docChgLst>
+  <pc:docChgLst>
+    <pc:chgData name="Mohammed Fasha" userId="cc64f42d-a1a6-4f08-b97b-0c37f877119f" providerId="ADAL" clId="{2E5FBF59-3168-4932-9518-582502FE1AD5}"/>
+    <pc:docChg chg="undo custSel delSld modSld">
+      <pc:chgData name="Mohammed Fasha" userId="cc64f42d-a1a6-4f08-b97b-0c37f877119f" providerId="ADAL" clId="{2E5FBF59-3168-4932-9518-582502FE1AD5}" dt="2024-12-24T08:08:19.987" v="550" actId="20577"/>
+      <pc:docMkLst>
+        <pc:docMk/>
+      </pc:docMkLst>
+      <pc:sldChg chg="delSp">
+        <pc:chgData name="Mohammed Fasha" userId="cc64f42d-a1a6-4f08-b97b-0c37f877119f" providerId="ADAL" clId="{2E5FBF59-3168-4932-9518-582502FE1AD5}" dt="2024-11-19T07:40:47.121" v="208" actId="478"/>
+        <pc:sldMkLst>
+          <pc:docMk/>
+          <pc:sldMk cId="391491219" sldId="428"/>
+        </pc:sldMkLst>
+      </pc:sldChg>
+      <pc:sldChg chg="modSp">
+        <pc:chgData name="Mohammed Fasha" userId="cc64f42d-a1a6-4f08-b97b-0c37f877119f" providerId="ADAL" clId="{2E5FBF59-3168-4932-9518-582502FE1AD5}" dt="2024-12-03T07:43:58.007" v="456" actId="1076"/>
+        <pc:sldMkLst>
+          <pc:docMk/>
+          <pc:sldMk cId="3339445507" sldId="430"/>
+        </pc:sldMkLst>
+      </pc:sldChg>
+      <pc:sldChg chg="modSp">
+        <pc:chgData name="Mohammed Fasha" userId="cc64f42d-a1a6-4f08-b97b-0c37f877119f" providerId="ADAL" clId="{2E5FBF59-3168-4932-9518-582502FE1AD5}" dt="2024-12-03T07:45:08.136" v="474" actId="20577"/>
+        <pc:sldMkLst>
+          <pc:docMk/>
+          <pc:sldMk cId="3389046835" sldId="431"/>
+        </pc:sldMkLst>
+      </pc:sldChg>
+      <pc:sldChg chg="modSp">
+        <pc:chgData name="Mohammed Fasha" userId="cc64f42d-a1a6-4f08-b97b-0c37f877119f" providerId="ADAL" clId="{2E5FBF59-3168-4932-9518-582502FE1AD5}" dt="2024-11-10T06:33:09.727" v="37" actId="207"/>
+        <pc:sldMkLst>
+          <pc:docMk/>
+          <pc:sldMk cId="2726994946" sldId="479"/>
+        </pc:sldMkLst>
+      </pc:sldChg>
+      <pc:sldChg chg="modSp">
+        <pc:chgData name="Mohammed Fasha" userId="cc64f42d-a1a6-4f08-b97b-0c37f877119f" providerId="ADAL" clId="{2E5FBF59-3168-4932-9518-582502FE1AD5}" dt="2024-11-19T07:44:28.766" v="211" actId="20577"/>
+        <pc:sldMkLst>
+          <pc:docMk/>
+          <pc:sldMk cId="2297456757" sldId="483"/>
+        </pc:sldMkLst>
+      </pc:sldChg>
+      <pc:sldChg chg="modSp">
+        <pc:chgData name="Mohammed Fasha" userId="cc64f42d-a1a6-4f08-b97b-0c37f877119f" providerId="ADAL" clId="{2E5FBF59-3168-4932-9518-582502FE1AD5}" dt="2024-11-10T06:45:09.392" v="40" actId="20577"/>
+        <pc:sldMkLst>
+          <pc:docMk/>
+          <pc:sldMk cId="3474268344" sldId="596"/>
+        </pc:sldMkLst>
+      </pc:sldChg>
+      <pc:sldChg chg="modSp">
+        <pc:chgData name="Mohammed Fasha" userId="cc64f42d-a1a6-4f08-b97b-0c37f877119f" providerId="ADAL" clId="{2E5FBF59-3168-4932-9518-582502FE1AD5}" dt="2024-12-03T07:47:21.561" v="476" actId="6549"/>
+        <pc:sldMkLst>
+          <pc:docMk/>
+          <pc:sldMk cId="399592497" sldId="613"/>
+        </pc:sldMkLst>
+      </pc:sldChg>
+      <pc:sldChg chg="modSp">
+        <pc:chgData name="Mohammed Fasha" userId="cc64f42d-a1a6-4f08-b97b-0c37f877119f" providerId="ADAL" clId="{2E5FBF59-3168-4932-9518-582502FE1AD5}" dt="2024-12-03T07:49:02.980" v="478" actId="207"/>
+        <pc:sldMkLst>
+          <pc:docMk/>
+          <pc:sldMk cId="3329135496" sldId="617"/>
+        </pc:sldMkLst>
+      </pc:sldChg>
+      <pc:sldChg chg="modSp">
+        <pc:chgData name="Mohammed Fasha" userId="cc64f42d-a1a6-4f08-b97b-0c37f877119f" providerId="ADAL" clId="{2E5FBF59-3168-4932-9518-582502FE1AD5}" dt="2024-12-24T08:05:16.608" v="482" actId="403"/>
+        <pc:sldMkLst>
+          <pc:docMk/>
+          <pc:sldMk cId="2990045589" sldId="659"/>
+        </pc:sldMkLst>
+      </pc:sldChg>
+      <pc:sldChg chg="modSp">
+        <pc:chgData name="Mohammed Fasha" userId="cc64f42d-a1a6-4f08-b97b-0c37f877119f" providerId="ADAL" clId="{2E5FBF59-3168-4932-9518-582502FE1AD5}" dt="2024-12-24T08:08:19.987" v="550" actId="20577"/>
+        <pc:sldMkLst>
+          <pc:docMk/>
+          <pc:sldMk cId="2680231355" sldId="669"/>
+        </pc:sldMkLst>
+      </pc:sldChg>
+      <pc:sldChg chg="addSp modSp">
+        <pc:chgData name="Mohammed Fasha" userId="cc64f42d-a1a6-4f08-b97b-0c37f877119f" providerId="ADAL" clId="{2E5FBF59-3168-4932-9518-582502FE1AD5}" dt="2024-12-24T08:05:52.910" v="488" actId="1076"/>
+        <pc:sldMkLst>
+          <pc:docMk/>
+          <pc:sldMk cId="916102856" sldId="685"/>
+        </pc:sldMkLst>
+      </pc:sldChg>
+      <pc:sldChg chg="modSp">
+        <pc:chgData name="Mohammed Fasha" userId="cc64f42d-a1a6-4f08-b97b-0c37f877119f" providerId="ADAL" clId="{2E5FBF59-3168-4932-9518-582502FE1AD5}" dt="2024-11-19T07:03:29.557" v="206" actId="207"/>
+        <pc:sldMkLst>
+          <pc:docMk/>
+          <pc:sldMk cId="32004852" sldId="708"/>
         </pc:sldMkLst>
       </pc:sldChg>
     </pc:docChg>
@@ -1523,6 +2858,30 @@
     </pc:docChg>
   </pc:docChgLst>
   <pc:docChgLst>
+    <pc:chgData name="Mohammed Fasha" userId="cc64f42d-a1a6-4f08-b97b-0c37f877119f" providerId="ADAL" clId="{6804A8E6-8D7F-46E3-B091-66A8F6B926BF}"/>
+    <pc:docChg chg="custSel modMainMaster">
+      <pc:chgData name="Mohammed Fasha" userId="cc64f42d-a1a6-4f08-b97b-0c37f877119f" providerId="ADAL" clId="{6804A8E6-8D7F-46E3-B091-66A8F6B926BF}" dt="2024-11-09T05:15:35.019" v="2" actId="1076"/>
+      <pc:docMkLst>
+        <pc:docMk/>
+      </pc:docMkLst>
+      <pc:sldMasterChg chg="delSp mod modSldLayout">
+        <pc:chgData name="Mohammed Fasha" userId="cc64f42d-a1a6-4f08-b97b-0c37f877119f" providerId="ADAL" clId="{6804A8E6-8D7F-46E3-B091-66A8F6B926BF}" dt="2024-11-09T05:15:35.019" v="2" actId="1076"/>
+        <pc:sldMasterMkLst>
+          <pc:docMk/>
+          <pc:sldMasterMk cId="742811419" sldId="2147483648"/>
+        </pc:sldMasterMkLst>
+        <pc:sldLayoutChg chg="addSp modSp mod">
+          <pc:chgData name="Mohammed Fasha" userId="cc64f42d-a1a6-4f08-b97b-0c37f877119f" providerId="ADAL" clId="{6804A8E6-8D7F-46E3-B091-66A8F6B926BF}" dt="2024-11-09T05:15:35.019" v="2" actId="1076"/>
+          <pc:sldLayoutMkLst>
+            <pc:docMk/>
+            <pc:sldMasterMk cId="742811419" sldId="2147483648"/>
+            <pc:sldLayoutMk cId="4063788262" sldId="2147483649"/>
+          </pc:sldLayoutMkLst>
+        </pc:sldLayoutChg>
+      </pc:sldMasterChg>
+    </pc:docChg>
+  </pc:docChgLst>
+  <pc:docChgLst>
     <pc:chgData name="Mohammed Fasha" userId="cc64f42d-a1a6-4f08-b97b-0c37f877119f" providerId="ADAL" clId="{19B6BCF0-69C5-47B4-98CC-B0941D29A039}"/>
     <pc:docChg chg="undo redo custSel addSld delSld modSld sldOrd modMainMaster">
       <pc:chgData name="Mohammed Fasha" userId="cc64f42d-a1a6-4f08-b97b-0c37f877119f" providerId="ADAL" clId="{19B6BCF0-69C5-47B4-98CC-B0941D29A039}" dt="2025-04-09T04:34:39.336" v="631" actId="1076"/>
@@ -1810,1225 +3169,6 @@
               <ac:spMk id="3" creationId="{93FDCCF6-2612-A73C-C264-680D14569853}"/>
             </ac:spMkLst>
           </pc:spChg>
-        </pc:sldLayoutChg>
-      </pc:sldMasterChg>
-    </pc:docChg>
-  </pc:docChgLst>
-  <pc:docChgLst>
-    <pc:chgData name="Mohammed Fasha" userId="cc64f42d-a1a6-4f08-b97b-0c37f877119f" providerId="ADAL" clId="{4C71ED24-115E-432D-933D-C801DA3E52F1}"/>
-    <pc:docChg chg="delSld">
-      <pc:chgData name="Mohammed Fasha" userId="cc64f42d-a1a6-4f08-b97b-0c37f877119f" providerId="ADAL" clId="{4C71ED24-115E-432D-933D-C801DA3E52F1}" dt="2024-12-29T03:12:49.974" v="2" actId="47"/>
-      <pc:docMkLst>
-        <pc:docMk/>
-      </pc:docMkLst>
-      <pc:sldChg chg="del">
-        <pc:chgData name="Mohammed Fasha" userId="cc64f42d-a1a6-4f08-b97b-0c37f877119f" providerId="ADAL" clId="{4C71ED24-115E-432D-933D-C801DA3E52F1}" dt="2024-12-29T03:12:48.360" v="0" actId="47"/>
-        <pc:sldMkLst>
-          <pc:docMk/>
-          <pc:sldMk cId="2341000601" sldId="701"/>
-        </pc:sldMkLst>
-      </pc:sldChg>
-      <pc:sldChg chg="del">
-        <pc:chgData name="Mohammed Fasha" userId="cc64f42d-a1a6-4f08-b97b-0c37f877119f" providerId="ADAL" clId="{4C71ED24-115E-432D-933D-C801DA3E52F1}" dt="2024-12-29T03:12:49.133" v="1" actId="47"/>
-        <pc:sldMkLst>
-          <pc:docMk/>
-          <pc:sldMk cId="3519698944" sldId="702"/>
-        </pc:sldMkLst>
-      </pc:sldChg>
-      <pc:sldChg chg="del">
-        <pc:chgData name="Mohammed Fasha" userId="cc64f42d-a1a6-4f08-b97b-0c37f877119f" providerId="ADAL" clId="{4C71ED24-115E-432D-933D-C801DA3E52F1}" dt="2024-12-29T03:12:49.974" v="2" actId="47"/>
-        <pc:sldMkLst>
-          <pc:docMk/>
-          <pc:sldMk cId="3934257344" sldId="703"/>
-        </pc:sldMkLst>
-      </pc:sldChg>
-    </pc:docChg>
-  </pc:docChgLst>
-  <pc:docChgLst>
-    <pc:chgData name="Mohammed Fasha" userId="cc64f42d-a1a6-4f08-b97b-0c37f877119f" providerId="ADAL" clId="{BECD4A7F-C1AF-4585-8C31-FE7D4FE3ED16}"/>
-    <pc:docChg chg="undo redo custSel addSld delSld modSld sldOrd">
-      <pc:chgData name="Mohammed Fasha" userId="cc64f42d-a1a6-4f08-b97b-0c37f877119f" providerId="ADAL" clId="{BECD4A7F-C1AF-4585-8C31-FE7D4FE3ED16}" dt="2025-01-05T16:36:16.605" v="1945" actId="1076"/>
-      <pc:docMkLst>
-        <pc:docMk/>
-      </pc:docMkLst>
-      <pc:sldChg chg="modSp mod">
-        <pc:chgData name="Mohammed Fasha" userId="cc64f42d-a1a6-4f08-b97b-0c37f877119f" providerId="ADAL" clId="{BECD4A7F-C1AF-4585-8C31-FE7D4FE3ED16}" dt="2024-12-30T18:47:27.683" v="988" actId="20577"/>
-        <pc:sldMkLst>
-          <pc:docMk/>
-          <pc:sldMk cId="2281221656" sldId="527"/>
-        </pc:sldMkLst>
-      </pc:sldChg>
-      <pc:sldChg chg="modSp mod">
-        <pc:chgData name="Mohammed Fasha" userId="cc64f42d-a1a6-4f08-b97b-0c37f877119f" providerId="ADAL" clId="{BECD4A7F-C1AF-4585-8C31-FE7D4FE3ED16}" dt="2024-12-27T13:59:26.893" v="366" actId="20577"/>
-        <pc:sldMkLst>
-          <pc:docMk/>
-          <pc:sldMk cId="3474268344" sldId="596"/>
-        </pc:sldMkLst>
-      </pc:sldChg>
-      <pc:sldChg chg="modSp mod">
-        <pc:chgData name="Mohammed Fasha" userId="cc64f42d-a1a6-4f08-b97b-0c37f877119f" providerId="ADAL" clId="{BECD4A7F-C1AF-4585-8C31-FE7D4FE3ED16}" dt="2024-12-30T18:44:34.649" v="884" actId="20577"/>
-        <pc:sldMkLst>
-          <pc:docMk/>
-          <pc:sldMk cId="916802035" sldId="651"/>
-        </pc:sldMkLst>
-      </pc:sldChg>
-      <pc:sldChg chg="del">
-        <pc:chgData name="Mohammed Fasha" userId="cc64f42d-a1a6-4f08-b97b-0c37f877119f" providerId="ADAL" clId="{BECD4A7F-C1AF-4585-8C31-FE7D4FE3ED16}" dt="2025-01-05T14:42:38.675" v="989" actId="2696"/>
-        <pc:sldMkLst>
-          <pc:docMk/>
-          <pc:sldMk cId="426516858" sldId="662"/>
-        </pc:sldMkLst>
-      </pc:sldChg>
-      <pc:sldChg chg="modSp add del mod">
-        <pc:chgData name="Mohammed Fasha" userId="cc64f42d-a1a6-4f08-b97b-0c37f877119f" providerId="ADAL" clId="{BECD4A7F-C1AF-4585-8C31-FE7D4FE3ED16}" dt="2025-01-05T16:34:59.233" v="1926" actId="20577"/>
-        <pc:sldMkLst>
-          <pc:docMk/>
-          <pc:sldMk cId="691538069" sldId="662"/>
-        </pc:sldMkLst>
-      </pc:sldChg>
-      <pc:sldChg chg="del">
-        <pc:chgData name="Mohammed Fasha" userId="cc64f42d-a1a6-4f08-b97b-0c37f877119f" providerId="ADAL" clId="{BECD4A7F-C1AF-4585-8C31-FE7D4FE3ED16}" dt="2025-01-05T14:42:38.675" v="989" actId="2696"/>
-        <pc:sldMkLst>
-          <pc:docMk/>
-          <pc:sldMk cId="895445062" sldId="663"/>
-        </pc:sldMkLst>
-      </pc:sldChg>
-      <pc:sldChg chg="add del">
-        <pc:chgData name="Mohammed Fasha" userId="cc64f42d-a1a6-4f08-b97b-0c37f877119f" providerId="ADAL" clId="{BECD4A7F-C1AF-4585-8C31-FE7D4FE3ED16}" dt="2025-01-05T14:43:16.100" v="993" actId="2696"/>
-        <pc:sldMkLst>
-          <pc:docMk/>
-          <pc:sldMk cId="3980180774" sldId="663"/>
-        </pc:sldMkLst>
-      </pc:sldChg>
-      <pc:sldChg chg="add del">
-        <pc:chgData name="Mohammed Fasha" userId="cc64f42d-a1a6-4f08-b97b-0c37f877119f" providerId="ADAL" clId="{BECD4A7F-C1AF-4585-8C31-FE7D4FE3ED16}" dt="2025-01-05T14:43:16.100" v="993" actId="2696"/>
-        <pc:sldMkLst>
-          <pc:docMk/>
-          <pc:sldMk cId="1728680596" sldId="664"/>
-        </pc:sldMkLst>
-      </pc:sldChg>
-      <pc:sldChg chg="del">
-        <pc:chgData name="Mohammed Fasha" userId="cc64f42d-a1a6-4f08-b97b-0c37f877119f" providerId="ADAL" clId="{BECD4A7F-C1AF-4585-8C31-FE7D4FE3ED16}" dt="2025-01-05T14:42:38.675" v="989" actId="2696"/>
-        <pc:sldMkLst>
-          <pc:docMk/>
-          <pc:sldMk cId="3900588277" sldId="664"/>
-        </pc:sldMkLst>
-      </pc:sldChg>
-      <pc:sldChg chg="del">
-        <pc:chgData name="Mohammed Fasha" userId="cc64f42d-a1a6-4f08-b97b-0c37f877119f" providerId="ADAL" clId="{BECD4A7F-C1AF-4585-8C31-FE7D4FE3ED16}" dt="2025-01-05T14:42:38.675" v="989" actId="2696"/>
-        <pc:sldMkLst>
-          <pc:docMk/>
-          <pc:sldMk cId="123002105" sldId="665"/>
-        </pc:sldMkLst>
-      </pc:sldChg>
-      <pc:sldChg chg="modSp add del mod">
-        <pc:chgData name="Mohammed Fasha" userId="cc64f42d-a1a6-4f08-b97b-0c37f877119f" providerId="ADAL" clId="{BECD4A7F-C1AF-4585-8C31-FE7D4FE3ED16}" dt="2025-01-05T15:05:12.729" v="1226" actId="21"/>
-        <pc:sldMkLst>
-          <pc:docMk/>
-          <pc:sldMk cId="148099094" sldId="665"/>
-        </pc:sldMkLst>
-      </pc:sldChg>
-      <pc:sldChg chg="del">
-        <pc:chgData name="Mohammed Fasha" userId="cc64f42d-a1a6-4f08-b97b-0c37f877119f" providerId="ADAL" clId="{BECD4A7F-C1AF-4585-8C31-FE7D4FE3ED16}" dt="2025-01-05T14:42:38.675" v="989" actId="2696"/>
-        <pc:sldMkLst>
-          <pc:docMk/>
-          <pc:sldMk cId="659863378" sldId="676"/>
-        </pc:sldMkLst>
-      </pc:sldChg>
-      <pc:sldChg chg="modSp add del mod">
-        <pc:chgData name="Mohammed Fasha" userId="cc64f42d-a1a6-4f08-b97b-0c37f877119f" providerId="ADAL" clId="{BECD4A7F-C1AF-4585-8C31-FE7D4FE3ED16}" dt="2025-01-05T14:55:27.595" v="1130" actId="255"/>
-        <pc:sldMkLst>
-          <pc:docMk/>
-          <pc:sldMk cId="1577854815" sldId="676"/>
-        </pc:sldMkLst>
-      </pc:sldChg>
-      <pc:sldChg chg="modSp add del mod">
-        <pc:chgData name="Mohammed Fasha" userId="cc64f42d-a1a6-4f08-b97b-0c37f877119f" providerId="ADAL" clId="{BECD4A7F-C1AF-4585-8C31-FE7D4FE3ED16}" dt="2025-01-05T14:55:43.754" v="1132" actId="1076"/>
-        <pc:sldMkLst>
-          <pc:docMk/>
-          <pc:sldMk cId="139882925" sldId="677"/>
-        </pc:sldMkLst>
-      </pc:sldChg>
-      <pc:sldChg chg="del">
-        <pc:chgData name="Mohammed Fasha" userId="cc64f42d-a1a6-4f08-b97b-0c37f877119f" providerId="ADAL" clId="{BECD4A7F-C1AF-4585-8C31-FE7D4FE3ED16}" dt="2025-01-05T14:42:38.675" v="989" actId="2696"/>
-        <pc:sldMkLst>
-          <pc:docMk/>
-          <pc:sldMk cId="2736863534" sldId="677"/>
-        </pc:sldMkLst>
-      </pc:sldChg>
-      <pc:sldChg chg="add del">
-        <pc:chgData name="Mohammed Fasha" userId="cc64f42d-a1a6-4f08-b97b-0c37f877119f" providerId="ADAL" clId="{BECD4A7F-C1AF-4585-8C31-FE7D4FE3ED16}" dt="2025-01-05T14:43:16.100" v="993" actId="2696"/>
-        <pc:sldMkLst>
-          <pc:docMk/>
-          <pc:sldMk cId="4146654093" sldId="678"/>
-        </pc:sldMkLst>
-      </pc:sldChg>
-      <pc:sldChg chg="del">
-        <pc:chgData name="Mohammed Fasha" userId="cc64f42d-a1a6-4f08-b97b-0c37f877119f" providerId="ADAL" clId="{BECD4A7F-C1AF-4585-8C31-FE7D4FE3ED16}" dt="2025-01-05T14:42:38.675" v="989" actId="2696"/>
-        <pc:sldMkLst>
-          <pc:docMk/>
-          <pc:sldMk cId="4228312762" sldId="678"/>
-        </pc:sldMkLst>
-      </pc:sldChg>
-      <pc:sldChg chg="del">
-        <pc:chgData name="Mohammed Fasha" userId="cc64f42d-a1a6-4f08-b97b-0c37f877119f" providerId="ADAL" clId="{BECD4A7F-C1AF-4585-8C31-FE7D4FE3ED16}" dt="2025-01-05T14:42:38.675" v="989" actId="2696"/>
-        <pc:sldMkLst>
-          <pc:docMk/>
-          <pc:sldMk cId="581717462" sldId="679"/>
-        </pc:sldMkLst>
-      </pc:sldChg>
-      <pc:sldChg chg="addSp delSp modSp add del mod chgLayout">
-        <pc:chgData name="Mohammed Fasha" userId="cc64f42d-a1a6-4f08-b97b-0c37f877119f" providerId="ADAL" clId="{BECD4A7F-C1AF-4585-8C31-FE7D4FE3ED16}" dt="2025-01-05T16:36:16.605" v="1945" actId="1076"/>
-        <pc:sldMkLst>
-          <pc:docMk/>
-          <pc:sldMk cId="3454522070" sldId="679"/>
-        </pc:sldMkLst>
-      </pc:sldChg>
-      <pc:sldChg chg="add del">
-        <pc:chgData name="Mohammed Fasha" userId="cc64f42d-a1a6-4f08-b97b-0c37f877119f" providerId="ADAL" clId="{BECD4A7F-C1AF-4585-8C31-FE7D4FE3ED16}" dt="2025-01-05T14:43:16.100" v="993" actId="2696"/>
-        <pc:sldMkLst>
-          <pc:docMk/>
-          <pc:sldMk cId="2856814121" sldId="681"/>
-        </pc:sldMkLst>
-      </pc:sldChg>
-      <pc:sldChg chg="del">
-        <pc:chgData name="Mohammed Fasha" userId="cc64f42d-a1a6-4f08-b97b-0c37f877119f" providerId="ADAL" clId="{BECD4A7F-C1AF-4585-8C31-FE7D4FE3ED16}" dt="2025-01-05T14:42:38.675" v="989" actId="2696"/>
-        <pc:sldMkLst>
-          <pc:docMk/>
-          <pc:sldMk cId="3083966018" sldId="681"/>
-        </pc:sldMkLst>
-      </pc:sldChg>
-      <pc:sldChg chg="modSp mod">
-        <pc:chgData name="Mohammed Fasha" userId="cc64f42d-a1a6-4f08-b97b-0c37f877119f" providerId="ADAL" clId="{BECD4A7F-C1AF-4585-8C31-FE7D4FE3ED16}" dt="2025-01-05T14:42:50.596" v="990" actId="14100"/>
-        <pc:sldMkLst>
-          <pc:docMk/>
-          <pc:sldMk cId="1697141369" sldId="695"/>
-        </pc:sldMkLst>
-      </pc:sldChg>
-      <pc:sldChg chg="addSp delSp modSp add del mod">
-        <pc:chgData name="Mohammed Fasha" userId="cc64f42d-a1a6-4f08-b97b-0c37f877119f" providerId="ADAL" clId="{BECD4A7F-C1AF-4585-8C31-FE7D4FE3ED16}" dt="2025-01-05T14:54:31.375" v="1125" actId="14100"/>
-        <pc:sldMkLst>
-          <pc:docMk/>
-          <pc:sldMk cId="265576630" sldId="698"/>
-        </pc:sldMkLst>
-      </pc:sldChg>
-      <pc:sldChg chg="del">
-        <pc:chgData name="Mohammed Fasha" userId="cc64f42d-a1a6-4f08-b97b-0c37f877119f" providerId="ADAL" clId="{BECD4A7F-C1AF-4585-8C31-FE7D4FE3ED16}" dt="2025-01-05T14:42:38.675" v="989" actId="2696"/>
-        <pc:sldMkLst>
-          <pc:docMk/>
-          <pc:sldMk cId="991725834" sldId="698"/>
-        </pc:sldMkLst>
-      </pc:sldChg>
-      <pc:sldChg chg="del">
-        <pc:chgData name="Mohammed Fasha" userId="cc64f42d-a1a6-4f08-b97b-0c37f877119f" providerId="ADAL" clId="{BECD4A7F-C1AF-4585-8C31-FE7D4FE3ED16}" dt="2025-01-05T14:42:38.675" v="989" actId="2696"/>
-        <pc:sldMkLst>
-          <pc:docMk/>
-          <pc:sldMk cId="3109561867" sldId="700"/>
-        </pc:sldMkLst>
-      </pc:sldChg>
-      <pc:sldChg chg="addSp delSp modSp add del mod">
-        <pc:chgData name="Mohammed Fasha" userId="cc64f42d-a1a6-4f08-b97b-0c37f877119f" providerId="ADAL" clId="{BECD4A7F-C1AF-4585-8C31-FE7D4FE3ED16}" dt="2025-01-05T16:00:05.564" v="1529" actId="20577"/>
-        <pc:sldMkLst>
-          <pc:docMk/>
-          <pc:sldMk cId="4247717824" sldId="700"/>
-        </pc:sldMkLst>
-      </pc:sldChg>
-      <pc:sldChg chg="addSp delSp modSp add mod">
-        <pc:chgData name="Mohammed Fasha" userId="cc64f42d-a1a6-4f08-b97b-0c37f877119f" providerId="ADAL" clId="{BECD4A7F-C1AF-4585-8C31-FE7D4FE3ED16}" dt="2025-01-05T14:53:29.185" v="1101" actId="21"/>
-        <pc:sldMkLst>
-          <pc:docMk/>
-          <pc:sldMk cId="67871309" sldId="709"/>
-        </pc:sldMkLst>
-      </pc:sldChg>
-      <pc:sldChg chg="modSp add mod">
-        <pc:chgData name="Mohammed Fasha" userId="cc64f42d-a1a6-4f08-b97b-0c37f877119f" providerId="ADAL" clId="{BECD4A7F-C1AF-4585-8C31-FE7D4FE3ED16}" dt="2025-01-05T15:31:09.113" v="1385" actId="6549"/>
-        <pc:sldMkLst>
-          <pc:docMk/>
-          <pc:sldMk cId="4114896152" sldId="710"/>
-        </pc:sldMkLst>
-      </pc:sldChg>
-      <pc:sldChg chg="addSp modSp add mod">
-        <pc:chgData name="Mohammed Fasha" userId="cc64f42d-a1a6-4f08-b97b-0c37f877119f" providerId="ADAL" clId="{BECD4A7F-C1AF-4585-8C31-FE7D4FE3ED16}" dt="2025-01-05T15:27:36.027" v="1348" actId="20577"/>
-        <pc:sldMkLst>
-          <pc:docMk/>
-          <pc:sldMk cId="3794385322" sldId="711"/>
-        </pc:sldMkLst>
-      </pc:sldChg>
-      <pc:sldChg chg="add del">
-        <pc:chgData name="Mohammed Fasha" userId="cc64f42d-a1a6-4f08-b97b-0c37f877119f" providerId="ADAL" clId="{BECD4A7F-C1AF-4585-8C31-FE7D4FE3ED16}" dt="2025-01-05T14:57:43.613" v="1146" actId="2696"/>
-        <pc:sldMkLst>
-          <pc:docMk/>
-          <pc:sldMk cId="501127302" sldId="712"/>
-        </pc:sldMkLst>
-      </pc:sldChg>
-      <pc:sldChg chg="modSp add mod">
-        <pc:chgData name="Mohammed Fasha" userId="cc64f42d-a1a6-4f08-b97b-0c37f877119f" providerId="ADAL" clId="{BECD4A7F-C1AF-4585-8C31-FE7D4FE3ED16}" dt="2025-01-05T15:32:23.870" v="1388"/>
-        <pc:sldMkLst>
-          <pc:docMk/>
-          <pc:sldMk cId="3701206727" sldId="712"/>
-        </pc:sldMkLst>
-      </pc:sldChg>
-      <pc:sldChg chg="addSp modSp add mod">
-        <pc:chgData name="Mohammed Fasha" userId="cc64f42d-a1a6-4f08-b97b-0c37f877119f" providerId="ADAL" clId="{BECD4A7F-C1AF-4585-8C31-FE7D4FE3ED16}" dt="2025-01-05T16:06:36.028" v="1538" actId="1076"/>
-        <pc:sldMkLst>
-          <pc:docMk/>
-          <pc:sldMk cId="1499972066" sldId="713"/>
-        </pc:sldMkLst>
-      </pc:sldChg>
-      <pc:sldChg chg="addSp delSp modSp add mod">
-        <pc:chgData name="Mohammed Fasha" userId="cc64f42d-a1a6-4f08-b97b-0c37f877119f" providerId="ADAL" clId="{BECD4A7F-C1AF-4585-8C31-FE7D4FE3ED16}" dt="2025-01-05T16:19:08.436" v="1705" actId="1036"/>
-        <pc:sldMkLst>
-          <pc:docMk/>
-          <pc:sldMk cId="1270641495" sldId="714"/>
-        </pc:sldMkLst>
-      </pc:sldChg>
-      <pc:sldChg chg="addSp modSp new mod">
-        <pc:chgData name="Mohammed Fasha" userId="cc64f42d-a1a6-4f08-b97b-0c37f877119f" providerId="ADAL" clId="{BECD4A7F-C1AF-4585-8C31-FE7D4FE3ED16}" dt="2025-01-05T16:23:44.632" v="1736" actId="12"/>
-        <pc:sldMkLst>
-          <pc:docMk/>
-          <pc:sldMk cId="1096386322" sldId="715"/>
-        </pc:sldMkLst>
-      </pc:sldChg>
-      <pc:sldChg chg="modSp new mod">
-        <pc:chgData name="Mohammed Fasha" userId="cc64f42d-a1a6-4f08-b97b-0c37f877119f" providerId="ADAL" clId="{BECD4A7F-C1AF-4585-8C31-FE7D4FE3ED16}" dt="2025-01-05T16:34:02.360" v="1902" actId="27636"/>
-        <pc:sldMkLst>
-          <pc:docMk/>
-          <pc:sldMk cId="1784058309" sldId="716"/>
-        </pc:sldMkLst>
-      </pc:sldChg>
-      <pc:sldChg chg="modSp add mod ord">
-        <pc:chgData name="Mohammed Fasha" userId="cc64f42d-a1a6-4f08-b97b-0c37f877119f" providerId="ADAL" clId="{BECD4A7F-C1AF-4585-8C31-FE7D4FE3ED16}" dt="2025-01-05T16:27:20.520" v="1803"/>
-        <pc:sldMkLst>
-          <pc:docMk/>
-          <pc:sldMk cId="3139017106" sldId="717"/>
-        </pc:sldMkLst>
-      </pc:sldChg>
-      <pc:sldChg chg="addSp delSp modSp new mod">
-        <pc:chgData name="Mohammed Fasha" userId="cc64f42d-a1a6-4f08-b97b-0c37f877119f" providerId="ADAL" clId="{BECD4A7F-C1AF-4585-8C31-FE7D4FE3ED16}" dt="2025-01-05T16:32:45.446" v="1897" actId="20577"/>
-        <pc:sldMkLst>
-          <pc:docMk/>
-          <pc:sldMk cId="3043812923" sldId="718"/>
-        </pc:sldMkLst>
-      </pc:sldChg>
-    </pc:docChg>
-  </pc:docChgLst>
-  <pc:docChgLst>
-    <pc:chgData name="Mohammed Fasha" userId="cc64f42d-a1a6-4f08-b97b-0c37f877119f" providerId="ADAL" clId="{FEC9C214-E726-4192-8176-A8C9AACEB478}"/>
-    <pc:docChg chg="custSel addSld delSld modSld">
-      <pc:chgData name="Mohammed Fasha" userId="cc64f42d-a1a6-4f08-b97b-0c37f877119f" providerId="ADAL" clId="{FEC9C214-E726-4192-8176-A8C9AACEB478}" dt="2025-05-16T05:43:36.510" v="126" actId="2696"/>
-      <pc:docMkLst>
-        <pc:docMk/>
-      </pc:docMkLst>
-      <pc:sldChg chg="del">
-        <pc:chgData name="Mohammed Fasha" userId="cc64f42d-a1a6-4f08-b97b-0c37f877119f" providerId="ADAL" clId="{FEC9C214-E726-4192-8176-A8C9AACEB478}" dt="2025-05-16T05:43:36.510" v="126" actId="2696"/>
-        <pc:sldMkLst>
-          <pc:docMk/>
-          <pc:sldMk cId="607684796" sldId="333"/>
-        </pc:sldMkLst>
-      </pc:sldChg>
-      <pc:sldChg chg="del">
-        <pc:chgData name="Mohammed Fasha" userId="cc64f42d-a1a6-4f08-b97b-0c37f877119f" providerId="ADAL" clId="{FEC9C214-E726-4192-8176-A8C9AACEB478}" dt="2025-05-16T05:43:36.510" v="126" actId="2696"/>
-        <pc:sldMkLst>
-          <pc:docMk/>
-          <pc:sldMk cId="587789057" sldId="423"/>
-        </pc:sldMkLst>
-      </pc:sldChg>
-      <pc:sldChg chg="del">
-        <pc:chgData name="Mohammed Fasha" userId="cc64f42d-a1a6-4f08-b97b-0c37f877119f" providerId="ADAL" clId="{FEC9C214-E726-4192-8176-A8C9AACEB478}" dt="2025-05-16T05:43:36.510" v="126" actId="2696"/>
-        <pc:sldMkLst>
-          <pc:docMk/>
-          <pc:sldMk cId="2127906749" sldId="427"/>
-        </pc:sldMkLst>
-      </pc:sldChg>
-      <pc:sldChg chg="del">
-        <pc:chgData name="Mohammed Fasha" userId="cc64f42d-a1a6-4f08-b97b-0c37f877119f" providerId="ADAL" clId="{FEC9C214-E726-4192-8176-A8C9AACEB478}" dt="2025-05-16T05:43:36.510" v="126" actId="2696"/>
-        <pc:sldMkLst>
-          <pc:docMk/>
-          <pc:sldMk cId="391491219" sldId="428"/>
-        </pc:sldMkLst>
-      </pc:sldChg>
-      <pc:sldChg chg="del">
-        <pc:chgData name="Mohammed Fasha" userId="cc64f42d-a1a6-4f08-b97b-0c37f877119f" providerId="ADAL" clId="{FEC9C214-E726-4192-8176-A8C9AACEB478}" dt="2025-05-16T05:43:36.510" v="126" actId="2696"/>
-        <pc:sldMkLst>
-          <pc:docMk/>
-          <pc:sldMk cId="3339445507" sldId="430"/>
-        </pc:sldMkLst>
-      </pc:sldChg>
-      <pc:sldChg chg="del">
-        <pc:chgData name="Mohammed Fasha" userId="cc64f42d-a1a6-4f08-b97b-0c37f877119f" providerId="ADAL" clId="{FEC9C214-E726-4192-8176-A8C9AACEB478}" dt="2025-05-16T05:43:36.510" v="126" actId="2696"/>
-        <pc:sldMkLst>
-          <pc:docMk/>
-          <pc:sldMk cId="3389046835" sldId="431"/>
-        </pc:sldMkLst>
-      </pc:sldChg>
-      <pc:sldChg chg="modSp mod">
-        <pc:chgData name="Mohammed Fasha" userId="cc64f42d-a1a6-4f08-b97b-0c37f877119f" providerId="ADAL" clId="{FEC9C214-E726-4192-8176-A8C9AACEB478}" dt="2025-05-16T05:42:48.998" v="99" actId="6549"/>
-        <pc:sldMkLst>
-          <pc:docMk/>
-          <pc:sldMk cId="4208461039" sldId="447"/>
-        </pc:sldMkLst>
-      </pc:sldChg>
-      <pc:sldChg chg="modSp mod">
-        <pc:chgData name="Mohammed Fasha" userId="cc64f42d-a1a6-4f08-b97b-0c37f877119f" providerId="ADAL" clId="{FEC9C214-E726-4192-8176-A8C9AACEB478}" dt="2025-05-16T05:43:13.101" v="125" actId="6549"/>
-        <pc:sldMkLst>
-          <pc:docMk/>
-          <pc:sldMk cId="2297456757" sldId="483"/>
-        </pc:sldMkLst>
-        <pc:spChg chg="mod">
-          <ac:chgData name="Mohammed Fasha" userId="cc64f42d-a1a6-4f08-b97b-0c37f877119f" providerId="ADAL" clId="{FEC9C214-E726-4192-8176-A8C9AACEB478}" dt="2025-05-16T05:43:13.101" v="125" actId="6549"/>
-          <ac:spMkLst>
-            <pc:docMk/>
-            <pc:sldMk cId="2297456757" sldId="483"/>
-            <ac:spMk id="5" creationId="{89403830-E271-DAA0-8838-E295A84A8B5B}"/>
-          </ac:spMkLst>
-        </pc:spChg>
-      </pc:sldChg>
-      <pc:sldChg chg="del">
-        <pc:chgData name="Mohammed Fasha" userId="cc64f42d-a1a6-4f08-b97b-0c37f877119f" providerId="ADAL" clId="{FEC9C214-E726-4192-8176-A8C9AACEB478}" dt="2025-05-16T05:43:36.510" v="126" actId="2696"/>
-        <pc:sldMkLst>
-          <pc:docMk/>
-          <pc:sldMk cId="1586650541" sldId="510"/>
-        </pc:sldMkLst>
-      </pc:sldChg>
-      <pc:sldChg chg="del">
-        <pc:chgData name="Mohammed Fasha" userId="cc64f42d-a1a6-4f08-b97b-0c37f877119f" providerId="ADAL" clId="{FEC9C214-E726-4192-8176-A8C9AACEB478}" dt="2025-05-16T05:43:36.510" v="126" actId="2696"/>
-        <pc:sldMkLst>
-          <pc:docMk/>
-          <pc:sldMk cId="1271956779" sldId="514"/>
-        </pc:sldMkLst>
-      </pc:sldChg>
-      <pc:sldChg chg="del">
-        <pc:chgData name="Mohammed Fasha" userId="cc64f42d-a1a6-4f08-b97b-0c37f877119f" providerId="ADAL" clId="{FEC9C214-E726-4192-8176-A8C9AACEB478}" dt="2025-05-16T05:43:36.510" v="126" actId="2696"/>
-        <pc:sldMkLst>
-          <pc:docMk/>
-          <pc:sldMk cId="2281221656" sldId="527"/>
-        </pc:sldMkLst>
-      </pc:sldChg>
-      <pc:sldChg chg="del">
-        <pc:chgData name="Mohammed Fasha" userId="cc64f42d-a1a6-4f08-b97b-0c37f877119f" providerId="ADAL" clId="{FEC9C214-E726-4192-8176-A8C9AACEB478}" dt="2025-05-16T05:43:36.510" v="126" actId="2696"/>
-        <pc:sldMkLst>
-          <pc:docMk/>
-          <pc:sldMk cId="2877973779" sldId="607"/>
-        </pc:sldMkLst>
-      </pc:sldChg>
-      <pc:sldChg chg="del">
-        <pc:chgData name="Mohammed Fasha" userId="cc64f42d-a1a6-4f08-b97b-0c37f877119f" providerId="ADAL" clId="{FEC9C214-E726-4192-8176-A8C9AACEB478}" dt="2025-05-16T05:43:36.510" v="126" actId="2696"/>
-        <pc:sldMkLst>
-          <pc:docMk/>
-          <pc:sldMk cId="21481256" sldId="611"/>
-        </pc:sldMkLst>
-      </pc:sldChg>
-      <pc:sldChg chg="del">
-        <pc:chgData name="Mohammed Fasha" userId="cc64f42d-a1a6-4f08-b97b-0c37f877119f" providerId="ADAL" clId="{FEC9C214-E726-4192-8176-A8C9AACEB478}" dt="2025-05-16T05:43:36.510" v="126" actId="2696"/>
-        <pc:sldMkLst>
-          <pc:docMk/>
-          <pc:sldMk cId="4040874025" sldId="612"/>
-        </pc:sldMkLst>
-      </pc:sldChg>
-      <pc:sldChg chg="del">
-        <pc:chgData name="Mohammed Fasha" userId="cc64f42d-a1a6-4f08-b97b-0c37f877119f" providerId="ADAL" clId="{FEC9C214-E726-4192-8176-A8C9AACEB478}" dt="2025-05-16T05:43:36.510" v="126" actId="2696"/>
-        <pc:sldMkLst>
-          <pc:docMk/>
-          <pc:sldMk cId="399592497" sldId="613"/>
-        </pc:sldMkLst>
-      </pc:sldChg>
-      <pc:sldChg chg="del">
-        <pc:chgData name="Mohammed Fasha" userId="cc64f42d-a1a6-4f08-b97b-0c37f877119f" providerId="ADAL" clId="{FEC9C214-E726-4192-8176-A8C9AACEB478}" dt="2025-05-16T05:43:36.510" v="126" actId="2696"/>
-        <pc:sldMkLst>
-          <pc:docMk/>
-          <pc:sldMk cId="3535314737" sldId="614"/>
-        </pc:sldMkLst>
-      </pc:sldChg>
-      <pc:sldChg chg="del">
-        <pc:chgData name="Mohammed Fasha" userId="cc64f42d-a1a6-4f08-b97b-0c37f877119f" providerId="ADAL" clId="{FEC9C214-E726-4192-8176-A8C9AACEB478}" dt="2025-05-16T05:43:36.510" v="126" actId="2696"/>
-        <pc:sldMkLst>
-          <pc:docMk/>
-          <pc:sldMk cId="627652750" sldId="615"/>
-        </pc:sldMkLst>
-      </pc:sldChg>
-      <pc:sldChg chg="del">
-        <pc:chgData name="Mohammed Fasha" userId="cc64f42d-a1a6-4f08-b97b-0c37f877119f" providerId="ADAL" clId="{FEC9C214-E726-4192-8176-A8C9AACEB478}" dt="2025-05-16T05:43:36.510" v="126" actId="2696"/>
-        <pc:sldMkLst>
-          <pc:docMk/>
-          <pc:sldMk cId="423212581" sldId="616"/>
-        </pc:sldMkLst>
-      </pc:sldChg>
-      <pc:sldChg chg="del">
-        <pc:chgData name="Mohammed Fasha" userId="cc64f42d-a1a6-4f08-b97b-0c37f877119f" providerId="ADAL" clId="{FEC9C214-E726-4192-8176-A8C9AACEB478}" dt="2025-05-16T05:43:36.510" v="126" actId="2696"/>
-        <pc:sldMkLst>
-          <pc:docMk/>
-          <pc:sldMk cId="3329135496" sldId="617"/>
-        </pc:sldMkLst>
-      </pc:sldChg>
-      <pc:sldChg chg="del">
-        <pc:chgData name="Mohammed Fasha" userId="cc64f42d-a1a6-4f08-b97b-0c37f877119f" providerId="ADAL" clId="{FEC9C214-E726-4192-8176-A8C9AACEB478}" dt="2025-05-16T05:43:36.510" v="126" actId="2696"/>
-        <pc:sldMkLst>
-          <pc:docMk/>
-          <pc:sldMk cId="1380276415" sldId="618"/>
-        </pc:sldMkLst>
-      </pc:sldChg>
-      <pc:sldChg chg="del">
-        <pc:chgData name="Mohammed Fasha" userId="cc64f42d-a1a6-4f08-b97b-0c37f877119f" providerId="ADAL" clId="{FEC9C214-E726-4192-8176-A8C9AACEB478}" dt="2025-05-16T05:43:36.510" v="126" actId="2696"/>
-        <pc:sldMkLst>
-          <pc:docMk/>
-          <pc:sldMk cId="246730148" sldId="619"/>
-        </pc:sldMkLst>
-      </pc:sldChg>
-      <pc:sldChg chg="del">
-        <pc:chgData name="Mohammed Fasha" userId="cc64f42d-a1a6-4f08-b97b-0c37f877119f" providerId="ADAL" clId="{FEC9C214-E726-4192-8176-A8C9AACEB478}" dt="2025-05-16T05:43:36.510" v="126" actId="2696"/>
-        <pc:sldMkLst>
-          <pc:docMk/>
-          <pc:sldMk cId="839834530" sldId="621"/>
-        </pc:sldMkLst>
-      </pc:sldChg>
-      <pc:sldChg chg="del">
-        <pc:chgData name="Mohammed Fasha" userId="cc64f42d-a1a6-4f08-b97b-0c37f877119f" providerId="ADAL" clId="{FEC9C214-E726-4192-8176-A8C9AACEB478}" dt="2025-05-16T05:43:36.510" v="126" actId="2696"/>
-        <pc:sldMkLst>
-          <pc:docMk/>
-          <pc:sldMk cId="3734309461" sldId="625"/>
-        </pc:sldMkLst>
-      </pc:sldChg>
-      <pc:sldChg chg="del">
-        <pc:chgData name="Mohammed Fasha" userId="cc64f42d-a1a6-4f08-b97b-0c37f877119f" providerId="ADAL" clId="{FEC9C214-E726-4192-8176-A8C9AACEB478}" dt="2025-05-16T05:43:36.510" v="126" actId="2696"/>
-        <pc:sldMkLst>
-          <pc:docMk/>
-          <pc:sldMk cId="4269580935" sldId="634"/>
-        </pc:sldMkLst>
-      </pc:sldChg>
-      <pc:sldChg chg="del">
-        <pc:chgData name="Mohammed Fasha" userId="cc64f42d-a1a6-4f08-b97b-0c37f877119f" providerId="ADAL" clId="{FEC9C214-E726-4192-8176-A8C9AACEB478}" dt="2025-05-16T05:43:36.510" v="126" actId="2696"/>
-        <pc:sldMkLst>
-          <pc:docMk/>
-          <pc:sldMk cId="2838240985" sldId="635"/>
-        </pc:sldMkLst>
-      </pc:sldChg>
-      <pc:sldChg chg="del">
-        <pc:chgData name="Mohammed Fasha" userId="cc64f42d-a1a6-4f08-b97b-0c37f877119f" providerId="ADAL" clId="{FEC9C214-E726-4192-8176-A8C9AACEB478}" dt="2025-05-16T05:43:36.510" v="126" actId="2696"/>
-        <pc:sldMkLst>
-          <pc:docMk/>
-          <pc:sldMk cId="1675291572" sldId="638"/>
-        </pc:sldMkLst>
-      </pc:sldChg>
-      <pc:sldChg chg="modSp del">
-        <pc:chgData name="Mohammed Fasha" userId="cc64f42d-a1a6-4f08-b97b-0c37f877119f" providerId="ADAL" clId="{FEC9C214-E726-4192-8176-A8C9AACEB478}" dt="2025-05-16T05:43:36.510" v="126" actId="2696"/>
-        <pc:sldMkLst>
-          <pc:docMk/>
-          <pc:sldMk cId="2145145303" sldId="640"/>
-        </pc:sldMkLst>
-      </pc:sldChg>
-      <pc:sldChg chg="del">
-        <pc:chgData name="Mohammed Fasha" userId="cc64f42d-a1a6-4f08-b97b-0c37f877119f" providerId="ADAL" clId="{FEC9C214-E726-4192-8176-A8C9AACEB478}" dt="2025-05-16T05:43:36.510" v="126" actId="2696"/>
-        <pc:sldMkLst>
-          <pc:docMk/>
-          <pc:sldMk cId="1135291414" sldId="643"/>
-        </pc:sldMkLst>
-      </pc:sldChg>
-      <pc:sldChg chg="del">
-        <pc:chgData name="Mohammed Fasha" userId="cc64f42d-a1a6-4f08-b97b-0c37f877119f" providerId="ADAL" clId="{FEC9C214-E726-4192-8176-A8C9AACEB478}" dt="2025-05-16T05:43:36.510" v="126" actId="2696"/>
-        <pc:sldMkLst>
-          <pc:docMk/>
-          <pc:sldMk cId="1030124935" sldId="644"/>
-        </pc:sldMkLst>
-      </pc:sldChg>
-      <pc:sldChg chg="del">
-        <pc:chgData name="Mohammed Fasha" userId="cc64f42d-a1a6-4f08-b97b-0c37f877119f" providerId="ADAL" clId="{FEC9C214-E726-4192-8176-A8C9AACEB478}" dt="2025-05-16T05:43:36.510" v="126" actId="2696"/>
-        <pc:sldMkLst>
-          <pc:docMk/>
-          <pc:sldMk cId="2168644593" sldId="645"/>
-        </pc:sldMkLst>
-      </pc:sldChg>
-      <pc:sldChg chg="del">
-        <pc:chgData name="Mohammed Fasha" userId="cc64f42d-a1a6-4f08-b97b-0c37f877119f" providerId="ADAL" clId="{FEC9C214-E726-4192-8176-A8C9AACEB478}" dt="2025-05-16T05:43:36.510" v="126" actId="2696"/>
-        <pc:sldMkLst>
-          <pc:docMk/>
-          <pc:sldMk cId="2743226386" sldId="646"/>
-        </pc:sldMkLst>
-      </pc:sldChg>
-      <pc:sldChg chg="del">
-        <pc:chgData name="Mohammed Fasha" userId="cc64f42d-a1a6-4f08-b97b-0c37f877119f" providerId="ADAL" clId="{FEC9C214-E726-4192-8176-A8C9AACEB478}" dt="2025-05-16T05:43:36.510" v="126" actId="2696"/>
-        <pc:sldMkLst>
-          <pc:docMk/>
-          <pc:sldMk cId="202107314" sldId="647"/>
-        </pc:sldMkLst>
-      </pc:sldChg>
-      <pc:sldChg chg="del">
-        <pc:chgData name="Mohammed Fasha" userId="cc64f42d-a1a6-4f08-b97b-0c37f877119f" providerId="ADAL" clId="{FEC9C214-E726-4192-8176-A8C9AACEB478}" dt="2025-05-16T05:43:36.510" v="126" actId="2696"/>
-        <pc:sldMkLst>
-          <pc:docMk/>
-          <pc:sldMk cId="662689605" sldId="649"/>
-        </pc:sldMkLst>
-      </pc:sldChg>
-      <pc:sldChg chg="del">
-        <pc:chgData name="Mohammed Fasha" userId="cc64f42d-a1a6-4f08-b97b-0c37f877119f" providerId="ADAL" clId="{FEC9C214-E726-4192-8176-A8C9AACEB478}" dt="2025-05-16T05:43:36.510" v="126" actId="2696"/>
-        <pc:sldMkLst>
-          <pc:docMk/>
-          <pc:sldMk cId="3942060319" sldId="650"/>
-        </pc:sldMkLst>
-      </pc:sldChg>
-      <pc:sldChg chg="del">
-        <pc:chgData name="Mohammed Fasha" userId="cc64f42d-a1a6-4f08-b97b-0c37f877119f" providerId="ADAL" clId="{FEC9C214-E726-4192-8176-A8C9AACEB478}" dt="2025-05-16T05:43:36.510" v="126" actId="2696"/>
-        <pc:sldMkLst>
-          <pc:docMk/>
-          <pc:sldMk cId="916802035" sldId="651"/>
-        </pc:sldMkLst>
-      </pc:sldChg>
-      <pc:sldChg chg="del">
-        <pc:chgData name="Mohammed Fasha" userId="cc64f42d-a1a6-4f08-b97b-0c37f877119f" providerId="ADAL" clId="{FEC9C214-E726-4192-8176-A8C9AACEB478}" dt="2025-05-16T05:43:36.510" v="126" actId="2696"/>
-        <pc:sldMkLst>
-          <pc:docMk/>
-          <pc:sldMk cId="3061130053" sldId="653"/>
-        </pc:sldMkLst>
-      </pc:sldChg>
-      <pc:sldChg chg="del">
-        <pc:chgData name="Mohammed Fasha" userId="cc64f42d-a1a6-4f08-b97b-0c37f877119f" providerId="ADAL" clId="{FEC9C214-E726-4192-8176-A8C9AACEB478}" dt="2025-05-16T05:43:36.510" v="126" actId="2696"/>
-        <pc:sldMkLst>
-          <pc:docMk/>
-          <pc:sldMk cId="3585687456" sldId="654"/>
-        </pc:sldMkLst>
-      </pc:sldChg>
-      <pc:sldChg chg="del">
-        <pc:chgData name="Mohammed Fasha" userId="cc64f42d-a1a6-4f08-b97b-0c37f877119f" providerId="ADAL" clId="{FEC9C214-E726-4192-8176-A8C9AACEB478}" dt="2025-05-16T05:43:36.510" v="126" actId="2696"/>
-        <pc:sldMkLst>
-          <pc:docMk/>
-          <pc:sldMk cId="2892622100" sldId="655"/>
-        </pc:sldMkLst>
-      </pc:sldChg>
-      <pc:sldChg chg="modSp del mod">
-        <pc:chgData name="Mohammed Fasha" userId="cc64f42d-a1a6-4f08-b97b-0c37f877119f" providerId="ADAL" clId="{FEC9C214-E726-4192-8176-A8C9AACEB478}" dt="2025-05-16T05:43:36.510" v="126" actId="2696"/>
-        <pc:sldMkLst>
-          <pc:docMk/>
-          <pc:sldMk cId="555764928" sldId="657"/>
-        </pc:sldMkLst>
-      </pc:sldChg>
-      <pc:sldChg chg="del">
-        <pc:chgData name="Mohammed Fasha" userId="cc64f42d-a1a6-4f08-b97b-0c37f877119f" providerId="ADAL" clId="{FEC9C214-E726-4192-8176-A8C9AACEB478}" dt="2025-05-16T05:43:36.510" v="126" actId="2696"/>
-        <pc:sldMkLst>
-          <pc:docMk/>
-          <pc:sldMk cId="1461426122" sldId="658"/>
-        </pc:sldMkLst>
-      </pc:sldChg>
-      <pc:sldChg chg="del">
-        <pc:chgData name="Mohammed Fasha" userId="cc64f42d-a1a6-4f08-b97b-0c37f877119f" providerId="ADAL" clId="{FEC9C214-E726-4192-8176-A8C9AACEB478}" dt="2025-05-16T05:43:36.510" v="126" actId="2696"/>
-        <pc:sldMkLst>
-          <pc:docMk/>
-          <pc:sldMk cId="2990045589" sldId="659"/>
-        </pc:sldMkLst>
-      </pc:sldChg>
-      <pc:sldChg chg="del">
-        <pc:chgData name="Mohammed Fasha" userId="cc64f42d-a1a6-4f08-b97b-0c37f877119f" providerId="ADAL" clId="{FEC9C214-E726-4192-8176-A8C9AACEB478}" dt="2025-05-16T05:43:36.510" v="126" actId="2696"/>
-        <pc:sldMkLst>
-          <pc:docMk/>
-          <pc:sldMk cId="2575039538" sldId="660"/>
-        </pc:sldMkLst>
-      </pc:sldChg>
-      <pc:sldChg chg="del">
-        <pc:chgData name="Mohammed Fasha" userId="cc64f42d-a1a6-4f08-b97b-0c37f877119f" providerId="ADAL" clId="{FEC9C214-E726-4192-8176-A8C9AACEB478}" dt="2025-05-16T05:43:36.510" v="126" actId="2696"/>
-        <pc:sldMkLst>
-          <pc:docMk/>
-          <pc:sldMk cId="1554491934" sldId="661"/>
-        </pc:sldMkLst>
-      </pc:sldChg>
-      <pc:sldChg chg="del">
-        <pc:chgData name="Mohammed Fasha" userId="cc64f42d-a1a6-4f08-b97b-0c37f877119f" providerId="ADAL" clId="{FEC9C214-E726-4192-8176-A8C9AACEB478}" dt="2025-05-16T05:43:36.510" v="126" actId="2696"/>
-        <pc:sldMkLst>
-          <pc:docMk/>
-          <pc:sldMk cId="691538069" sldId="662"/>
-        </pc:sldMkLst>
-      </pc:sldChg>
-      <pc:sldChg chg="del">
-        <pc:chgData name="Mohammed Fasha" userId="cc64f42d-a1a6-4f08-b97b-0c37f877119f" providerId="ADAL" clId="{FEC9C214-E726-4192-8176-A8C9AACEB478}" dt="2025-05-16T05:43:36.510" v="126" actId="2696"/>
-        <pc:sldMkLst>
-          <pc:docMk/>
-          <pc:sldMk cId="3980180774" sldId="663"/>
-        </pc:sldMkLst>
-      </pc:sldChg>
-      <pc:sldChg chg="del">
-        <pc:chgData name="Mohammed Fasha" userId="cc64f42d-a1a6-4f08-b97b-0c37f877119f" providerId="ADAL" clId="{FEC9C214-E726-4192-8176-A8C9AACEB478}" dt="2025-05-16T05:43:36.510" v="126" actId="2696"/>
-        <pc:sldMkLst>
-          <pc:docMk/>
-          <pc:sldMk cId="1728680596" sldId="664"/>
-        </pc:sldMkLst>
-      </pc:sldChg>
-      <pc:sldChg chg="del">
-        <pc:chgData name="Mohammed Fasha" userId="cc64f42d-a1a6-4f08-b97b-0c37f877119f" providerId="ADAL" clId="{FEC9C214-E726-4192-8176-A8C9AACEB478}" dt="2025-05-16T05:43:36.510" v="126" actId="2696"/>
-        <pc:sldMkLst>
-          <pc:docMk/>
-          <pc:sldMk cId="148099094" sldId="665"/>
-        </pc:sldMkLst>
-      </pc:sldChg>
-      <pc:sldChg chg="del">
-        <pc:chgData name="Mohammed Fasha" userId="cc64f42d-a1a6-4f08-b97b-0c37f877119f" providerId="ADAL" clId="{FEC9C214-E726-4192-8176-A8C9AACEB478}" dt="2025-05-16T05:43:36.510" v="126" actId="2696"/>
-        <pc:sldMkLst>
-          <pc:docMk/>
-          <pc:sldMk cId="898885298" sldId="667"/>
-        </pc:sldMkLst>
-      </pc:sldChg>
-      <pc:sldChg chg="del">
-        <pc:chgData name="Mohammed Fasha" userId="cc64f42d-a1a6-4f08-b97b-0c37f877119f" providerId="ADAL" clId="{FEC9C214-E726-4192-8176-A8C9AACEB478}" dt="2025-05-16T05:43:36.510" v="126" actId="2696"/>
-        <pc:sldMkLst>
-          <pc:docMk/>
-          <pc:sldMk cId="2652660250" sldId="668"/>
-        </pc:sldMkLst>
-      </pc:sldChg>
-      <pc:sldChg chg="del">
-        <pc:chgData name="Mohammed Fasha" userId="cc64f42d-a1a6-4f08-b97b-0c37f877119f" providerId="ADAL" clId="{FEC9C214-E726-4192-8176-A8C9AACEB478}" dt="2025-05-16T05:43:36.510" v="126" actId="2696"/>
-        <pc:sldMkLst>
-          <pc:docMk/>
-          <pc:sldMk cId="2680231355" sldId="669"/>
-        </pc:sldMkLst>
-      </pc:sldChg>
-      <pc:sldChg chg="modSp del mod">
-        <pc:chgData name="Mohammed Fasha" userId="cc64f42d-a1a6-4f08-b97b-0c37f877119f" providerId="ADAL" clId="{FEC9C214-E726-4192-8176-A8C9AACEB478}" dt="2025-05-16T05:43:36.510" v="126" actId="2696"/>
-        <pc:sldMkLst>
-          <pc:docMk/>
-          <pc:sldMk cId="1960150938" sldId="670"/>
-        </pc:sldMkLst>
-      </pc:sldChg>
-      <pc:sldChg chg="del">
-        <pc:chgData name="Mohammed Fasha" userId="cc64f42d-a1a6-4f08-b97b-0c37f877119f" providerId="ADAL" clId="{FEC9C214-E726-4192-8176-A8C9AACEB478}" dt="2025-05-16T05:43:36.510" v="126" actId="2696"/>
-        <pc:sldMkLst>
-          <pc:docMk/>
-          <pc:sldMk cId="3605011436" sldId="671"/>
-        </pc:sldMkLst>
-      </pc:sldChg>
-      <pc:sldChg chg="del">
-        <pc:chgData name="Mohammed Fasha" userId="cc64f42d-a1a6-4f08-b97b-0c37f877119f" providerId="ADAL" clId="{FEC9C214-E726-4192-8176-A8C9AACEB478}" dt="2025-05-16T05:43:36.510" v="126" actId="2696"/>
-        <pc:sldMkLst>
-          <pc:docMk/>
-          <pc:sldMk cId="1620993364" sldId="672"/>
-        </pc:sldMkLst>
-      </pc:sldChg>
-      <pc:sldChg chg="del">
-        <pc:chgData name="Mohammed Fasha" userId="cc64f42d-a1a6-4f08-b97b-0c37f877119f" providerId="ADAL" clId="{FEC9C214-E726-4192-8176-A8C9AACEB478}" dt="2025-05-16T05:43:36.510" v="126" actId="2696"/>
-        <pc:sldMkLst>
-          <pc:docMk/>
-          <pc:sldMk cId="2865119215" sldId="674"/>
-        </pc:sldMkLst>
-      </pc:sldChg>
-      <pc:sldChg chg="del">
-        <pc:chgData name="Mohammed Fasha" userId="cc64f42d-a1a6-4f08-b97b-0c37f877119f" providerId="ADAL" clId="{FEC9C214-E726-4192-8176-A8C9AACEB478}" dt="2025-05-16T05:43:36.510" v="126" actId="2696"/>
-        <pc:sldMkLst>
-          <pc:docMk/>
-          <pc:sldMk cId="2170303756" sldId="675"/>
-        </pc:sldMkLst>
-      </pc:sldChg>
-      <pc:sldChg chg="del">
-        <pc:chgData name="Mohammed Fasha" userId="cc64f42d-a1a6-4f08-b97b-0c37f877119f" providerId="ADAL" clId="{FEC9C214-E726-4192-8176-A8C9AACEB478}" dt="2025-05-16T05:43:36.510" v="126" actId="2696"/>
-        <pc:sldMkLst>
-          <pc:docMk/>
-          <pc:sldMk cId="1577854815" sldId="676"/>
-        </pc:sldMkLst>
-      </pc:sldChg>
-      <pc:sldChg chg="del">
-        <pc:chgData name="Mohammed Fasha" userId="cc64f42d-a1a6-4f08-b97b-0c37f877119f" providerId="ADAL" clId="{FEC9C214-E726-4192-8176-A8C9AACEB478}" dt="2025-05-16T05:43:36.510" v="126" actId="2696"/>
-        <pc:sldMkLst>
-          <pc:docMk/>
-          <pc:sldMk cId="139882925" sldId="677"/>
-        </pc:sldMkLst>
-      </pc:sldChg>
-      <pc:sldChg chg="del">
-        <pc:chgData name="Mohammed Fasha" userId="cc64f42d-a1a6-4f08-b97b-0c37f877119f" providerId="ADAL" clId="{FEC9C214-E726-4192-8176-A8C9AACEB478}" dt="2025-05-16T05:43:36.510" v="126" actId="2696"/>
-        <pc:sldMkLst>
-          <pc:docMk/>
-          <pc:sldMk cId="4146654093" sldId="678"/>
-        </pc:sldMkLst>
-      </pc:sldChg>
-      <pc:sldChg chg="del">
-        <pc:chgData name="Mohammed Fasha" userId="cc64f42d-a1a6-4f08-b97b-0c37f877119f" providerId="ADAL" clId="{FEC9C214-E726-4192-8176-A8C9AACEB478}" dt="2025-05-16T05:43:36.510" v="126" actId="2696"/>
-        <pc:sldMkLst>
-          <pc:docMk/>
-          <pc:sldMk cId="3454522070" sldId="679"/>
-        </pc:sldMkLst>
-      </pc:sldChg>
-      <pc:sldChg chg="del">
-        <pc:chgData name="Mohammed Fasha" userId="cc64f42d-a1a6-4f08-b97b-0c37f877119f" providerId="ADAL" clId="{FEC9C214-E726-4192-8176-A8C9AACEB478}" dt="2025-05-16T05:43:36.510" v="126" actId="2696"/>
-        <pc:sldMkLst>
-          <pc:docMk/>
-          <pc:sldMk cId="2856814121" sldId="681"/>
-        </pc:sldMkLst>
-      </pc:sldChg>
-      <pc:sldChg chg="del">
-        <pc:chgData name="Mohammed Fasha" userId="cc64f42d-a1a6-4f08-b97b-0c37f877119f" providerId="ADAL" clId="{FEC9C214-E726-4192-8176-A8C9AACEB478}" dt="2025-05-16T05:43:36.510" v="126" actId="2696"/>
-        <pc:sldMkLst>
-          <pc:docMk/>
-          <pc:sldMk cId="1377124484" sldId="682"/>
-        </pc:sldMkLst>
-      </pc:sldChg>
-      <pc:sldChg chg="del">
-        <pc:chgData name="Mohammed Fasha" userId="cc64f42d-a1a6-4f08-b97b-0c37f877119f" providerId="ADAL" clId="{FEC9C214-E726-4192-8176-A8C9AACEB478}" dt="2025-05-16T05:43:36.510" v="126" actId="2696"/>
-        <pc:sldMkLst>
-          <pc:docMk/>
-          <pc:sldMk cId="2630096202" sldId="683"/>
-        </pc:sldMkLst>
-      </pc:sldChg>
-      <pc:sldChg chg="del">
-        <pc:chgData name="Mohammed Fasha" userId="cc64f42d-a1a6-4f08-b97b-0c37f877119f" providerId="ADAL" clId="{FEC9C214-E726-4192-8176-A8C9AACEB478}" dt="2025-05-16T05:43:36.510" v="126" actId="2696"/>
-        <pc:sldMkLst>
-          <pc:docMk/>
-          <pc:sldMk cId="3328652623" sldId="684"/>
-        </pc:sldMkLst>
-      </pc:sldChg>
-      <pc:sldChg chg="del">
-        <pc:chgData name="Mohammed Fasha" userId="cc64f42d-a1a6-4f08-b97b-0c37f877119f" providerId="ADAL" clId="{FEC9C214-E726-4192-8176-A8C9AACEB478}" dt="2025-05-16T05:43:36.510" v="126" actId="2696"/>
-        <pc:sldMkLst>
-          <pc:docMk/>
-          <pc:sldMk cId="916102856" sldId="685"/>
-        </pc:sldMkLst>
-      </pc:sldChg>
-      <pc:sldChg chg="del">
-        <pc:chgData name="Mohammed Fasha" userId="cc64f42d-a1a6-4f08-b97b-0c37f877119f" providerId="ADAL" clId="{FEC9C214-E726-4192-8176-A8C9AACEB478}" dt="2025-05-16T05:43:36.510" v="126" actId="2696"/>
-        <pc:sldMkLst>
-          <pc:docMk/>
-          <pc:sldMk cId="2620697854" sldId="686"/>
-        </pc:sldMkLst>
-      </pc:sldChg>
-      <pc:sldChg chg="del">
-        <pc:chgData name="Mohammed Fasha" userId="cc64f42d-a1a6-4f08-b97b-0c37f877119f" providerId="ADAL" clId="{FEC9C214-E726-4192-8176-A8C9AACEB478}" dt="2025-05-16T05:43:36.510" v="126" actId="2696"/>
-        <pc:sldMkLst>
-          <pc:docMk/>
-          <pc:sldMk cId="140683555" sldId="687"/>
-        </pc:sldMkLst>
-      </pc:sldChg>
-      <pc:sldChg chg="del">
-        <pc:chgData name="Mohammed Fasha" userId="cc64f42d-a1a6-4f08-b97b-0c37f877119f" providerId="ADAL" clId="{FEC9C214-E726-4192-8176-A8C9AACEB478}" dt="2025-05-16T05:43:36.510" v="126" actId="2696"/>
-        <pc:sldMkLst>
-          <pc:docMk/>
-          <pc:sldMk cId="1788308240" sldId="688"/>
-        </pc:sldMkLst>
-      </pc:sldChg>
-      <pc:sldChg chg="del">
-        <pc:chgData name="Mohammed Fasha" userId="cc64f42d-a1a6-4f08-b97b-0c37f877119f" providerId="ADAL" clId="{FEC9C214-E726-4192-8176-A8C9AACEB478}" dt="2025-05-16T05:43:36.510" v="126" actId="2696"/>
-        <pc:sldMkLst>
-          <pc:docMk/>
-          <pc:sldMk cId="1660737293" sldId="689"/>
-        </pc:sldMkLst>
-      </pc:sldChg>
-      <pc:sldChg chg="del">
-        <pc:chgData name="Mohammed Fasha" userId="cc64f42d-a1a6-4f08-b97b-0c37f877119f" providerId="ADAL" clId="{FEC9C214-E726-4192-8176-A8C9AACEB478}" dt="2025-05-16T05:43:36.510" v="126" actId="2696"/>
-        <pc:sldMkLst>
-          <pc:docMk/>
-          <pc:sldMk cId="1987101698" sldId="690"/>
-        </pc:sldMkLst>
-      </pc:sldChg>
-      <pc:sldChg chg="del">
-        <pc:chgData name="Mohammed Fasha" userId="cc64f42d-a1a6-4f08-b97b-0c37f877119f" providerId="ADAL" clId="{FEC9C214-E726-4192-8176-A8C9AACEB478}" dt="2025-05-16T05:43:36.510" v="126" actId="2696"/>
-        <pc:sldMkLst>
-          <pc:docMk/>
-          <pc:sldMk cId="1982708772" sldId="692"/>
-        </pc:sldMkLst>
-      </pc:sldChg>
-      <pc:sldChg chg="del">
-        <pc:chgData name="Mohammed Fasha" userId="cc64f42d-a1a6-4f08-b97b-0c37f877119f" providerId="ADAL" clId="{FEC9C214-E726-4192-8176-A8C9AACEB478}" dt="2025-05-16T05:43:36.510" v="126" actId="2696"/>
-        <pc:sldMkLst>
-          <pc:docMk/>
-          <pc:sldMk cId="3424197979" sldId="694"/>
-        </pc:sldMkLst>
-      </pc:sldChg>
-      <pc:sldChg chg="del">
-        <pc:chgData name="Mohammed Fasha" userId="cc64f42d-a1a6-4f08-b97b-0c37f877119f" providerId="ADAL" clId="{FEC9C214-E726-4192-8176-A8C9AACEB478}" dt="2025-05-16T05:43:36.510" v="126" actId="2696"/>
-        <pc:sldMkLst>
-          <pc:docMk/>
-          <pc:sldMk cId="1697141369" sldId="695"/>
-        </pc:sldMkLst>
-      </pc:sldChg>
-      <pc:sldChg chg="del">
-        <pc:chgData name="Mohammed Fasha" userId="cc64f42d-a1a6-4f08-b97b-0c37f877119f" providerId="ADAL" clId="{FEC9C214-E726-4192-8176-A8C9AACEB478}" dt="2025-05-16T05:43:36.510" v="126" actId="2696"/>
-        <pc:sldMkLst>
-          <pc:docMk/>
-          <pc:sldMk cId="1317643237" sldId="696"/>
-        </pc:sldMkLst>
-      </pc:sldChg>
-      <pc:sldChg chg="del">
-        <pc:chgData name="Mohammed Fasha" userId="cc64f42d-a1a6-4f08-b97b-0c37f877119f" providerId="ADAL" clId="{FEC9C214-E726-4192-8176-A8C9AACEB478}" dt="2025-05-16T05:43:36.510" v="126" actId="2696"/>
-        <pc:sldMkLst>
-          <pc:docMk/>
-          <pc:sldMk cId="265576630" sldId="698"/>
-        </pc:sldMkLst>
-      </pc:sldChg>
-      <pc:sldChg chg="del">
-        <pc:chgData name="Mohammed Fasha" userId="cc64f42d-a1a6-4f08-b97b-0c37f877119f" providerId="ADAL" clId="{FEC9C214-E726-4192-8176-A8C9AACEB478}" dt="2025-05-16T05:43:36.510" v="126" actId="2696"/>
-        <pc:sldMkLst>
-          <pc:docMk/>
-          <pc:sldMk cId="4247717824" sldId="700"/>
-        </pc:sldMkLst>
-      </pc:sldChg>
-      <pc:sldChg chg="del">
-        <pc:chgData name="Mohammed Fasha" userId="cc64f42d-a1a6-4f08-b97b-0c37f877119f" providerId="ADAL" clId="{FEC9C214-E726-4192-8176-A8C9AACEB478}" dt="2025-05-16T05:43:36.510" v="126" actId="2696"/>
-        <pc:sldMkLst>
-          <pc:docMk/>
-          <pc:sldMk cId="3085160177" sldId="704"/>
-        </pc:sldMkLst>
-      </pc:sldChg>
-      <pc:sldChg chg="del">
-        <pc:chgData name="Mohammed Fasha" userId="cc64f42d-a1a6-4f08-b97b-0c37f877119f" providerId="ADAL" clId="{FEC9C214-E726-4192-8176-A8C9AACEB478}" dt="2025-05-16T05:43:36.510" v="126" actId="2696"/>
-        <pc:sldMkLst>
-          <pc:docMk/>
-          <pc:sldMk cId="1862107672" sldId="705"/>
-        </pc:sldMkLst>
-      </pc:sldChg>
-      <pc:sldChg chg="modSp del mod">
-        <pc:chgData name="Mohammed Fasha" userId="cc64f42d-a1a6-4f08-b97b-0c37f877119f" providerId="ADAL" clId="{FEC9C214-E726-4192-8176-A8C9AACEB478}" dt="2025-05-16T05:43:36.510" v="126" actId="2696"/>
-        <pc:sldMkLst>
-          <pc:docMk/>
-          <pc:sldMk cId="1142780366" sldId="706"/>
-        </pc:sldMkLst>
-      </pc:sldChg>
-      <pc:sldChg chg="del">
-        <pc:chgData name="Mohammed Fasha" userId="cc64f42d-a1a6-4f08-b97b-0c37f877119f" providerId="ADAL" clId="{FEC9C214-E726-4192-8176-A8C9AACEB478}" dt="2025-05-16T05:43:36.510" v="126" actId="2696"/>
-        <pc:sldMkLst>
-          <pc:docMk/>
-          <pc:sldMk cId="67871309" sldId="709"/>
-        </pc:sldMkLst>
-      </pc:sldChg>
-      <pc:sldChg chg="del">
-        <pc:chgData name="Mohammed Fasha" userId="cc64f42d-a1a6-4f08-b97b-0c37f877119f" providerId="ADAL" clId="{FEC9C214-E726-4192-8176-A8C9AACEB478}" dt="2025-05-16T05:43:36.510" v="126" actId="2696"/>
-        <pc:sldMkLst>
-          <pc:docMk/>
-          <pc:sldMk cId="4114896152" sldId="710"/>
-        </pc:sldMkLst>
-      </pc:sldChg>
-      <pc:sldChg chg="del">
-        <pc:chgData name="Mohammed Fasha" userId="cc64f42d-a1a6-4f08-b97b-0c37f877119f" providerId="ADAL" clId="{FEC9C214-E726-4192-8176-A8C9AACEB478}" dt="2025-05-16T05:43:36.510" v="126" actId="2696"/>
-        <pc:sldMkLst>
-          <pc:docMk/>
-          <pc:sldMk cId="3794385322" sldId="711"/>
-        </pc:sldMkLst>
-      </pc:sldChg>
-      <pc:sldChg chg="del">
-        <pc:chgData name="Mohammed Fasha" userId="cc64f42d-a1a6-4f08-b97b-0c37f877119f" providerId="ADAL" clId="{FEC9C214-E726-4192-8176-A8C9AACEB478}" dt="2025-05-16T05:43:36.510" v="126" actId="2696"/>
-        <pc:sldMkLst>
-          <pc:docMk/>
-          <pc:sldMk cId="3701206727" sldId="712"/>
-        </pc:sldMkLst>
-      </pc:sldChg>
-      <pc:sldChg chg="del">
-        <pc:chgData name="Mohammed Fasha" userId="cc64f42d-a1a6-4f08-b97b-0c37f877119f" providerId="ADAL" clId="{FEC9C214-E726-4192-8176-A8C9AACEB478}" dt="2025-05-16T05:43:36.510" v="126" actId="2696"/>
-        <pc:sldMkLst>
-          <pc:docMk/>
-          <pc:sldMk cId="1499972066" sldId="713"/>
-        </pc:sldMkLst>
-      </pc:sldChg>
-      <pc:sldChg chg="del">
-        <pc:chgData name="Mohammed Fasha" userId="cc64f42d-a1a6-4f08-b97b-0c37f877119f" providerId="ADAL" clId="{FEC9C214-E726-4192-8176-A8C9AACEB478}" dt="2025-05-16T05:43:36.510" v="126" actId="2696"/>
-        <pc:sldMkLst>
-          <pc:docMk/>
-          <pc:sldMk cId="1270641495" sldId="714"/>
-        </pc:sldMkLst>
-      </pc:sldChg>
-      <pc:sldChg chg="modSp del mod">
-        <pc:chgData name="Mohammed Fasha" userId="cc64f42d-a1a6-4f08-b97b-0c37f877119f" providerId="ADAL" clId="{FEC9C214-E726-4192-8176-A8C9AACEB478}" dt="2025-05-16T05:43:36.510" v="126" actId="2696"/>
-        <pc:sldMkLst>
-          <pc:docMk/>
-          <pc:sldMk cId="1096386322" sldId="715"/>
-        </pc:sldMkLst>
-      </pc:sldChg>
-      <pc:sldChg chg="modSp del mod">
-        <pc:chgData name="Mohammed Fasha" userId="cc64f42d-a1a6-4f08-b97b-0c37f877119f" providerId="ADAL" clId="{FEC9C214-E726-4192-8176-A8C9AACEB478}" dt="2025-05-16T05:43:36.510" v="126" actId="2696"/>
-        <pc:sldMkLst>
-          <pc:docMk/>
-          <pc:sldMk cId="1784058309" sldId="716"/>
-        </pc:sldMkLst>
-      </pc:sldChg>
-      <pc:sldChg chg="modSp del mod">
-        <pc:chgData name="Mohammed Fasha" userId="cc64f42d-a1a6-4f08-b97b-0c37f877119f" providerId="ADAL" clId="{FEC9C214-E726-4192-8176-A8C9AACEB478}" dt="2025-05-16T05:43:36.510" v="126" actId="2696"/>
-        <pc:sldMkLst>
-          <pc:docMk/>
-          <pc:sldMk cId="3139017106" sldId="717"/>
-        </pc:sldMkLst>
-      </pc:sldChg>
-      <pc:sldChg chg="del">
-        <pc:chgData name="Mohammed Fasha" userId="cc64f42d-a1a6-4f08-b97b-0c37f877119f" providerId="ADAL" clId="{FEC9C214-E726-4192-8176-A8C9AACEB478}" dt="2025-05-16T05:43:36.510" v="126" actId="2696"/>
-        <pc:sldMkLst>
-          <pc:docMk/>
-          <pc:sldMk cId="3043812923" sldId="718"/>
-        </pc:sldMkLst>
-      </pc:sldChg>
-      <pc:sldChg chg="modSp del mod">
-        <pc:chgData name="Mohammed Fasha" userId="cc64f42d-a1a6-4f08-b97b-0c37f877119f" providerId="ADAL" clId="{FEC9C214-E726-4192-8176-A8C9AACEB478}" dt="2025-05-12T03:04:56.963" v="45" actId="2696"/>
-        <pc:sldMkLst>
-          <pc:docMk/>
-          <pc:sldMk cId="666527140" sldId="725"/>
-        </pc:sldMkLst>
-      </pc:sldChg>
-      <pc:sldChg chg="add del">
-        <pc:chgData name="Mohammed Fasha" userId="cc64f42d-a1a6-4f08-b97b-0c37f877119f" providerId="ADAL" clId="{FEC9C214-E726-4192-8176-A8C9AACEB478}" dt="2025-05-16T05:43:36.510" v="126" actId="2696"/>
-        <pc:sldMkLst>
-          <pc:docMk/>
-          <pc:sldMk cId="2280465272" sldId="725"/>
-        </pc:sldMkLst>
-      </pc:sldChg>
-      <pc:sldChg chg="del">
-        <pc:chgData name="Mohammed Fasha" userId="cc64f42d-a1a6-4f08-b97b-0c37f877119f" providerId="ADAL" clId="{FEC9C214-E726-4192-8176-A8C9AACEB478}" dt="2025-05-16T05:43:36.510" v="126" actId="2696"/>
-        <pc:sldMkLst>
-          <pc:docMk/>
-          <pc:sldMk cId="3660604927" sldId="726"/>
-        </pc:sldMkLst>
-      </pc:sldChg>
-      <pc:sldChg chg="del">
-        <pc:chgData name="Mohammed Fasha" userId="cc64f42d-a1a6-4f08-b97b-0c37f877119f" providerId="ADAL" clId="{FEC9C214-E726-4192-8176-A8C9AACEB478}" dt="2025-05-16T05:43:36.510" v="126" actId="2696"/>
-        <pc:sldMkLst>
-          <pc:docMk/>
-          <pc:sldMk cId="4051640529" sldId="728"/>
-        </pc:sldMkLst>
-      </pc:sldChg>
-      <pc:sldChg chg="modSp new del mod">
-        <pc:chgData name="Mohammed Fasha" userId="cc64f42d-a1a6-4f08-b97b-0c37f877119f" providerId="ADAL" clId="{FEC9C214-E726-4192-8176-A8C9AACEB478}" dt="2025-05-12T03:11:40.927" v="51" actId="47"/>
-        <pc:sldMkLst>
-          <pc:docMk/>
-          <pc:sldMk cId="1223704259" sldId="729"/>
-        </pc:sldMkLst>
-      </pc:sldChg>
-      <pc:sldChg chg="add del">
-        <pc:chgData name="Mohammed Fasha" userId="cc64f42d-a1a6-4f08-b97b-0c37f877119f" providerId="ADAL" clId="{FEC9C214-E726-4192-8176-A8C9AACEB478}" dt="2025-05-12T03:06:57.298" v="49"/>
-        <pc:sldMkLst>
-          <pc:docMk/>
-          <pc:sldMk cId="3927078588" sldId="730"/>
-        </pc:sldMkLst>
-      </pc:sldChg>
-    </pc:docChg>
-  </pc:docChgLst>
-  <pc:docChgLst>
-    <pc:chgData name="Mohammed Fasha" userId="cc64f42d-a1a6-4f08-b97b-0c37f877119f" providerId="ADAL" clId="{2E5FBF59-3168-4932-9518-582502FE1AD5}"/>
-    <pc:docChg chg="undo custSel delSld modSld">
-      <pc:chgData name="Mohammed Fasha" userId="cc64f42d-a1a6-4f08-b97b-0c37f877119f" providerId="ADAL" clId="{2E5FBF59-3168-4932-9518-582502FE1AD5}" dt="2024-12-24T08:08:19.987" v="550" actId="20577"/>
-      <pc:docMkLst>
-        <pc:docMk/>
-      </pc:docMkLst>
-      <pc:sldChg chg="delSp">
-        <pc:chgData name="Mohammed Fasha" userId="cc64f42d-a1a6-4f08-b97b-0c37f877119f" providerId="ADAL" clId="{2E5FBF59-3168-4932-9518-582502FE1AD5}" dt="2024-11-19T07:40:47.121" v="208" actId="478"/>
-        <pc:sldMkLst>
-          <pc:docMk/>
-          <pc:sldMk cId="391491219" sldId="428"/>
-        </pc:sldMkLst>
-      </pc:sldChg>
-      <pc:sldChg chg="modSp">
-        <pc:chgData name="Mohammed Fasha" userId="cc64f42d-a1a6-4f08-b97b-0c37f877119f" providerId="ADAL" clId="{2E5FBF59-3168-4932-9518-582502FE1AD5}" dt="2024-12-03T07:43:58.007" v="456" actId="1076"/>
-        <pc:sldMkLst>
-          <pc:docMk/>
-          <pc:sldMk cId="3339445507" sldId="430"/>
-        </pc:sldMkLst>
-      </pc:sldChg>
-      <pc:sldChg chg="modSp">
-        <pc:chgData name="Mohammed Fasha" userId="cc64f42d-a1a6-4f08-b97b-0c37f877119f" providerId="ADAL" clId="{2E5FBF59-3168-4932-9518-582502FE1AD5}" dt="2024-12-03T07:45:08.136" v="474" actId="20577"/>
-        <pc:sldMkLst>
-          <pc:docMk/>
-          <pc:sldMk cId="3389046835" sldId="431"/>
-        </pc:sldMkLst>
-      </pc:sldChg>
-      <pc:sldChg chg="modSp">
-        <pc:chgData name="Mohammed Fasha" userId="cc64f42d-a1a6-4f08-b97b-0c37f877119f" providerId="ADAL" clId="{2E5FBF59-3168-4932-9518-582502FE1AD5}" dt="2024-11-10T06:33:09.727" v="37" actId="207"/>
-        <pc:sldMkLst>
-          <pc:docMk/>
-          <pc:sldMk cId="2726994946" sldId="479"/>
-        </pc:sldMkLst>
-      </pc:sldChg>
-      <pc:sldChg chg="modSp">
-        <pc:chgData name="Mohammed Fasha" userId="cc64f42d-a1a6-4f08-b97b-0c37f877119f" providerId="ADAL" clId="{2E5FBF59-3168-4932-9518-582502FE1AD5}" dt="2024-11-19T07:44:28.766" v="211" actId="20577"/>
-        <pc:sldMkLst>
-          <pc:docMk/>
-          <pc:sldMk cId="2297456757" sldId="483"/>
-        </pc:sldMkLst>
-      </pc:sldChg>
-      <pc:sldChg chg="modSp">
-        <pc:chgData name="Mohammed Fasha" userId="cc64f42d-a1a6-4f08-b97b-0c37f877119f" providerId="ADAL" clId="{2E5FBF59-3168-4932-9518-582502FE1AD5}" dt="2024-11-10T06:45:09.392" v="40" actId="20577"/>
-        <pc:sldMkLst>
-          <pc:docMk/>
-          <pc:sldMk cId="3474268344" sldId="596"/>
-        </pc:sldMkLst>
-      </pc:sldChg>
-      <pc:sldChg chg="modSp">
-        <pc:chgData name="Mohammed Fasha" userId="cc64f42d-a1a6-4f08-b97b-0c37f877119f" providerId="ADAL" clId="{2E5FBF59-3168-4932-9518-582502FE1AD5}" dt="2024-12-03T07:47:21.561" v="476" actId="6549"/>
-        <pc:sldMkLst>
-          <pc:docMk/>
-          <pc:sldMk cId="399592497" sldId="613"/>
-        </pc:sldMkLst>
-      </pc:sldChg>
-      <pc:sldChg chg="modSp">
-        <pc:chgData name="Mohammed Fasha" userId="cc64f42d-a1a6-4f08-b97b-0c37f877119f" providerId="ADAL" clId="{2E5FBF59-3168-4932-9518-582502FE1AD5}" dt="2024-12-03T07:49:02.980" v="478" actId="207"/>
-        <pc:sldMkLst>
-          <pc:docMk/>
-          <pc:sldMk cId="3329135496" sldId="617"/>
-        </pc:sldMkLst>
-      </pc:sldChg>
-      <pc:sldChg chg="modSp">
-        <pc:chgData name="Mohammed Fasha" userId="cc64f42d-a1a6-4f08-b97b-0c37f877119f" providerId="ADAL" clId="{2E5FBF59-3168-4932-9518-582502FE1AD5}" dt="2024-12-24T08:05:16.608" v="482" actId="403"/>
-        <pc:sldMkLst>
-          <pc:docMk/>
-          <pc:sldMk cId="2990045589" sldId="659"/>
-        </pc:sldMkLst>
-      </pc:sldChg>
-      <pc:sldChg chg="modSp">
-        <pc:chgData name="Mohammed Fasha" userId="cc64f42d-a1a6-4f08-b97b-0c37f877119f" providerId="ADAL" clId="{2E5FBF59-3168-4932-9518-582502FE1AD5}" dt="2024-12-24T08:08:19.987" v="550" actId="20577"/>
-        <pc:sldMkLst>
-          <pc:docMk/>
-          <pc:sldMk cId="2680231355" sldId="669"/>
-        </pc:sldMkLst>
-      </pc:sldChg>
-      <pc:sldChg chg="addSp modSp">
-        <pc:chgData name="Mohammed Fasha" userId="cc64f42d-a1a6-4f08-b97b-0c37f877119f" providerId="ADAL" clId="{2E5FBF59-3168-4932-9518-582502FE1AD5}" dt="2024-12-24T08:05:52.910" v="488" actId="1076"/>
-        <pc:sldMkLst>
-          <pc:docMk/>
-          <pc:sldMk cId="916102856" sldId="685"/>
-        </pc:sldMkLst>
-      </pc:sldChg>
-      <pc:sldChg chg="modSp">
-        <pc:chgData name="Mohammed Fasha" userId="cc64f42d-a1a6-4f08-b97b-0c37f877119f" providerId="ADAL" clId="{2E5FBF59-3168-4932-9518-582502FE1AD5}" dt="2024-11-19T07:03:29.557" v="206" actId="207"/>
-        <pc:sldMkLst>
-          <pc:docMk/>
-          <pc:sldMk cId="32004852" sldId="708"/>
-        </pc:sldMkLst>
-      </pc:sldChg>
-    </pc:docChg>
-  </pc:docChgLst>
-  <pc:docChgLst>
-    <pc:chgData name="Mohammed Fasha" userId="cc64f42d-a1a6-4f08-b97b-0c37f877119f" providerId="ADAL" clId="{25C05559-E4DC-4EE1-91BC-1444D09EE869}"/>
-    <pc:docChg chg="undo custSel addSld delSld modSld sldOrd">
-      <pc:chgData name="Mohammed Fasha" userId="cc64f42d-a1a6-4f08-b97b-0c37f877119f" providerId="ADAL" clId="{25C05559-E4DC-4EE1-91BC-1444D09EE869}" dt="2025-04-30T07:51:18.812" v="264" actId="47"/>
-      <pc:docMkLst>
-        <pc:docMk/>
-      </pc:docMkLst>
-      <pc:sldChg chg="modSp mod">
-        <pc:chgData name="Mohammed Fasha" userId="cc64f42d-a1a6-4f08-b97b-0c37f877119f" providerId="ADAL" clId="{25C05559-E4DC-4EE1-91BC-1444D09EE869}" dt="2025-04-16T06:14:55.232" v="16" actId="1076"/>
-        <pc:sldMkLst>
-          <pc:docMk/>
-          <pc:sldMk cId="1499958888" sldId="394"/>
-        </pc:sldMkLst>
-      </pc:sldChg>
-      <pc:sldChg chg="delSp modSp mod delAnim">
-        <pc:chgData name="Mohammed Fasha" userId="cc64f42d-a1a6-4f08-b97b-0c37f877119f" providerId="ADAL" clId="{25C05559-E4DC-4EE1-91BC-1444D09EE869}" dt="2025-04-16T06:43:36.666" v="20" actId="478"/>
-        <pc:sldMkLst>
-          <pc:docMk/>
-          <pc:sldMk cId="2905491798" sldId="440"/>
-        </pc:sldMkLst>
-      </pc:sldChg>
-      <pc:sldChg chg="modSp mod">
-        <pc:chgData name="Mohammed Fasha" userId="cc64f42d-a1a6-4f08-b97b-0c37f877119f" providerId="ADAL" clId="{25C05559-E4DC-4EE1-91BC-1444D09EE869}" dt="2025-04-09T06:23:26.187" v="0" actId="20577"/>
-        <pc:sldMkLst>
-          <pc:docMk/>
-          <pc:sldMk cId="2297456757" sldId="483"/>
-        </pc:sldMkLst>
-        <pc:spChg chg="mod">
-          <ac:chgData name="Mohammed Fasha" userId="cc64f42d-a1a6-4f08-b97b-0c37f877119f" providerId="ADAL" clId="{25C05559-E4DC-4EE1-91BC-1444D09EE869}" dt="2025-04-09T06:23:26.187" v="0" actId="20577"/>
-          <ac:spMkLst>
-            <pc:docMk/>
-            <pc:sldMk cId="2297456757" sldId="483"/>
-            <ac:spMk id="5" creationId="{89403830-E271-DAA0-8838-E295A84A8B5B}"/>
-          </ac:spMkLst>
-        </pc:spChg>
-      </pc:sldChg>
-      <pc:sldChg chg="ord">
-        <pc:chgData name="Mohammed Fasha" userId="cc64f42d-a1a6-4f08-b97b-0c37f877119f" providerId="ADAL" clId="{25C05559-E4DC-4EE1-91BC-1444D09EE869}" dt="2025-04-16T06:46:21.733" v="23" actId="20578"/>
-        <pc:sldMkLst>
-          <pc:docMk/>
-          <pc:sldMk cId="3480194047" sldId="599"/>
-        </pc:sldMkLst>
-      </pc:sldChg>
-      <pc:sldChg chg="modSp mod">
-        <pc:chgData name="Mohammed Fasha" userId="cc64f42d-a1a6-4f08-b97b-0c37f877119f" providerId="ADAL" clId="{25C05559-E4DC-4EE1-91BC-1444D09EE869}" dt="2025-04-16T06:46:47.902" v="27" actId="404"/>
-        <pc:sldMkLst>
-          <pc:docMk/>
-          <pc:sldMk cId="3146452721" sldId="600"/>
-        </pc:sldMkLst>
-      </pc:sldChg>
-      <pc:sldChg chg="delSp mod">
-        <pc:chgData name="Mohammed Fasha" userId="cc64f42d-a1a6-4f08-b97b-0c37f877119f" providerId="ADAL" clId="{25C05559-E4DC-4EE1-91BC-1444D09EE869}" dt="2025-04-16T06:47:57.131" v="35" actId="21"/>
-        <pc:sldMkLst>
-          <pc:docMk/>
-          <pc:sldMk cId="202107314" sldId="647"/>
-        </pc:sldMkLst>
-      </pc:sldChg>
-      <pc:sldChg chg="modSp mod">
-        <pc:chgData name="Mohammed Fasha" userId="cc64f42d-a1a6-4f08-b97b-0c37f877119f" providerId="ADAL" clId="{25C05559-E4DC-4EE1-91BC-1444D09EE869}" dt="2025-04-16T06:48:42.467" v="40" actId="14100"/>
-        <pc:sldMkLst>
-          <pc:docMk/>
-          <pc:sldMk cId="3454522070" sldId="679"/>
-        </pc:sldMkLst>
-      </pc:sldChg>
-      <pc:sldChg chg="modSp mod">
-        <pc:chgData name="Mohammed Fasha" userId="cc64f42d-a1a6-4f08-b97b-0c37f877119f" providerId="ADAL" clId="{25C05559-E4DC-4EE1-91BC-1444D09EE869}" dt="2025-04-16T06:49:10.468" v="48" actId="404"/>
-        <pc:sldMkLst>
-          <pc:docMk/>
-          <pc:sldMk cId="2856814121" sldId="681"/>
-        </pc:sldMkLst>
-      </pc:sldChg>
-      <pc:sldChg chg="modSp mod">
-        <pc:chgData name="Mohammed Fasha" userId="cc64f42d-a1a6-4f08-b97b-0c37f877119f" providerId="ADAL" clId="{25C05559-E4DC-4EE1-91BC-1444D09EE869}" dt="2025-04-16T06:48:55.287" v="46" actId="27636"/>
-        <pc:sldMkLst>
-          <pc:docMk/>
-          <pc:sldMk cId="265576630" sldId="698"/>
-        </pc:sldMkLst>
-      </pc:sldChg>
-      <pc:sldChg chg="modSp">
-        <pc:chgData name="Mohammed Fasha" userId="cc64f42d-a1a6-4f08-b97b-0c37f877119f" providerId="ADAL" clId="{25C05559-E4DC-4EE1-91BC-1444D09EE869}" dt="2025-04-16T06:48:02.658" v="36" actId="1076"/>
-        <pc:sldMkLst>
-          <pc:docMk/>
-          <pc:sldMk cId="3085160177" sldId="704"/>
-        </pc:sldMkLst>
-      </pc:sldChg>
-      <pc:sldChg chg="modSp mod">
-        <pc:chgData name="Mohammed Fasha" userId="cc64f42d-a1a6-4f08-b97b-0c37f877119f" providerId="ADAL" clId="{25C05559-E4DC-4EE1-91BC-1444D09EE869}" dt="2025-04-16T06:47:18.630" v="34" actId="1076"/>
-        <pc:sldMkLst>
-          <pc:docMk/>
-          <pc:sldMk cId="32004852" sldId="708"/>
-        </pc:sldMkLst>
-      </pc:sldChg>
-      <pc:sldChg chg="addSp delSp modSp mod">
-        <pc:chgData name="Mohammed Fasha" userId="cc64f42d-a1a6-4f08-b97b-0c37f877119f" providerId="ADAL" clId="{25C05559-E4DC-4EE1-91BC-1444D09EE869}" dt="2025-04-16T06:14:10.424" v="11" actId="167"/>
-        <pc:sldMkLst>
-          <pc:docMk/>
-          <pc:sldMk cId="3150550060" sldId="720"/>
-        </pc:sldMkLst>
-      </pc:sldChg>
-      <pc:sldChg chg="addSp modSp new mod">
-        <pc:chgData name="Mohammed Fasha" userId="cc64f42d-a1a6-4f08-b97b-0c37f877119f" providerId="ADAL" clId="{25C05559-E4DC-4EE1-91BC-1444D09EE869}" dt="2025-04-30T06:40:50.224" v="212" actId="6549"/>
-        <pc:sldMkLst>
-          <pc:docMk/>
-          <pc:sldMk cId="666527140" sldId="725"/>
-        </pc:sldMkLst>
-      </pc:sldChg>
-      <pc:sldChg chg="addSp delSp modSp new mod">
-        <pc:chgData name="Mohammed Fasha" userId="cc64f42d-a1a6-4f08-b97b-0c37f877119f" providerId="ADAL" clId="{25C05559-E4DC-4EE1-91BC-1444D09EE869}" dt="2025-04-30T07:05:36.135" v="263" actId="122"/>
-        <pc:sldMkLst>
-          <pc:docMk/>
-          <pc:sldMk cId="3660604927" sldId="726"/>
-        </pc:sldMkLst>
-      </pc:sldChg>
-      <pc:sldChg chg="add del">
-        <pc:chgData name="Mohammed Fasha" userId="cc64f42d-a1a6-4f08-b97b-0c37f877119f" providerId="ADAL" clId="{25C05559-E4DC-4EE1-91BC-1444D09EE869}" dt="2025-04-30T07:51:18.812" v="264" actId="47"/>
-        <pc:sldMkLst>
-          <pc:docMk/>
-          <pc:sldMk cId="2399550384" sldId="727"/>
-        </pc:sldMkLst>
-      </pc:sldChg>
-      <pc:sldChg chg="modSp add mod ord">
-        <pc:chgData name="Mohammed Fasha" userId="cc64f42d-a1a6-4f08-b97b-0c37f877119f" providerId="ADAL" clId="{25C05559-E4DC-4EE1-91BC-1444D09EE869}" dt="2025-04-30T06:47:23.280" v="238" actId="20577"/>
-        <pc:sldMkLst>
-          <pc:docMk/>
-          <pc:sldMk cId="4051640529" sldId="728"/>
-        </pc:sldMkLst>
-      </pc:sldChg>
-    </pc:docChg>
-  </pc:docChgLst>
-  <pc:docChgLst>
-    <pc:chgData name="Mohammed Fasha" userId="cc64f42d-a1a6-4f08-b97b-0c37f877119f" providerId="ADAL" clId="{6804A8E6-8D7F-46E3-B091-66A8F6B926BF}"/>
-    <pc:docChg chg="custSel modMainMaster">
-      <pc:chgData name="Mohammed Fasha" userId="cc64f42d-a1a6-4f08-b97b-0c37f877119f" providerId="ADAL" clId="{6804A8E6-8D7F-46E3-B091-66A8F6B926BF}" dt="2024-11-09T05:15:35.019" v="2" actId="1076"/>
-      <pc:docMkLst>
-        <pc:docMk/>
-      </pc:docMkLst>
-      <pc:sldMasterChg chg="delSp mod modSldLayout">
-        <pc:chgData name="Mohammed Fasha" userId="cc64f42d-a1a6-4f08-b97b-0c37f877119f" providerId="ADAL" clId="{6804A8E6-8D7F-46E3-B091-66A8F6B926BF}" dt="2024-11-09T05:15:35.019" v="2" actId="1076"/>
-        <pc:sldMasterMkLst>
-          <pc:docMk/>
-          <pc:sldMasterMk cId="742811419" sldId="2147483648"/>
-        </pc:sldMasterMkLst>
-        <pc:sldLayoutChg chg="addSp modSp mod">
-          <pc:chgData name="Mohammed Fasha" userId="cc64f42d-a1a6-4f08-b97b-0c37f877119f" providerId="ADAL" clId="{6804A8E6-8D7F-46E3-B091-66A8F6B926BF}" dt="2024-11-09T05:15:35.019" v="2" actId="1076"/>
-          <pc:sldLayoutMkLst>
-            <pc:docMk/>
-            <pc:sldMasterMk cId="742811419" sldId="2147483648"/>
-            <pc:sldLayoutMk cId="4063788262" sldId="2147483649"/>
-          </pc:sldLayoutMkLst>
         </pc:sldLayoutChg>
       </pc:sldMasterChg>
     </pc:docChg>
@@ -3118,7 +3258,7 @@
           <a:p>
             <a:fld id="{13BA03A4-B9F1-404C-8A74-B1AFD6480953}" type="datetimeFigureOut">
               <a:rPr lang="en-US" smtClean="0"/>
-              <a:t>6/7/2025</a:t>
+              <a:t>6/18/2025</a:t>
             </a:fld>
             <a:endParaRPr lang="en-US"/>
           </a:p>
@@ -3616,7 +3756,7 @@
           <a:p>
             <a:fld id="{0DB78E95-DE77-44D3-BDB9-E242948FB112}" type="datetimeFigureOut">
               <a:rPr lang="en-US" smtClean="0"/>
-              <a:t>6/7/2025</a:t>
+              <a:t>6/18/2025</a:t>
             </a:fld>
             <a:endParaRPr lang="en-US"/>
           </a:p>
@@ -3844,7 +3984,7 @@
           <a:p>
             <a:fld id="{0DB78E95-DE77-44D3-BDB9-E242948FB112}" type="datetimeFigureOut">
               <a:rPr lang="en-US" smtClean="0"/>
-              <a:t>6/7/2025</a:t>
+              <a:t>6/18/2025</a:t>
             </a:fld>
             <a:endParaRPr lang="en-US"/>
           </a:p>
@@ -4052,7 +4192,7 @@
           <a:p>
             <a:fld id="{0DB78E95-DE77-44D3-BDB9-E242948FB112}" type="datetimeFigureOut">
               <a:rPr lang="en-US" smtClean="0"/>
-              <a:t>6/7/2025</a:t>
+              <a:t>6/18/2025</a:t>
             </a:fld>
             <a:endParaRPr lang="en-US"/>
           </a:p>
@@ -4483,7 +4623,7 @@
           <a:p>
             <a:fld id="{0DB78E95-DE77-44D3-BDB9-E242948FB112}" type="datetimeFigureOut">
               <a:rPr lang="en-US" smtClean="0"/>
-              <a:t>6/7/2025</a:t>
+              <a:t>6/18/2025</a:t>
             </a:fld>
             <a:endParaRPr lang="en-US"/>
           </a:p>
@@ -4862,7 +5002,7 @@
           <a:p>
             <a:fld id="{0DB78E95-DE77-44D3-BDB9-E242948FB112}" type="datetimeFigureOut">
               <a:rPr lang="en-US" smtClean="0"/>
-              <a:t>6/7/2025</a:t>
+              <a:t>6/18/2025</a:t>
             </a:fld>
             <a:endParaRPr lang="en-US"/>
           </a:p>
@@ -5274,7 +5414,7 @@
           <a:p>
             <a:fld id="{0DB78E95-DE77-44D3-BDB9-E242948FB112}" type="datetimeFigureOut">
               <a:rPr lang="en-US" smtClean="0"/>
-              <a:t>6/7/2025</a:t>
+              <a:t>6/18/2025</a:t>
             </a:fld>
             <a:endParaRPr lang="en-US"/>
           </a:p>
@@ -5415,7 +5555,7 @@
           <a:p>
             <a:fld id="{0DB78E95-DE77-44D3-BDB9-E242948FB112}" type="datetimeFigureOut">
               <a:rPr lang="en-US" smtClean="0"/>
-              <a:t>6/7/2025</a:t>
+              <a:t>6/18/2025</a:t>
             </a:fld>
             <a:endParaRPr lang="en-US"/>
           </a:p>
@@ -5528,7 +5668,7 @@
           <a:p>
             <a:fld id="{0DB78E95-DE77-44D3-BDB9-E242948FB112}" type="datetimeFigureOut">
               <a:rPr lang="en-US" smtClean="0"/>
-              <a:t>6/7/2025</a:t>
+              <a:t>6/18/2025</a:t>
             </a:fld>
             <a:endParaRPr lang="en-US"/>
           </a:p>
@@ -5839,7 +5979,7 @@
           <a:p>
             <a:fld id="{0DB78E95-DE77-44D3-BDB9-E242948FB112}" type="datetimeFigureOut">
               <a:rPr lang="en-US" smtClean="0"/>
-              <a:t>6/7/2025</a:t>
+              <a:t>6/18/2025</a:t>
             </a:fld>
             <a:endParaRPr lang="en-US"/>
           </a:p>
@@ -6127,7 +6267,7 @@
           <a:p>
             <a:fld id="{0DB78E95-DE77-44D3-BDB9-E242948FB112}" type="datetimeFigureOut">
               <a:rPr lang="en-US" smtClean="0"/>
-              <a:t>6/7/2025</a:t>
+              <a:t>6/18/2025</a:t>
             </a:fld>
             <a:endParaRPr lang="en-US"/>
           </a:p>
@@ -6368,7 +6508,7 @@
           <a:p>
             <a:fld id="{0DB78E95-DE77-44D3-BDB9-E242948FB112}" type="datetimeFigureOut">
               <a:rPr lang="en-US" smtClean="0"/>
-              <a:t>6/7/2025</a:t>
+              <a:t>6/18/2025</a:t>
             </a:fld>
             <a:endParaRPr lang="en-US"/>
           </a:p>
@@ -7019,6 +7159,800 @@
           <p:cNvPr id="2" name="Title 1">
             <a:extLst>
               <a:ext uri="{FF2B5EF4-FFF2-40B4-BE49-F238E27FC236}">
+                <a16:creationId xmlns:a16="http://schemas.microsoft.com/office/drawing/2014/main" id="{1462616C-41EE-2B5B-760C-E900F7CFDE29}"/>
+              </a:ext>
+            </a:extLst>
+          </p:cNvPr>
+          <p:cNvSpPr>
+            <a:spLocks noGrp="1"/>
+          </p:cNvSpPr>
+          <p:nvPr>
+            <p:ph type="title"/>
+          </p:nvPr>
+        </p:nvSpPr>
+        <p:spPr/>
+        <p:txBody>
+          <a:bodyPr/>
+          <a:lstStyle/>
+          <a:p>
+            <a:r>
+              <a:rPr lang="en-US" dirty="0">
+                <a:ea typeface="Calibri Light"/>
+                <a:cs typeface="Calibri Light"/>
+              </a:rPr>
+              <a:t>The Importance of Confidence, Direction Matters</a:t>
+            </a:r>
+            <a:endParaRPr lang="en-US" dirty="0"/>
+          </a:p>
+        </p:txBody>
+      </p:sp>
+      <p:graphicFrame>
+        <p:nvGraphicFramePr>
+          <p:cNvPr id="5" name="Content Placeholder 4">
+            <a:extLst>
+              <a:ext uri="{FF2B5EF4-FFF2-40B4-BE49-F238E27FC236}">
+                <a16:creationId xmlns:a16="http://schemas.microsoft.com/office/drawing/2014/main" id="{D986A135-B943-08AB-BF49-B8AFBFF1A02E}"/>
+              </a:ext>
+            </a:extLst>
+          </p:cNvPr>
+          <p:cNvGraphicFramePr>
+            <a:graphicFrameLocks noGrp="1"/>
+          </p:cNvGraphicFramePr>
+          <p:nvPr>
+            <p:ph idx="1"/>
+            <p:extLst>
+              <p:ext uri="{D42A27DB-BD31-4B8C-83A1-F6EECF244321}">
+                <p14:modId xmlns:p14="http://schemas.microsoft.com/office/powerpoint/2010/main" val="4160585547"/>
+              </p:ext>
+            </p:extLst>
+          </p:nvPr>
+        </p:nvGraphicFramePr>
+        <p:xfrm>
+          <a:off x="838200" y="1706563"/>
+          <a:ext cx="10515599" cy="4450080"/>
+        </p:xfrm>
+        <a:graphic>
+          <a:graphicData uri="http://schemas.openxmlformats.org/drawingml/2006/table">
+            <a:tbl>
+              <a:tblPr bandRow="1">
+                <a:tableStyleId>{5940675A-B579-460E-94D1-54222C63F5DA}</a:tableStyleId>
+              </a:tblPr>
+              <a:tblGrid>
+                <a:gridCol w="1898468">
+                  <a:extLst>
+                    <a:ext uri="{9D8B030D-6E8A-4147-A177-3AD203B41FA5}">
+                      <a16:colId xmlns:a16="http://schemas.microsoft.com/office/drawing/2014/main" val="1099920249"/>
+                    </a:ext>
+                  </a:extLst>
+                </a:gridCol>
+                <a:gridCol w="3359331">
+                  <a:extLst>
+                    <a:ext uri="{9D8B030D-6E8A-4147-A177-3AD203B41FA5}">
+                      <a16:colId xmlns:a16="http://schemas.microsoft.com/office/drawing/2014/main" val="4200357428"/>
+                    </a:ext>
+                  </a:extLst>
+                </a:gridCol>
+                <a:gridCol w="2628900">
+                  <a:extLst>
+                    <a:ext uri="{9D8B030D-6E8A-4147-A177-3AD203B41FA5}">
+                      <a16:colId xmlns:a16="http://schemas.microsoft.com/office/drawing/2014/main" val="2556761527"/>
+                    </a:ext>
+                  </a:extLst>
+                </a:gridCol>
+                <a:gridCol w="2628900">
+                  <a:extLst>
+                    <a:ext uri="{9D8B030D-6E8A-4147-A177-3AD203B41FA5}">
+                      <a16:colId xmlns:a16="http://schemas.microsoft.com/office/drawing/2014/main" val="282503261"/>
+                    </a:ext>
+                  </a:extLst>
+                </a:gridCol>
+              </a:tblGrid>
+              <a:tr h="0">
+                <a:tc>
+                  <a:txBody>
+                    <a:bodyPr/>
+                    <a:lstStyle/>
+                    <a:p>
+                      <a:pPr algn="ctr">
+                        <a:buNone/>
+                      </a:pPr>
+                      <a:r>
+                        <a:rPr lang="en-US" sz="1400" dirty="0"/>
+                        <a:t>Domain</a:t>
+                      </a:r>
+                    </a:p>
+                  </a:txBody>
+                  <a:tcPr anchor="ctr">
+                    <a:solidFill>
+                      <a:schemeClr val="bg1">
+                        <a:lumMod val="85000"/>
+                      </a:schemeClr>
+                    </a:solidFill>
+                  </a:tcPr>
+                </a:tc>
+                <a:tc>
+                  <a:txBody>
+                    <a:bodyPr/>
+                    <a:lstStyle/>
+                    <a:p>
+                      <a:pPr algn="ctr">
+                        <a:buNone/>
+                      </a:pPr>
+                      <a:r>
+                        <a:rPr lang="en-US" sz="1400" dirty="0"/>
+                        <a:t>Rule A → B (Strong)</a:t>
+                      </a:r>
+                    </a:p>
+                  </a:txBody>
+                  <a:tcPr anchor="ctr">
+                    <a:solidFill>
+                      <a:schemeClr val="bg1">
+                        <a:lumMod val="85000"/>
+                      </a:schemeClr>
+                    </a:solidFill>
+                  </a:tcPr>
+                </a:tc>
+                <a:tc>
+                  <a:txBody>
+                    <a:bodyPr/>
+                    <a:lstStyle/>
+                    <a:p>
+                      <a:pPr algn="ctr">
+                        <a:buNone/>
+                      </a:pPr>
+                      <a:r>
+                        <a:rPr lang="en-US" sz="1400" dirty="0"/>
+                        <a:t>Rule B → A (Weak or Misleading)</a:t>
+                      </a:r>
+                    </a:p>
+                  </a:txBody>
+                  <a:tcPr anchor="ctr">
+                    <a:solidFill>
+                      <a:schemeClr val="bg1">
+                        <a:lumMod val="85000"/>
+                      </a:schemeClr>
+                    </a:solidFill>
+                  </a:tcPr>
+                </a:tc>
+                <a:tc>
+                  <a:txBody>
+                    <a:bodyPr/>
+                    <a:lstStyle/>
+                    <a:p>
+                      <a:pPr algn="ctr">
+                        <a:buNone/>
+                      </a:pPr>
+                      <a:r>
+                        <a:rPr lang="en-US" sz="1400" dirty="0"/>
+                        <a:t>Reason for Asymmetry</a:t>
+                      </a:r>
+                    </a:p>
+                  </a:txBody>
+                  <a:tcPr anchor="ctr">
+                    <a:solidFill>
+                      <a:schemeClr val="bg1">
+                        <a:lumMod val="85000"/>
+                      </a:schemeClr>
+                    </a:solidFill>
+                  </a:tcPr>
+                </a:tc>
+                <a:extLst>
+                  <a:ext uri="{0D108BD9-81ED-4DB2-BD59-A6C34878D82A}">
+                    <a16:rowId xmlns:a16="http://schemas.microsoft.com/office/drawing/2014/main" val="3976222607"/>
+                  </a:ext>
+                </a:extLst>
+              </a:tr>
+              <a:tr h="0">
+                <a:tc>
+                  <a:txBody>
+                    <a:bodyPr/>
+                    <a:lstStyle/>
+                    <a:p>
+                      <a:pPr>
+                        <a:buNone/>
+                      </a:pPr>
+                      <a:r>
+                        <a:rPr lang="en-US" sz="1400" dirty="0"/>
+                        <a:t>Retail</a:t>
+                      </a:r>
+                    </a:p>
+                  </a:txBody>
+                  <a:tcPr anchor="ctr"/>
+                </a:tc>
+                <a:tc>
+                  <a:txBody>
+                    <a:bodyPr/>
+                    <a:lstStyle/>
+                    <a:p>
+                      <a:pPr>
+                        <a:buNone/>
+                      </a:pPr>
+                      <a:r>
+                        <a:rPr lang="en-US" sz="1400" dirty="0"/>
+                        <a:t>Buys Smartphone → Buys Phone Case</a:t>
+                      </a:r>
+                    </a:p>
+                  </a:txBody>
+                  <a:tcPr anchor="ctr"/>
+                </a:tc>
+                <a:tc>
+                  <a:txBody>
+                    <a:bodyPr/>
+                    <a:lstStyle/>
+                    <a:p>
+                      <a:pPr>
+                        <a:buNone/>
+                      </a:pPr>
+                      <a:r>
+                        <a:rPr lang="en-US" sz="1400" dirty="0"/>
+                        <a:t>Buys Phone Case → Buys Smartphone</a:t>
+                      </a:r>
+                    </a:p>
+                  </a:txBody>
+                  <a:tcPr anchor="ctr"/>
+                </a:tc>
+                <a:tc>
+                  <a:txBody>
+                    <a:bodyPr/>
+                    <a:lstStyle/>
+                    <a:p>
+                      <a:pPr>
+                        <a:buNone/>
+                      </a:pPr>
+                      <a:r>
+                        <a:rPr lang="en-US" sz="1400" dirty="0"/>
+                        <a:t>Cases are often bought later or as replacements</a:t>
+                      </a:r>
+                    </a:p>
+                  </a:txBody>
+                  <a:tcPr anchor="ctr"/>
+                </a:tc>
+                <a:extLst>
+                  <a:ext uri="{0D108BD9-81ED-4DB2-BD59-A6C34878D82A}">
+                    <a16:rowId xmlns:a16="http://schemas.microsoft.com/office/drawing/2014/main" val="212492749"/>
+                  </a:ext>
+                </a:extLst>
+              </a:tr>
+              <a:tr h="0">
+                <a:tc>
+                  <a:txBody>
+                    <a:bodyPr/>
+                    <a:lstStyle/>
+                    <a:p>
+                      <a:pPr>
+                        <a:buNone/>
+                      </a:pPr>
+                      <a:r>
+                        <a:rPr lang="en-US" sz="1400" dirty="0"/>
+                        <a:t>Web Analytics</a:t>
+                      </a:r>
+                    </a:p>
+                  </a:txBody>
+                  <a:tcPr anchor="ctr"/>
+                </a:tc>
+                <a:tc>
+                  <a:txBody>
+                    <a:bodyPr/>
+                    <a:lstStyle/>
+                    <a:p>
+                      <a:pPr>
+                        <a:buNone/>
+                      </a:pPr>
+                      <a:r>
+                        <a:rPr lang="en-US" sz="1400" dirty="0"/>
+                        <a:t>Visits Product Page → Adds to Cart</a:t>
+                      </a:r>
+                    </a:p>
+                  </a:txBody>
+                  <a:tcPr anchor="ctr"/>
+                </a:tc>
+                <a:tc>
+                  <a:txBody>
+                    <a:bodyPr/>
+                    <a:lstStyle/>
+                    <a:p>
+                      <a:pPr>
+                        <a:buNone/>
+                      </a:pPr>
+                      <a:r>
+                        <a:rPr lang="en-US" sz="1400" dirty="0"/>
+                        <a:t>Adds to Cart → Visits Product Page</a:t>
+                      </a:r>
+                    </a:p>
+                  </a:txBody>
+                  <a:tcPr anchor="ctr"/>
+                </a:tc>
+                <a:tc>
+                  <a:txBody>
+                    <a:bodyPr/>
+                    <a:lstStyle/>
+                    <a:p>
+                      <a:pPr>
+                        <a:buNone/>
+                      </a:pPr>
+                      <a:r>
+                        <a:rPr lang="en-US" sz="1400" dirty="0"/>
+                        <a:t>Visit is required, but not all visits lead to cart</a:t>
+                      </a:r>
+                    </a:p>
+                  </a:txBody>
+                  <a:tcPr anchor="ctr"/>
+                </a:tc>
+                <a:extLst>
+                  <a:ext uri="{0D108BD9-81ED-4DB2-BD59-A6C34878D82A}">
+                    <a16:rowId xmlns:a16="http://schemas.microsoft.com/office/drawing/2014/main" val="3451002103"/>
+                  </a:ext>
+                </a:extLst>
+              </a:tr>
+              <a:tr h="0">
+                <a:tc>
+                  <a:txBody>
+                    <a:bodyPr/>
+                    <a:lstStyle/>
+                    <a:p>
+                      <a:pPr>
+                        <a:buNone/>
+                      </a:pPr>
+                      <a:r>
+                        <a:rPr lang="en-US" sz="1400" dirty="0"/>
+                        <a:t>Healthcare</a:t>
+                      </a:r>
+                    </a:p>
+                  </a:txBody>
+                  <a:tcPr anchor="ctr"/>
+                </a:tc>
+                <a:tc>
+                  <a:txBody>
+                    <a:bodyPr/>
+                    <a:lstStyle/>
+                    <a:p>
+                      <a:pPr>
+                        <a:buNone/>
+                      </a:pPr>
+                      <a:r>
+                        <a:rPr lang="en-US" sz="1400" dirty="0"/>
+                        <a:t>Diagnosed with Diabetes → Prescribed Insulin</a:t>
+                      </a:r>
+                    </a:p>
+                  </a:txBody>
+                  <a:tcPr anchor="ctr"/>
+                </a:tc>
+                <a:tc>
+                  <a:txBody>
+                    <a:bodyPr/>
+                    <a:lstStyle/>
+                    <a:p>
+                      <a:pPr>
+                        <a:buNone/>
+                      </a:pPr>
+                      <a:r>
+                        <a:rPr lang="en-US" sz="1400" dirty="0"/>
+                        <a:t>Prescribed Insulin → Diagnosed with Diabetes</a:t>
+                      </a:r>
+                    </a:p>
+                  </a:txBody>
+                  <a:tcPr anchor="ctr"/>
+                </a:tc>
+                <a:tc>
+                  <a:txBody>
+                    <a:bodyPr/>
+                    <a:lstStyle/>
+                    <a:p>
+                      <a:pPr>
+                        <a:buNone/>
+                      </a:pPr>
+                      <a:r>
+                        <a:rPr lang="en-US" sz="1400" dirty="0"/>
+                        <a:t>Insulin used for other conditions too</a:t>
+                      </a:r>
+                    </a:p>
+                  </a:txBody>
+                  <a:tcPr anchor="ctr"/>
+                </a:tc>
+                <a:extLst>
+                  <a:ext uri="{0D108BD9-81ED-4DB2-BD59-A6C34878D82A}">
+                    <a16:rowId xmlns:a16="http://schemas.microsoft.com/office/drawing/2014/main" val="4182332532"/>
+                  </a:ext>
+                </a:extLst>
+              </a:tr>
+              <a:tr h="0">
+                <a:tc>
+                  <a:txBody>
+                    <a:bodyPr/>
+                    <a:lstStyle/>
+                    <a:p>
+                      <a:pPr>
+                        <a:buNone/>
+                      </a:pPr>
+                      <a:r>
+                        <a:rPr lang="en-US" sz="1400" dirty="0"/>
+                        <a:t>Fraud Detection</a:t>
+                      </a:r>
+                    </a:p>
+                  </a:txBody>
+                  <a:tcPr anchor="ctr"/>
+                </a:tc>
+                <a:tc>
+                  <a:txBody>
+                    <a:bodyPr/>
+                    <a:lstStyle/>
+                    <a:p>
+                      <a:pPr>
+                        <a:buNone/>
+                      </a:pPr>
+                      <a:r>
+                        <a:rPr lang="en-US" sz="1400" dirty="0"/>
+                        <a:t>Unusual Login → Account Lock</a:t>
+                      </a:r>
+                    </a:p>
+                  </a:txBody>
+                  <a:tcPr anchor="ctr"/>
+                </a:tc>
+                <a:tc>
+                  <a:txBody>
+                    <a:bodyPr/>
+                    <a:lstStyle/>
+                    <a:p>
+                      <a:pPr>
+                        <a:buNone/>
+                      </a:pPr>
+                      <a:r>
+                        <a:rPr lang="en-US" sz="1400" dirty="0"/>
+                        <a:t>Account Lock → Unusual Login</a:t>
+                      </a:r>
+                    </a:p>
+                  </a:txBody>
+                  <a:tcPr anchor="ctr"/>
+                </a:tc>
+                <a:tc>
+                  <a:txBody>
+                    <a:bodyPr/>
+                    <a:lstStyle/>
+                    <a:p>
+                      <a:pPr>
+                        <a:buNone/>
+                      </a:pPr>
+                      <a:r>
+                        <a:rPr lang="en-US" sz="1400" dirty="0"/>
+                        <a:t>Locks triggered by various issues</a:t>
+                      </a:r>
+                    </a:p>
+                  </a:txBody>
+                  <a:tcPr anchor="ctr"/>
+                </a:tc>
+                <a:extLst>
+                  <a:ext uri="{0D108BD9-81ED-4DB2-BD59-A6C34878D82A}">
+                    <a16:rowId xmlns:a16="http://schemas.microsoft.com/office/drawing/2014/main" val="4036471077"/>
+                  </a:ext>
+                </a:extLst>
+              </a:tr>
+              <a:tr h="0">
+                <a:tc>
+                  <a:txBody>
+                    <a:bodyPr/>
+                    <a:lstStyle/>
+                    <a:p>
+                      <a:pPr>
+                        <a:buNone/>
+                      </a:pPr>
+                      <a:r>
+                        <a:rPr lang="en-US" sz="1400" dirty="0"/>
+                        <a:t>E-Learning</a:t>
+                      </a:r>
+                    </a:p>
+                  </a:txBody>
+                  <a:tcPr anchor="ctr"/>
+                </a:tc>
+                <a:tc>
+                  <a:txBody>
+                    <a:bodyPr/>
+                    <a:lstStyle/>
+                    <a:p>
+                      <a:pPr>
+                        <a:buNone/>
+                      </a:pPr>
+                      <a:r>
+                        <a:rPr lang="en-US" sz="1400"/>
+                        <a:t>Watches Lecture Video → Submits Homework</a:t>
+                      </a:r>
+                      <a:endParaRPr lang="en-US" sz="1400" dirty="0"/>
+                    </a:p>
+                  </a:txBody>
+                  <a:tcPr anchor="ctr"/>
+                </a:tc>
+                <a:tc>
+                  <a:txBody>
+                    <a:bodyPr/>
+                    <a:lstStyle/>
+                    <a:p>
+                      <a:pPr>
+                        <a:buNone/>
+                      </a:pPr>
+                      <a:r>
+                        <a:rPr lang="en-US" sz="1400" dirty="0"/>
+                        <a:t>Submits Homework → Watches Lecture Video</a:t>
+                      </a:r>
+                    </a:p>
+                  </a:txBody>
+                  <a:tcPr anchor="ctr"/>
+                </a:tc>
+                <a:tc>
+                  <a:txBody>
+                    <a:bodyPr/>
+                    <a:lstStyle/>
+                    <a:p>
+                      <a:pPr>
+                        <a:buNone/>
+                      </a:pPr>
+                      <a:r>
+                        <a:rPr lang="en-US" sz="1400" dirty="0"/>
+                        <a:t>Some students skip the video</a:t>
+                      </a:r>
+                    </a:p>
+                  </a:txBody>
+                  <a:tcPr anchor="ctr"/>
+                </a:tc>
+                <a:extLst>
+                  <a:ext uri="{0D108BD9-81ED-4DB2-BD59-A6C34878D82A}">
+                    <a16:rowId xmlns:a16="http://schemas.microsoft.com/office/drawing/2014/main" val="931208208"/>
+                  </a:ext>
+                </a:extLst>
+              </a:tr>
+              <a:tr h="0">
+                <a:tc>
+                  <a:txBody>
+                    <a:bodyPr/>
+                    <a:lstStyle/>
+                    <a:p>
+                      <a:pPr>
+                        <a:buNone/>
+                      </a:pPr>
+                      <a:r>
+                        <a:rPr lang="en-US" sz="1400" dirty="0"/>
+                        <a:t>Streaming Services</a:t>
+                      </a:r>
+                    </a:p>
+                  </a:txBody>
+                  <a:tcPr anchor="ctr"/>
+                </a:tc>
+                <a:tc>
+                  <a:txBody>
+                    <a:bodyPr/>
+                    <a:lstStyle/>
+                    <a:p>
+                      <a:pPr>
+                        <a:buNone/>
+                      </a:pPr>
+                      <a:r>
+                        <a:rPr lang="en-US" sz="1400"/>
+                        <a:t>Subscribes to Premium Plan → Watches Exclusive Shows</a:t>
+                      </a:r>
+                      <a:endParaRPr lang="en-US" sz="1400" dirty="0"/>
+                    </a:p>
+                  </a:txBody>
+                  <a:tcPr anchor="ctr"/>
+                </a:tc>
+                <a:tc>
+                  <a:txBody>
+                    <a:bodyPr/>
+                    <a:lstStyle/>
+                    <a:p>
+                      <a:pPr>
+                        <a:buNone/>
+                      </a:pPr>
+                      <a:r>
+                        <a:rPr lang="en-US" sz="1400" dirty="0"/>
+                        <a:t>Watches Exclusive Shows → Subscribes to Premium Plan</a:t>
+                      </a:r>
+                    </a:p>
+                  </a:txBody>
+                  <a:tcPr anchor="ctr"/>
+                </a:tc>
+                <a:tc>
+                  <a:txBody>
+                    <a:bodyPr/>
+                    <a:lstStyle/>
+                    <a:p>
+                      <a:pPr>
+                        <a:buNone/>
+                      </a:pPr>
+                      <a:r>
+                        <a:rPr lang="en-US" sz="1400" dirty="0"/>
+                        <a:t>Content may be shared or watched via someone else's account</a:t>
+                      </a:r>
+                    </a:p>
+                  </a:txBody>
+                  <a:tcPr anchor="ctr"/>
+                </a:tc>
+                <a:extLst>
+                  <a:ext uri="{0D108BD9-81ED-4DB2-BD59-A6C34878D82A}">
+                    <a16:rowId xmlns:a16="http://schemas.microsoft.com/office/drawing/2014/main" val="4023662678"/>
+                  </a:ext>
+                </a:extLst>
+              </a:tr>
+              <a:tr h="0">
+                <a:tc>
+                  <a:txBody>
+                    <a:bodyPr/>
+                    <a:lstStyle/>
+                    <a:p>
+                      <a:pPr>
+                        <a:buNone/>
+                      </a:pPr>
+                      <a:r>
+                        <a:rPr lang="en-US" sz="1400" dirty="0"/>
+                        <a:t>Finance</a:t>
+                      </a:r>
+                    </a:p>
+                  </a:txBody>
+                  <a:tcPr anchor="ctr"/>
+                </a:tc>
+                <a:tc>
+                  <a:txBody>
+                    <a:bodyPr/>
+                    <a:lstStyle/>
+                    <a:p>
+                      <a:pPr>
+                        <a:buNone/>
+                      </a:pPr>
+                      <a:r>
+                        <a:rPr lang="en-US" sz="1400"/>
+                        <a:t>Misses Loan Payment → Credit Score Drops</a:t>
+                      </a:r>
+                      <a:endParaRPr lang="en-US" sz="1400" dirty="0"/>
+                    </a:p>
+                  </a:txBody>
+                  <a:tcPr anchor="ctr"/>
+                </a:tc>
+                <a:tc>
+                  <a:txBody>
+                    <a:bodyPr/>
+                    <a:lstStyle/>
+                    <a:p>
+                      <a:pPr>
+                        <a:buNone/>
+                      </a:pPr>
+                      <a:r>
+                        <a:rPr lang="en-US" sz="1400" dirty="0"/>
+                        <a:t>Credit Score Drops → Misses Loan Payment</a:t>
+                      </a:r>
+                    </a:p>
+                  </a:txBody>
+                  <a:tcPr anchor="ctr"/>
+                </a:tc>
+                <a:tc>
+                  <a:txBody>
+                    <a:bodyPr/>
+                    <a:lstStyle/>
+                    <a:p>
+                      <a:pPr>
+                        <a:buNone/>
+                      </a:pPr>
+                      <a:r>
+                        <a:rPr lang="en-US" sz="1400" dirty="0"/>
+                        <a:t>Scores drop for many other financial behaviors</a:t>
+                      </a:r>
+                    </a:p>
+                  </a:txBody>
+                  <a:tcPr anchor="ctr"/>
+                </a:tc>
+                <a:extLst>
+                  <a:ext uri="{0D108BD9-81ED-4DB2-BD59-A6C34878D82A}">
+                    <a16:rowId xmlns:a16="http://schemas.microsoft.com/office/drawing/2014/main" val="895064090"/>
+                  </a:ext>
+                </a:extLst>
+              </a:tr>
+              <a:tr h="0">
+                <a:tc>
+                  <a:txBody>
+                    <a:bodyPr/>
+                    <a:lstStyle/>
+                    <a:p>
+                      <a:pPr>
+                        <a:buNone/>
+                      </a:pPr>
+                      <a:r>
+                        <a:rPr lang="en-US" sz="1400" dirty="0"/>
+                        <a:t>HR / Workforce</a:t>
+                      </a:r>
+                    </a:p>
+                  </a:txBody>
+                  <a:tcPr anchor="ctr"/>
+                </a:tc>
+                <a:tc>
+                  <a:txBody>
+                    <a:bodyPr/>
+                    <a:lstStyle/>
+                    <a:p>
+                      <a:pPr>
+                        <a:buNone/>
+                      </a:pPr>
+                      <a:r>
+                        <a:rPr lang="en-US" sz="1400"/>
+                        <a:t>Attends Training → Improved Job Performance</a:t>
+                      </a:r>
+                      <a:endParaRPr lang="en-US" sz="1400" dirty="0"/>
+                    </a:p>
+                  </a:txBody>
+                  <a:tcPr anchor="ctr"/>
+                </a:tc>
+                <a:tc>
+                  <a:txBody>
+                    <a:bodyPr/>
+                    <a:lstStyle/>
+                    <a:p>
+                      <a:pPr>
+                        <a:buNone/>
+                      </a:pPr>
+                      <a:r>
+                        <a:rPr lang="en-US" sz="1400" dirty="0"/>
+                        <a:t>Improved Job Performance → Attended Training</a:t>
+                      </a:r>
+                    </a:p>
+                  </a:txBody>
+                  <a:tcPr anchor="ctr"/>
+                </a:tc>
+                <a:tc>
+                  <a:txBody>
+                    <a:bodyPr/>
+                    <a:lstStyle/>
+                    <a:p>
+                      <a:pPr>
+                        <a:buNone/>
+                      </a:pPr>
+                      <a:r>
+                        <a:rPr lang="en-US" sz="1400" dirty="0"/>
+                        <a:t>Performance may improve for unrelated reasons</a:t>
+                      </a:r>
+                    </a:p>
+                  </a:txBody>
+                  <a:tcPr anchor="ctr"/>
+                </a:tc>
+                <a:extLst>
+                  <a:ext uri="{0D108BD9-81ED-4DB2-BD59-A6C34878D82A}">
+                    <a16:rowId xmlns:a16="http://schemas.microsoft.com/office/drawing/2014/main" val="2043656007"/>
+                  </a:ext>
+                </a:extLst>
+              </a:tr>
+            </a:tbl>
+          </a:graphicData>
+        </a:graphic>
+      </p:graphicFrame>
+    </p:spTree>
+    <p:extLst>
+      <p:ext uri="{BB962C8B-B14F-4D97-AF65-F5344CB8AC3E}">
+        <p14:creationId xmlns:p14="http://schemas.microsoft.com/office/powerpoint/2010/main" val="2757035436"/>
+      </p:ext>
+    </p:extLst>
+  </p:cSld>
+  <p:clrMapOvr>
+    <a:masterClrMapping/>
+  </p:clrMapOvr>
+</p:sld>
+</file>
+
+<file path=ppt/slides/slide11.xml><?xml version="1.0" encoding="utf-8"?>
+<p:sld xmlns:a="http://schemas.openxmlformats.org/drawingml/2006/main" xmlns:r="http://schemas.openxmlformats.org/officeDocument/2006/relationships" xmlns:p="http://schemas.openxmlformats.org/presentationml/2006/main">
+  <p:cSld>
+    <p:spTree>
+      <p:nvGrpSpPr>
+        <p:cNvPr id="1" name=""/>
+        <p:cNvGrpSpPr/>
+        <p:nvPr/>
+      </p:nvGrpSpPr>
+      <p:grpSpPr>
+        <a:xfrm>
+          <a:off x="0" y="0"/>
+          <a:ext cx="0" cy="0"/>
+          <a:chOff x="0" y="0"/>
+          <a:chExt cx="0" cy="0"/>
+        </a:xfrm>
+      </p:grpSpPr>
+      <p:sp>
+        <p:nvSpPr>
+          <p:cNvPr id="2" name="Title 1">
+            <a:extLst>
+              <a:ext uri="{FF2B5EF4-FFF2-40B4-BE49-F238E27FC236}">
                 <a16:creationId xmlns:a16="http://schemas.microsoft.com/office/drawing/2014/main" id="{748EBE3E-0A49-2947-0CEC-18B7160B878C}"/>
               </a:ext>
             </a:extLst>
@@ -7033,20 +7967,13 @@
         <p:spPr/>
         <p:txBody>
           <a:bodyPr>
-            <a:normAutofit fontScale="90000"/>
+            <a:normAutofit/>
           </a:bodyPr>
           <a:lstStyle/>
           <a:p>
             <a:r>
               <a:rPr lang="en-US" dirty="0"/>
               <a:t>The Lift Metric </a:t>
-            </a:r>
-            <a:br>
-              <a:rPr lang="en-US" dirty="0"/>
-            </a:br>
-            <a:r>
-              <a:rPr lang="en-US" dirty="0"/>
-              <a:t>Is the co-occurrence of two items is truly meaningful or just due to chance</a:t>
             </a:r>
           </a:p>
         </p:txBody>
@@ -7074,8 +8001,8 @@
           </a:xfrm>
         </p:spPr>
         <p:txBody>
-          <a:bodyPr>
-            <a:normAutofit fontScale="62500" lnSpcReduction="20000"/>
+          <a:bodyPr vert="horz" lIns="91440" tIns="45720" rIns="91440" bIns="45720" rtlCol="0" anchor="t">
+            <a:normAutofit fontScale="55000" lnSpcReduction="20000"/>
           </a:bodyPr>
           <a:lstStyle/>
           <a:p>
@@ -7088,6 +8015,23 @@
             </a:r>
           </a:p>
           <a:p>
+            <a:pPr>
+              <a:buNone/>
+            </a:pPr>
+            <a:r>
+              <a:rPr lang="en-US" dirty="0">
+                <a:latin typeface="Calibri"/>
+                <a:ea typeface="Calibri"/>
+                <a:cs typeface="Calibri"/>
+              </a:rPr>
+              <a:t>The lift metric answers the questions whether this co-occurrence is truly meaningful or it occurred just by change.</a:t>
+            </a:r>
+            <a:endParaRPr lang="en-US" dirty="0">
+              <a:ea typeface="Calibri"/>
+              <a:cs typeface="Calibri"/>
+            </a:endParaRPr>
+          </a:p>
+          <a:p>
             <a:pPr marL="0" indent="0">
               <a:buNone/>
             </a:pPr>
@@ -7096,9 +8040,13 @@
               <a:t>Scenario: </a:t>
             </a:r>
             <a:r>
-              <a:rPr lang="en-US" dirty="0"/>
+              <a:rPr lang="en-US"/>
               <a:t>We analyze 100 transactions at a bakery.</a:t>
             </a:r>
+            <a:endParaRPr lang="en-US" dirty="0">
+              <a:ea typeface="Calibri"/>
+              <a:cs typeface="Calibri"/>
+            </a:endParaRPr>
           </a:p>
           <a:p>
             <a:pPr marL="0" indent="0">
@@ -7286,7 +8234,7 @@
 </p:sld>
 </file>
 
-<file path=ppt/slides/slide11.xml><?xml version="1.0" encoding="utf-8"?>
+<file path=ppt/slides/slide12.xml><?xml version="1.0" encoding="utf-8"?>
 <p:sld xmlns:a="http://schemas.openxmlformats.org/drawingml/2006/main" xmlns:r="http://schemas.openxmlformats.org/officeDocument/2006/relationships" xmlns:p="http://schemas.openxmlformats.org/presentationml/2006/main">
   <p:cSld>
     <p:spTree>
@@ -7402,7 +8350,7 @@
 </p:sld>
 </file>
 
-<file path=ppt/slides/slide12.xml><?xml version="1.0" encoding="utf-8"?>
+<file path=ppt/slides/slide13.xml><?xml version="1.0" encoding="utf-8"?>
 <p:sld xmlns:a="http://schemas.openxmlformats.org/drawingml/2006/main" xmlns:r="http://schemas.openxmlformats.org/officeDocument/2006/relationships" xmlns:p="http://schemas.openxmlformats.org/presentationml/2006/main">
   <p:cSld>
     <p:spTree>
@@ -7442,7 +8390,7 @@
           <a:p>
             <a:r>
               <a:rPr lang="en-US" dirty="0"/>
-              <a:t>Lift Examples - Lift &gt; 1</a:t>
+              <a:t>Lift Examples: Lift &gt; 1</a:t>
             </a:r>
           </a:p>
         </p:txBody>
@@ -7594,7 +8542,7 @@
 </p:sld>
 </file>
 
-<file path=ppt/slides/slide13.xml><?xml version="1.0" encoding="utf-8"?>
+<file path=ppt/slides/slide14.xml><?xml version="1.0" encoding="utf-8"?>
 <p:sld xmlns:a="http://schemas.openxmlformats.org/drawingml/2006/main" xmlns:r="http://schemas.openxmlformats.org/officeDocument/2006/relationships" xmlns:p="http://schemas.openxmlformats.org/presentationml/2006/main">
   <p:cSld>
     <p:spTree>
@@ -7634,7 +8582,7 @@
           <a:p>
             <a:r>
               <a:rPr lang="en-US" dirty="0"/>
-              <a:t>Lift Examples - Lift &lt; 1 – Negative Relationship</a:t>
+              <a:t>Lift Examples: Lift &lt; 1 – Negative Relationship</a:t>
             </a:r>
           </a:p>
         </p:txBody>
@@ -7662,7 +8610,7 @@
           </a:xfrm>
         </p:spPr>
         <p:txBody>
-          <a:bodyPr>
+          <a:bodyPr vert="horz" lIns="91440" tIns="45720" rIns="91440" bIns="45720" rtlCol="0" anchor="t">
             <a:normAutofit fontScale="62500" lnSpcReduction="20000"/>
           </a:bodyPr>
           <a:lstStyle/>
@@ -7671,18 +8619,44 @@
               <a:buNone/>
             </a:pPr>
             <a:r>
-              <a:rPr lang="en-US" dirty="0"/>
-              <a:t>Lift can be 1 in two cases (When the consequent is common like in the bread/butter example and when there is a negative relationship between the antecedent and the consequent as show in the example in this slide).</a:t>
-            </a:r>
+              <a:rPr lang="en-US"/>
+              <a:t>Lift can be less than 1 in two cases:</a:t>
+            </a:r>
+          </a:p>
+          <a:p>
+            <a:pPr marL="342900" indent="-342900"/>
+            <a:r>
+              <a:rPr lang="en-US"/>
+              <a:t>When the consequent is common like in the bread/butter example.</a:t>
+            </a:r>
+            <a:endParaRPr lang="en-US">
+              <a:ea typeface="Calibri" panose="020F0502020204030204"/>
+              <a:cs typeface="Calibri" panose="020F0502020204030204"/>
+            </a:endParaRPr>
+          </a:p>
+          <a:p>
+            <a:pPr marL="342900" indent="-342900"/>
+            <a:r>
+              <a:rPr lang="en-US"/>
+              <a:t>When there is a negative relationship between the antecedent and the consequent as show next.</a:t>
+            </a:r>
+            <a:endParaRPr lang="en-US">
+              <a:ea typeface="Calibri"/>
+              <a:cs typeface="Calibri"/>
+            </a:endParaRPr>
           </a:p>
           <a:p>
             <a:pPr marL="0" indent="0">
               <a:buNone/>
             </a:pPr>
             <a:r>
-              <a:rPr lang="en-US" dirty="0"/>
+              <a:rPr lang="en-US" b="1" dirty="0"/>
               <a:t>Example: Analyzing supermarket transactions.</a:t>
             </a:r>
+            <a:endParaRPr lang="en-US" b="1" dirty="0">
+              <a:ea typeface="Calibri"/>
+              <a:cs typeface="Calibri"/>
+            </a:endParaRPr>
           </a:p>
           <a:p>
             <a:pPr marL="0" indent="0">
@@ -7795,7 +8769,7 @@
 </p:sld>
 </file>
 
-<file path=ppt/slides/slide14.xml><?xml version="1.0" encoding="utf-8"?>
+<file path=ppt/slides/slide15.xml><?xml version="1.0" encoding="utf-8"?>
 <p:sld xmlns:a="http://schemas.openxmlformats.org/drawingml/2006/main" xmlns:r="http://schemas.openxmlformats.org/officeDocument/2006/relationships" xmlns:p="http://schemas.openxmlformats.org/presentationml/2006/main">
   <p:cSld>
     <p:spTree>
@@ -7835,7 +8809,7 @@
           <a:p>
             <a:r>
               <a:rPr lang="en-US" dirty="0"/>
-              <a:t>Lift Examples - Lift = 1</a:t>
+              <a:t>Lift Examples:- Lift = 1</a:t>
             </a:r>
           </a:p>
         </p:txBody>
@@ -7968,7 +8942,7 @@
         <p:spPr>
           <a:xfrm>
             <a:off x="838200" y="5321813"/>
-            <a:ext cx="6094970" cy="1477328"/>
+            <a:ext cx="10015687" cy="861774"/>
           </a:xfrm>
           <a:prstGeom prst="rect">
             <a:avLst/>
@@ -7976,7 +8950,7 @@
           <a:noFill/>
         </p:spPr>
         <p:txBody>
-          <a:bodyPr wrap="square">
+          <a:bodyPr wrap="square" lIns="91440" tIns="45720" rIns="91440" bIns="45720" anchor="t">
             <a:spAutoFit/>
           </a:bodyPr>
           <a:lstStyle/>
@@ -7990,16 +8964,32 @@
             </a:r>
           </a:p>
           <a:p>
-            <a:r>
-              <a:rPr lang="en-US" dirty="0"/>
+            <a:pPr marL="285750" indent="-285750">
+              <a:buFont typeface="Arial"/>
+              <a:buChar char="•"/>
+            </a:pPr>
+            <a:r>
+              <a:rPr lang="en-US" sz="1600" dirty="0"/>
               <a:t>A lift of 1 means people who buy milk are neither more nor less likely to buy bread than the general population.</a:t>
             </a:r>
-          </a:p>
-          <a:p>
-            <a:r>
-              <a:rPr lang="en-US" dirty="0"/>
+            <a:endParaRPr lang="en-US" sz="1600">
+              <a:ea typeface="Calibri" panose="020F0502020204030204"/>
+              <a:cs typeface="Calibri" panose="020F0502020204030204"/>
+            </a:endParaRPr>
+          </a:p>
+          <a:p>
+            <a:pPr marL="285750" indent="-285750">
+              <a:buFont typeface="Arial"/>
+              <a:buChar char="•"/>
+            </a:pPr>
+            <a:r>
+              <a:rPr lang="en-US" sz="1600" dirty="0"/>
               <a:t>This suggests no real association between milk and bread in this dataset.</a:t>
             </a:r>
+            <a:endParaRPr lang="en-US" sz="1600" dirty="0">
+              <a:ea typeface="Calibri" panose="020F0502020204030204"/>
+              <a:cs typeface="Calibri" panose="020F0502020204030204"/>
+            </a:endParaRPr>
           </a:p>
         </p:txBody>
       </p:sp>
@@ -8297,7 +9287,7 @@
 </p:sld>
 </file>
 
-<file path=ppt/slides/slide15.xml><?xml version="1.0" encoding="utf-8"?>
+<file path=ppt/slides/slide16.xml><?xml version="1.0" encoding="utf-8"?>
 <p:sld xmlns:a="http://schemas.openxmlformats.org/drawingml/2006/main" xmlns:r="http://schemas.openxmlformats.org/officeDocument/2006/relationships" xmlns:p="http://schemas.openxmlformats.org/presentationml/2006/main">
   <p:cSld>
     <p:spTree>
@@ -8486,7 +9476,7 @@
 </p:sld>
 </file>
 
-<file path=ppt/slides/slide16.xml><?xml version="1.0" encoding="utf-8"?>
+<file path=ppt/slides/slide17.xml><?xml version="1.0" encoding="utf-8"?>
 <p:sld xmlns:a="http://schemas.openxmlformats.org/drawingml/2006/main" xmlns:r="http://schemas.openxmlformats.org/officeDocument/2006/relationships" xmlns:p="http://schemas.openxmlformats.org/presentationml/2006/main">
   <p:cSld>
     <p:spTree>
@@ -8557,7 +9547,7 @@
         </p:nvSpPr>
         <p:spPr/>
         <p:txBody>
-          <a:bodyPr>
+          <a:bodyPr vert="horz" lIns="91440" tIns="45720" rIns="91440" bIns="45720" rtlCol="0" anchor="t">
             <a:normAutofit fontScale="92500" lnSpcReduction="10000"/>
           </a:bodyPr>
           <a:lstStyle/>
@@ -8645,10 +9635,10 @@
               <a:t> Keep only frequent k-</a:t>
             </a:r>
             <a:r>
-              <a:rPr lang="en-US" dirty="0" err="1"/>
+              <a:rPr lang="en-US" err="1"/>
               <a:t>itemsets</a:t>
             </a:r>
-            <a:endParaRPr lang="en-US" dirty="0"/>
+            <a:endParaRPr lang="en-US"/>
           </a:p>
           <a:p>
             <a:pPr marL="457200" indent="-457200">
@@ -8748,7 +9738,7 @@
 </p:sld>
 </file>
 
-<file path=ppt/slides/slide17.xml><?xml version="1.0" encoding="utf-8"?>
+<file path=ppt/slides/slide18.xml><?xml version="1.0" encoding="utf-8"?>
 <p:sld xmlns:a="http://schemas.openxmlformats.org/drawingml/2006/main" xmlns:r="http://schemas.openxmlformats.org/officeDocument/2006/relationships" xmlns:p="http://schemas.openxmlformats.org/presentationml/2006/main">
   <p:cSld>
     <p:spTree>
@@ -9407,7 +10397,7 @@
 </p:sld>
 </file>
 
-<file path=ppt/slides/slide18.xml><?xml version="1.0" encoding="utf-8"?>
+<file path=ppt/slides/slide19.xml><?xml version="1.0" encoding="utf-8"?>
 <p:sld xmlns:a="http://schemas.openxmlformats.org/drawingml/2006/main" xmlns:r="http://schemas.openxmlformats.org/officeDocument/2006/relationships" xmlns:p="http://schemas.openxmlformats.org/presentationml/2006/main">
   <p:cSld>
     <p:spTree>
@@ -10778,142 +11768,6 @@
     <p:extLst>
       <p:ext uri="{BB962C8B-B14F-4D97-AF65-F5344CB8AC3E}">
         <p14:creationId xmlns:p14="http://schemas.microsoft.com/office/powerpoint/2010/main" val="2617828375"/>
-      </p:ext>
-    </p:extLst>
-  </p:cSld>
-  <p:clrMapOvr>
-    <a:masterClrMapping/>
-  </p:clrMapOvr>
-</p:sld>
-</file>
-
-<file path=ppt/slides/slide19.xml><?xml version="1.0" encoding="utf-8"?>
-<p:sld xmlns:a="http://schemas.openxmlformats.org/drawingml/2006/main" xmlns:r="http://schemas.openxmlformats.org/officeDocument/2006/relationships" xmlns:p="http://schemas.openxmlformats.org/presentationml/2006/main">
-  <p:cSld>
-    <p:spTree>
-      <p:nvGrpSpPr>
-        <p:cNvPr id="1" name="">
-          <a:extLst>
-            <a:ext uri="{FF2B5EF4-FFF2-40B4-BE49-F238E27FC236}">
-              <a16:creationId xmlns:a16="http://schemas.microsoft.com/office/drawing/2014/main" id="{E439A3BD-95DA-C239-F7A5-4EFCBFD449FC}"/>
-            </a:ext>
-          </a:extLst>
-        </p:cNvPr>
-        <p:cNvGrpSpPr/>
-        <p:nvPr/>
-      </p:nvGrpSpPr>
-      <p:grpSpPr>
-        <a:xfrm>
-          <a:off x="0" y="0"/>
-          <a:ext cx="0" cy="0"/>
-          <a:chOff x="0" y="0"/>
-          <a:chExt cx="0" cy="0"/>
-        </a:xfrm>
-      </p:grpSpPr>
-      <p:sp>
-        <p:nvSpPr>
-          <p:cNvPr id="2" name="Title 1">
-            <a:extLst>
-              <a:ext uri="{FF2B5EF4-FFF2-40B4-BE49-F238E27FC236}">
-                <a16:creationId xmlns:a16="http://schemas.microsoft.com/office/drawing/2014/main" id="{470AF467-6CBB-C3C1-F7A2-B0454D6C7ACF}"/>
-              </a:ext>
-            </a:extLst>
-          </p:cNvPr>
-          <p:cNvSpPr>
-            <a:spLocks noGrp="1"/>
-          </p:cNvSpPr>
-          <p:nvPr>
-            <p:ph type="title"/>
-          </p:nvPr>
-        </p:nvSpPr>
-        <p:spPr/>
-        <p:txBody>
-          <a:bodyPr>
-            <a:normAutofit/>
-          </a:bodyPr>
-          <a:lstStyle/>
-          <a:p>
-            <a:r>
-              <a:rPr lang="en-US" dirty="0"/>
-              <a:t>Iteration 2 Results</a:t>
-            </a:r>
-          </a:p>
-        </p:txBody>
-      </p:sp>
-      <p:sp>
-        <p:nvSpPr>
-          <p:cNvPr id="3" name="Content Placeholder 2">
-            <a:extLst>
-              <a:ext uri="{FF2B5EF4-FFF2-40B4-BE49-F238E27FC236}">
-                <a16:creationId xmlns:a16="http://schemas.microsoft.com/office/drawing/2014/main" id="{B9757FC9-2E4F-A35E-E89D-FFF9BD7C348E}"/>
-              </a:ext>
-            </a:extLst>
-          </p:cNvPr>
-          <p:cNvSpPr>
-            <a:spLocks noGrp="1"/>
-          </p:cNvSpPr>
-          <p:nvPr>
-            <p:ph idx="1"/>
-          </p:nvPr>
-        </p:nvSpPr>
-        <p:spPr/>
-        <p:txBody>
-          <a:bodyPr>
-            <a:normAutofit/>
-          </a:bodyPr>
-          <a:lstStyle/>
-          <a:p>
-            <a:pPr marL="0" indent="0">
-              <a:buNone/>
-            </a:pPr>
-            <a:r>
-              <a:rPr lang="en-US" sz="2000" b="1" dirty="0"/>
-              <a:t>L₂ (Frequent 2-itemsets)</a:t>
-            </a:r>
-          </a:p>
-          <a:p>
-            <a:pPr lvl="1"/>
-            <a:r>
-              <a:rPr lang="en-US" sz="1800" dirty="0"/>
-              <a:t>{Bread, Milk} - 40% support {Bread, Butter} - 40% support {Bread, Cheese} - 30% support {Bread, Eggs} - 30% support {Milk, Butter} - 30% support {Milk, Cheese} - 40% support {Butter, Cheese} - 40% support {Cheese, Yogurt} - 40% support</a:t>
-            </a:r>
-          </a:p>
-          <a:p>
-            <a:pPr marL="0" indent="0">
-              <a:buNone/>
-            </a:pPr>
-            <a:r>
-              <a:rPr lang="en-US" sz="2000" b="1" dirty="0"/>
-              <a:t>Key Observations</a:t>
-            </a:r>
-          </a:p>
-          <a:p>
-            <a:r>
-              <a:rPr lang="en-US" sz="2000" dirty="0"/>
-              <a:t>8 frequent pairs out of 15 possible</a:t>
-            </a:r>
-          </a:p>
-          <a:p>
-            <a:r>
-              <a:rPr lang="en-US" sz="2000" dirty="0"/>
-              <a:t>{Bread, Yogurt} has 0% support - strong negative correlation</a:t>
-            </a:r>
-          </a:p>
-          <a:p>
-            <a:r>
-              <a:rPr lang="en-US" sz="2000" dirty="0"/>
-              <a:t>{Butter, Cheese} has highest support (40%) - good combination</a:t>
-            </a:r>
-          </a:p>
-          <a:p>
-            <a:endParaRPr lang="en-US" sz="2000" dirty="0"/>
-          </a:p>
-        </p:txBody>
-      </p:sp>
-    </p:spTree>
-    <p:extLst>
-      <p:ext uri="{BB962C8B-B14F-4D97-AF65-F5344CB8AC3E}">
-        <p14:creationId xmlns:p14="http://schemas.microsoft.com/office/powerpoint/2010/main" val="1812782099"/>
       </p:ext>
     </p:extLst>
   </p:cSld>
@@ -11145,6 +11999,142 @@
         <p:cNvPr id="1" name="">
           <a:extLst>
             <a:ext uri="{FF2B5EF4-FFF2-40B4-BE49-F238E27FC236}">
+              <a16:creationId xmlns:a16="http://schemas.microsoft.com/office/drawing/2014/main" id="{E439A3BD-95DA-C239-F7A5-4EFCBFD449FC}"/>
+            </a:ext>
+          </a:extLst>
+        </p:cNvPr>
+        <p:cNvGrpSpPr/>
+        <p:nvPr/>
+      </p:nvGrpSpPr>
+      <p:grpSpPr>
+        <a:xfrm>
+          <a:off x="0" y="0"/>
+          <a:ext cx="0" cy="0"/>
+          <a:chOff x="0" y="0"/>
+          <a:chExt cx="0" cy="0"/>
+        </a:xfrm>
+      </p:grpSpPr>
+      <p:sp>
+        <p:nvSpPr>
+          <p:cNvPr id="2" name="Title 1">
+            <a:extLst>
+              <a:ext uri="{FF2B5EF4-FFF2-40B4-BE49-F238E27FC236}">
+                <a16:creationId xmlns:a16="http://schemas.microsoft.com/office/drawing/2014/main" id="{470AF467-6CBB-C3C1-F7A2-B0454D6C7ACF}"/>
+              </a:ext>
+            </a:extLst>
+          </p:cNvPr>
+          <p:cNvSpPr>
+            <a:spLocks noGrp="1"/>
+          </p:cNvSpPr>
+          <p:nvPr>
+            <p:ph type="title"/>
+          </p:nvPr>
+        </p:nvSpPr>
+        <p:spPr/>
+        <p:txBody>
+          <a:bodyPr>
+            <a:normAutofit/>
+          </a:bodyPr>
+          <a:lstStyle/>
+          <a:p>
+            <a:r>
+              <a:rPr lang="en-US" dirty="0"/>
+              <a:t>Iteration 2 Results</a:t>
+            </a:r>
+          </a:p>
+        </p:txBody>
+      </p:sp>
+      <p:sp>
+        <p:nvSpPr>
+          <p:cNvPr id="3" name="Content Placeholder 2">
+            <a:extLst>
+              <a:ext uri="{FF2B5EF4-FFF2-40B4-BE49-F238E27FC236}">
+                <a16:creationId xmlns:a16="http://schemas.microsoft.com/office/drawing/2014/main" id="{B9757FC9-2E4F-A35E-E89D-FFF9BD7C348E}"/>
+              </a:ext>
+            </a:extLst>
+          </p:cNvPr>
+          <p:cNvSpPr>
+            <a:spLocks noGrp="1"/>
+          </p:cNvSpPr>
+          <p:nvPr>
+            <p:ph idx="1"/>
+          </p:nvPr>
+        </p:nvSpPr>
+        <p:spPr/>
+        <p:txBody>
+          <a:bodyPr>
+            <a:normAutofit/>
+          </a:bodyPr>
+          <a:lstStyle/>
+          <a:p>
+            <a:pPr marL="0" indent="0">
+              <a:buNone/>
+            </a:pPr>
+            <a:r>
+              <a:rPr lang="en-US" sz="2000" b="1" dirty="0"/>
+              <a:t>L₂ (Frequent 2-itemsets)</a:t>
+            </a:r>
+          </a:p>
+          <a:p>
+            <a:pPr lvl="1"/>
+            <a:r>
+              <a:rPr lang="en-US" sz="1800" dirty="0"/>
+              <a:t>{Bread, Milk} - 40% support {Bread, Butter} - 40% support {Bread, Cheese} - 30% support {Bread, Eggs} - 30% support {Milk, Butter} - 30% support {Milk, Cheese} - 40% support {Butter, Cheese} - 40% support {Cheese, Yogurt} - 40% support</a:t>
+            </a:r>
+          </a:p>
+          <a:p>
+            <a:pPr marL="0" indent="0">
+              <a:buNone/>
+            </a:pPr>
+            <a:r>
+              <a:rPr lang="en-US" sz="2000" b="1" dirty="0"/>
+              <a:t>Key Observations</a:t>
+            </a:r>
+          </a:p>
+          <a:p>
+            <a:r>
+              <a:rPr lang="en-US" sz="2000" dirty="0"/>
+              <a:t>8 frequent pairs out of 15 possible</a:t>
+            </a:r>
+          </a:p>
+          <a:p>
+            <a:r>
+              <a:rPr lang="en-US" sz="2000" dirty="0"/>
+              <a:t>{Bread, Yogurt} has 0% support - strong negative correlation</a:t>
+            </a:r>
+          </a:p>
+          <a:p>
+            <a:r>
+              <a:rPr lang="en-US" sz="2000" dirty="0"/>
+              <a:t>{Butter, Cheese} has highest support (40%) - good combination</a:t>
+            </a:r>
+          </a:p>
+          <a:p>
+            <a:endParaRPr lang="en-US" sz="2000" dirty="0"/>
+          </a:p>
+        </p:txBody>
+      </p:sp>
+    </p:spTree>
+    <p:extLst>
+      <p:ext uri="{BB962C8B-B14F-4D97-AF65-F5344CB8AC3E}">
+        <p14:creationId xmlns:p14="http://schemas.microsoft.com/office/powerpoint/2010/main" val="1812782099"/>
+      </p:ext>
+    </p:extLst>
+  </p:cSld>
+  <p:clrMapOvr>
+    <a:masterClrMapping/>
+  </p:clrMapOvr>
+</p:sld>
+</file>
+
+<file path=ppt/slides/slide21.xml><?xml version="1.0" encoding="utf-8"?>
+<p:sld xmlns:a="http://schemas.openxmlformats.org/drawingml/2006/main" xmlns:r="http://schemas.openxmlformats.org/officeDocument/2006/relationships" xmlns:p="http://schemas.openxmlformats.org/presentationml/2006/main">
+  <p:cSld>
+    <p:spTree>
+      <p:nvGrpSpPr>
+        <p:cNvPr id="1" name="">
+          <a:extLst>
+            <a:ext uri="{FF2B5EF4-FFF2-40B4-BE49-F238E27FC236}">
               <a16:creationId xmlns:a16="http://schemas.microsoft.com/office/drawing/2014/main" id="{2B5614F4-A625-FC54-BE88-0618783C69D7}"/>
             </a:ext>
           </a:extLst>
@@ -11348,7 +12338,7 @@
 </p:sld>
 </file>
 
-<file path=ppt/slides/slide21.xml><?xml version="1.0" encoding="utf-8"?>
+<file path=ppt/slides/slide22.xml><?xml version="1.0" encoding="utf-8"?>
 <p:sld xmlns:a="http://schemas.openxmlformats.org/drawingml/2006/main" xmlns:r="http://schemas.openxmlformats.org/officeDocument/2006/relationships" xmlns:p="http://schemas.openxmlformats.org/presentationml/2006/main">
   <p:cSld>
     <p:spTree>
@@ -12049,7 +13039,7 @@
 </p:sld>
 </file>
 
-<file path=ppt/slides/slide22.xml><?xml version="1.0" encoding="utf-8"?>
+<file path=ppt/slides/slide23.xml><?xml version="1.0" encoding="utf-8"?>
 <p:sld xmlns:a="http://schemas.openxmlformats.org/drawingml/2006/main" xmlns:r="http://schemas.openxmlformats.org/officeDocument/2006/relationships" xmlns:p="http://schemas.openxmlformats.org/presentationml/2006/main">
   <p:cSld>
     <p:spTree>
@@ -12144,7 +13134,7 @@
 </p:sld>
 </file>
 
-<file path=ppt/slides/slide23.xml><?xml version="1.0" encoding="utf-8"?>
+<file path=ppt/slides/slide24.xml><?xml version="1.0" encoding="utf-8"?>
 <p:sld xmlns:a="http://schemas.openxmlformats.org/drawingml/2006/main" xmlns:r="http://schemas.openxmlformats.org/officeDocument/2006/relationships" xmlns:p="http://schemas.openxmlformats.org/presentationml/2006/main">
   <p:cSld>
     <p:spTree>
@@ -12237,7 +13227,7 @@
 </p:sld>
 </file>
 
-<file path=ppt/slides/slide24.xml><?xml version="1.0" encoding="utf-8"?>
+<file path=ppt/slides/slide25.xml><?xml version="1.0" encoding="utf-8"?>
 <p:sld xmlns:a="http://schemas.openxmlformats.org/drawingml/2006/main" xmlns:r="http://schemas.openxmlformats.org/officeDocument/2006/relationships" xmlns:p="http://schemas.openxmlformats.org/presentationml/2006/main">
   <p:cSld>
     <p:spTree>
@@ -12453,7 +13443,7 @@
 </p:sld>
 </file>
 
-<file path=ppt/slides/slide25.xml><?xml version="1.0" encoding="utf-8"?>
+<file path=ppt/slides/slide26.xml><?xml version="1.0" encoding="utf-8"?>
 <p:sld xmlns:a="http://schemas.openxmlformats.org/drawingml/2006/main" xmlns:r="http://schemas.openxmlformats.org/officeDocument/2006/relationships" xmlns:p="http://schemas.openxmlformats.org/presentationml/2006/main">
   <p:cSld>
     <p:spTree>
@@ -12546,7 +13536,7 @@
 </p:sld>
 </file>
 
-<file path=ppt/slides/slide26.xml><?xml version="1.0" encoding="utf-8"?>
+<file path=ppt/slides/slide27.xml><?xml version="1.0" encoding="utf-8"?>
 <p:sld xmlns:a="http://schemas.openxmlformats.org/drawingml/2006/main" xmlns:r="http://schemas.openxmlformats.org/officeDocument/2006/relationships" xmlns:p="http://schemas.openxmlformats.org/presentationml/2006/main">
   <p:cSld>
     <p:spTree>
@@ -12756,7 +13746,7 @@
 </p:sld>
 </file>
 
-<file path=ppt/slides/slide27.xml><?xml version="1.0" encoding="utf-8"?>
+<file path=ppt/slides/slide28.xml><?xml version="1.0" encoding="utf-8"?>
 <p:sld xmlns:a="http://schemas.openxmlformats.org/drawingml/2006/main" xmlns:r="http://schemas.openxmlformats.org/officeDocument/2006/relationships" xmlns:p="http://schemas.openxmlformats.org/presentationml/2006/main">
   <p:cSld>
     <p:spTree>
@@ -13012,7 +14002,7 @@
 </p:sld>
 </file>
 
-<file path=ppt/slides/slide28.xml><?xml version="1.0" encoding="utf-8"?>
+<file path=ppt/slides/slide29.xml><?xml version="1.0" encoding="utf-8"?>
 <p:sld xmlns:a="http://schemas.openxmlformats.org/drawingml/2006/main" xmlns:r="http://schemas.openxmlformats.org/officeDocument/2006/relationships" xmlns:p="http://schemas.openxmlformats.org/presentationml/2006/main">
   <p:cSld>
     <p:spTree>
@@ -13262,288 +14252,6 @@
     <p:extLst>
       <p:ext uri="{BB962C8B-B14F-4D97-AF65-F5344CB8AC3E}">
         <p14:creationId xmlns:p14="http://schemas.microsoft.com/office/powerpoint/2010/main" val="2747417129"/>
-      </p:ext>
-    </p:extLst>
-  </p:cSld>
-  <p:clrMapOvr>
-    <a:masterClrMapping/>
-  </p:clrMapOvr>
-</p:sld>
-</file>
-
-<file path=ppt/slides/slide29.xml><?xml version="1.0" encoding="utf-8"?>
-<p:sld xmlns:a="http://schemas.openxmlformats.org/drawingml/2006/main" xmlns:r="http://schemas.openxmlformats.org/officeDocument/2006/relationships" xmlns:p="http://schemas.openxmlformats.org/presentationml/2006/main">
-  <p:cSld>
-    <p:spTree>
-      <p:nvGrpSpPr>
-        <p:cNvPr id="1" name="">
-          <a:extLst>
-            <a:ext uri="{FF2B5EF4-FFF2-40B4-BE49-F238E27FC236}">
-              <a16:creationId xmlns:a16="http://schemas.microsoft.com/office/drawing/2014/main" id="{C428DA21-E83E-856F-D737-F1A1067A2EB0}"/>
-            </a:ext>
-          </a:extLst>
-        </p:cNvPr>
-        <p:cNvGrpSpPr/>
-        <p:nvPr/>
-      </p:nvGrpSpPr>
-      <p:grpSpPr>
-        <a:xfrm>
-          <a:off x="0" y="0"/>
-          <a:ext cx="0" cy="0"/>
-          <a:chOff x="0" y="0"/>
-          <a:chExt cx="0" cy="0"/>
-        </a:xfrm>
-      </p:grpSpPr>
-      <p:sp>
-        <p:nvSpPr>
-          <p:cNvPr id="2" name="Title 1">
-            <a:extLst>
-              <a:ext uri="{FF2B5EF4-FFF2-40B4-BE49-F238E27FC236}">
-                <a16:creationId xmlns:a16="http://schemas.microsoft.com/office/drawing/2014/main" id="{80E8F853-FCD3-A579-AEB9-A648F1DB23C7}"/>
-              </a:ext>
-            </a:extLst>
-          </p:cNvPr>
-          <p:cNvSpPr>
-            <a:spLocks noGrp="1"/>
-          </p:cNvSpPr>
-          <p:nvPr>
-            <p:ph type="title"/>
-          </p:nvPr>
-        </p:nvSpPr>
-        <p:spPr/>
-        <p:txBody>
-          <a:bodyPr>
-            <a:normAutofit/>
-          </a:bodyPr>
-          <a:lstStyle/>
-          <a:p>
-            <a:r>
-              <a:rPr lang="en-US" b="1" dirty="0"/>
-              <a:t>Next Steps &amp; Advanced Topics</a:t>
-            </a:r>
-            <a:endParaRPr lang="en-US" dirty="0"/>
-          </a:p>
-        </p:txBody>
-      </p:sp>
-      <p:sp>
-        <p:nvSpPr>
-          <p:cNvPr id="3" name="Content Placeholder 2">
-            <a:extLst>
-              <a:ext uri="{FF2B5EF4-FFF2-40B4-BE49-F238E27FC236}">
-                <a16:creationId xmlns:a16="http://schemas.microsoft.com/office/drawing/2014/main" id="{A375DEE9-89C5-A926-94A5-CAA66B30274D}"/>
-              </a:ext>
-            </a:extLst>
-          </p:cNvPr>
-          <p:cNvSpPr>
-            <a:spLocks noGrp="1"/>
-          </p:cNvSpPr>
-          <p:nvPr>
-            <p:ph idx="1"/>
-          </p:nvPr>
-        </p:nvSpPr>
-        <p:spPr/>
-        <p:txBody>
-          <a:bodyPr>
-            <a:normAutofit fontScale="70000" lnSpcReduction="20000"/>
-          </a:bodyPr>
-          <a:lstStyle/>
-          <a:p>
-            <a:pPr marL="0" indent="0">
-              <a:buNone/>
-            </a:pPr>
-            <a:r>
-              <a:rPr lang="en-US" b="1" dirty="0"/>
-              <a:t>Immediate Applications</a:t>
-            </a:r>
-          </a:p>
-          <a:p>
-            <a:r>
-              <a:rPr lang="en-US" b="1" dirty="0"/>
-              <a:t>Implement basic Apriori</a:t>
-            </a:r>
-            <a:r>
-              <a:rPr lang="en-US" dirty="0"/>
-              <a:t> on your own datasets</a:t>
-            </a:r>
-          </a:p>
-          <a:p>
-            <a:r>
-              <a:rPr lang="en-US" b="1" dirty="0"/>
-              <a:t>Experiment with thresholds</a:t>
-            </a:r>
-            <a:r>
-              <a:rPr lang="en-US" dirty="0"/>
-              <a:t> to understand trade-offs</a:t>
-            </a:r>
-          </a:p>
-          <a:p>
-            <a:r>
-              <a:rPr lang="en-US" b="1" dirty="0"/>
-              <a:t>Validate discovered rules</a:t>
-            </a:r>
-            <a:r>
-              <a:rPr lang="en-US" dirty="0"/>
-              <a:t> with domain experts</a:t>
-            </a:r>
-          </a:p>
-          <a:p>
-            <a:pPr marL="0" indent="0">
-              <a:buNone/>
-            </a:pPr>
-            <a:r>
-              <a:rPr lang="en-US" b="1" dirty="0"/>
-              <a:t>Advanced Techniques</a:t>
-            </a:r>
-          </a:p>
-          <a:p>
-            <a:r>
-              <a:rPr lang="en-US" b="1" dirty="0"/>
-              <a:t>Sequential pattern mining:</a:t>
-            </a:r>
-            <a:r>
-              <a:rPr lang="en-US" dirty="0"/>
-              <a:t> Time-ordered associations</a:t>
-            </a:r>
-          </a:p>
-          <a:p>
-            <a:r>
-              <a:rPr lang="en-US" b="1" dirty="0"/>
-              <a:t>Multi-level associations:</a:t>
-            </a:r>
-            <a:r>
-              <a:rPr lang="en-US" dirty="0"/>
-              <a:t> Category hierarchies</a:t>
-            </a:r>
-          </a:p>
-          <a:p>
-            <a:r>
-              <a:rPr lang="en-US" b="1" dirty="0"/>
-              <a:t>Constraint-based mining:</a:t>
-            </a:r>
-            <a:r>
-              <a:rPr lang="en-US" dirty="0"/>
-              <a:t> User-specified business rules</a:t>
-            </a:r>
-          </a:p>
-          <a:p>
-            <a:pPr marL="0" indent="0">
-              <a:buNone/>
-            </a:pPr>
-            <a:r>
-              <a:rPr lang="en-US" b="1" dirty="0"/>
-              <a:t>Modern Developments</a:t>
-            </a:r>
-          </a:p>
-          <a:p>
-            <a:r>
-              <a:rPr lang="en-US" b="1" dirty="0"/>
-              <a:t>Real-time association mining</a:t>
-            </a:r>
-            <a:r>
-              <a:rPr lang="en-US" dirty="0"/>
-              <a:t> for streaming data</a:t>
-            </a:r>
-          </a:p>
-          <a:p>
-            <a:r>
-              <a:rPr lang="en-US" b="1" dirty="0"/>
-              <a:t>Privacy-preserving techniques</a:t>
-            </a:r>
-            <a:r>
-              <a:rPr lang="en-US" dirty="0"/>
-              <a:t> for sensitive data</a:t>
-            </a:r>
-          </a:p>
-          <a:p>
-            <a:r>
-              <a:rPr lang="en-US" b="1" dirty="0"/>
-              <a:t>Deep learning approaches</a:t>
-            </a:r>
-            <a:r>
-              <a:rPr lang="en-US" dirty="0"/>
-              <a:t> for complex pattern discovery</a:t>
-            </a:r>
-          </a:p>
-          <a:p>
-            <a:pPr marL="0" indent="0">
-              <a:buNone/>
-            </a:pPr>
-            <a:r>
-              <a:rPr lang="en-US" b="1" dirty="0"/>
-              <a:t>Tools to Explore</a:t>
-            </a:r>
-          </a:p>
-          <a:p>
-            <a:r>
-              <a:rPr lang="en-US" b="1" dirty="0"/>
-              <a:t>Python:</a:t>
-            </a:r>
-            <a:r>
-              <a:rPr lang="en-US" dirty="0"/>
-              <a:t> </a:t>
-            </a:r>
-            <a:r>
-              <a:rPr lang="en-US" dirty="0" err="1"/>
-              <a:t>mlxtend</a:t>
-            </a:r>
-            <a:r>
-              <a:rPr lang="en-US" dirty="0"/>
-              <a:t>, </a:t>
-            </a:r>
-            <a:r>
-              <a:rPr lang="en-US" dirty="0" err="1"/>
-              <a:t>apyori</a:t>
-            </a:r>
-            <a:r>
-              <a:rPr lang="en-US" dirty="0"/>
-              <a:t> libraries</a:t>
-            </a:r>
-          </a:p>
-          <a:p>
-            <a:r>
-              <a:rPr lang="en-US" b="1" dirty="0"/>
-              <a:t>R:</a:t>
-            </a:r>
-            <a:r>
-              <a:rPr lang="en-US" dirty="0"/>
-              <a:t> </a:t>
-            </a:r>
-            <a:r>
-              <a:rPr lang="en-US" dirty="0" err="1"/>
-              <a:t>arules</a:t>
-            </a:r>
-            <a:r>
-              <a:rPr lang="en-US" dirty="0"/>
-              <a:t>, </a:t>
-            </a:r>
-            <a:r>
-              <a:rPr lang="en-US" dirty="0" err="1"/>
-              <a:t>arulesViz</a:t>
-            </a:r>
-            <a:r>
-              <a:rPr lang="en-US" dirty="0"/>
-              <a:t> packages</a:t>
-            </a:r>
-          </a:p>
-          <a:p>
-            <a:r>
-              <a:rPr lang="en-US" b="1" dirty="0"/>
-              <a:t>Spark:</a:t>
-            </a:r>
-            <a:r>
-              <a:rPr lang="en-US" dirty="0"/>
-              <a:t> MLlib for large-scale mining</a:t>
-            </a:r>
-          </a:p>
-          <a:p>
-            <a:endParaRPr lang="en-US" dirty="0"/>
-          </a:p>
-        </p:txBody>
-      </p:sp>
-    </p:spTree>
-    <p:extLst>
-      <p:ext uri="{BB962C8B-B14F-4D97-AF65-F5344CB8AC3E}">
-        <p14:creationId xmlns:p14="http://schemas.microsoft.com/office/powerpoint/2010/main" val="1798126145"/>
       </p:ext>
     </p:extLst>
   </p:cSld>
@@ -13848,6 +14556,288 @@
     <p:extLst>
       <p:ext uri="{BB962C8B-B14F-4D97-AF65-F5344CB8AC3E}">
         <p14:creationId xmlns:p14="http://schemas.microsoft.com/office/powerpoint/2010/main" val="2426021593"/>
+      </p:ext>
+    </p:extLst>
+  </p:cSld>
+  <p:clrMapOvr>
+    <a:masterClrMapping/>
+  </p:clrMapOvr>
+</p:sld>
+</file>
+
+<file path=ppt/slides/slide30.xml><?xml version="1.0" encoding="utf-8"?>
+<p:sld xmlns:a="http://schemas.openxmlformats.org/drawingml/2006/main" xmlns:r="http://schemas.openxmlformats.org/officeDocument/2006/relationships" xmlns:p="http://schemas.openxmlformats.org/presentationml/2006/main">
+  <p:cSld>
+    <p:spTree>
+      <p:nvGrpSpPr>
+        <p:cNvPr id="1" name="">
+          <a:extLst>
+            <a:ext uri="{FF2B5EF4-FFF2-40B4-BE49-F238E27FC236}">
+              <a16:creationId xmlns:a16="http://schemas.microsoft.com/office/drawing/2014/main" id="{C428DA21-E83E-856F-D737-F1A1067A2EB0}"/>
+            </a:ext>
+          </a:extLst>
+        </p:cNvPr>
+        <p:cNvGrpSpPr/>
+        <p:nvPr/>
+      </p:nvGrpSpPr>
+      <p:grpSpPr>
+        <a:xfrm>
+          <a:off x="0" y="0"/>
+          <a:ext cx="0" cy="0"/>
+          <a:chOff x="0" y="0"/>
+          <a:chExt cx="0" cy="0"/>
+        </a:xfrm>
+      </p:grpSpPr>
+      <p:sp>
+        <p:nvSpPr>
+          <p:cNvPr id="2" name="Title 1">
+            <a:extLst>
+              <a:ext uri="{FF2B5EF4-FFF2-40B4-BE49-F238E27FC236}">
+                <a16:creationId xmlns:a16="http://schemas.microsoft.com/office/drawing/2014/main" id="{80E8F853-FCD3-A579-AEB9-A648F1DB23C7}"/>
+              </a:ext>
+            </a:extLst>
+          </p:cNvPr>
+          <p:cNvSpPr>
+            <a:spLocks noGrp="1"/>
+          </p:cNvSpPr>
+          <p:nvPr>
+            <p:ph type="title"/>
+          </p:nvPr>
+        </p:nvSpPr>
+        <p:spPr/>
+        <p:txBody>
+          <a:bodyPr>
+            <a:normAutofit/>
+          </a:bodyPr>
+          <a:lstStyle/>
+          <a:p>
+            <a:r>
+              <a:rPr lang="en-US" b="1" dirty="0"/>
+              <a:t>Next Steps &amp; Advanced Topics</a:t>
+            </a:r>
+            <a:endParaRPr lang="en-US" dirty="0"/>
+          </a:p>
+        </p:txBody>
+      </p:sp>
+      <p:sp>
+        <p:nvSpPr>
+          <p:cNvPr id="3" name="Content Placeholder 2">
+            <a:extLst>
+              <a:ext uri="{FF2B5EF4-FFF2-40B4-BE49-F238E27FC236}">
+                <a16:creationId xmlns:a16="http://schemas.microsoft.com/office/drawing/2014/main" id="{A375DEE9-89C5-A926-94A5-CAA66B30274D}"/>
+              </a:ext>
+            </a:extLst>
+          </p:cNvPr>
+          <p:cNvSpPr>
+            <a:spLocks noGrp="1"/>
+          </p:cNvSpPr>
+          <p:nvPr>
+            <p:ph idx="1"/>
+          </p:nvPr>
+        </p:nvSpPr>
+        <p:spPr/>
+        <p:txBody>
+          <a:bodyPr>
+            <a:normAutofit fontScale="70000" lnSpcReduction="20000"/>
+          </a:bodyPr>
+          <a:lstStyle/>
+          <a:p>
+            <a:pPr marL="0" indent="0">
+              <a:buNone/>
+            </a:pPr>
+            <a:r>
+              <a:rPr lang="en-US" b="1" dirty="0"/>
+              <a:t>Immediate Applications</a:t>
+            </a:r>
+          </a:p>
+          <a:p>
+            <a:r>
+              <a:rPr lang="en-US" b="1" dirty="0"/>
+              <a:t>Implement basic Apriori</a:t>
+            </a:r>
+            <a:r>
+              <a:rPr lang="en-US" dirty="0"/>
+              <a:t> on your own datasets</a:t>
+            </a:r>
+          </a:p>
+          <a:p>
+            <a:r>
+              <a:rPr lang="en-US" b="1" dirty="0"/>
+              <a:t>Experiment with thresholds</a:t>
+            </a:r>
+            <a:r>
+              <a:rPr lang="en-US" dirty="0"/>
+              <a:t> to understand trade-offs</a:t>
+            </a:r>
+          </a:p>
+          <a:p>
+            <a:r>
+              <a:rPr lang="en-US" b="1" dirty="0"/>
+              <a:t>Validate discovered rules</a:t>
+            </a:r>
+            <a:r>
+              <a:rPr lang="en-US" dirty="0"/>
+              <a:t> with domain experts</a:t>
+            </a:r>
+          </a:p>
+          <a:p>
+            <a:pPr marL="0" indent="0">
+              <a:buNone/>
+            </a:pPr>
+            <a:r>
+              <a:rPr lang="en-US" b="1" dirty="0"/>
+              <a:t>Advanced Techniques</a:t>
+            </a:r>
+          </a:p>
+          <a:p>
+            <a:r>
+              <a:rPr lang="en-US" b="1" dirty="0"/>
+              <a:t>Sequential pattern mining:</a:t>
+            </a:r>
+            <a:r>
+              <a:rPr lang="en-US" dirty="0"/>
+              <a:t> Time-ordered associations</a:t>
+            </a:r>
+          </a:p>
+          <a:p>
+            <a:r>
+              <a:rPr lang="en-US" b="1" dirty="0"/>
+              <a:t>Multi-level associations:</a:t>
+            </a:r>
+            <a:r>
+              <a:rPr lang="en-US" dirty="0"/>
+              <a:t> Category hierarchies</a:t>
+            </a:r>
+          </a:p>
+          <a:p>
+            <a:r>
+              <a:rPr lang="en-US" b="1" dirty="0"/>
+              <a:t>Constraint-based mining:</a:t>
+            </a:r>
+            <a:r>
+              <a:rPr lang="en-US" dirty="0"/>
+              <a:t> User-specified business rules</a:t>
+            </a:r>
+          </a:p>
+          <a:p>
+            <a:pPr marL="0" indent="0">
+              <a:buNone/>
+            </a:pPr>
+            <a:r>
+              <a:rPr lang="en-US" b="1" dirty="0"/>
+              <a:t>Modern Developments</a:t>
+            </a:r>
+          </a:p>
+          <a:p>
+            <a:r>
+              <a:rPr lang="en-US" b="1" dirty="0"/>
+              <a:t>Real-time association mining</a:t>
+            </a:r>
+            <a:r>
+              <a:rPr lang="en-US" dirty="0"/>
+              <a:t> for streaming data</a:t>
+            </a:r>
+          </a:p>
+          <a:p>
+            <a:r>
+              <a:rPr lang="en-US" b="1" dirty="0"/>
+              <a:t>Privacy-preserving techniques</a:t>
+            </a:r>
+            <a:r>
+              <a:rPr lang="en-US" dirty="0"/>
+              <a:t> for sensitive data</a:t>
+            </a:r>
+          </a:p>
+          <a:p>
+            <a:r>
+              <a:rPr lang="en-US" b="1" dirty="0"/>
+              <a:t>Deep learning approaches</a:t>
+            </a:r>
+            <a:r>
+              <a:rPr lang="en-US" dirty="0"/>
+              <a:t> for complex pattern discovery</a:t>
+            </a:r>
+          </a:p>
+          <a:p>
+            <a:pPr marL="0" indent="0">
+              <a:buNone/>
+            </a:pPr>
+            <a:r>
+              <a:rPr lang="en-US" b="1" dirty="0"/>
+              <a:t>Tools to Explore</a:t>
+            </a:r>
+          </a:p>
+          <a:p>
+            <a:r>
+              <a:rPr lang="en-US" b="1" dirty="0"/>
+              <a:t>Python:</a:t>
+            </a:r>
+            <a:r>
+              <a:rPr lang="en-US" dirty="0"/>
+              <a:t> </a:t>
+            </a:r>
+            <a:r>
+              <a:rPr lang="en-US" dirty="0" err="1"/>
+              <a:t>mlxtend</a:t>
+            </a:r>
+            <a:r>
+              <a:rPr lang="en-US" dirty="0"/>
+              <a:t>, </a:t>
+            </a:r>
+            <a:r>
+              <a:rPr lang="en-US" dirty="0" err="1"/>
+              <a:t>apyori</a:t>
+            </a:r>
+            <a:r>
+              <a:rPr lang="en-US" dirty="0"/>
+              <a:t> libraries</a:t>
+            </a:r>
+          </a:p>
+          <a:p>
+            <a:r>
+              <a:rPr lang="en-US" b="1" dirty="0"/>
+              <a:t>R:</a:t>
+            </a:r>
+            <a:r>
+              <a:rPr lang="en-US" dirty="0"/>
+              <a:t> </a:t>
+            </a:r>
+            <a:r>
+              <a:rPr lang="en-US" dirty="0" err="1"/>
+              <a:t>arules</a:t>
+            </a:r>
+            <a:r>
+              <a:rPr lang="en-US" dirty="0"/>
+              <a:t>, </a:t>
+            </a:r>
+            <a:r>
+              <a:rPr lang="en-US" dirty="0" err="1"/>
+              <a:t>arulesViz</a:t>
+            </a:r>
+            <a:r>
+              <a:rPr lang="en-US" dirty="0"/>
+              <a:t> packages</a:t>
+            </a:r>
+          </a:p>
+          <a:p>
+            <a:r>
+              <a:rPr lang="en-US" b="1" dirty="0"/>
+              <a:t>Spark:</a:t>
+            </a:r>
+            <a:r>
+              <a:rPr lang="en-US" dirty="0"/>
+              <a:t> MLlib for large-scale mining</a:t>
+            </a:r>
+          </a:p>
+          <a:p>
+            <a:endParaRPr lang="en-US" dirty="0"/>
+          </a:p>
+        </p:txBody>
+      </p:sp>
+    </p:spTree>
+    <p:extLst>
+      <p:ext uri="{BB962C8B-B14F-4D97-AF65-F5344CB8AC3E}">
+        <p14:creationId xmlns:p14="http://schemas.microsoft.com/office/powerpoint/2010/main" val="1798126145"/>
       </p:ext>
     </p:extLst>
   </p:cSld>
